--- a/usecase2_demand_forecasting/final_output/usecase2_forecast_summary.pptx
+++ b/usecase2_demand_forecasting/final_output/usecase2_forecast_summary.pptx
@@ -3109,7 +3109,7 @@
         </p:nvSpPr>
         <p:spPr>
           <a:xfrm>
-            <a:off x="594360" y="2606040"/>
+            <a:off x="594360" y="2103120"/>
             <a:ext cx="1097280" cy="63500"/>
           </a:xfrm>
           <a:prstGeom prst="rect">
@@ -3153,7 +3153,7 @@
         </p:nvSpPr>
         <p:spPr>
           <a:xfrm>
-            <a:off x="594360" y="2743200"/>
+            <a:off x="594360" y="2240280"/>
             <a:ext cx="10972800" cy="1188720"/>
           </a:xfrm>
           <a:prstGeom prst="rect">
@@ -3169,7 +3169,7 @@
           <a:p>
             <a:pPr algn="l"/>
             <a:r>
-              <a:rPr sz="4000" b="1">
+              <a:rPr sz="4000" b="1" i="0">
                 <a:solidFill>
                   <a:srgbClr val="FFFFFF"/>
                 </a:solidFill>
@@ -3188,7 +3188,7 @@
         </p:nvSpPr>
         <p:spPr>
           <a:xfrm>
-            <a:off x="594360" y="3657600"/>
+            <a:off x="594360" y="3200400"/>
             <a:ext cx="10058400" cy="548640"/>
           </a:xfrm>
           <a:prstGeom prst="rect">
@@ -3204,7 +3204,7 @@
           <a:p>
             <a:pPr algn="l"/>
             <a:r>
-              <a:rPr sz="1800" b="0">
+              <a:rPr sz="1800" b="0" i="0">
                 <a:solidFill>
                   <a:srgbClr val="2EC4B6"/>
                 </a:solidFill>
@@ -3217,14 +3217,282 @@
       </p:sp>
       <p:sp>
         <p:nvSpPr>
-          <p:cNvPr id="5" name="TextBox 4"/>
+          <p:cNvPr id="5" name="Rounded Rectangle 4"/>
+          <p:cNvSpPr/>
+          <p:nvPr/>
+        </p:nvSpPr>
+        <p:spPr>
+          <a:xfrm>
+            <a:off x="594360" y="4114800"/>
+            <a:ext cx="2651760" cy="868680"/>
+          </a:xfrm>
+          <a:prstGeom prst="roundRect">
+            <a:avLst/>
+          </a:prstGeom>
+          <a:solidFill>
+            <a:srgbClr val="2B3C5E"/>
+          </a:solidFill>
+          <a:ln w="12700">
+            <a:solidFill>
+              <a:srgbClr val="2EC4B6"/>
+            </a:solidFill>
+          </a:ln>
+          <a:effectLst/>
+        </p:spPr>
+        <p:style>
+          <a:lnRef idx="1">
+            <a:schemeClr val="accent1"/>
+          </a:lnRef>
+          <a:fillRef idx="3">
+            <a:schemeClr val="accent1"/>
+          </a:fillRef>
+          <a:effectRef idx="2">
+            <a:schemeClr val="accent1"/>
+          </a:effectRef>
+          <a:fontRef idx="minor">
+            <a:schemeClr val="lt1"/>
+          </a:fontRef>
+        </p:style>
+        <p:txBody>
+          <a:bodyPr rtlCol="0" anchor="ctr" wrap="square"/>
+          <a:lstStyle/>
+          <a:p>
+            <a:pPr algn="ctr"/>
+            <a:r>
+              <a:rPr sz="1900" b="1">
+                <a:solidFill>
+                  <a:srgbClr val="2EC4B6"/>
+                </a:solidFill>
+                <a:latin typeface="Calibri"/>
+              </a:rPr>
+              <a:t>3.8 yrs</a:t>
+            </a:r>
+          </a:p>
+          <a:p>
+            <a:pPr algn="ctr"/>
+            <a:r>
+              <a:rPr sz="1050">
+                <a:solidFill>
+                  <a:srgbClr val="D7DEE8"/>
+                </a:solidFill>
+                <a:latin typeface="Calibri"/>
+              </a:rPr>
+              <a:t>Daily contact-volume history</a:t>
+            </a:r>
+          </a:p>
+        </p:txBody>
+      </p:sp>
+      <p:sp>
+        <p:nvSpPr>
+          <p:cNvPr id="6" name="Rounded Rectangle 5"/>
+          <p:cNvSpPr/>
+          <p:nvPr/>
+        </p:nvSpPr>
+        <p:spPr>
+          <a:xfrm>
+            <a:off x="3474720" y="4114800"/>
+            <a:ext cx="2651760" cy="868680"/>
+          </a:xfrm>
+          <a:prstGeom prst="roundRect">
+            <a:avLst/>
+          </a:prstGeom>
+          <a:solidFill>
+            <a:srgbClr val="2B3C5E"/>
+          </a:solidFill>
+          <a:ln w="12700">
+            <a:solidFill>
+              <a:srgbClr val="2EC4B6"/>
+            </a:solidFill>
+          </a:ln>
+          <a:effectLst/>
+        </p:spPr>
+        <p:style>
+          <a:lnRef idx="1">
+            <a:schemeClr val="accent1"/>
+          </a:lnRef>
+          <a:fillRef idx="3">
+            <a:schemeClr val="accent1"/>
+          </a:fillRef>
+          <a:effectRef idx="2">
+            <a:schemeClr val="accent1"/>
+          </a:effectRef>
+          <a:fontRef idx="minor">
+            <a:schemeClr val="lt1"/>
+          </a:fontRef>
+        </p:style>
+        <p:txBody>
+          <a:bodyPr rtlCol="0" anchor="ctr" wrap="square"/>
+          <a:lstStyle/>
+          <a:p>
+            <a:pPr algn="ctr"/>
+            <a:r>
+              <a:rPr sz="1900" b="1">
+                <a:solidFill>
+                  <a:srgbClr val="2EC4B6"/>
+                </a:solidFill>
+                <a:latin typeface="Calibri"/>
+              </a:rPr>
+              <a:t>42 days</a:t>
+            </a:r>
+          </a:p>
+          <a:p>
+            <a:pPr algn="ctr"/>
+            <a:r>
+              <a:rPr sz="1050">
+                <a:solidFill>
+                  <a:srgbClr val="D7DEE8"/>
+                </a:solidFill>
+                <a:latin typeface="Calibri"/>
+              </a:rPr>
+              <a:t>Forecast horizon</a:t>
+            </a:r>
+          </a:p>
+        </p:txBody>
+      </p:sp>
+      <p:sp>
+        <p:nvSpPr>
+          <p:cNvPr id="7" name="Rounded Rectangle 6"/>
+          <p:cNvSpPr/>
+          <p:nvPr/>
+        </p:nvSpPr>
+        <p:spPr>
+          <a:xfrm>
+            <a:off x="6355080" y="4114800"/>
+            <a:ext cx="2651760" cy="868680"/>
+          </a:xfrm>
+          <a:prstGeom prst="roundRect">
+            <a:avLst/>
+          </a:prstGeom>
+          <a:solidFill>
+            <a:srgbClr val="2B3C5E"/>
+          </a:solidFill>
+          <a:ln w="12700">
+            <a:solidFill>
+              <a:srgbClr val="2EC4B6"/>
+            </a:solidFill>
+          </a:ln>
+          <a:effectLst/>
+        </p:spPr>
+        <p:style>
+          <a:lnRef idx="1">
+            <a:schemeClr val="accent1"/>
+          </a:lnRef>
+          <a:fillRef idx="3">
+            <a:schemeClr val="accent1"/>
+          </a:fillRef>
+          <a:effectRef idx="2">
+            <a:schemeClr val="accent1"/>
+          </a:effectRef>
+          <a:fontRef idx="minor">
+            <a:schemeClr val="lt1"/>
+          </a:fontRef>
+        </p:style>
+        <p:txBody>
+          <a:bodyPr rtlCol="0" anchor="ctr" wrap="square"/>
+          <a:lstStyle/>
+          <a:p>
+            <a:pPr algn="ctr"/>
+            <a:r>
+              <a:rPr sz="1900" b="1">
+                <a:solidFill>
+                  <a:srgbClr val="2EC4B6"/>
+                </a:solidFill>
+                <a:latin typeface="Calibri"/>
+              </a:rPr>
+              <a:t>2 / 3</a:t>
+            </a:r>
+          </a:p>
+          <a:p>
+            <a:pPr algn="ctr"/>
+            <a:r>
+              <a:rPr sz="1050">
+                <a:solidFill>
+                  <a:srgbClr val="D7DEE8"/>
+                </a:solidFill>
+                <a:latin typeface="Calibri"/>
+              </a:rPr>
+              <a:t>Lines of business / channels</a:t>
+            </a:r>
+          </a:p>
+        </p:txBody>
+      </p:sp>
+      <p:sp>
+        <p:nvSpPr>
+          <p:cNvPr id="8" name="Rounded Rectangle 7"/>
+          <p:cNvSpPr/>
+          <p:nvPr/>
+        </p:nvSpPr>
+        <p:spPr>
+          <a:xfrm>
+            <a:off x="9235440" y="4114800"/>
+            <a:ext cx="2651760" cy="868680"/>
+          </a:xfrm>
+          <a:prstGeom prst="roundRect">
+            <a:avLst/>
+          </a:prstGeom>
+          <a:solidFill>
+            <a:srgbClr val="2B3C5E"/>
+          </a:solidFill>
+          <a:ln w="12700">
+            <a:solidFill>
+              <a:srgbClr val="2EC4B6"/>
+            </a:solidFill>
+          </a:ln>
+          <a:effectLst/>
+        </p:spPr>
+        <p:style>
+          <a:lnRef idx="1">
+            <a:schemeClr val="accent1"/>
+          </a:lnRef>
+          <a:fillRef idx="3">
+            <a:schemeClr val="accent1"/>
+          </a:fillRef>
+          <a:effectRef idx="2">
+            <a:schemeClr val="accent1"/>
+          </a:effectRef>
+          <a:fontRef idx="minor">
+            <a:schemeClr val="lt1"/>
+          </a:fontRef>
+        </p:style>
+        <p:txBody>
+          <a:bodyPr rtlCol="0" anchor="ctr" wrap="square"/>
+          <a:lstStyle/>
+          <a:p>
+            <a:pPr algn="ctr"/>
+            <a:r>
+              <a:rPr sz="1900" b="1">
+                <a:solidFill>
+                  <a:srgbClr val="2EC4B6"/>
+                </a:solidFill>
+                <a:latin typeface="Calibri"/>
+              </a:rPr>
+              <a:t>18.8%</a:t>
+            </a:r>
+          </a:p>
+          <a:p>
+            <a:pPr algn="ctr"/>
+            <a:r>
+              <a:rPr sz="1050">
+                <a:solidFill>
+                  <a:srgbClr val="D7DEE8"/>
+                </a:solidFill>
+                <a:latin typeface="Calibri"/>
+              </a:rPr>
+              <a:t>Holdout forecast MAPE</a:t>
+            </a:r>
+          </a:p>
+        </p:txBody>
+      </p:sp>
+      <p:sp>
+        <p:nvSpPr>
+          <p:cNvPr id="9" name="TextBox 8"/>
           <p:cNvSpPr txBox="1"/>
           <p:nvPr/>
         </p:nvSpPr>
         <p:spPr>
           <a:xfrm>
-            <a:off x="594360" y="6126480"/>
-            <a:ext cx="10058400" cy="365760"/>
+            <a:off x="594360" y="6446520"/>
+            <a:ext cx="10058400" cy="320040"/>
           </a:xfrm>
           <a:prstGeom prst="rect">
             <a:avLst/>
@@ -3239,13 +3507,13 @@
           <a:p>
             <a:pPr algn="l"/>
             <a:r>
-              <a:rPr sz="1300" b="0">
-                <a:solidFill>
-                  <a:srgbClr val="B8C2D0"/>
-                </a:solidFill>
-                <a:latin typeface="Calibri"/>
-              </a:rPr>
-              <a:t>Data Analytics Consulting  |  3.8 years of history  |  42-day forecast horizon</a:t>
+              <a:rPr sz="1100" b="0" i="0">
+                <a:solidFill>
+                  <a:srgbClr val="8A97AB"/>
+                </a:solidFill>
+                <a:latin typeface="Calibri"/>
+              </a:rPr>
+              <a:t>Data Analytics Consulting</a:t>
             </a:r>
           </a:p>
         </p:txBody>
@@ -3322,14 +3590,69 @@
       </p:sp>
       <p:sp>
         <p:nvSpPr>
-          <p:cNvPr id="3" name="TextBox 2"/>
+          <p:cNvPr id="3" name="Rounded Rectangle 2"/>
+          <p:cNvSpPr/>
+          <p:nvPr/>
+        </p:nvSpPr>
+        <p:spPr>
+          <a:xfrm>
+            <a:off x="594360" y="365760"/>
+            <a:ext cx="1737360" cy="292608"/>
+          </a:xfrm>
+          <a:prstGeom prst="roundRect">
+            <a:avLst/>
+          </a:prstGeom>
+          <a:solidFill>
+            <a:srgbClr val="F5F7FA"/>
+          </a:solidFill>
+          <a:ln w="12700">
+            <a:solidFill>
+              <a:srgbClr val="2EC4B6"/>
+            </a:solidFill>
+          </a:ln>
+          <a:effectLst/>
+        </p:spPr>
+        <p:style>
+          <a:lnRef idx="1">
+            <a:schemeClr val="accent1"/>
+          </a:lnRef>
+          <a:fillRef idx="3">
+            <a:schemeClr val="accent1"/>
+          </a:fillRef>
+          <a:effectRef idx="2">
+            <a:schemeClr val="accent1"/>
+          </a:effectRef>
+          <a:fontRef idx="minor">
+            <a:schemeClr val="lt1"/>
+          </a:fontRef>
+        </p:style>
+        <p:txBody>
+          <a:bodyPr rtlCol="0" anchor="ctr" wrap="none" lIns="0" rIns="0"/>
+          <a:lstStyle/>
+          <a:p>
+            <a:pPr algn="ctr"/>
+            <a:r>
+              <a:rPr sz="1100" b="1">
+                <a:solidFill>
+                  <a:srgbClr val="1F9A8F"/>
+                </a:solidFill>
+                <a:latin typeface="Calibri"/>
+              </a:rPr>
+              <a:t>BUSINESS CONTEXT</a:t>
+            </a:r>
+          </a:p>
+        </p:txBody>
+      </p:sp>
+      <p:sp>
+        <p:nvSpPr>
+          <p:cNvPr id="4" name="TextBox 3"/>
           <p:cNvSpPr txBox="1"/>
           <p:nvPr/>
         </p:nvSpPr>
         <p:spPr>
           <a:xfrm>
-            <a:off x="594360" y="365760"/>
-            <a:ext cx="9144000" cy="365760"/>
+            <a:off x="594360" y="786384"/>
+            <a:ext cx="10972800" cy="822960"/>
           </a:xfrm>
           <a:prstGeom prst="rect">
             <a:avLst/>
@@ -3344,27 +3667,71 @@
           <a:p>
             <a:pPr algn="l"/>
             <a:r>
-              <a:rPr sz="1300" b="1">
-                <a:solidFill>
-                  <a:srgbClr val="2EC4B6"/>
-                </a:solidFill>
-                <a:latin typeface="Calibri"/>
-              </a:rPr>
-              <a:t>BUSINESS CONTEXT</a:t>
-            </a:r>
-          </a:p>
-        </p:txBody>
-      </p:sp>
-      <p:sp>
-        <p:nvSpPr>
-          <p:cNvPr id="4" name="TextBox 3"/>
+              <a:rPr sz="3000" b="1" i="0">
+                <a:solidFill>
+                  <a:srgbClr val="1B2A4A"/>
+                </a:solidFill>
+                <a:latin typeface="Calibri"/>
+              </a:rPr>
+              <a:t>The Use Case</a:t>
+            </a:r>
+          </a:p>
+        </p:txBody>
+      </p:sp>
+      <p:sp>
+        <p:nvSpPr>
+          <p:cNvPr id="5" name="Oval 4"/>
+          <p:cNvSpPr/>
+          <p:nvPr/>
+        </p:nvSpPr>
+        <p:spPr>
+          <a:xfrm>
+            <a:off x="594360" y="1581912"/>
+            <a:ext cx="128016" cy="128016"/>
+          </a:xfrm>
+          <a:prstGeom prst="ellipse">
+            <a:avLst/>
+          </a:prstGeom>
+          <a:solidFill>
+            <a:srgbClr val="2EC4B6"/>
+          </a:solidFill>
+          <a:ln>
+            <a:noFill/>
+          </a:ln>
+          <a:effectLst/>
+        </p:spPr>
+        <p:style>
+          <a:lnRef idx="1">
+            <a:schemeClr val="accent1"/>
+          </a:lnRef>
+          <a:fillRef idx="3">
+            <a:schemeClr val="accent1"/>
+          </a:fillRef>
+          <a:effectRef idx="2">
+            <a:schemeClr val="accent1"/>
+          </a:effectRef>
+          <a:fontRef idx="minor">
+            <a:schemeClr val="lt1"/>
+          </a:fontRef>
+        </p:style>
+        <p:txBody>
+          <a:bodyPr rtlCol="0" anchor="ctr"/>
+          <a:lstStyle/>
+          <a:p>
+            <a:pPr algn="ctr"/>
+          </a:p>
+        </p:txBody>
+      </p:sp>
+      <p:sp>
+        <p:nvSpPr>
+          <p:cNvPr id="6" name="TextBox 5"/>
           <p:cNvSpPr txBox="1"/>
           <p:nvPr/>
         </p:nvSpPr>
         <p:spPr>
           <a:xfrm>
-            <a:off x="594360" y="713232"/>
-            <a:ext cx="10972800" cy="822960"/>
+            <a:off x="914400" y="1508760"/>
+            <a:ext cx="6355080" cy="1417320"/>
           </a:xfrm>
           <a:prstGeom prst="rect">
             <a:avLst/>
@@ -3379,27 +3746,71 @@
           <a:p>
             <a:pPr algn="l"/>
             <a:r>
-              <a:rPr sz="3000" b="1">
-                <a:solidFill>
-                  <a:srgbClr val="1B2A4A"/>
-                </a:solidFill>
-                <a:latin typeface="Calibri"/>
-              </a:rPr>
-              <a:t>The Use Case</a:t>
-            </a:r>
-          </a:p>
-        </p:txBody>
-      </p:sp>
-      <p:sp>
-        <p:nvSpPr>
-          <p:cNvPr id="5" name="TextBox 4"/>
+              <a:rPr sz="1700" b="0" i="0">
+                <a:solidFill>
+                  <a:srgbClr val="202633"/>
+                </a:solidFill>
+                <a:latin typeface="Calibri"/>
+              </a:rPr>
+              <a:t>Both over- and under-staffing are expensive: idle capacity burns cost; a shortfall shows up directly in service levels and CSAT.</a:t>
+            </a:r>
+          </a:p>
+        </p:txBody>
+      </p:sp>
+      <p:sp>
+        <p:nvSpPr>
+          <p:cNvPr id="7" name="Oval 6"/>
+          <p:cNvSpPr/>
+          <p:nvPr/>
+        </p:nvSpPr>
+        <p:spPr>
+          <a:xfrm>
+            <a:off x="594360" y="2999232"/>
+            <a:ext cx="128016" cy="128016"/>
+          </a:xfrm>
+          <a:prstGeom prst="ellipse">
+            <a:avLst/>
+          </a:prstGeom>
+          <a:solidFill>
+            <a:srgbClr val="2EC4B6"/>
+          </a:solidFill>
+          <a:ln>
+            <a:noFill/>
+          </a:ln>
+          <a:effectLst/>
+        </p:spPr>
+        <p:style>
+          <a:lnRef idx="1">
+            <a:schemeClr val="accent1"/>
+          </a:lnRef>
+          <a:fillRef idx="3">
+            <a:schemeClr val="accent1"/>
+          </a:fillRef>
+          <a:effectRef idx="2">
+            <a:schemeClr val="accent1"/>
+          </a:effectRef>
+          <a:fontRef idx="minor">
+            <a:schemeClr val="lt1"/>
+          </a:fontRef>
+        </p:style>
+        <p:txBody>
+          <a:bodyPr rtlCol="0" anchor="ctr"/>
+          <a:lstStyle/>
+          <a:p>
+            <a:pPr algn="ctr"/>
+          </a:p>
+        </p:txBody>
+      </p:sp>
+      <p:sp>
+        <p:nvSpPr>
+          <p:cNvPr id="8" name="TextBox 7"/>
           <p:cNvSpPr txBox="1"/>
           <p:nvPr/>
         </p:nvSpPr>
         <p:spPr>
           <a:xfrm>
-            <a:off x="594360" y="1463040"/>
-            <a:ext cx="10789920" cy="4114800"/>
+            <a:off x="914400" y="2926080"/>
+            <a:ext cx="6355080" cy="1417320"/>
           </a:xfrm>
           <a:prstGeom prst="rect">
             <a:avLst/>
@@ -3412,65 +3823,73 @@
           </a:bodyPr>
           <a:lstStyle/>
           <a:p>
-            <a:pPr>
-              <a:spcAft>
-                <a:spcPts val="2200"/>
-              </a:spcAft>
-            </a:pPr>
-            <a:r>
-              <a:rPr sz="1900">
+            <a:pPr algn="l"/>
+            <a:r>
+              <a:rPr sz="1700" b="0" i="0">
                 <a:solidFill>
                   <a:srgbClr val="202633"/>
                 </a:solidFill>
                 <a:latin typeface="Calibri"/>
               </a:rPr>
-              <a:t>●   Both over- and under-staffing are expensive: idle capacity burns cost; a shortfall shows up directly in service levels and CSAT.</a:t>
-            </a:r>
-          </a:p>
-          <a:p>
-            <a:pPr>
-              <a:spcAft>
-                <a:spcPts val="2200"/>
-              </a:spcAft>
-            </a:pPr>
-            <a:r>
-              <a:rPr sz="1900">
-                <a:solidFill>
-                  <a:srgbClr val="202633"/>
-                </a:solidFill>
-                <a:latin typeface="Calibri"/>
-              </a:rPr>
-              <a:t>●   The business question: based on real contact-volume history, how many agents do we actually need over the next several weeks, and does the current roster cover it?</a:t>
-            </a:r>
-          </a:p>
-          <a:p>
-            <a:pPr>
-              <a:spcAft>
-                <a:spcPts val="2200"/>
-              </a:spcAft>
-            </a:pPr>
-            <a:r>
-              <a:rPr sz="1900">
-                <a:solidFill>
-                  <a:srgbClr val="202633"/>
-                </a:solidFill>
-                <a:latin typeface="Calibri"/>
-              </a:rPr>
-              <a:t>●   Objective: build a forecast grounded in the real patterns in the data - trend, seasonality, holidays, campaigns - validate it honestly, then convert it into a concrete FTE requirement the business can act on.</a:t>
-            </a:r>
-          </a:p>
-        </p:txBody>
-      </p:sp>
-      <p:sp>
-        <p:nvSpPr>
-          <p:cNvPr id="6" name="TextBox 5"/>
+              <a:t>The business question: based on real contact-volume history, how many agents do we actually need over the next several weeks, and does the current roster cover it?</a:t>
+            </a:r>
+          </a:p>
+        </p:txBody>
+      </p:sp>
+      <p:sp>
+        <p:nvSpPr>
+          <p:cNvPr id="9" name="Oval 8"/>
+          <p:cNvSpPr/>
+          <p:nvPr/>
+        </p:nvSpPr>
+        <p:spPr>
+          <a:xfrm>
+            <a:off x="594360" y="4416552"/>
+            <a:ext cx="128016" cy="128016"/>
+          </a:xfrm>
+          <a:prstGeom prst="ellipse">
+            <a:avLst/>
+          </a:prstGeom>
+          <a:solidFill>
+            <a:srgbClr val="2EC4B6"/>
+          </a:solidFill>
+          <a:ln>
+            <a:noFill/>
+          </a:ln>
+          <a:effectLst/>
+        </p:spPr>
+        <p:style>
+          <a:lnRef idx="1">
+            <a:schemeClr val="accent1"/>
+          </a:lnRef>
+          <a:fillRef idx="3">
+            <a:schemeClr val="accent1"/>
+          </a:fillRef>
+          <a:effectRef idx="2">
+            <a:schemeClr val="accent1"/>
+          </a:effectRef>
+          <a:fontRef idx="minor">
+            <a:schemeClr val="lt1"/>
+          </a:fontRef>
+        </p:style>
+        <p:txBody>
+          <a:bodyPr rtlCol="0" anchor="ctr"/>
+          <a:lstStyle/>
+          <a:p>
+            <a:pPr algn="ctr"/>
+          </a:p>
+        </p:txBody>
+      </p:sp>
+      <p:sp>
+        <p:nvSpPr>
+          <p:cNvPr id="10" name="TextBox 9"/>
           <p:cNvSpPr txBox="1"/>
           <p:nvPr/>
         </p:nvSpPr>
         <p:spPr>
           <a:xfrm>
-            <a:off x="594360" y="6446520"/>
-            <a:ext cx="9144000" cy="320040"/>
+            <a:off x="914400" y="4343400"/>
+            <a:ext cx="6355080" cy="1417320"/>
           </a:xfrm>
           <a:prstGeom prst="rect">
             <a:avLst/>
@@ -3485,13 +3904,199 @@
           <a:p>
             <a:pPr algn="l"/>
             <a:r>
-              <a:rPr sz="1000" b="0">
+              <a:rPr sz="1700" b="0" i="0">
+                <a:solidFill>
+                  <a:srgbClr val="202633"/>
+                </a:solidFill>
+                <a:latin typeface="Calibri"/>
+              </a:rPr>
+              <a:t>Objective: build a forecast grounded in the real patterns in the data - trend, seasonality, holidays, campaigns - validate it honestly, then convert it into a concrete FTE requirement the business can act on.</a:t>
+            </a:r>
+          </a:p>
+        </p:txBody>
+      </p:sp>
+      <p:sp>
+        <p:nvSpPr>
+          <p:cNvPr id="11" name="Rounded Rectangle 10"/>
+          <p:cNvSpPr/>
+          <p:nvPr/>
+        </p:nvSpPr>
+        <p:spPr>
+          <a:xfrm>
+            <a:off x="7589520" y="1508760"/>
+            <a:ext cx="4023360" cy="3931920"/>
+          </a:xfrm>
+          <a:prstGeom prst="roundRect">
+            <a:avLst/>
+          </a:prstGeom>
+          <a:solidFill>
+            <a:srgbClr val="F5F7FA"/>
+          </a:solidFill>
+          <a:ln>
+            <a:solidFill>
+              <a:srgbClr val="DDE2E8"/>
+            </a:solidFill>
+          </a:ln>
+          <a:effectLst/>
+        </p:spPr>
+        <p:style>
+          <a:lnRef idx="1">
+            <a:schemeClr val="accent1"/>
+          </a:lnRef>
+          <a:fillRef idx="3">
+            <a:schemeClr val="accent1"/>
+          </a:fillRef>
+          <a:effectRef idx="2">
+            <a:schemeClr val="accent1"/>
+          </a:effectRef>
+          <a:fontRef idx="minor">
+            <a:schemeClr val="lt1"/>
+          </a:fontRef>
+        </p:style>
+        <p:txBody>
+          <a:bodyPr rtlCol="0" anchor="ctr"/>
+          <a:lstStyle/>
+          <a:p>
+            <a:pPr algn="ctr"/>
+          </a:p>
+        </p:txBody>
+      </p:sp>
+      <p:sp>
+        <p:nvSpPr>
+          <p:cNvPr id="12" name="TextBox 11"/>
+          <p:cNvSpPr txBox="1"/>
+          <p:nvPr/>
+        </p:nvSpPr>
+        <p:spPr>
+          <a:xfrm>
+            <a:off x="7909560" y="1783080"/>
+            <a:ext cx="3474720" cy="365760"/>
+          </a:xfrm>
+          <a:prstGeom prst="rect">
+            <a:avLst/>
+          </a:prstGeom>
+          <a:noFill/>
+        </p:spPr>
+        <p:txBody>
+          <a:bodyPr wrap="square">
+            <a:spAutoFit/>
+          </a:bodyPr>
+          <a:lstStyle/>
+          <a:p>
+            <a:pPr algn="l"/>
+            <a:r>
+              <a:rPr sz="1200" b="1" i="0">
+                <a:solidFill>
+                  <a:srgbClr val="1F9A8F"/>
+                </a:solidFill>
+                <a:latin typeface="Calibri"/>
+              </a:rPr>
+              <a:t>WHY THIS MATTERS</a:t>
+            </a:r>
+          </a:p>
+        </p:txBody>
+      </p:sp>
+      <p:sp>
+        <p:nvSpPr>
+          <p:cNvPr id="13" name="TextBox 12"/>
+          <p:cNvSpPr txBox="1"/>
+          <p:nvPr/>
+        </p:nvSpPr>
+        <p:spPr>
+          <a:xfrm>
+            <a:off x="7909560" y="2194560"/>
+            <a:ext cx="3429000" cy="3017520"/>
+          </a:xfrm>
+          <a:prstGeom prst="rect">
+            <a:avLst/>
+          </a:prstGeom>
+          <a:noFill/>
+        </p:spPr>
+        <p:txBody>
+          <a:bodyPr wrap="square">
+            <a:spAutoFit/>
+          </a:bodyPr>
+          <a:lstStyle/>
+          <a:p>
+            <a:pPr algn="l"/>
+            <a:r>
+              <a:rPr sz="1450" b="0" i="0">
+                <a:solidFill>
+                  <a:srgbClr val="202633"/>
+                </a:solidFill>
+                <a:latin typeface="Calibri"/>
+              </a:rPr>
+              <a:t>A forecast that just says “volume is going up” isn't actionable. A staffing plan that says “you'll be short 3.7 FTE on November 18th” gives the business weeks of lead time to actually do something about it - overtime, a flexible shift, or a deliberate decision to accept the risk.</a:t>
+            </a:r>
+          </a:p>
+        </p:txBody>
+      </p:sp>
+      <p:sp>
+        <p:nvSpPr>
+          <p:cNvPr id="14" name="TextBox 13"/>
+          <p:cNvSpPr txBox="1"/>
+          <p:nvPr/>
+        </p:nvSpPr>
+        <p:spPr>
+          <a:xfrm>
+            <a:off x="594360" y="6473952"/>
+            <a:ext cx="9144000" cy="320040"/>
+          </a:xfrm>
+          <a:prstGeom prst="rect">
+            <a:avLst/>
+          </a:prstGeom>
+          <a:noFill/>
+        </p:spPr>
+        <p:txBody>
+          <a:bodyPr wrap="square">
+            <a:spAutoFit/>
+          </a:bodyPr>
+          <a:lstStyle/>
+          <a:p>
+            <a:pPr algn="l"/>
+            <a:r>
+              <a:rPr sz="1000" b="0" i="0">
                 <a:solidFill>
                   <a:srgbClr val="5A6B7D"/>
                 </a:solidFill>
                 <a:latin typeface="Calibri"/>
               </a:rPr>
               <a:t>Demand Forecasting &amp; Staffing</a:t>
+            </a:r>
+          </a:p>
+        </p:txBody>
+      </p:sp>
+      <p:sp>
+        <p:nvSpPr>
+          <p:cNvPr id="15" name="TextBox 14"/>
+          <p:cNvSpPr txBox="1"/>
+          <p:nvPr/>
+        </p:nvSpPr>
+        <p:spPr>
+          <a:xfrm>
+            <a:off x="11064240" y="6473952"/>
+            <a:ext cx="822960" cy="320040"/>
+          </a:xfrm>
+          <a:prstGeom prst="rect">
+            <a:avLst/>
+          </a:prstGeom>
+          <a:noFill/>
+        </p:spPr>
+        <p:txBody>
+          <a:bodyPr wrap="square">
+            <a:spAutoFit/>
+          </a:bodyPr>
+          <a:lstStyle/>
+          <a:p>
+            <a:pPr algn="r"/>
+            <a:r>
+              <a:rPr sz="1000" b="0" i="0">
+                <a:solidFill>
+                  <a:srgbClr val="5A6B7D"/>
+                </a:solidFill>
+                <a:latin typeface="Calibri"/>
+              </a:rPr>
+              <a:t>02 / 06</a:t>
             </a:r>
           </a:p>
         </p:txBody>
@@ -3568,14 +4173,69 @@
       </p:sp>
       <p:sp>
         <p:nvSpPr>
-          <p:cNvPr id="3" name="TextBox 2"/>
+          <p:cNvPr id="3" name="Rounded Rectangle 2"/>
+          <p:cNvSpPr/>
+          <p:nvPr/>
+        </p:nvSpPr>
+        <p:spPr>
+          <a:xfrm>
+            <a:off x="594360" y="365760"/>
+            <a:ext cx="1737360" cy="292608"/>
+          </a:xfrm>
+          <a:prstGeom prst="roundRect">
+            <a:avLst/>
+          </a:prstGeom>
+          <a:solidFill>
+            <a:srgbClr val="F5F7FA"/>
+          </a:solidFill>
+          <a:ln w="12700">
+            <a:solidFill>
+              <a:srgbClr val="2EC4B6"/>
+            </a:solidFill>
+          </a:ln>
+          <a:effectLst/>
+        </p:spPr>
+        <p:style>
+          <a:lnRef idx="1">
+            <a:schemeClr val="accent1"/>
+          </a:lnRef>
+          <a:fillRef idx="3">
+            <a:schemeClr val="accent1"/>
+          </a:fillRef>
+          <a:effectRef idx="2">
+            <a:schemeClr val="accent1"/>
+          </a:effectRef>
+          <a:fontRef idx="minor">
+            <a:schemeClr val="lt1"/>
+          </a:fontRef>
+        </p:style>
+        <p:txBody>
+          <a:bodyPr rtlCol="0" anchor="ctr" wrap="none" lIns="0" rIns="0"/>
+          <a:lstStyle/>
+          <a:p>
+            <a:pPr algn="ctr"/>
+            <a:r>
+              <a:rPr sz="1100" b="1">
+                <a:solidFill>
+                  <a:srgbClr val="1F9A8F"/>
+                </a:solidFill>
+                <a:latin typeface="Calibri"/>
+              </a:rPr>
+              <a:t>INPUT</a:t>
+            </a:r>
+          </a:p>
+        </p:txBody>
+      </p:sp>
+      <p:sp>
+        <p:nvSpPr>
+          <p:cNvPr id="4" name="TextBox 3"/>
           <p:cNvSpPr txBox="1"/>
           <p:nvPr/>
         </p:nvSpPr>
         <p:spPr>
           <a:xfrm>
-            <a:off x="594360" y="365760"/>
-            <a:ext cx="9144000" cy="365760"/>
+            <a:off x="594360" y="786384"/>
+            <a:ext cx="10972800" cy="822960"/>
           </a:xfrm>
           <a:prstGeom prst="rect">
             <a:avLst/>
@@ -3590,27 +4250,515 @@
           <a:p>
             <a:pPr algn="l"/>
             <a:r>
-              <a:rPr sz="1300" b="1">
-                <a:solidFill>
-                  <a:srgbClr val="2EC4B6"/>
-                </a:solidFill>
-                <a:latin typeface="Calibri"/>
-              </a:rPr>
-              <a:t>INPUT</a:t>
-            </a:r>
-          </a:p>
-        </p:txBody>
-      </p:sp>
-      <p:sp>
-        <p:nvSpPr>
-          <p:cNvPr id="4" name="TextBox 3"/>
+              <a:rPr sz="3000" b="1" i="0">
+                <a:solidFill>
+                  <a:srgbClr val="1B2A4A"/>
+                </a:solidFill>
+                <a:latin typeface="Calibri"/>
+              </a:rPr>
+              <a:t>The Data</a:t>
+            </a:r>
+          </a:p>
+        </p:txBody>
+      </p:sp>
+      <p:sp>
+        <p:nvSpPr>
+          <p:cNvPr id="5" name="Rectangle 4"/>
+          <p:cNvSpPr/>
+          <p:nvPr/>
+        </p:nvSpPr>
+        <p:spPr>
+          <a:xfrm>
+            <a:off x="594360" y="1463040"/>
+            <a:ext cx="2542032" cy="82296"/>
+          </a:xfrm>
+          <a:prstGeom prst="rect">
+            <a:avLst/>
+          </a:prstGeom>
+          <a:solidFill>
+            <a:srgbClr val="2EC4B6"/>
+          </a:solidFill>
+          <a:ln>
+            <a:noFill/>
+          </a:ln>
+          <a:effectLst/>
+        </p:spPr>
+        <p:style>
+          <a:lnRef idx="1">
+            <a:schemeClr val="accent1"/>
+          </a:lnRef>
+          <a:fillRef idx="3">
+            <a:schemeClr val="accent1"/>
+          </a:fillRef>
+          <a:effectRef idx="2">
+            <a:schemeClr val="accent1"/>
+          </a:effectRef>
+          <a:fontRef idx="minor">
+            <a:schemeClr val="lt1"/>
+          </a:fontRef>
+        </p:style>
+        <p:txBody>
+          <a:bodyPr rtlCol="0" anchor="ctr"/>
+          <a:lstStyle/>
+          <a:p>
+            <a:pPr algn="ctr"/>
+          </a:p>
+        </p:txBody>
+      </p:sp>
+      <p:sp>
+        <p:nvSpPr>
+          <p:cNvPr id="6" name="Rectangle 5"/>
+          <p:cNvSpPr/>
+          <p:nvPr/>
+        </p:nvSpPr>
+        <p:spPr>
+          <a:xfrm>
+            <a:off x="594360" y="1545336"/>
+            <a:ext cx="2542032" cy="1152144"/>
+          </a:xfrm>
+          <a:prstGeom prst="rect">
+            <a:avLst/>
+          </a:prstGeom>
+          <a:solidFill>
+            <a:srgbClr val="F5F7FA"/>
+          </a:solidFill>
+          <a:ln w="9525">
+            <a:solidFill>
+              <a:srgbClr val="DDE2E8"/>
+            </a:solidFill>
+          </a:ln>
+          <a:effectLst/>
+        </p:spPr>
+        <p:style>
+          <a:lnRef idx="1">
+            <a:schemeClr val="accent1"/>
+          </a:lnRef>
+          <a:fillRef idx="3">
+            <a:schemeClr val="accent1"/>
+          </a:fillRef>
+          <a:effectRef idx="2">
+            <a:schemeClr val="accent1"/>
+          </a:effectRef>
+          <a:fontRef idx="minor">
+            <a:schemeClr val="lt1"/>
+          </a:fontRef>
+        </p:style>
+        <p:txBody>
+          <a:bodyPr rtlCol="0" anchor="ctr" wrap="square"/>
+          <a:lstStyle/>
+          <a:p>
+            <a:pPr algn="ctr"/>
+            <a:r>
+              <a:rPr sz="3000" b="1">
+                <a:solidFill>
+                  <a:srgbClr val="1B2A4A"/>
+                </a:solidFill>
+                <a:latin typeface="Calibri"/>
+              </a:rPr>
+              <a:t>3.8 yrs</a:t>
+            </a:r>
+          </a:p>
+          <a:p>
+            <a:pPr algn="ctr"/>
+            <a:r>
+              <a:rPr sz="1200">
+                <a:solidFill>
+                  <a:srgbClr val="5A6B7D"/>
+                </a:solidFill>
+                <a:latin typeface="Calibri"/>
+              </a:rPr>
+              <a:t>Daily contact-volume history</a:t>
+            </a:r>
+          </a:p>
+        </p:txBody>
+      </p:sp>
+      <p:sp>
+        <p:nvSpPr>
+          <p:cNvPr id="7" name="Rectangle 6"/>
+          <p:cNvSpPr/>
+          <p:nvPr/>
+        </p:nvSpPr>
+        <p:spPr>
+          <a:xfrm>
+            <a:off x="3392424" y="1463040"/>
+            <a:ext cx="2542032" cy="82296"/>
+          </a:xfrm>
+          <a:prstGeom prst="rect">
+            <a:avLst/>
+          </a:prstGeom>
+          <a:solidFill>
+            <a:srgbClr val="2EC4B6"/>
+          </a:solidFill>
+          <a:ln>
+            <a:noFill/>
+          </a:ln>
+          <a:effectLst/>
+        </p:spPr>
+        <p:style>
+          <a:lnRef idx="1">
+            <a:schemeClr val="accent1"/>
+          </a:lnRef>
+          <a:fillRef idx="3">
+            <a:schemeClr val="accent1"/>
+          </a:fillRef>
+          <a:effectRef idx="2">
+            <a:schemeClr val="accent1"/>
+          </a:effectRef>
+          <a:fontRef idx="minor">
+            <a:schemeClr val="lt1"/>
+          </a:fontRef>
+        </p:style>
+        <p:txBody>
+          <a:bodyPr rtlCol="0" anchor="ctr"/>
+          <a:lstStyle/>
+          <a:p>
+            <a:pPr algn="ctr"/>
+          </a:p>
+        </p:txBody>
+      </p:sp>
+      <p:sp>
+        <p:nvSpPr>
+          <p:cNvPr id="8" name="Rectangle 7"/>
+          <p:cNvSpPr/>
+          <p:nvPr/>
+        </p:nvSpPr>
+        <p:spPr>
+          <a:xfrm>
+            <a:off x="3392424" y="1545336"/>
+            <a:ext cx="2542032" cy="1152144"/>
+          </a:xfrm>
+          <a:prstGeom prst="rect">
+            <a:avLst/>
+          </a:prstGeom>
+          <a:solidFill>
+            <a:srgbClr val="F5F7FA"/>
+          </a:solidFill>
+          <a:ln w="9525">
+            <a:solidFill>
+              <a:srgbClr val="DDE2E8"/>
+            </a:solidFill>
+          </a:ln>
+          <a:effectLst/>
+        </p:spPr>
+        <p:style>
+          <a:lnRef idx="1">
+            <a:schemeClr val="accent1"/>
+          </a:lnRef>
+          <a:fillRef idx="3">
+            <a:schemeClr val="accent1"/>
+          </a:fillRef>
+          <a:effectRef idx="2">
+            <a:schemeClr val="accent1"/>
+          </a:effectRef>
+          <a:fontRef idx="minor">
+            <a:schemeClr val="lt1"/>
+          </a:fontRef>
+        </p:style>
+        <p:txBody>
+          <a:bodyPr rtlCol="0" anchor="ctr" wrap="square"/>
+          <a:lstStyle/>
+          <a:p>
+            <a:pPr algn="ctr"/>
+            <a:r>
+              <a:rPr sz="3000" b="1">
+                <a:solidFill>
+                  <a:srgbClr val="1B2A4A"/>
+                </a:solidFill>
+                <a:latin typeface="Calibri"/>
+              </a:rPr>
+              <a:t>3</a:t>
+            </a:r>
+          </a:p>
+          <a:p>
+            <a:pPr algn="ctr"/>
+            <a:r>
+              <a:rPr sz="1200">
+                <a:solidFill>
+                  <a:srgbClr val="5A6B7D"/>
+                </a:solidFill>
+                <a:latin typeface="Calibri"/>
+              </a:rPr>
+              <a:t>Channels</a:t>
+            </a:r>
+          </a:p>
+        </p:txBody>
+      </p:sp>
+      <p:sp>
+        <p:nvSpPr>
+          <p:cNvPr id="9" name="Rectangle 8"/>
+          <p:cNvSpPr/>
+          <p:nvPr/>
+        </p:nvSpPr>
+        <p:spPr>
+          <a:xfrm>
+            <a:off x="6190488" y="1463040"/>
+            <a:ext cx="2542032" cy="82296"/>
+          </a:xfrm>
+          <a:prstGeom prst="rect">
+            <a:avLst/>
+          </a:prstGeom>
+          <a:solidFill>
+            <a:srgbClr val="2EC4B6"/>
+          </a:solidFill>
+          <a:ln>
+            <a:noFill/>
+          </a:ln>
+          <a:effectLst/>
+        </p:spPr>
+        <p:style>
+          <a:lnRef idx="1">
+            <a:schemeClr val="accent1"/>
+          </a:lnRef>
+          <a:fillRef idx="3">
+            <a:schemeClr val="accent1"/>
+          </a:fillRef>
+          <a:effectRef idx="2">
+            <a:schemeClr val="accent1"/>
+          </a:effectRef>
+          <a:fontRef idx="minor">
+            <a:schemeClr val="lt1"/>
+          </a:fontRef>
+        </p:style>
+        <p:txBody>
+          <a:bodyPr rtlCol="0" anchor="ctr"/>
+          <a:lstStyle/>
+          <a:p>
+            <a:pPr algn="ctr"/>
+          </a:p>
+        </p:txBody>
+      </p:sp>
+      <p:sp>
+        <p:nvSpPr>
+          <p:cNvPr id="10" name="Rectangle 9"/>
+          <p:cNvSpPr/>
+          <p:nvPr/>
+        </p:nvSpPr>
+        <p:spPr>
+          <a:xfrm>
+            <a:off x="6190488" y="1545336"/>
+            <a:ext cx="2542032" cy="1152144"/>
+          </a:xfrm>
+          <a:prstGeom prst="rect">
+            <a:avLst/>
+          </a:prstGeom>
+          <a:solidFill>
+            <a:srgbClr val="F5F7FA"/>
+          </a:solidFill>
+          <a:ln w="9525">
+            <a:solidFill>
+              <a:srgbClr val="DDE2E8"/>
+            </a:solidFill>
+          </a:ln>
+          <a:effectLst/>
+        </p:spPr>
+        <p:style>
+          <a:lnRef idx="1">
+            <a:schemeClr val="accent1"/>
+          </a:lnRef>
+          <a:fillRef idx="3">
+            <a:schemeClr val="accent1"/>
+          </a:fillRef>
+          <a:effectRef idx="2">
+            <a:schemeClr val="accent1"/>
+          </a:effectRef>
+          <a:fontRef idx="minor">
+            <a:schemeClr val="lt1"/>
+          </a:fontRef>
+        </p:style>
+        <p:txBody>
+          <a:bodyPr rtlCol="0" anchor="ctr" wrap="square"/>
+          <a:lstStyle/>
+          <a:p>
+            <a:pPr algn="ctr"/>
+            <a:r>
+              <a:rPr sz="3000" b="1">
+                <a:solidFill>
+                  <a:srgbClr val="1B2A4A"/>
+                </a:solidFill>
+                <a:latin typeface="Calibri"/>
+              </a:rPr>
+              <a:t>2</a:t>
+            </a:r>
+          </a:p>
+          <a:p>
+            <a:pPr algn="ctr"/>
+            <a:r>
+              <a:rPr sz="1200">
+                <a:solidFill>
+                  <a:srgbClr val="5A6B7D"/>
+                </a:solidFill>
+                <a:latin typeface="Calibri"/>
+              </a:rPr>
+              <a:t>Lines of business</a:t>
+            </a:r>
+          </a:p>
+        </p:txBody>
+      </p:sp>
+      <p:sp>
+        <p:nvSpPr>
+          <p:cNvPr id="11" name="Rectangle 10"/>
+          <p:cNvSpPr/>
+          <p:nvPr/>
+        </p:nvSpPr>
+        <p:spPr>
+          <a:xfrm>
+            <a:off x="8988552" y="1463040"/>
+            <a:ext cx="2542032" cy="82296"/>
+          </a:xfrm>
+          <a:prstGeom prst="rect">
+            <a:avLst/>
+          </a:prstGeom>
+          <a:solidFill>
+            <a:srgbClr val="2EC4B6"/>
+          </a:solidFill>
+          <a:ln>
+            <a:noFill/>
+          </a:ln>
+          <a:effectLst/>
+        </p:spPr>
+        <p:style>
+          <a:lnRef idx="1">
+            <a:schemeClr val="accent1"/>
+          </a:lnRef>
+          <a:fillRef idx="3">
+            <a:schemeClr val="accent1"/>
+          </a:fillRef>
+          <a:effectRef idx="2">
+            <a:schemeClr val="accent1"/>
+          </a:effectRef>
+          <a:fontRef idx="minor">
+            <a:schemeClr val="lt1"/>
+          </a:fontRef>
+        </p:style>
+        <p:txBody>
+          <a:bodyPr rtlCol="0" anchor="ctr"/>
+          <a:lstStyle/>
+          <a:p>
+            <a:pPr algn="ctr"/>
+          </a:p>
+        </p:txBody>
+      </p:sp>
+      <p:sp>
+        <p:nvSpPr>
+          <p:cNvPr id="12" name="Rectangle 11"/>
+          <p:cNvSpPr/>
+          <p:nvPr/>
+        </p:nvSpPr>
+        <p:spPr>
+          <a:xfrm>
+            <a:off x="8988552" y="1545336"/>
+            <a:ext cx="2542032" cy="1152144"/>
+          </a:xfrm>
+          <a:prstGeom prst="rect">
+            <a:avLst/>
+          </a:prstGeom>
+          <a:solidFill>
+            <a:srgbClr val="F5F7FA"/>
+          </a:solidFill>
+          <a:ln w="9525">
+            <a:solidFill>
+              <a:srgbClr val="DDE2E8"/>
+            </a:solidFill>
+          </a:ln>
+          <a:effectLst/>
+        </p:spPr>
+        <p:style>
+          <a:lnRef idx="1">
+            <a:schemeClr val="accent1"/>
+          </a:lnRef>
+          <a:fillRef idx="3">
+            <a:schemeClr val="accent1"/>
+          </a:fillRef>
+          <a:effectRef idx="2">
+            <a:schemeClr val="accent1"/>
+          </a:effectRef>
+          <a:fontRef idx="minor">
+            <a:schemeClr val="lt1"/>
+          </a:fontRef>
+        </p:style>
+        <p:txBody>
+          <a:bodyPr rtlCol="0" anchor="ctr" wrap="square"/>
+          <a:lstStyle/>
+          <a:p>
+            <a:pPr algn="ctr"/>
+            <a:r>
+              <a:rPr sz="3000" b="1">
+                <a:solidFill>
+                  <a:srgbClr val="1B2A4A"/>
+                </a:solidFill>
+                <a:latin typeface="Calibri"/>
+              </a:rPr>
+              <a:t>42</a:t>
+            </a:r>
+          </a:p>
+          <a:p>
+            <a:pPr algn="ctr"/>
+            <a:r>
+              <a:rPr sz="1200">
+                <a:solidFill>
+                  <a:srgbClr val="5A6B7D"/>
+                </a:solidFill>
+                <a:latin typeface="Calibri"/>
+              </a:rPr>
+              <a:t>Days forecast forward</a:t>
+            </a:r>
+          </a:p>
+        </p:txBody>
+      </p:sp>
+      <p:sp>
+        <p:nvSpPr>
+          <p:cNvPr id="13" name="Oval 12"/>
+          <p:cNvSpPr/>
+          <p:nvPr/>
+        </p:nvSpPr>
+        <p:spPr>
+          <a:xfrm>
+            <a:off x="594360" y="3090672"/>
+            <a:ext cx="128016" cy="128016"/>
+          </a:xfrm>
+          <a:prstGeom prst="ellipse">
+            <a:avLst/>
+          </a:prstGeom>
+          <a:solidFill>
+            <a:srgbClr val="2EC4B6"/>
+          </a:solidFill>
+          <a:ln>
+            <a:noFill/>
+          </a:ln>
+          <a:effectLst/>
+        </p:spPr>
+        <p:style>
+          <a:lnRef idx="1">
+            <a:schemeClr val="accent1"/>
+          </a:lnRef>
+          <a:fillRef idx="3">
+            <a:schemeClr val="accent1"/>
+          </a:fillRef>
+          <a:effectRef idx="2">
+            <a:schemeClr val="accent1"/>
+          </a:effectRef>
+          <a:fontRef idx="minor">
+            <a:schemeClr val="lt1"/>
+          </a:fontRef>
+        </p:style>
+        <p:txBody>
+          <a:bodyPr rtlCol="0" anchor="ctr"/>
+          <a:lstStyle/>
+          <a:p>
+            <a:pPr algn="ctr"/>
+          </a:p>
+        </p:txBody>
+      </p:sp>
+      <p:sp>
+        <p:nvSpPr>
+          <p:cNvPr id="14" name="TextBox 13"/>
           <p:cNvSpPr txBox="1"/>
           <p:nvPr/>
         </p:nvSpPr>
         <p:spPr>
           <a:xfrm>
-            <a:off x="594360" y="713232"/>
-            <a:ext cx="10972800" cy="822960"/>
+            <a:off x="914400" y="3017520"/>
+            <a:ext cx="10561320" cy="594360"/>
           </a:xfrm>
           <a:prstGeom prst="rect">
             <a:avLst/>
@@ -3625,27 +4773,71 @@
           <a:p>
             <a:pPr algn="l"/>
             <a:r>
-              <a:rPr sz="3000" b="1">
-                <a:solidFill>
-                  <a:srgbClr val="1B2A4A"/>
-                </a:solidFill>
-                <a:latin typeface="Calibri"/>
-              </a:rPr>
-              <a:t>The Data</a:t>
-            </a:r>
-          </a:p>
-        </p:txBody>
-      </p:sp>
-      <p:sp>
-        <p:nvSpPr>
-          <p:cNvPr id="5" name="TextBox 4"/>
+              <a:rPr sz="1550" b="0" i="0">
+                <a:solidFill>
+                  <a:srgbClr val="202633"/>
+                </a:solidFill>
+                <a:latin typeface="Calibri"/>
+              </a:rPr>
+              <a:t>Daily contact volume by line of business and channel, with handle time, holiday and campaign flags - the real signals that drive the shape of demand</a:t>
+            </a:r>
+          </a:p>
+        </p:txBody>
+      </p:sp>
+      <p:sp>
+        <p:nvSpPr>
+          <p:cNvPr id="15" name="Oval 14"/>
+          <p:cNvSpPr/>
+          <p:nvPr/>
+        </p:nvSpPr>
+        <p:spPr>
+          <a:xfrm>
+            <a:off x="594360" y="3685032"/>
+            <a:ext cx="128016" cy="128016"/>
+          </a:xfrm>
+          <a:prstGeom prst="ellipse">
+            <a:avLst/>
+          </a:prstGeom>
+          <a:solidFill>
+            <a:srgbClr val="2EC4B6"/>
+          </a:solidFill>
+          <a:ln>
+            <a:noFill/>
+          </a:ln>
+          <a:effectLst/>
+        </p:spPr>
+        <p:style>
+          <a:lnRef idx="1">
+            <a:schemeClr val="accent1"/>
+          </a:lnRef>
+          <a:fillRef idx="3">
+            <a:schemeClr val="accent1"/>
+          </a:fillRef>
+          <a:effectRef idx="2">
+            <a:schemeClr val="accent1"/>
+          </a:effectRef>
+          <a:fontRef idx="minor">
+            <a:schemeClr val="lt1"/>
+          </a:fontRef>
+        </p:style>
+        <p:txBody>
+          <a:bodyPr rtlCol="0" anchor="ctr"/>
+          <a:lstStyle/>
+          <a:p>
+            <a:pPr algn="ctr"/>
+          </a:p>
+        </p:txBody>
+      </p:sp>
+      <p:sp>
+        <p:nvSpPr>
+          <p:cNvPr id="16" name="TextBox 15"/>
           <p:cNvSpPr txBox="1"/>
           <p:nvPr/>
         </p:nvSpPr>
         <p:spPr>
           <a:xfrm>
-            <a:off x="594360" y="1463040"/>
-            <a:ext cx="10789920" cy="2926080"/>
+            <a:off x="914400" y="3611880"/>
+            <a:ext cx="10561320" cy="594360"/>
           </a:xfrm>
           <a:prstGeom prst="rect">
             <a:avLst/>
@@ -3658,49 +4850,29 @@
           </a:bodyPr>
           <a:lstStyle/>
           <a:p>
-            <a:pPr>
-              <a:spcAft>
-                <a:spcPts val="2000"/>
-              </a:spcAft>
-            </a:pPr>
-            <a:r>
-              <a:rPr sz="1900">
+            <a:pPr algn="l"/>
+            <a:r>
+              <a:rPr sz="1550" b="0" i="0">
                 <a:solidFill>
                   <a:srgbClr val="202633"/>
                 </a:solidFill>
                 <a:latin typeface="Calibri"/>
               </a:rPr>
-              <a:t>●   3.8 years of daily contact-volume history, by line of business and channel, with handle time, holiday and campaign flags</a:t>
-            </a:r>
-          </a:p>
-          <a:p>
-            <a:pPr>
-              <a:spcAft>
-                <a:spcPts val="2000"/>
-              </a:spcAft>
-            </a:pPr>
-            <a:r>
-              <a:rPr sz="1900">
-                <a:solidFill>
-                  <a:srgbClr val="202633"/>
-                </a:solidFill>
-                <a:latin typeface="Calibri"/>
-              </a:rPr>
-              <a:t>●   An agent roster: who we have today, their line of business, team lead/manager, tenure, weekly available hours, and real shrinkage % (time scheduled but not available - breaks, training, coaching)</a:t>
-            </a:r>
-          </a:p>
-        </p:txBody>
-      </p:sp>
-      <p:sp>
-        <p:nvSpPr>
-          <p:cNvPr id="6" name="TextBox 5"/>
+              <a:t>An agent roster: who we have today, their line of business, team lead/manager, tenure, weekly available hours, and real shrinkage % (not a flat assumption)</a:t>
+            </a:r>
+          </a:p>
+        </p:txBody>
+      </p:sp>
+      <p:sp>
+        <p:nvSpPr>
+          <p:cNvPr id="17" name="TextBox 16"/>
           <p:cNvSpPr txBox="1"/>
           <p:nvPr/>
         </p:nvSpPr>
         <p:spPr>
           <a:xfrm>
-            <a:off x="594360" y="3657600"/>
-            <a:ext cx="10789920" cy="457200"/>
+            <a:off x="594360" y="4434840"/>
+            <a:ext cx="4572000" cy="320040"/>
           </a:xfrm>
           <a:prstGeom prst="rect">
             <a:avLst/>
@@ -3715,27 +4887,163 @@
           <a:p>
             <a:pPr algn="l"/>
             <a:r>
-              <a:rPr sz="1600" b="0">
-                <a:solidFill>
-                  <a:srgbClr val="5A6B7D"/>
-                </a:solidFill>
-                <a:latin typeface="Calibri"/>
-              </a:rPr>
-              <a:t>Volume split by LoB:  Broadband: 36%  |  Postpaid Mobile: 64%</a:t>
-            </a:r>
-          </a:p>
-        </p:txBody>
-      </p:sp>
-      <p:sp>
-        <p:nvSpPr>
-          <p:cNvPr id="7" name="TextBox 6"/>
+              <a:rPr sz="1200" b="1" i="0">
+                <a:solidFill>
+                  <a:srgbClr val="1F9A8F"/>
+                </a:solidFill>
+                <a:latin typeface="Calibri"/>
+              </a:rPr>
+              <a:t>VOLUME SPLIT BY LINE OF BUSINESS</a:t>
+            </a:r>
+          </a:p>
+        </p:txBody>
+      </p:sp>
+      <p:sp>
+        <p:nvSpPr>
+          <p:cNvPr id="18" name="Rectangle 17"/>
+          <p:cNvSpPr/>
+          <p:nvPr/>
+        </p:nvSpPr>
+        <p:spPr>
+          <a:xfrm>
+            <a:off x="594360" y="4800600"/>
+            <a:ext cx="3862882" cy="411480"/>
+          </a:xfrm>
+          <a:prstGeom prst="rect">
+            <a:avLst/>
+          </a:prstGeom>
+          <a:solidFill>
+            <a:srgbClr val="1B2A4A"/>
+          </a:solidFill>
+          <a:ln w="19050">
+            <a:solidFill>
+              <a:srgbClr val="FFFFFF"/>
+            </a:solidFill>
+          </a:ln>
+          <a:effectLst/>
+        </p:spPr>
+        <p:style>
+          <a:lnRef idx="1">
+            <a:schemeClr val="accent1"/>
+          </a:lnRef>
+          <a:fillRef idx="3">
+            <a:schemeClr val="accent1"/>
+          </a:fillRef>
+          <a:effectRef idx="2">
+            <a:schemeClr val="accent1"/>
+          </a:effectRef>
+          <a:fontRef idx="minor">
+            <a:schemeClr val="lt1"/>
+          </a:fontRef>
+        </p:style>
+        <p:txBody>
+          <a:bodyPr rtlCol="0" anchor="ctr"/>
+          <a:lstStyle/>
+          <a:p>
+            <a:pPr algn="ctr"/>
+          </a:p>
+        </p:txBody>
+      </p:sp>
+      <p:sp>
+        <p:nvSpPr>
+          <p:cNvPr id="19" name="Rectangle 18"/>
+          <p:cNvSpPr/>
+          <p:nvPr/>
+        </p:nvSpPr>
+        <p:spPr>
+          <a:xfrm>
+            <a:off x="4457242" y="4800600"/>
+            <a:ext cx="7018477" cy="411480"/>
+          </a:xfrm>
+          <a:prstGeom prst="rect">
+            <a:avLst/>
+          </a:prstGeom>
+          <a:solidFill>
+            <a:srgbClr val="2EC4B6"/>
+          </a:solidFill>
+          <a:ln w="19050">
+            <a:solidFill>
+              <a:srgbClr val="FFFFFF"/>
+            </a:solidFill>
+          </a:ln>
+          <a:effectLst/>
+        </p:spPr>
+        <p:style>
+          <a:lnRef idx="1">
+            <a:schemeClr val="accent1"/>
+          </a:lnRef>
+          <a:fillRef idx="3">
+            <a:schemeClr val="accent1"/>
+          </a:fillRef>
+          <a:effectRef idx="2">
+            <a:schemeClr val="accent1"/>
+          </a:effectRef>
+          <a:fontRef idx="minor">
+            <a:schemeClr val="lt1"/>
+          </a:fontRef>
+        </p:style>
+        <p:txBody>
+          <a:bodyPr rtlCol="0" anchor="ctr"/>
+          <a:lstStyle/>
+          <a:p>
+            <a:pPr algn="ctr"/>
+          </a:p>
+        </p:txBody>
+      </p:sp>
+      <p:sp>
+        <p:nvSpPr>
+          <p:cNvPr id="20" name="Oval 19"/>
+          <p:cNvSpPr/>
+          <p:nvPr/>
+        </p:nvSpPr>
+        <p:spPr>
+          <a:xfrm>
+            <a:off x="594360" y="5321808"/>
+            <a:ext cx="128016" cy="128016"/>
+          </a:xfrm>
+          <a:prstGeom prst="ellipse">
+            <a:avLst/>
+          </a:prstGeom>
+          <a:solidFill>
+            <a:srgbClr val="1B2A4A"/>
+          </a:solidFill>
+          <a:ln>
+            <a:noFill/>
+          </a:ln>
+          <a:effectLst/>
+        </p:spPr>
+        <p:style>
+          <a:lnRef idx="1">
+            <a:schemeClr val="accent1"/>
+          </a:lnRef>
+          <a:fillRef idx="3">
+            <a:schemeClr val="accent1"/>
+          </a:fillRef>
+          <a:effectRef idx="2">
+            <a:schemeClr val="accent1"/>
+          </a:effectRef>
+          <a:fontRef idx="minor">
+            <a:schemeClr val="lt1"/>
+          </a:fontRef>
+        </p:style>
+        <p:txBody>
+          <a:bodyPr rtlCol="0" anchor="ctr"/>
+          <a:lstStyle/>
+          <a:p>
+            <a:pPr algn="ctr"/>
+          </a:p>
+        </p:txBody>
+      </p:sp>
+      <p:sp>
+        <p:nvSpPr>
+          <p:cNvPr id="21" name="TextBox 20"/>
           <p:cNvSpPr txBox="1"/>
           <p:nvPr/>
         </p:nvSpPr>
         <p:spPr>
           <a:xfrm>
-            <a:off x="594360" y="6446520"/>
-            <a:ext cx="9144000" cy="320040"/>
+            <a:off x="777240" y="5276088"/>
+            <a:ext cx="2377440" cy="274320"/>
           </a:xfrm>
           <a:prstGeom prst="rect">
             <a:avLst/>
@@ -3750,13 +5058,162 @@
           <a:p>
             <a:pPr algn="l"/>
             <a:r>
-              <a:rPr sz="1000" b="0">
+              <a:rPr sz="1300" b="0" i="0">
                 <a:solidFill>
                   <a:srgbClr val="5A6B7D"/>
                 </a:solidFill>
                 <a:latin typeface="Calibri"/>
               </a:rPr>
+              <a:t>Broadband: 36%</a:t>
+            </a:r>
+          </a:p>
+        </p:txBody>
+      </p:sp>
+      <p:sp>
+        <p:nvSpPr>
+          <p:cNvPr id="22" name="Oval 21"/>
+          <p:cNvSpPr/>
+          <p:nvPr/>
+        </p:nvSpPr>
+        <p:spPr>
+          <a:xfrm>
+            <a:off x="3108960" y="5321808"/>
+            <a:ext cx="128016" cy="128016"/>
+          </a:xfrm>
+          <a:prstGeom prst="ellipse">
+            <a:avLst/>
+          </a:prstGeom>
+          <a:solidFill>
+            <a:srgbClr val="2EC4B6"/>
+          </a:solidFill>
+          <a:ln>
+            <a:noFill/>
+          </a:ln>
+          <a:effectLst/>
+        </p:spPr>
+        <p:style>
+          <a:lnRef idx="1">
+            <a:schemeClr val="accent1"/>
+          </a:lnRef>
+          <a:fillRef idx="3">
+            <a:schemeClr val="accent1"/>
+          </a:fillRef>
+          <a:effectRef idx="2">
+            <a:schemeClr val="accent1"/>
+          </a:effectRef>
+          <a:fontRef idx="minor">
+            <a:schemeClr val="lt1"/>
+          </a:fontRef>
+        </p:style>
+        <p:txBody>
+          <a:bodyPr rtlCol="0" anchor="ctr"/>
+          <a:lstStyle/>
+          <a:p>
+            <a:pPr algn="ctr"/>
+          </a:p>
+        </p:txBody>
+      </p:sp>
+      <p:sp>
+        <p:nvSpPr>
+          <p:cNvPr id="23" name="TextBox 22"/>
+          <p:cNvSpPr txBox="1"/>
+          <p:nvPr/>
+        </p:nvSpPr>
+        <p:spPr>
+          <a:xfrm>
+            <a:off x="3291840" y="5276088"/>
+            <a:ext cx="2377440" cy="274320"/>
+          </a:xfrm>
+          <a:prstGeom prst="rect">
+            <a:avLst/>
+          </a:prstGeom>
+          <a:noFill/>
+        </p:spPr>
+        <p:txBody>
+          <a:bodyPr wrap="square">
+            <a:spAutoFit/>
+          </a:bodyPr>
+          <a:lstStyle/>
+          <a:p>
+            <a:pPr algn="l"/>
+            <a:r>
+              <a:rPr sz="1300" b="0" i="0">
+                <a:solidFill>
+                  <a:srgbClr val="5A6B7D"/>
+                </a:solidFill>
+                <a:latin typeface="Calibri"/>
+              </a:rPr>
+              <a:t>Postpaid Mobile: 64%</a:t>
+            </a:r>
+          </a:p>
+        </p:txBody>
+      </p:sp>
+      <p:sp>
+        <p:nvSpPr>
+          <p:cNvPr id="24" name="TextBox 23"/>
+          <p:cNvSpPr txBox="1"/>
+          <p:nvPr/>
+        </p:nvSpPr>
+        <p:spPr>
+          <a:xfrm>
+            <a:off x="594360" y="6473952"/>
+            <a:ext cx="9144000" cy="320040"/>
+          </a:xfrm>
+          <a:prstGeom prst="rect">
+            <a:avLst/>
+          </a:prstGeom>
+          <a:noFill/>
+        </p:spPr>
+        <p:txBody>
+          <a:bodyPr wrap="square">
+            <a:spAutoFit/>
+          </a:bodyPr>
+          <a:lstStyle/>
+          <a:p>
+            <a:pPr algn="l"/>
+            <a:r>
+              <a:rPr sz="1000" b="0" i="0">
+                <a:solidFill>
+                  <a:srgbClr val="5A6B7D"/>
+                </a:solidFill>
+                <a:latin typeface="Calibri"/>
+              </a:rPr>
               <a:t>Demand Forecasting &amp; Staffing</a:t>
+            </a:r>
+          </a:p>
+        </p:txBody>
+      </p:sp>
+      <p:sp>
+        <p:nvSpPr>
+          <p:cNvPr id="25" name="TextBox 24"/>
+          <p:cNvSpPr txBox="1"/>
+          <p:nvPr/>
+        </p:nvSpPr>
+        <p:spPr>
+          <a:xfrm>
+            <a:off x="11064240" y="6473952"/>
+            <a:ext cx="822960" cy="320040"/>
+          </a:xfrm>
+          <a:prstGeom prst="rect">
+            <a:avLst/>
+          </a:prstGeom>
+          <a:noFill/>
+        </p:spPr>
+        <p:txBody>
+          <a:bodyPr wrap="square">
+            <a:spAutoFit/>
+          </a:bodyPr>
+          <a:lstStyle/>
+          <a:p>
+            <a:pPr algn="r"/>
+            <a:r>
+              <a:rPr sz="1000" b="0" i="0">
+                <a:solidFill>
+                  <a:srgbClr val="5A6B7D"/>
+                </a:solidFill>
+                <a:latin typeface="Calibri"/>
+              </a:rPr>
+              <a:t>03 / 06</a:t>
             </a:r>
           </a:p>
         </p:txBody>
@@ -3833,14 +5290,69 @@
       </p:sp>
       <p:sp>
         <p:nvSpPr>
-          <p:cNvPr id="3" name="TextBox 2"/>
+          <p:cNvPr id="3" name="Rounded Rectangle 2"/>
+          <p:cNvSpPr/>
+          <p:nvPr/>
+        </p:nvSpPr>
+        <p:spPr>
+          <a:xfrm>
+            <a:off x="594360" y="365760"/>
+            <a:ext cx="1737360" cy="292608"/>
+          </a:xfrm>
+          <a:prstGeom prst="roundRect">
+            <a:avLst/>
+          </a:prstGeom>
+          <a:solidFill>
+            <a:srgbClr val="F5F7FA"/>
+          </a:solidFill>
+          <a:ln w="12700">
+            <a:solidFill>
+              <a:srgbClr val="2EC4B6"/>
+            </a:solidFill>
+          </a:ln>
+          <a:effectLst/>
+        </p:spPr>
+        <p:style>
+          <a:lnRef idx="1">
+            <a:schemeClr val="accent1"/>
+          </a:lnRef>
+          <a:fillRef idx="3">
+            <a:schemeClr val="accent1"/>
+          </a:fillRef>
+          <a:effectRef idx="2">
+            <a:schemeClr val="accent1"/>
+          </a:effectRef>
+          <a:fontRef idx="minor">
+            <a:schemeClr val="lt1"/>
+          </a:fontRef>
+        </p:style>
+        <p:txBody>
+          <a:bodyPr rtlCol="0" anchor="ctr" wrap="none" lIns="0" rIns="0"/>
+          <a:lstStyle/>
+          <a:p>
+            <a:pPr algn="ctr"/>
+            <a:r>
+              <a:rPr sz="1100" b="1">
+                <a:solidFill>
+                  <a:srgbClr val="1F9A8F"/>
+                </a:solidFill>
+                <a:latin typeface="Calibri"/>
+              </a:rPr>
+              <a:t>METHOD</a:t>
+            </a:r>
+          </a:p>
+        </p:txBody>
+      </p:sp>
+      <p:sp>
+        <p:nvSpPr>
+          <p:cNvPr id="4" name="TextBox 3"/>
           <p:cNvSpPr txBox="1"/>
           <p:nvPr/>
         </p:nvSpPr>
         <p:spPr>
           <a:xfrm>
-            <a:off x="594360" y="365760"/>
-            <a:ext cx="9144000" cy="365760"/>
+            <a:off x="594360" y="786384"/>
+            <a:ext cx="10972800" cy="822960"/>
           </a:xfrm>
           <a:prstGeom prst="rect">
             <a:avLst/>
@@ -3855,27 +5367,115 @@
           <a:p>
             <a:pPr algn="l"/>
             <a:r>
-              <a:rPr sz="1300" b="1">
-                <a:solidFill>
-                  <a:srgbClr val="2EC4B6"/>
-                </a:solidFill>
-                <a:latin typeface="Calibri"/>
-              </a:rPr>
-              <a:t>METHOD</a:t>
-            </a:r>
-          </a:p>
-        </p:txBody>
-      </p:sp>
-      <p:sp>
-        <p:nvSpPr>
-          <p:cNvPr id="4" name="TextBox 3"/>
+              <a:rPr sz="3000" b="1" i="0">
+                <a:solidFill>
+                  <a:srgbClr val="1B2A4A"/>
+                </a:solidFill>
+                <a:latin typeface="Calibri"/>
+              </a:rPr>
+              <a:t>Approach &amp; Expected Output</a:t>
+            </a:r>
+          </a:p>
+        </p:txBody>
+      </p:sp>
+      <p:cxnSp>
+        <p:nvCxnSpPr>
+          <p:cNvPr id="5" name="Connector 4"/>
+          <p:cNvCxnSpPr/>
+          <p:nvPr/>
+        </p:nvCxnSpPr>
+        <p:spPr>
+          <a:xfrm>
+            <a:off x="708660.0" y="1851660.0"/>
+            <a:ext cx="10744200.0" cy="0.0"/>
+          </a:xfrm>
+          <a:prstGeom prst="line">
+            <a:avLst/>
+          </a:prstGeom>
+          <a:ln w="25400">
+            <a:solidFill>
+              <a:srgbClr val="DDE2E8"/>
+            </a:solidFill>
+          </a:ln>
+        </p:spPr>
+        <p:style>
+          <a:lnRef idx="2">
+            <a:schemeClr val="accent1"/>
+          </a:lnRef>
+          <a:fillRef idx="0">
+            <a:schemeClr val="accent1"/>
+          </a:fillRef>
+          <a:effectRef idx="1">
+            <a:schemeClr val="accent1"/>
+          </a:effectRef>
+          <a:fontRef idx="minor">
+            <a:schemeClr val="tx1"/>
+          </a:fontRef>
+        </p:style>
+      </p:cxnSp>
+      <p:sp>
+        <p:nvSpPr>
+          <p:cNvPr id="6" name="Oval 5"/>
+          <p:cNvSpPr/>
+          <p:nvPr/>
+        </p:nvSpPr>
+        <p:spPr>
+          <a:xfrm>
+            <a:off x="1330452" y="1600200"/>
+            <a:ext cx="502920" cy="502920"/>
+          </a:xfrm>
+          <a:prstGeom prst="ellipse">
+            <a:avLst/>
+          </a:prstGeom>
+          <a:solidFill>
+            <a:srgbClr val="2EC4B6"/>
+          </a:solidFill>
+          <a:ln>
+            <a:noFill/>
+          </a:ln>
+          <a:effectLst/>
+        </p:spPr>
+        <p:style>
+          <a:lnRef idx="1">
+            <a:schemeClr val="accent1"/>
+          </a:lnRef>
+          <a:fillRef idx="3">
+            <a:schemeClr val="accent1"/>
+          </a:fillRef>
+          <a:effectRef idx="2">
+            <a:schemeClr val="accent1"/>
+          </a:effectRef>
+          <a:fontRef idx="minor">
+            <a:schemeClr val="lt1"/>
+          </a:fontRef>
+        </p:style>
+        <p:txBody>
+          <a:bodyPr rtlCol="0" anchor="ctr"/>
+          <a:lstStyle/>
+          <a:p>
+            <a:pPr algn="ctr"/>
+            <a:r>
+              <a:rPr sz="1800" b="1">
+                <a:solidFill>
+                  <a:srgbClr val="FFFFFF"/>
+                </a:solidFill>
+                <a:latin typeface="Calibri"/>
+              </a:rPr>
+              <a:t>1</a:t>
+            </a:r>
+          </a:p>
+        </p:txBody>
+      </p:sp>
+      <p:sp>
+        <p:nvSpPr>
+          <p:cNvPr id="7" name="TextBox 6"/>
           <p:cNvSpPr txBox="1"/>
           <p:nvPr/>
         </p:nvSpPr>
         <p:spPr>
           <a:xfrm>
-            <a:off x="594360" y="713232"/>
-            <a:ext cx="10972800" cy="822960"/>
+            <a:off x="457200" y="2240280"/>
+            <a:ext cx="2249424" cy="365760"/>
           </a:xfrm>
           <a:prstGeom prst="rect">
             <a:avLst/>
@@ -3888,29 +5488,29 @@
           </a:bodyPr>
           <a:lstStyle/>
           <a:p>
-            <a:pPr algn="l"/>
-            <a:r>
-              <a:rPr sz="3000" b="1">
+            <a:pPr algn="ctr"/>
+            <a:r>
+              <a:rPr sz="1450" b="1" i="0">
                 <a:solidFill>
                   <a:srgbClr val="1B2A4A"/>
                 </a:solidFill>
                 <a:latin typeface="Calibri"/>
               </a:rPr>
-              <a:t>Approach &amp; Expected Output</a:t>
-            </a:r>
-          </a:p>
-        </p:txBody>
-      </p:sp>
-      <p:sp>
-        <p:nvSpPr>
-          <p:cNvPr id="5" name="TextBox 4"/>
+              <a:t>1. Explore first</a:t>
+            </a:r>
+          </a:p>
+        </p:txBody>
+      </p:sp>
+      <p:sp>
+        <p:nvSpPr>
+          <p:cNvPr id="8" name="TextBox 7"/>
           <p:cNvSpPr txBox="1"/>
           <p:nvPr/>
         </p:nvSpPr>
         <p:spPr>
           <a:xfrm>
-            <a:off x="594360" y="1463040"/>
-            <a:ext cx="10789920" cy="4114800"/>
+            <a:off x="457200" y="2633472"/>
+            <a:ext cx="2249424" cy="1371600"/>
           </a:xfrm>
           <a:prstGeom prst="rect">
             <a:avLst/>
@@ -3923,97 +5523,82 @@
           </a:bodyPr>
           <a:lstStyle/>
           <a:p>
-            <a:pPr>
-              <a:spcAft>
-                <a:spcPts val="1600"/>
-              </a:spcAft>
-            </a:pPr>
-            <a:r>
-              <a:rPr sz="1800">
-                <a:solidFill>
-                  <a:srgbClr val="202633"/>
-                </a:solidFill>
-                <a:latin typeface="Calibri"/>
-              </a:rPr>
-              <a:t>●   Explore the data first: decompose trend, weekly and yearly seasonality before touching any model</a:t>
-            </a:r>
-          </a:p>
-          <a:p>
-            <a:pPr>
-              <a:spcAft>
-                <a:spcPts val="1600"/>
-              </a:spcAft>
-            </a:pPr>
-            <a:r>
-              <a:rPr sz="1800">
-                <a:solidFill>
-                  <a:srgbClr val="202633"/>
-                </a:solidFill>
-                <a:latin typeface="Calibri"/>
-              </a:rPr>
-              <a:t>●   Benchmark every candidate model against a naive seasonal baseline on a held-out test window - a model only ships if it genuinely beats the simple approach</a:t>
-            </a:r>
-          </a:p>
-          <a:p>
-            <a:pPr>
-              <a:spcAft>
-                <a:spcPts val="1600"/>
-              </a:spcAft>
-            </a:pPr>
-            <a:r>
-              <a:rPr sz="1800">
-                <a:solidFill>
-                  <a:srgbClr val="202633"/>
-                </a:solidFill>
-                <a:latin typeface="Calibri"/>
-              </a:rPr>
-              <a:t>●   Holt-Winters exponential smoothing - a lightweight, explainable model, not a black box - forecasts volume forward</a:t>
-            </a:r>
-          </a:p>
-          <a:p>
-            <a:pPr>
-              <a:spcAft>
-                <a:spcPts val="1600"/>
-              </a:spcAft>
-            </a:pPr>
-            <a:r>
-              <a:rPr sz="1800">
-                <a:solidFill>
-                  <a:srgbClr val="202633"/>
-                </a:solidFill>
-                <a:latin typeface="Calibri"/>
-              </a:rPr>
-              <a:t>●   Convert volume into required FTE using handle time and the roster's REAL shrinkage rate (not a flat textbook assumption), then compare to available FTE</a:t>
-            </a:r>
-          </a:p>
-          <a:p>
-            <a:pPr>
-              <a:spcAft>
-                <a:spcPts val="1600"/>
-              </a:spcAft>
-            </a:pPr>
-            <a:r>
-              <a:rPr sz="1800">
-                <a:solidFill>
-                  <a:srgbClr val="202633"/>
-                </a:solidFill>
-                <a:latin typeface="Calibri"/>
-              </a:rPr>
-              <a:t>●   Expected output: one Excel workbook (date-level forecast, model accuracy evidence, weekly/monthly rollups, charts) plus a Power BI staffing-gap report</a:t>
-            </a:r>
-          </a:p>
-        </p:txBody>
-      </p:sp>
-      <p:sp>
-        <p:nvSpPr>
-          <p:cNvPr id="6" name="TextBox 5"/>
+            <a:pPr algn="ctr"/>
+            <a:r>
+              <a:rPr sz="1200" b="0" i="0">
+                <a:solidFill>
+                  <a:srgbClr val="5A6B7D"/>
+                </a:solidFill>
+                <a:latin typeface="Calibri"/>
+              </a:rPr>
+              <a:t>Decompose trend, weekly and yearly seasonality before touching any model.</a:t>
+            </a:r>
+          </a:p>
+        </p:txBody>
+      </p:sp>
+      <p:sp>
+        <p:nvSpPr>
+          <p:cNvPr id="9" name="Oval 8"/>
+          <p:cNvSpPr/>
+          <p:nvPr/>
+        </p:nvSpPr>
+        <p:spPr>
+          <a:xfrm>
+            <a:off x="3579876" y="1600200"/>
+            <a:ext cx="502920" cy="502920"/>
+          </a:xfrm>
+          <a:prstGeom prst="ellipse">
+            <a:avLst/>
+          </a:prstGeom>
+          <a:solidFill>
+            <a:srgbClr val="2EC4B6"/>
+          </a:solidFill>
+          <a:ln>
+            <a:noFill/>
+          </a:ln>
+          <a:effectLst/>
+        </p:spPr>
+        <p:style>
+          <a:lnRef idx="1">
+            <a:schemeClr val="accent1"/>
+          </a:lnRef>
+          <a:fillRef idx="3">
+            <a:schemeClr val="accent1"/>
+          </a:fillRef>
+          <a:effectRef idx="2">
+            <a:schemeClr val="accent1"/>
+          </a:effectRef>
+          <a:fontRef idx="minor">
+            <a:schemeClr val="lt1"/>
+          </a:fontRef>
+        </p:style>
+        <p:txBody>
+          <a:bodyPr rtlCol="0" anchor="ctr"/>
+          <a:lstStyle/>
+          <a:p>
+            <a:pPr algn="ctr"/>
+            <a:r>
+              <a:rPr sz="1800" b="1">
+                <a:solidFill>
+                  <a:srgbClr val="FFFFFF"/>
+                </a:solidFill>
+                <a:latin typeface="Calibri"/>
+              </a:rPr>
+              <a:t>2</a:t>
+            </a:r>
+          </a:p>
+        </p:txBody>
+      </p:sp>
+      <p:sp>
+        <p:nvSpPr>
+          <p:cNvPr id="10" name="TextBox 9"/>
           <p:cNvSpPr txBox="1"/>
           <p:nvPr/>
         </p:nvSpPr>
         <p:spPr>
           <a:xfrm>
-            <a:off x="594360" y="6446520"/>
-            <a:ext cx="9144000" cy="320040"/>
+            <a:off x="2706624" y="2240280"/>
+            <a:ext cx="2249424" cy="365760"/>
           </a:xfrm>
           <a:prstGeom prst="rect">
             <a:avLst/>
@@ -4026,15 +5611,489 @@
           </a:bodyPr>
           <a:lstStyle/>
           <a:p>
+            <a:pPr algn="ctr"/>
+            <a:r>
+              <a:rPr sz="1450" b="1" i="0">
+                <a:solidFill>
+                  <a:srgbClr val="1B2A4A"/>
+                </a:solidFill>
+                <a:latin typeface="Calibri"/>
+              </a:rPr>
+              <a:t>2. Benchmark honestly</a:t>
+            </a:r>
+          </a:p>
+        </p:txBody>
+      </p:sp>
+      <p:sp>
+        <p:nvSpPr>
+          <p:cNvPr id="11" name="TextBox 10"/>
+          <p:cNvSpPr txBox="1"/>
+          <p:nvPr/>
+        </p:nvSpPr>
+        <p:spPr>
+          <a:xfrm>
+            <a:off x="2706624" y="2633472"/>
+            <a:ext cx="2249424" cy="1371600"/>
+          </a:xfrm>
+          <a:prstGeom prst="rect">
+            <a:avLst/>
+          </a:prstGeom>
+          <a:noFill/>
+        </p:spPr>
+        <p:txBody>
+          <a:bodyPr wrap="square">
+            <a:spAutoFit/>
+          </a:bodyPr>
+          <a:lstStyle/>
+          <a:p>
+            <a:pPr algn="ctr"/>
+            <a:r>
+              <a:rPr sz="1200" b="0" i="0">
+                <a:solidFill>
+                  <a:srgbClr val="5A6B7D"/>
+                </a:solidFill>
+                <a:latin typeface="Calibri"/>
+              </a:rPr>
+              <a:t>Every candidate is tested against a naive seasonal baseline on a held-out window - it only ships if it genuinely wins.</a:t>
+            </a:r>
+          </a:p>
+        </p:txBody>
+      </p:sp>
+      <p:sp>
+        <p:nvSpPr>
+          <p:cNvPr id="12" name="Oval 11"/>
+          <p:cNvSpPr/>
+          <p:nvPr/>
+        </p:nvSpPr>
+        <p:spPr>
+          <a:xfrm>
+            <a:off x="5829300" y="1600200"/>
+            <a:ext cx="502920" cy="502920"/>
+          </a:xfrm>
+          <a:prstGeom prst="ellipse">
+            <a:avLst/>
+          </a:prstGeom>
+          <a:solidFill>
+            <a:srgbClr val="2EC4B6"/>
+          </a:solidFill>
+          <a:ln>
+            <a:noFill/>
+          </a:ln>
+          <a:effectLst/>
+        </p:spPr>
+        <p:style>
+          <a:lnRef idx="1">
+            <a:schemeClr val="accent1"/>
+          </a:lnRef>
+          <a:fillRef idx="3">
+            <a:schemeClr val="accent1"/>
+          </a:fillRef>
+          <a:effectRef idx="2">
+            <a:schemeClr val="accent1"/>
+          </a:effectRef>
+          <a:fontRef idx="minor">
+            <a:schemeClr val="lt1"/>
+          </a:fontRef>
+        </p:style>
+        <p:txBody>
+          <a:bodyPr rtlCol="0" anchor="ctr"/>
+          <a:lstStyle/>
+          <a:p>
+            <a:pPr algn="ctr"/>
+            <a:r>
+              <a:rPr sz="1800" b="1">
+                <a:solidFill>
+                  <a:srgbClr val="FFFFFF"/>
+                </a:solidFill>
+                <a:latin typeface="Calibri"/>
+              </a:rPr>
+              <a:t>3</a:t>
+            </a:r>
+          </a:p>
+        </p:txBody>
+      </p:sp>
+      <p:sp>
+        <p:nvSpPr>
+          <p:cNvPr id="13" name="TextBox 12"/>
+          <p:cNvSpPr txBox="1"/>
+          <p:nvPr/>
+        </p:nvSpPr>
+        <p:spPr>
+          <a:xfrm>
+            <a:off x="4956048" y="2240280"/>
+            <a:ext cx="2249424" cy="365760"/>
+          </a:xfrm>
+          <a:prstGeom prst="rect">
+            <a:avLst/>
+          </a:prstGeom>
+          <a:noFill/>
+        </p:spPr>
+        <p:txBody>
+          <a:bodyPr wrap="square">
+            <a:spAutoFit/>
+          </a:bodyPr>
+          <a:lstStyle/>
+          <a:p>
+            <a:pPr algn="ctr"/>
+            <a:r>
+              <a:rPr sz="1450" b="1" i="0">
+                <a:solidFill>
+                  <a:srgbClr val="1B2A4A"/>
+                </a:solidFill>
+                <a:latin typeface="Calibri"/>
+              </a:rPr>
+              <a:t>3. Holt-Winters</a:t>
+            </a:r>
+          </a:p>
+        </p:txBody>
+      </p:sp>
+      <p:sp>
+        <p:nvSpPr>
+          <p:cNvPr id="14" name="TextBox 13"/>
+          <p:cNvSpPr txBox="1"/>
+          <p:nvPr/>
+        </p:nvSpPr>
+        <p:spPr>
+          <a:xfrm>
+            <a:off x="4956048" y="2633472"/>
+            <a:ext cx="2249424" cy="1371600"/>
+          </a:xfrm>
+          <a:prstGeom prst="rect">
+            <a:avLst/>
+          </a:prstGeom>
+          <a:noFill/>
+        </p:spPr>
+        <p:txBody>
+          <a:bodyPr wrap="square">
+            <a:spAutoFit/>
+          </a:bodyPr>
+          <a:lstStyle/>
+          <a:p>
+            <a:pPr algn="ctr"/>
+            <a:r>
+              <a:rPr sz="1200" b="0" i="0">
+                <a:solidFill>
+                  <a:srgbClr val="5A6B7D"/>
+                </a:solidFill>
+                <a:latin typeface="Calibri"/>
+              </a:rPr>
+              <a:t>A lightweight, explainable exponential-smoothing model - not a black box - forecasts volume forward.</a:t>
+            </a:r>
+          </a:p>
+        </p:txBody>
+      </p:sp>
+      <p:sp>
+        <p:nvSpPr>
+          <p:cNvPr id="15" name="Oval 14"/>
+          <p:cNvSpPr/>
+          <p:nvPr/>
+        </p:nvSpPr>
+        <p:spPr>
+          <a:xfrm>
+            <a:off x="8078724" y="1600200"/>
+            <a:ext cx="502920" cy="502920"/>
+          </a:xfrm>
+          <a:prstGeom prst="ellipse">
+            <a:avLst/>
+          </a:prstGeom>
+          <a:solidFill>
+            <a:srgbClr val="2EC4B6"/>
+          </a:solidFill>
+          <a:ln>
+            <a:noFill/>
+          </a:ln>
+          <a:effectLst/>
+        </p:spPr>
+        <p:style>
+          <a:lnRef idx="1">
+            <a:schemeClr val="accent1"/>
+          </a:lnRef>
+          <a:fillRef idx="3">
+            <a:schemeClr val="accent1"/>
+          </a:fillRef>
+          <a:effectRef idx="2">
+            <a:schemeClr val="accent1"/>
+          </a:effectRef>
+          <a:fontRef idx="minor">
+            <a:schemeClr val="lt1"/>
+          </a:fontRef>
+        </p:style>
+        <p:txBody>
+          <a:bodyPr rtlCol="0" anchor="ctr"/>
+          <a:lstStyle/>
+          <a:p>
+            <a:pPr algn="ctr"/>
+            <a:r>
+              <a:rPr sz="1800" b="1">
+                <a:solidFill>
+                  <a:srgbClr val="FFFFFF"/>
+                </a:solidFill>
+                <a:latin typeface="Calibri"/>
+              </a:rPr>
+              <a:t>4</a:t>
+            </a:r>
+          </a:p>
+        </p:txBody>
+      </p:sp>
+      <p:sp>
+        <p:nvSpPr>
+          <p:cNvPr id="16" name="TextBox 15"/>
+          <p:cNvSpPr txBox="1"/>
+          <p:nvPr/>
+        </p:nvSpPr>
+        <p:spPr>
+          <a:xfrm>
+            <a:off x="7205472" y="2240280"/>
+            <a:ext cx="2249424" cy="365760"/>
+          </a:xfrm>
+          <a:prstGeom prst="rect">
+            <a:avLst/>
+          </a:prstGeom>
+          <a:noFill/>
+        </p:spPr>
+        <p:txBody>
+          <a:bodyPr wrap="square">
+            <a:spAutoFit/>
+          </a:bodyPr>
+          <a:lstStyle/>
+          <a:p>
+            <a:pPr algn="ctr"/>
+            <a:r>
+              <a:rPr sz="1450" b="1" i="0">
+                <a:solidFill>
+                  <a:srgbClr val="1B2A4A"/>
+                </a:solidFill>
+                <a:latin typeface="Calibri"/>
+              </a:rPr>
+              <a:t>4. Volume -&gt; FTE</a:t>
+            </a:r>
+          </a:p>
+        </p:txBody>
+      </p:sp>
+      <p:sp>
+        <p:nvSpPr>
+          <p:cNvPr id="17" name="TextBox 16"/>
+          <p:cNvSpPr txBox="1"/>
+          <p:nvPr/>
+        </p:nvSpPr>
+        <p:spPr>
+          <a:xfrm>
+            <a:off x="7205472" y="2633472"/>
+            <a:ext cx="2249424" cy="1371600"/>
+          </a:xfrm>
+          <a:prstGeom prst="rect">
+            <a:avLst/>
+          </a:prstGeom>
+          <a:noFill/>
+        </p:spPr>
+        <p:txBody>
+          <a:bodyPr wrap="square">
+            <a:spAutoFit/>
+          </a:bodyPr>
+          <a:lstStyle/>
+          <a:p>
+            <a:pPr algn="ctr"/>
+            <a:r>
+              <a:rPr sz="1200" b="0" i="0">
+                <a:solidFill>
+                  <a:srgbClr val="5A6B7D"/>
+                </a:solidFill>
+                <a:latin typeface="Calibri"/>
+              </a:rPr>
+              <a:t>Convert volume to required FTE using handle time and the roster's REAL shrinkage rate, then compare to available FTE.</a:t>
+            </a:r>
+          </a:p>
+        </p:txBody>
+      </p:sp>
+      <p:sp>
+        <p:nvSpPr>
+          <p:cNvPr id="18" name="Oval 17"/>
+          <p:cNvSpPr/>
+          <p:nvPr/>
+        </p:nvSpPr>
+        <p:spPr>
+          <a:xfrm>
+            <a:off x="10328148" y="1600200"/>
+            <a:ext cx="502920" cy="502920"/>
+          </a:xfrm>
+          <a:prstGeom prst="ellipse">
+            <a:avLst/>
+          </a:prstGeom>
+          <a:solidFill>
+            <a:srgbClr val="2EC4B6"/>
+          </a:solidFill>
+          <a:ln>
+            <a:noFill/>
+          </a:ln>
+          <a:effectLst/>
+        </p:spPr>
+        <p:style>
+          <a:lnRef idx="1">
+            <a:schemeClr val="accent1"/>
+          </a:lnRef>
+          <a:fillRef idx="3">
+            <a:schemeClr val="accent1"/>
+          </a:fillRef>
+          <a:effectRef idx="2">
+            <a:schemeClr val="accent1"/>
+          </a:effectRef>
+          <a:fontRef idx="minor">
+            <a:schemeClr val="lt1"/>
+          </a:fontRef>
+        </p:style>
+        <p:txBody>
+          <a:bodyPr rtlCol="0" anchor="ctr"/>
+          <a:lstStyle/>
+          <a:p>
+            <a:pPr algn="ctr"/>
+            <a:r>
+              <a:rPr sz="1800" b="1">
+                <a:solidFill>
+                  <a:srgbClr val="FFFFFF"/>
+                </a:solidFill>
+                <a:latin typeface="Calibri"/>
+              </a:rPr>
+              <a:t>5</a:t>
+            </a:r>
+          </a:p>
+        </p:txBody>
+      </p:sp>
+      <p:sp>
+        <p:nvSpPr>
+          <p:cNvPr id="19" name="TextBox 18"/>
+          <p:cNvSpPr txBox="1"/>
+          <p:nvPr/>
+        </p:nvSpPr>
+        <p:spPr>
+          <a:xfrm>
+            <a:off x="9454896" y="2240280"/>
+            <a:ext cx="2249424" cy="365760"/>
+          </a:xfrm>
+          <a:prstGeom prst="rect">
+            <a:avLst/>
+          </a:prstGeom>
+          <a:noFill/>
+        </p:spPr>
+        <p:txBody>
+          <a:bodyPr wrap="square">
+            <a:spAutoFit/>
+          </a:bodyPr>
+          <a:lstStyle/>
+          <a:p>
+            <a:pPr algn="ctr"/>
+            <a:r>
+              <a:rPr sz="1450" b="1" i="0">
+                <a:solidFill>
+                  <a:srgbClr val="1B2A4A"/>
+                </a:solidFill>
+                <a:latin typeface="Calibri"/>
+              </a:rPr>
+              <a:t>5. Publish</a:t>
+            </a:r>
+          </a:p>
+        </p:txBody>
+      </p:sp>
+      <p:sp>
+        <p:nvSpPr>
+          <p:cNvPr id="20" name="TextBox 19"/>
+          <p:cNvSpPr txBox="1"/>
+          <p:nvPr/>
+        </p:nvSpPr>
+        <p:spPr>
+          <a:xfrm>
+            <a:off x="9454896" y="2633472"/>
+            <a:ext cx="2249424" cy="1371600"/>
+          </a:xfrm>
+          <a:prstGeom prst="rect">
+            <a:avLst/>
+          </a:prstGeom>
+          <a:noFill/>
+        </p:spPr>
+        <p:txBody>
+          <a:bodyPr wrap="square">
+            <a:spAutoFit/>
+          </a:bodyPr>
+          <a:lstStyle/>
+          <a:p>
+            <a:pPr algn="ctr"/>
+            <a:r>
+              <a:rPr sz="1200" b="0" i="0">
+                <a:solidFill>
+                  <a:srgbClr val="5A6B7D"/>
+                </a:solidFill>
+                <a:latin typeface="Calibri"/>
+              </a:rPr>
+              <a:t>One Excel workbook (forecast, model evidence, rollups, charts) plus a Power BI staffing-gap report.</a:t>
+            </a:r>
+          </a:p>
+        </p:txBody>
+      </p:sp>
+      <p:sp>
+        <p:nvSpPr>
+          <p:cNvPr id="21" name="TextBox 20"/>
+          <p:cNvSpPr txBox="1"/>
+          <p:nvPr/>
+        </p:nvSpPr>
+        <p:spPr>
+          <a:xfrm>
+            <a:off x="594360" y="6473952"/>
+            <a:ext cx="9144000" cy="320040"/>
+          </a:xfrm>
+          <a:prstGeom prst="rect">
+            <a:avLst/>
+          </a:prstGeom>
+          <a:noFill/>
+        </p:spPr>
+        <p:txBody>
+          <a:bodyPr wrap="square">
+            <a:spAutoFit/>
+          </a:bodyPr>
+          <a:lstStyle/>
+          <a:p>
             <a:pPr algn="l"/>
             <a:r>
-              <a:rPr sz="1000" b="0">
+              <a:rPr sz="1000" b="0" i="0">
                 <a:solidFill>
                   <a:srgbClr val="5A6B7D"/>
                 </a:solidFill>
                 <a:latin typeface="Calibri"/>
               </a:rPr>
               <a:t>Demand Forecasting &amp; Staffing</a:t>
+            </a:r>
+          </a:p>
+        </p:txBody>
+      </p:sp>
+      <p:sp>
+        <p:nvSpPr>
+          <p:cNvPr id="22" name="TextBox 21"/>
+          <p:cNvSpPr txBox="1"/>
+          <p:nvPr/>
+        </p:nvSpPr>
+        <p:spPr>
+          <a:xfrm>
+            <a:off x="11064240" y="6473952"/>
+            <a:ext cx="822960" cy="320040"/>
+          </a:xfrm>
+          <a:prstGeom prst="rect">
+            <a:avLst/>
+          </a:prstGeom>
+          <a:noFill/>
+        </p:spPr>
+        <p:txBody>
+          <a:bodyPr wrap="square">
+            <a:spAutoFit/>
+          </a:bodyPr>
+          <a:lstStyle/>
+          <a:p>
+            <a:pPr algn="r"/>
+            <a:r>
+              <a:rPr sz="1000" b="0" i="0">
+                <a:solidFill>
+                  <a:srgbClr val="5A6B7D"/>
+                </a:solidFill>
+                <a:latin typeface="Calibri"/>
+              </a:rPr>
+              <a:t>04 / 06</a:t>
             </a:r>
           </a:p>
         </p:txBody>
@@ -4111,84 +6170,14 @@
       </p:sp>
       <p:sp>
         <p:nvSpPr>
-          <p:cNvPr id="3" name="TextBox 2"/>
-          <p:cNvSpPr txBox="1"/>
+          <p:cNvPr id="3" name="Rounded Rectangle 2"/>
+          <p:cNvSpPr/>
           <p:nvPr/>
         </p:nvSpPr>
         <p:spPr>
           <a:xfrm>
             <a:off x="594360" y="365760"/>
-            <a:ext cx="9144000" cy="365760"/>
-          </a:xfrm>
-          <a:prstGeom prst="rect">
-            <a:avLst/>
-          </a:prstGeom>
-          <a:noFill/>
-        </p:spPr>
-        <p:txBody>
-          <a:bodyPr wrap="square">
-            <a:spAutoFit/>
-          </a:bodyPr>
-          <a:lstStyle/>
-          <a:p>
-            <a:pPr algn="l"/>
-            <a:r>
-              <a:rPr sz="1300" b="1">
-                <a:solidFill>
-                  <a:srgbClr val="2EC4B6"/>
-                </a:solidFill>
-                <a:latin typeface="Calibri"/>
-              </a:rPr>
-              <a:t>RESULTS</a:t>
-            </a:r>
-          </a:p>
-        </p:txBody>
-      </p:sp>
-      <p:sp>
-        <p:nvSpPr>
-          <p:cNvPr id="4" name="TextBox 3"/>
-          <p:cNvSpPr txBox="1"/>
-          <p:nvPr/>
-        </p:nvSpPr>
-        <p:spPr>
-          <a:xfrm>
-            <a:off x="594360" y="713232"/>
-            <a:ext cx="10972800" cy="822960"/>
-          </a:xfrm>
-          <a:prstGeom prst="rect">
-            <a:avLst/>
-          </a:prstGeom>
-          <a:noFill/>
-        </p:spPr>
-        <p:txBody>
-          <a:bodyPr wrap="square">
-            <a:spAutoFit/>
-          </a:bodyPr>
-          <a:lstStyle/>
-          <a:p>
-            <a:pPr algn="l"/>
-            <a:r>
-              <a:rPr sz="3000" b="1">
-                <a:solidFill>
-                  <a:srgbClr val="1B2A4A"/>
-                </a:solidFill>
-                <a:latin typeface="Calibri"/>
-              </a:rPr>
-              <a:t>Key Outcomes</a:t>
-            </a:r>
-          </a:p>
-        </p:txBody>
-      </p:sp>
-      <p:sp>
-        <p:nvSpPr>
-          <p:cNvPr id="5" name="Rounded Rectangle 4"/>
-          <p:cNvSpPr/>
-          <p:nvPr/>
-        </p:nvSpPr>
-        <p:spPr>
-          <a:xfrm>
-            <a:off x="594360" y="1554480"/>
-            <a:ext cx="2514600" cy="1554480"/>
+            <a:ext cx="1737360" cy="292608"/>
           </a:xfrm>
           <a:prstGeom prst="roundRect">
             <a:avLst/>
@@ -4196,7 +6185,7 @@
           <a:solidFill>
             <a:srgbClr val="F5F7FA"/>
           </a:solidFill>
-          <a:ln w="19050">
+          <a:ln w="12700">
             <a:solidFill>
               <a:srgbClr val="2EC4B6"/>
             </a:solidFill>
@@ -4218,55 +6207,76 @@
           </a:fontRef>
         </p:style>
         <p:txBody>
-          <a:bodyPr rtlCol="0" anchor="ctr" wrap="square"/>
+          <a:bodyPr rtlCol="0" anchor="ctr" wrap="none" lIns="0" rIns="0"/>
           <a:lstStyle/>
           <a:p>
             <a:pPr algn="ctr"/>
             <a:r>
-              <a:rPr sz="3000" b="1">
-                <a:solidFill>
-                  <a:srgbClr val="2EC4B6"/>
-                </a:solidFill>
-                <a:latin typeface="Calibri"/>
-              </a:rPr>
-              <a:t>18.8%</a:t>
-            </a:r>
-          </a:p>
-          <a:p>
-            <a:pPr algn="ctr"/>
-            <a:r>
-              <a:rPr sz="1200">
-                <a:solidFill>
-                  <a:srgbClr val="5A6B7D"/>
-                </a:solidFill>
-                <a:latin typeface="Calibri"/>
-              </a:rPr>
-              <a:t>Holdout MAPE (vs 20.1% baseline)</a:t>
-            </a:r>
-          </a:p>
-        </p:txBody>
-      </p:sp>
-      <p:sp>
-        <p:nvSpPr>
-          <p:cNvPr id="6" name="Rounded Rectangle 5"/>
+              <a:rPr sz="1100" b="1">
+                <a:solidFill>
+                  <a:srgbClr val="1F9A8F"/>
+                </a:solidFill>
+                <a:latin typeface="Calibri"/>
+              </a:rPr>
+              <a:t>RESULTS</a:t>
+            </a:r>
+          </a:p>
+        </p:txBody>
+      </p:sp>
+      <p:sp>
+        <p:nvSpPr>
+          <p:cNvPr id="4" name="TextBox 3"/>
+          <p:cNvSpPr txBox="1"/>
+          <p:nvPr/>
+        </p:nvSpPr>
+        <p:spPr>
+          <a:xfrm>
+            <a:off x="594360" y="786384"/>
+            <a:ext cx="10972800" cy="822960"/>
+          </a:xfrm>
+          <a:prstGeom prst="rect">
+            <a:avLst/>
+          </a:prstGeom>
+          <a:noFill/>
+        </p:spPr>
+        <p:txBody>
+          <a:bodyPr wrap="square">
+            <a:spAutoFit/>
+          </a:bodyPr>
+          <a:lstStyle/>
+          <a:p>
+            <a:pPr algn="l"/>
+            <a:r>
+              <a:rPr sz="3000" b="1" i="0">
+                <a:solidFill>
+                  <a:srgbClr val="1B2A4A"/>
+                </a:solidFill>
+                <a:latin typeface="Calibri"/>
+              </a:rPr>
+              <a:t>Key Outcomes</a:t>
+            </a:r>
+          </a:p>
+        </p:txBody>
+      </p:sp>
+      <p:sp>
+        <p:nvSpPr>
+          <p:cNvPr id="5" name="Rectangle 4"/>
           <p:cNvSpPr/>
           <p:nvPr/>
         </p:nvSpPr>
         <p:spPr>
           <a:xfrm>
-            <a:off x="3383280" y="1554480"/>
-            <a:ext cx="2514600" cy="1554480"/>
-          </a:xfrm>
-          <a:prstGeom prst="roundRect">
+            <a:off x="594360" y="1463040"/>
+            <a:ext cx="2542032" cy="82296"/>
+          </a:xfrm>
+          <a:prstGeom prst="rect">
             <a:avLst/>
           </a:prstGeom>
           <a:solidFill>
-            <a:srgbClr val="F5F7FA"/>
+            <a:srgbClr val="2EC4B6"/>
           </a:solidFill>
-          <a:ln w="19050">
-            <a:solidFill>
-              <a:srgbClr val="1B2A4A"/>
-            </a:solidFill>
+          <a:ln>
+            <a:noFill/>
           </a:ln>
           <a:effectLst/>
         </p:spPr>
@@ -4285,54 +6295,33 @@
           </a:fontRef>
         </p:style>
         <p:txBody>
-          <a:bodyPr rtlCol="0" anchor="ctr" wrap="square"/>
+          <a:bodyPr rtlCol="0" anchor="ctr"/>
           <a:lstStyle/>
           <a:p>
             <a:pPr algn="ctr"/>
-            <a:r>
-              <a:rPr sz="3000" b="1">
-                <a:solidFill>
-                  <a:srgbClr val="1B2A4A"/>
-                </a:solidFill>
-                <a:latin typeface="Calibri"/>
-              </a:rPr>
-              <a:t>28</a:t>
-            </a:r>
-          </a:p>
-          <a:p>
-            <a:pPr algn="ctr"/>
-            <a:r>
-              <a:rPr sz="1200">
-                <a:solidFill>
-                  <a:srgbClr val="5A6B7D"/>
-                </a:solidFill>
-                <a:latin typeface="Calibri"/>
-              </a:rPr>
-              <a:t>Avg required FTE over the horizon</a:t>
-            </a:r>
-          </a:p>
-        </p:txBody>
-      </p:sp>
-      <p:sp>
-        <p:nvSpPr>
-          <p:cNvPr id="7" name="Rounded Rectangle 6"/>
+          </a:p>
+        </p:txBody>
+      </p:sp>
+      <p:sp>
+        <p:nvSpPr>
+          <p:cNvPr id="6" name="Rectangle 5"/>
           <p:cNvSpPr/>
           <p:nvPr/>
         </p:nvSpPr>
         <p:spPr>
           <a:xfrm>
-            <a:off x="6172200" y="1554480"/>
-            <a:ext cx="2514600" cy="1554480"/>
-          </a:xfrm>
-          <a:prstGeom prst="roundRect">
+            <a:off x="594360" y="1545336"/>
+            <a:ext cx="2542032" cy="1289304"/>
+          </a:xfrm>
+          <a:prstGeom prst="rect">
             <a:avLst/>
           </a:prstGeom>
           <a:solidFill>
             <a:srgbClr val="F5F7FA"/>
           </a:solidFill>
-          <a:ln w="19050">
+          <a:ln w="9525">
             <a:solidFill>
-              <a:srgbClr val="1B2A4A"/>
+              <a:srgbClr val="DDE2E8"/>
             </a:solidFill>
           </a:ln>
           <a:effectLst/>
@@ -4363,7 +6352,7 @@
                 </a:solidFill>
                 <a:latin typeface="Calibri"/>
               </a:rPr>
-              <a:t>25</a:t>
+              <a:t>18.8%</a:t>
             </a:r>
           </a:p>
           <a:p>
@@ -4375,32 +6364,30 @@
                 </a:solidFill>
                 <a:latin typeface="Calibri"/>
               </a:rPr>
-              <a:t>Available FTE (current roster)</a:t>
-            </a:r>
-          </a:p>
-        </p:txBody>
-      </p:sp>
-      <p:sp>
-        <p:nvSpPr>
-          <p:cNvPr id="8" name="Rounded Rectangle 7"/>
+              <a:t>Holdout MAPE (vs 20.1% baseline)</a:t>
+            </a:r>
+          </a:p>
+        </p:txBody>
+      </p:sp>
+      <p:sp>
+        <p:nvSpPr>
+          <p:cNvPr id="7" name="Rectangle 6"/>
           <p:cNvSpPr/>
           <p:nvPr/>
         </p:nvSpPr>
         <p:spPr>
           <a:xfrm>
-            <a:off x="8961120" y="1554480"/>
-            <a:ext cx="2514600" cy="1554480"/>
-          </a:xfrm>
-          <a:prstGeom prst="roundRect">
+            <a:off x="3392424" y="1463040"/>
+            <a:ext cx="2542032" cy="82296"/>
+          </a:xfrm>
+          <a:prstGeom prst="rect">
             <a:avLst/>
           </a:prstGeom>
           <a:solidFill>
-            <a:srgbClr val="F5F7FA"/>
+            <a:srgbClr val="1B2A4A"/>
           </a:solidFill>
-          <a:ln w="19050">
-            <a:solidFill>
-              <a:srgbClr val="E05A47"/>
-            </a:solidFill>
+          <a:ln>
+            <a:noFill/>
           </a:ln>
           <a:effectLst/>
         </p:spPr>
@@ -4419,6 +6406,52 @@
           </a:fontRef>
         </p:style>
         <p:txBody>
+          <a:bodyPr rtlCol="0" anchor="ctr"/>
+          <a:lstStyle/>
+          <a:p>
+            <a:pPr algn="ctr"/>
+          </a:p>
+        </p:txBody>
+      </p:sp>
+      <p:sp>
+        <p:nvSpPr>
+          <p:cNvPr id="8" name="Rectangle 7"/>
+          <p:cNvSpPr/>
+          <p:nvPr/>
+        </p:nvSpPr>
+        <p:spPr>
+          <a:xfrm>
+            <a:off x="3392424" y="1545336"/>
+            <a:ext cx="2542032" cy="1289304"/>
+          </a:xfrm>
+          <a:prstGeom prst="rect">
+            <a:avLst/>
+          </a:prstGeom>
+          <a:solidFill>
+            <a:srgbClr val="F5F7FA"/>
+          </a:solidFill>
+          <a:ln w="9525">
+            <a:solidFill>
+              <a:srgbClr val="DDE2E8"/>
+            </a:solidFill>
+          </a:ln>
+          <a:effectLst/>
+        </p:spPr>
+        <p:style>
+          <a:lnRef idx="1">
+            <a:schemeClr val="accent1"/>
+          </a:lnRef>
+          <a:fillRef idx="3">
+            <a:schemeClr val="accent1"/>
+          </a:fillRef>
+          <a:effectRef idx="2">
+            <a:schemeClr val="accent1"/>
+          </a:effectRef>
+          <a:fontRef idx="minor">
+            <a:schemeClr val="lt1"/>
+          </a:fontRef>
+        </p:style>
+        <p:txBody>
           <a:bodyPr rtlCol="0" anchor="ctr" wrap="square"/>
           <a:lstStyle/>
           <a:p>
@@ -4426,7 +6459,229 @@
             <a:r>
               <a:rPr sz="3000" b="1">
                 <a:solidFill>
-                  <a:srgbClr val="E05A47"/>
+                  <a:srgbClr val="1B2A4A"/>
+                </a:solidFill>
+                <a:latin typeface="Calibri"/>
+              </a:rPr>
+              <a:t>28</a:t>
+            </a:r>
+          </a:p>
+          <a:p>
+            <a:pPr algn="ctr"/>
+            <a:r>
+              <a:rPr sz="1200">
+                <a:solidFill>
+                  <a:srgbClr val="5A6B7D"/>
+                </a:solidFill>
+                <a:latin typeface="Calibri"/>
+              </a:rPr>
+              <a:t>Avg required FTE over the horizon</a:t>
+            </a:r>
+          </a:p>
+        </p:txBody>
+      </p:sp>
+      <p:sp>
+        <p:nvSpPr>
+          <p:cNvPr id="9" name="Rectangle 8"/>
+          <p:cNvSpPr/>
+          <p:nvPr/>
+        </p:nvSpPr>
+        <p:spPr>
+          <a:xfrm>
+            <a:off x="6190488" y="1463040"/>
+            <a:ext cx="2542032" cy="82296"/>
+          </a:xfrm>
+          <a:prstGeom prst="rect">
+            <a:avLst/>
+          </a:prstGeom>
+          <a:solidFill>
+            <a:srgbClr val="1B2A4A"/>
+          </a:solidFill>
+          <a:ln>
+            <a:noFill/>
+          </a:ln>
+          <a:effectLst/>
+        </p:spPr>
+        <p:style>
+          <a:lnRef idx="1">
+            <a:schemeClr val="accent1"/>
+          </a:lnRef>
+          <a:fillRef idx="3">
+            <a:schemeClr val="accent1"/>
+          </a:fillRef>
+          <a:effectRef idx="2">
+            <a:schemeClr val="accent1"/>
+          </a:effectRef>
+          <a:fontRef idx="minor">
+            <a:schemeClr val="lt1"/>
+          </a:fontRef>
+        </p:style>
+        <p:txBody>
+          <a:bodyPr rtlCol="0" anchor="ctr"/>
+          <a:lstStyle/>
+          <a:p>
+            <a:pPr algn="ctr"/>
+          </a:p>
+        </p:txBody>
+      </p:sp>
+      <p:sp>
+        <p:nvSpPr>
+          <p:cNvPr id="10" name="Rectangle 9"/>
+          <p:cNvSpPr/>
+          <p:nvPr/>
+        </p:nvSpPr>
+        <p:spPr>
+          <a:xfrm>
+            <a:off x="6190488" y="1545336"/>
+            <a:ext cx="2542032" cy="1289304"/>
+          </a:xfrm>
+          <a:prstGeom prst="rect">
+            <a:avLst/>
+          </a:prstGeom>
+          <a:solidFill>
+            <a:srgbClr val="F5F7FA"/>
+          </a:solidFill>
+          <a:ln w="9525">
+            <a:solidFill>
+              <a:srgbClr val="DDE2E8"/>
+            </a:solidFill>
+          </a:ln>
+          <a:effectLst/>
+        </p:spPr>
+        <p:style>
+          <a:lnRef idx="1">
+            <a:schemeClr val="accent1"/>
+          </a:lnRef>
+          <a:fillRef idx="3">
+            <a:schemeClr val="accent1"/>
+          </a:fillRef>
+          <a:effectRef idx="2">
+            <a:schemeClr val="accent1"/>
+          </a:effectRef>
+          <a:fontRef idx="minor">
+            <a:schemeClr val="lt1"/>
+          </a:fontRef>
+        </p:style>
+        <p:txBody>
+          <a:bodyPr rtlCol="0" anchor="ctr" wrap="square"/>
+          <a:lstStyle/>
+          <a:p>
+            <a:pPr algn="ctr"/>
+            <a:r>
+              <a:rPr sz="3000" b="1">
+                <a:solidFill>
+                  <a:srgbClr val="1B2A4A"/>
+                </a:solidFill>
+                <a:latin typeface="Calibri"/>
+              </a:rPr>
+              <a:t>25</a:t>
+            </a:r>
+          </a:p>
+          <a:p>
+            <a:pPr algn="ctr"/>
+            <a:r>
+              <a:rPr sz="1200">
+                <a:solidFill>
+                  <a:srgbClr val="5A6B7D"/>
+                </a:solidFill>
+                <a:latin typeface="Calibri"/>
+              </a:rPr>
+              <a:t>Available FTE (current roster)</a:t>
+            </a:r>
+          </a:p>
+        </p:txBody>
+      </p:sp>
+      <p:sp>
+        <p:nvSpPr>
+          <p:cNvPr id="11" name="Rectangle 10"/>
+          <p:cNvSpPr/>
+          <p:nvPr/>
+        </p:nvSpPr>
+        <p:spPr>
+          <a:xfrm>
+            <a:off x="8988552" y="1463040"/>
+            <a:ext cx="2542032" cy="82296"/>
+          </a:xfrm>
+          <a:prstGeom prst="rect">
+            <a:avLst/>
+          </a:prstGeom>
+          <a:solidFill>
+            <a:srgbClr val="E05A47"/>
+          </a:solidFill>
+          <a:ln>
+            <a:noFill/>
+          </a:ln>
+          <a:effectLst/>
+        </p:spPr>
+        <p:style>
+          <a:lnRef idx="1">
+            <a:schemeClr val="accent1"/>
+          </a:lnRef>
+          <a:fillRef idx="3">
+            <a:schemeClr val="accent1"/>
+          </a:fillRef>
+          <a:effectRef idx="2">
+            <a:schemeClr val="accent1"/>
+          </a:effectRef>
+          <a:fontRef idx="minor">
+            <a:schemeClr val="lt1"/>
+          </a:fontRef>
+        </p:style>
+        <p:txBody>
+          <a:bodyPr rtlCol="0" anchor="ctr"/>
+          <a:lstStyle/>
+          <a:p>
+            <a:pPr algn="ctr"/>
+          </a:p>
+        </p:txBody>
+      </p:sp>
+      <p:sp>
+        <p:nvSpPr>
+          <p:cNvPr id="12" name="Rectangle 11"/>
+          <p:cNvSpPr/>
+          <p:nvPr/>
+        </p:nvSpPr>
+        <p:spPr>
+          <a:xfrm>
+            <a:off x="8988552" y="1545336"/>
+            <a:ext cx="2542032" cy="1289304"/>
+          </a:xfrm>
+          <a:prstGeom prst="rect">
+            <a:avLst/>
+          </a:prstGeom>
+          <a:solidFill>
+            <a:srgbClr val="F5F7FA"/>
+          </a:solidFill>
+          <a:ln w="9525">
+            <a:solidFill>
+              <a:srgbClr val="DDE2E8"/>
+            </a:solidFill>
+          </a:ln>
+          <a:effectLst/>
+        </p:spPr>
+        <p:style>
+          <a:lnRef idx="1">
+            <a:schemeClr val="accent1"/>
+          </a:lnRef>
+          <a:fillRef idx="3">
+            <a:schemeClr val="accent1"/>
+          </a:fillRef>
+          <a:effectRef idx="2">
+            <a:schemeClr val="accent1"/>
+          </a:effectRef>
+          <a:fontRef idx="minor">
+            <a:schemeClr val="lt1"/>
+          </a:fontRef>
+        </p:style>
+        <p:txBody>
+          <a:bodyPr rtlCol="0" anchor="ctr" wrap="square"/>
+          <a:lstStyle/>
+          <a:p>
+            <a:pPr algn="ctr"/>
+            <a:r>
+              <a:rPr sz="3000" b="1">
+                <a:solidFill>
+                  <a:srgbClr val="1B2A4A"/>
                 </a:solidFill>
                 <a:latin typeface="Calibri"/>
               </a:rPr>
@@ -4449,14 +6704,14 @@
       </p:sp>
       <p:sp>
         <p:nvSpPr>
-          <p:cNvPr id="9" name="TextBox 8"/>
+          <p:cNvPr id="13" name="TextBox 12"/>
           <p:cNvSpPr txBox="1"/>
           <p:nvPr/>
         </p:nvSpPr>
         <p:spPr>
           <a:xfrm>
-            <a:off x="594360" y="3566160"/>
-            <a:ext cx="10789920" cy="2377440"/>
+            <a:off x="594360" y="3063240"/>
+            <a:ext cx="5486400" cy="320040"/>
           </a:xfrm>
           <a:prstGeom prst="rect">
             <a:avLst/>
@@ -4469,65 +6724,165 @@
           </a:bodyPr>
           <a:lstStyle/>
           <a:p>
-            <a:pPr>
-              <a:spcAft>
-                <a:spcPts val="1400"/>
-              </a:spcAft>
-            </a:pPr>
-            <a:r>
-              <a:rPr sz="1700">
-                <a:solidFill>
-                  <a:srgbClr val="202633"/>
-                </a:solidFill>
-                <a:latin typeface="Calibri"/>
-              </a:rPr>
-              <a:t>●   Holt-Winters improves forecast accuracy by 1.3 percentage points over a naive 'same as last week' baseline - a real, honestly-validated gain, not an inflated claim.</a:t>
-            </a:r>
-          </a:p>
-          <a:p>
-            <a:pPr>
-              <a:spcAft>
-                <a:spcPts val="1400"/>
-              </a:spcAft>
-            </a:pPr>
-            <a:r>
-              <a:rPr sz="1700">
-                <a:solidFill>
-                  <a:srgbClr val="202633"/>
-                </a:solidFill>
-                <a:latin typeface="Calibri"/>
-              </a:rPr>
-              <a:t>●   The roster runs short on 36 of the next 42 days, averaging 2.5 FTE short - peaking at 3.7 FTE on 18 Nov 2026.</a:t>
-            </a:r>
-          </a:p>
-          <a:p>
-            <a:pPr>
-              <a:spcAft>
-                <a:spcPts val="1400"/>
-              </a:spcAft>
-            </a:pPr>
-            <a:r>
-              <a:rPr sz="1700">
-                <a:solidFill>
-                  <a:srgbClr val="202633"/>
-                </a:solidFill>
-                <a:latin typeface="Calibri"/>
-              </a:rPr>
-              <a:t>●   This is a modest, fixable gap - not a crisis - but worth flagging now, with weeks of lead time, rather than discovering it the week service levels slip.</a:t>
-            </a:r>
-          </a:p>
-        </p:txBody>
-      </p:sp>
-      <p:sp>
-        <p:nvSpPr>
-          <p:cNvPr id="10" name="TextBox 9"/>
+            <a:pPr algn="l"/>
+            <a:r>
+              <a:rPr sz="1200" b="1" i="0">
+                <a:solidFill>
+                  <a:srgbClr val="1F9A8F"/>
+                </a:solidFill>
+                <a:latin typeface="Calibri"/>
+              </a:rPr>
+              <a:t>REQUIRED VS AVAILABLE FTE</a:t>
+            </a:r>
+          </a:p>
+        </p:txBody>
+      </p:sp>
+      <p:sp>
+        <p:nvSpPr>
+          <p:cNvPr id="14" name="Rectangle 13"/>
+          <p:cNvSpPr/>
+          <p:nvPr/>
+        </p:nvSpPr>
+        <p:spPr>
+          <a:xfrm>
+            <a:off x="594360" y="3429000"/>
+            <a:ext cx="2682682" cy="411480"/>
+          </a:xfrm>
+          <a:prstGeom prst="rect">
+            <a:avLst/>
+          </a:prstGeom>
+          <a:solidFill>
+            <a:srgbClr val="E05A47"/>
+          </a:solidFill>
+          <a:ln w="19050">
+            <a:solidFill>
+              <a:srgbClr val="FFFFFF"/>
+            </a:solidFill>
+          </a:ln>
+          <a:effectLst/>
+        </p:spPr>
+        <p:style>
+          <a:lnRef idx="1">
+            <a:schemeClr val="accent1"/>
+          </a:lnRef>
+          <a:fillRef idx="3">
+            <a:schemeClr val="accent1"/>
+          </a:fillRef>
+          <a:effectRef idx="2">
+            <a:schemeClr val="accent1"/>
+          </a:effectRef>
+          <a:fontRef idx="minor">
+            <a:schemeClr val="lt1"/>
+          </a:fontRef>
+        </p:style>
+        <p:txBody>
+          <a:bodyPr rtlCol="0" anchor="ctr"/>
+          <a:lstStyle/>
+          <a:p>
+            <a:pPr algn="ctr"/>
+          </a:p>
+        </p:txBody>
+      </p:sp>
+      <p:sp>
+        <p:nvSpPr>
+          <p:cNvPr id="15" name="Rectangle 14"/>
+          <p:cNvSpPr/>
+          <p:nvPr/>
+        </p:nvSpPr>
+        <p:spPr>
+          <a:xfrm>
+            <a:off x="3277042" y="3429000"/>
+            <a:ext cx="2437957" cy="411480"/>
+          </a:xfrm>
+          <a:prstGeom prst="rect">
+            <a:avLst/>
+          </a:prstGeom>
+          <a:solidFill>
+            <a:srgbClr val="2EC4B6"/>
+          </a:solidFill>
+          <a:ln w="19050">
+            <a:solidFill>
+              <a:srgbClr val="FFFFFF"/>
+            </a:solidFill>
+          </a:ln>
+          <a:effectLst/>
+        </p:spPr>
+        <p:style>
+          <a:lnRef idx="1">
+            <a:schemeClr val="accent1"/>
+          </a:lnRef>
+          <a:fillRef idx="3">
+            <a:schemeClr val="accent1"/>
+          </a:fillRef>
+          <a:effectRef idx="2">
+            <a:schemeClr val="accent1"/>
+          </a:effectRef>
+          <a:fontRef idx="minor">
+            <a:schemeClr val="lt1"/>
+          </a:fontRef>
+        </p:style>
+        <p:txBody>
+          <a:bodyPr rtlCol="0" anchor="ctr"/>
+          <a:lstStyle/>
+          <a:p>
+            <a:pPr algn="ctr"/>
+          </a:p>
+        </p:txBody>
+      </p:sp>
+      <p:sp>
+        <p:nvSpPr>
+          <p:cNvPr id="16" name="Oval 15"/>
+          <p:cNvSpPr/>
+          <p:nvPr/>
+        </p:nvSpPr>
+        <p:spPr>
+          <a:xfrm>
+            <a:off x="594360" y="3950208"/>
+            <a:ext cx="128016" cy="128016"/>
+          </a:xfrm>
+          <a:prstGeom prst="ellipse">
+            <a:avLst/>
+          </a:prstGeom>
+          <a:solidFill>
+            <a:srgbClr val="E05A47"/>
+          </a:solidFill>
+          <a:ln>
+            <a:noFill/>
+          </a:ln>
+          <a:effectLst/>
+        </p:spPr>
+        <p:style>
+          <a:lnRef idx="1">
+            <a:schemeClr val="accent1"/>
+          </a:lnRef>
+          <a:fillRef idx="3">
+            <a:schemeClr val="accent1"/>
+          </a:fillRef>
+          <a:effectRef idx="2">
+            <a:schemeClr val="accent1"/>
+          </a:effectRef>
+          <a:fontRef idx="minor">
+            <a:schemeClr val="lt1"/>
+          </a:fontRef>
+        </p:style>
+        <p:txBody>
+          <a:bodyPr rtlCol="0" anchor="ctr"/>
+          <a:lstStyle/>
+          <a:p>
+            <a:pPr algn="ctr"/>
+          </a:p>
+        </p:txBody>
+      </p:sp>
+      <p:sp>
+        <p:nvSpPr>
+          <p:cNvPr id="17" name="TextBox 16"/>
           <p:cNvSpPr txBox="1"/>
           <p:nvPr/>
         </p:nvSpPr>
         <p:spPr>
           <a:xfrm>
-            <a:off x="594360" y="6446520"/>
-            <a:ext cx="9144000" cy="320040"/>
+            <a:off x="777240" y="3904488"/>
+            <a:ext cx="2377440" cy="274320"/>
           </a:xfrm>
           <a:prstGeom prst="rect">
             <a:avLst/>
@@ -4542,13 +6897,399 @@
           <a:p>
             <a:pPr algn="l"/>
             <a:r>
-              <a:rPr sz="1000" b="0">
+              <a:rPr sz="1300" b="0" i="0">
                 <a:solidFill>
                   <a:srgbClr val="5A6B7D"/>
                 </a:solidFill>
                 <a:latin typeface="Calibri"/>
               </a:rPr>
+              <a:t>Required: 52%</a:t>
+            </a:r>
+          </a:p>
+        </p:txBody>
+      </p:sp>
+      <p:sp>
+        <p:nvSpPr>
+          <p:cNvPr id="18" name="Oval 17"/>
+          <p:cNvSpPr/>
+          <p:nvPr/>
+        </p:nvSpPr>
+        <p:spPr>
+          <a:xfrm>
+            <a:off x="3108960" y="3950208"/>
+            <a:ext cx="128016" cy="128016"/>
+          </a:xfrm>
+          <a:prstGeom prst="ellipse">
+            <a:avLst/>
+          </a:prstGeom>
+          <a:solidFill>
+            <a:srgbClr val="2EC4B6"/>
+          </a:solidFill>
+          <a:ln>
+            <a:noFill/>
+          </a:ln>
+          <a:effectLst/>
+        </p:spPr>
+        <p:style>
+          <a:lnRef idx="1">
+            <a:schemeClr val="accent1"/>
+          </a:lnRef>
+          <a:fillRef idx="3">
+            <a:schemeClr val="accent1"/>
+          </a:fillRef>
+          <a:effectRef idx="2">
+            <a:schemeClr val="accent1"/>
+          </a:effectRef>
+          <a:fontRef idx="minor">
+            <a:schemeClr val="lt1"/>
+          </a:fontRef>
+        </p:style>
+        <p:txBody>
+          <a:bodyPr rtlCol="0" anchor="ctr"/>
+          <a:lstStyle/>
+          <a:p>
+            <a:pPr algn="ctr"/>
+          </a:p>
+        </p:txBody>
+      </p:sp>
+      <p:sp>
+        <p:nvSpPr>
+          <p:cNvPr id="19" name="TextBox 18"/>
+          <p:cNvSpPr txBox="1"/>
+          <p:nvPr/>
+        </p:nvSpPr>
+        <p:spPr>
+          <a:xfrm>
+            <a:off x="3291840" y="3904488"/>
+            <a:ext cx="2377440" cy="274320"/>
+          </a:xfrm>
+          <a:prstGeom prst="rect">
+            <a:avLst/>
+          </a:prstGeom>
+          <a:noFill/>
+        </p:spPr>
+        <p:txBody>
+          <a:bodyPr wrap="square">
+            <a:spAutoFit/>
+          </a:bodyPr>
+          <a:lstStyle/>
+          <a:p>
+            <a:pPr algn="l"/>
+            <a:r>
+              <a:rPr sz="1300" b="0" i="0">
+                <a:solidFill>
+                  <a:srgbClr val="5A6B7D"/>
+                </a:solidFill>
+                <a:latin typeface="Calibri"/>
+              </a:rPr>
+              <a:t>Available: 48%</a:t>
+            </a:r>
+          </a:p>
+        </p:txBody>
+      </p:sp>
+      <p:sp>
+        <p:nvSpPr>
+          <p:cNvPr id="20" name="Oval 19"/>
+          <p:cNvSpPr/>
+          <p:nvPr/>
+        </p:nvSpPr>
+        <p:spPr>
+          <a:xfrm>
+            <a:off x="6309360" y="3136392"/>
+            <a:ext cx="128016" cy="128016"/>
+          </a:xfrm>
+          <a:prstGeom prst="ellipse">
+            <a:avLst/>
+          </a:prstGeom>
+          <a:solidFill>
+            <a:srgbClr val="2EC4B6"/>
+          </a:solidFill>
+          <a:ln>
+            <a:noFill/>
+          </a:ln>
+          <a:effectLst/>
+        </p:spPr>
+        <p:style>
+          <a:lnRef idx="1">
+            <a:schemeClr val="accent1"/>
+          </a:lnRef>
+          <a:fillRef idx="3">
+            <a:schemeClr val="accent1"/>
+          </a:fillRef>
+          <a:effectRef idx="2">
+            <a:schemeClr val="accent1"/>
+          </a:effectRef>
+          <a:fontRef idx="minor">
+            <a:schemeClr val="lt1"/>
+          </a:fontRef>
+        </p:style>
+        <p:txBody>
+          <a:bodyPr rtlCol="0" anchor="ctr"/>
+          <a:lstStyle/>
+          <a:p>
+            <a:pPr algn="ctr"/>
+          </a:p>
+        </p:txBody>
+      </p:sp>
+      <p:sp>
+        <p:nvSpPr>
+          <p:cNvPr id="21" name="TextBox 20"/>
+          <p:cNvSpPr txBox="1"/>
+          <p:nvPr/>
+        </p:nvSpPr>
+        <p:spPr>
+          <a:xfrm>
+            <a:off x="6629400" y="3063240"/>
+            <a:ext cx="4983480" cy="868680"/>
+          </a:xfrm>
+          <a:prstGeom prst="rect">
+            <a:avLst/>
+          </a:prstGeom>
+          <a:noFill/>
+        </p:spPr>
+        <p:txBody>
+          <a:bodyPr wrap="square">
+            <a:spAutoFit/>
+          </a:bodyPr>
+          <a:lstStyle/>
+          <a:p>
+            <a:pPr algn="l"/>
+            <a:r>
+              <a:rPr sz="1450" b="0" i="0">
+                <a:solidFill>
+                  <a:srgbClr val="202633"/>
+                </a:solidFill>
+                <a:latin typeface="Calibri"/>
+              </a:rPr>
+              <a:t>Holt-Winters improves forecast accuracy by 1.3 percentage points over the naive baseline - a real, honestly-validated gain.</a:t>
+            </a:r>
+          </a:p>
+        </p:txBody>
+      </p:sp>
+      <p:sp>
+        <p:nvSpPr>
+          <p:cNvPr id="22" name="Oval 21"/>
+          <p:cNvSpPr/>
+          <p:nvPr/>
+        </p:nvSpPr>
+        <p:spPr>
+          <a:xfrm>
+            <a:off x="6309360" y="4005072"/>
+            <a:ext cx="128016" cy="128016"/>
+          </a:xfrm>
+          <a:prstGeom prst="ellipse">
+            <a:avLst/>
+          </a:prstGeom>
+          <a:solidFill>
+            <a:srgbClr val="2EC4B6"/>
+          </a:solidFill>
+          <a:ln>
+            <a:noFill/>
+          </a:ln>
+          <a:effectLst/>
+        </p:spPr>
+        <p:style>
+          <a:lnRef idx="1">
+            <a:schemeClr val="accent1"/>
+          </a:lnRef>
+          <a:fillRef idx="3">
+            <a:schemeClr val="accent1"/>
+          </a:fillRef>
+          <a:effectRef idx="2">
+            <a:schemeClr val="accent1"/>
+          </a:effectRef>
+          <a:fontRef idx="minor">
+            <a:schemeClr val="lt1"/>
+          </a:fontRef>
+        </p:style>
+        <p:txBody>
+          <a:bodyPr rtlCol="0" anchor="ctr"/>
+          <a:lstStyle/>
+          <a:p>
+            <a:pPr algn="ctr"/>
+          </a:p>
+        </p:txBody>
+      </p:sp>
+      <p:sp>
+        <p:nvSpPr>
+          <p:cNvPr id="23" name="TextBox 22"/>
+          <p:cNvSpPr txBox="1"/>
+          <p:nvPr/>
+        </p:nvSpPr>
+        <p:spPr>
+          <a:xfrm>
+            <a:off x="6629400" y="3931920"/>
+            <a:ext cx="4983480" cy="868680"/>
+          </a:xfrm>
+          <a:prstGeom prst="rect">
+            <a:avLst/>
+          </a:prstGeom>
+          <a:noFill/>
+        </p:spPr>
+        <p:txBody>
+          <a:bodyPr wrap="square">
+            <a:spAutoFit/>
+          </a:bodyPr>
+          <a:lstStyle/>
+          <a:p>
+            <a:pPr algn="l"/>
+            <a:r>
+              <a:rPr sz="1450" b="0" i="0">
+                <a:solidFill>
+                  <a:srgbClr val="202633"/>
+                </a:solidFill>
+                <a:latin typeface="Calibri"/>
+              </a:rPr>
+              <a:t>Short on 36 of the next 42 days, averaging 2.5 FTE short - peaking at 3.7 FTE on 18 Nov 2026.</a:t>
+            </a:r>
+          </a:p>
+        </p:txBody>
+      </p:sp>
+      <p:sp>
+        <p:nvSpPr>
+          <p:cNvPr id="24" name="Oval 23"/>
+          <p:cNvSpPr/>
+          <p:nvPr/>
+        </p:nvSpPr>
+        <p:spPr>
+          <a:xfrm>
+            <a:off x="594360" y="5148072"/>
+            <a:ext cx="128016" cy="128016"/>
+          </a:xfrm>
+          <a:prstGeom prst="ellipse">
+            <a:avLst/>
+          </a:prstGeom>
+          <a:solidFill>
+            <a:srgbClr val="2EC4B6"/>
+          </a:solidFill>
+          <a:ln>
+            <a:noFill/>
+          </a:ln>
+          <a:effectLst/>
+        </p:spPr>
+        <p:style>
+          <a:lnRef idx="1">
+            <a:schemeClr val="accent1"/>
+          </a:lnRef>
+          <a:fillRef idx="3">
+            <a:schemeClr val="accent1"/>
+          </a:fillRef>
+          <a:effectRef idx="2">
+            <a:schemeClr val="accent1"/>
+          </a:effectRef>
+          <a:fontRef idx="minor">
+            <a:schemeClr val="lt1"/>
+          </a:fontRef>
+        </p:style>
+        <p:txBody>
+          <a:bodyPr rtlCol="0" anchor="ctr"/>
+          <a:lstStyle/>
+          <a:p>
+            <a:pPr algn="ctr"/>
+          </a:p>
+        </p:txBody>
+      </p:sp>
+      <p:sp>
+        <p:nvSpPr>
+          <p:cNvPr id="25" name="TextBox 24"/>
+          <p:cNvSpPr txBox="1"/>
+          <p:nvPr/>
+        </p:nvSpPr>
+        <p:spPr>
+          <a:xfrm>
+            <a:off x="914400" y="5074920"/>
+            <a:ext cx="10561320" cy="640080"/>
+          </a:xfrm>
+          <a:prstGeom prst="rect">
+            <a:avLst/>
+          </a:prstGeom>
+          <a:noFill/>
+        </p:spPr>
+        <p:txBody>
+          <a:bodyPr wrap="square">
+            <a:spAutoFit/>
+          </a:bodyPr>
+          <a:lstStyle/>
+          <a:p>
+            <a:pPr algn="l"/>
+            <a:r>
+              <a:rPr sz="1450" b="0" i="0">
+                <a:solidFill>
+                  <a:srgbClr val="202633"/>
+                </a:solidFill>
+                <a:latin typeface="Calibri"/>
+              </a:rPr>
+              <a:t>This is a modest, fixable gap - not a crisis - but worth flagging now, with weeks of lead time, rather than discovering it the week service levels slip.</a:t>
+            </a:r>
+          </a:p>
+        </p:txBody>
+      </p:sp>
+      <p:sp>
+        <p:nvSpPr>
+          <p:cNvPr id="26" name="TextBox 25"/>
+          <p:cNvSpPr txBox="1"/>
+          <p:nvPr/>
+        </p:nvSpPr>
+        <p:spPr>
+          <a:xfrm>
+            <a:off x="594360" y="6473952"/>
+            <a:ext cx="9144000" cy="320040"/>
+          </a:xfrm>
+          <a:prstGeom prst="rect">
+            <a:avLst/>
+          </a:prstGeom>
+          <a:noFill/>
+        </p:spPr>
+        <p:txBody>
+          <a:bodyPr wrap="square">
+            <a:spAutoFit/>
+          </a:bodyPr>
+          <a:lstStyle/>
+          <a:p>
+            <a:pPr algn="l"/>
+            <a:r>
+              <a:rPr sz="1000" b="0" i="0">
+                <a:solidFill>
+                  <a:srgbClr val="5A6B7D"/>
+                </a:solidFill>
+                <a:latin typeface="Calibri"/>
+              </a:rPr>
               <a:t>Demand Forecasting &amp; Staffing</a:t>
+            </a:r>
+          </a:p>
+        </p:txBody>
+      </p:sp>
+      <p:sp>
+        <p:nvSpPr>
+          <p:cNvPr id="27" name="TextBox 26"/>
+          <p:cNvSpPr txBox="1"/>
+          <p:nvPr/>
+        </p:nvSpPr>
+        <p:spPr>
+          <a:xfrm>
+            <a:off x="11064240" y="6473952"/>
+            <a:ext cx="822960" cy="320040"/>
+          </a:xfrm>
+          <a:prstGeom prst="rect">
+            <a:avLst/>
+          </a:prstGeom>
+          <a:noFill/>
+        </p:spPr>
+        <p:txBody>
+          <a:bodyPr wrap="square">
+            <a:spAutoFit/>
+          </a:bodyPr>
+          <a:lstStyle/>
+          <a:p>
+            <a:pPr algn="r"/>
+            <a:r>
+              <a:rPr sz="1000" b="0" i="0">
+                <a:solidFill>
+                  <a:srgbClr val="5A6B7D"/>
+                </a:solidFill>
+                <a:latin typeface="Calibri"/>
+              </a:rPr>
+              <a:t>05 / 06</a:t>
             </a:r>
           </a:p>
         </p:txBody>
@@ -4587,7 +7328,7 @@
         </p:nvSpPr>
         <p:spPr>
           <a:xfrm>
-            <a:off x="594360" y="457200"/>
+            <a:off x="594360" y="502920"/>
             <a:ext cx="10789920" cy="731520"/>
           </a:xfrm>
           <a:prstGeom prst="rect">
@@ -4603,7 +7344,7 @@
           <a:p>
             <a:pPr algn="l"/>
             <a:r>
-              <a:rPr sz="3000" b="1">
+              <a:rPr sz="3000" b="1" i="0">
                 <a:solidFill>
                   <a:srgbClr val="FFFFFF"/>
                 </a:solidFill>
@@ -4616,14 +7357,67 @@
       </p:sp>
       <p:sp>
         <p:nvSpPr>
-          <p:cNvPr id="3" name="TextBox 2"/>
+          <p:cNvPr id="3" name="Oval 2"/>
+          <p:cNvSpPr/>
+          <p:nvPr/>
+        </p:nvSpPr>
+        <p:spPr>
+          <a:xfrm>
+            <a:off x="594360" y="1737360"/>
+            <a:ext cx="457200" cy="457200"/>
+          </a:xfrm>
+          <a:prstGeom prst="ellipse">
+            <a:avLst/>
+          </a:prstGeom>
+          <a:solidFill>
+            <a:srgbClr val="2EC4B6"/>
+          </a:solidFill>
+          <a:ln>
+            <a:noFill/>
+          </a:ln>
+          <a:effectLst/>
+        </p:spPr>
+        <p:style>
+          <a:lnRef idx="1">
+            <a:schemeClr val="accent1"/>
+          </a:lnRef>
+          <a:fillRef idx="3">
+            <a:schemeClr val="accent1"/>
+          </a:fillRef>
+          <a:effectRef idx="2">
+            <a:schemeClr val="accent1"/>
+          </a:effectRef>
+          <a:fontRef idx="minor">
+            <a:schemeClr val="lt1"/>
+          </a:fontRef>
+        </p:style>
+        <p:txBody>
+          <a:bodyPr rtlCol="0" anchor="ctr"/>
+          <a:lstStyle/>
+          <a:p>
+            <a:pPr algn="ctr"/>
+            <a:r>
+              <a:rPr sz="1800" b="1">
+                <a:solidFill>
+                  <a:srgbClr val="1B2A4A"/>
+                </a:solidFill>
+                <a:latin typeface="Calibri"/>
+              </a:rPr>
+              <a:t>1</a:t>
+            </a:r>
+          </a:p>
+        </p:txBody>
+      </p:sp>
+      <p:sp>
+        <p:nvSpPr>
+          <p:cNvPr id="4" name="TextBox 3"/>
           <p:cNvSpPr txBox="1"/>
           <p:nvPr/>
         </p:nvSpPr>
         <p:spPr>
           <a:xfrm>
-            <a:off x="594360" y="1645920"/>
-            <a:ext cx="10972800" cy="4114800"/>
+            <a:off x="1280160" y="1709928"/>
+            <a:ext cx="10287000" cy="1325880"/>
           </a:xfrm>
           <a:prstGeom prst="rect">
             <a:avLst/>
@@ -4636,65 +7430,97 @@
           </a:bodyPr>
           <a:lstStyle/>
           <a:p>
+            <a:r>
+              <a:rPr sz="1800" b="1">
+                <a:solidFill>
+                  <a:srgbClr val="FFFFFF"/>
+                </a:solidFill>
+                <a:latin typeface="Calibri"/>
+              </a:rPr>
+              <a:t>Fix #1: Close the FTE gap</a:t>
+            </a:r>
+          </a:p>
+          <a:p>
             <a:pPr>
-              <a:spcAft>
-                <a:spcPts val="2200"/>
-              </a:spcAft>
+              <a:spcBef>
+                <a:spcPts val="400"/>
+              </a:spcBef>
             </a:pPr>
             <a:r>
-              <a:rPr sz="1900">
-                <a:solidFill>
-                  <a:srgbClr val="FFFFFF"/>
-                </a:solidFill>
-                <a:latin typeface="Calibri"/>
-              </a:rPr>
-              <a:t>●   Close a 2.5-FTE average gap with overtime or a couple of flexible-shift agents - the forecast gives 42 days of lead time to plan it, not a same-week scramble.</a:t>
-            </a:r>
-          </a:p>
-          <a:p>
-            <a:pPr>
-              <a:spcAft>
-                <a:spcPts val="2200"/>
-              </a:spcAft>
-            </a:pPr>
-            <a:r>
-              <a:rPr sz="1900">
-                <a:solidFill>
-                  <a:srgbClr val="FFFFFF"/>
-                </a:solidFill>
-                <a:latin typeface="Calibri"/>
-              </a:rPr>
-              <a:t>●   Watch the week of 18 Nov 2026 specifically - the single worst-staffed day in the horizon.</a:t>
-            </a:r>
-          </a:p>
-          <a:p>
-            <a:pPr>
-              <a:spcAft>
-                <a:spcPts val="2200"/>
-              </a:spcAft>
-            </a:pPr>
-            <a:r>
-              <a:rPr sz="1900">
-                <a:solidFill>
-                  <a:srgbClr val="FFFFFF"/>
-                </a:solidFill>
-                <a:latin typeface="Calibri"/>
-              </a:rPr>
-              <a:t>●   Next step: extend the model per LoB/channel for sharper staffing allocation, and revisit shrinkage assumptions quarterly as the roster's tenure mix shifts.</a:t>
-            </a:r>
-          </a:p>
-        </p:txBody>
-      </p:sp>
-      <p:sp>
-        <p:nvSpPr>
-          <p:cNvPr id="4" name="TextBox 3"/>
+              <a:rPr sz="1450">
+                <a:solidFill>
+                  <a:srgbClr val="D7DEE8"/>
+                </a:solidFill>
+                <a:latin typeface="Calibri"/>
+              </a:rPr>
+              <a:t>Close a 2.5-FTE average gap with overtime or a couple of flexible-shift agents - the forecast gives 42 days of lead time to plan it, not a same-week scramble.</a:t>
+            </a:r>
+          </a:p>
+        </p:txBody>
+      </p:sp>
+      <p:sp>
+        <p:nvSpPr>
+          <p:cNvPr id="5" name="Oval 4"/>
+          <p:cNvSpPr/>
+          <p:nvPr/>
+        </p:nvSpPr>
+        <p:spPr>
+          <a:xfrm>
+            <a:off x="594360" y="3063240"/>
+            <a:ext cx="457200" cy="457200"/>
+          </a:xfrm>
+          <a:prstGeom prst="ellipse">
+            <a:avLst/>
+          </a:prstGeom>
+          <a:solidFill>
+            <a:srgbClr val="2EC4B6"/>
+          </a:solidFill>
+          <a:ln>
+            <a:noFill/>
+          </a:ln>
+          <a:effectLst/>
+        </p:spPr>
+        <p:style>
+          <a:lnRef idx="1">
+            <a:schemeClr val="accent1"/>
+          </a:lnRef>
+          <a:fillRef idx="3">
+            <a:schemeClr val="accent1"/>
+          </a:fillRef>
+          <a:effectRef idx="2">
+            <a:schemeClr val="accent1"/>
+          </a:effectRef>
+          <a:fontRef idx="minor">
+            <a:schemeClr val="lt1"/>
+          </a:fontRef>
+        </p:style>
+        <p:txBody>
+          <a:bodyPr rtlCol="0" anchor="ctr"/>
+          <a:lstStyle/>
+          <a:p>
+            <a:pPr algn="ctr"/>
+            <a:r>
+              <a:rPr sz="1800" b="1">
+                <a:solidFill>
+                  <a:srgbClr val="1B2A4A"/>
+                </a:solidFill>
+                <a:latin typeface="Calibri"/>
+              </a:rPr>
+              <a:t>2</a:t>
+            </a:r>
+          </a:p>
+        </p:txBody>
+      </p:sp>
+      <p:sp>
+        <p:nvSpPr>
+          <p:cNvPr id="6" name="TextBox 5"/>
           <p:cNvSpPr txBox="1"/>
           <p:nvPr/>
         </p:nvSpPr>
         <p:spPr>
           <a:xfrm>
-            <a:off x="594360" y="6217920"/>
-            <a:ext cx="10058400" cy="365760"/>
+            <a:off x="1280160" y="3035808"/>
+            <a:ext cx="10287000" cy="1325880"/>
           </a:xfrm>
           <a:prstGeom prst="rect">
             <a:avLst/>
@@ -4707,9 +7533,162 @@
           </a:bodyPr>
           <a:lstStyle/>
           <a:p>
+            <a:r>
+              <a:rPr sz="1800" b="1">
+                <a:solidFill>
+                  <a:srgbClr val="FFFFFF"/>
+                </a:solidFill>
+                <a:latin typeface="Calibri"/>
+              </a:rPr>
+              <a:t>Fix #2: Watch the peak day</a:t>
+            </a:r>
+          </a:p>
+          <a:p>
+            <a:pPr>
+              <a:spcBef>
+                <a:spcPts val="400"/>
+              </a:spcBef>
+            </a:pPr>
+            <a:r>
+              <a:rPr sz="1450">
+                <a:solidFill>
+                  <a:srgbClr val="D7DEE8"/>
+                </a:solidFill>
+                <a:latin typeface="Calibri"/>
+              </a:rPr>
+              <a:t>Watch 18 Nov 2026 specifically - the single worst-staffed day in the horizon.</a:t>
+            </a:r>
+          </a:p>
+        </p:txBody>
+      </p:sp>
+      <p:sp>
+        <p:nvSpPr>
+          <p:cNvPr id="7" name="Oval 6"/>
+          <p:cNvSpPr/>
+          <p:nvPr/>
+        </p:nvSpPr>
+        <p:spPr>
+          <a:xfrm>
+            <a:off x="594360" y="4389120"/>
+            <a:ext cx="457200" cy="457200"/>
+          </a:xfrm>
+          <a:prstGeom prst="ellipse">
+            <a:avLst/>
+          </a:prstGeom>
+          <a:solidFill>
+            <a:srgbClr val="2EC4B6"/>
+          </a:solidFill>
+          <a:ln>
+            <a:noFill/>
+          </a:ln>
+          <a:effectLst/>
+        </p:spPr>
+        <p:style>
+          <a:lnRef idx="1">
+            <a:schemeClr val="accent1"/>
+          </a:lnRef>
+          <a:fillRef idx="3">
+            <a:schemeClr val="accent1"/>
+          </a:fillRef>
+          <a:effectRef idx="2">
+            <a:schemeClr val="accent1"/>
+          </a:effectRef>
+          <a:fontRef idx="minor">
+            <a:schemeClr val="lt1"/>
+          </a:fontRef>
+        </p:style>
+        <p:txBody>
+          <a:bodyPr rtlCol="0" anchor="ctr"/>
+          <a:lstStyle/>
+          <a:p>
+            <a:pPr algn="ctr"/>
+            <a:r>
+              <a:rPr sz="1800" b="1">
+                <a:solidFill>
+                  <a:srgbClr val="1B2A4A"/>
+                </a:solidFill>
+                <a:latin typeface="Calibri"/>
+              </a:rPr>
+              <a:t>3</a:t>
+            </a:r>
+          </a:p>
+        </p:txBody>
+      </p:sp>
+      <p:sp>
+        <p:nvSpPr>
+          <p:cNvPr id="8" name="TextBox 7"/>
+          <p:cNvSpPr txBox="1"/>
+          <p:nvPr/>
+        </p:nvSpPr>
+        <p:spPr>
+          <a:xfrm>
+            <a:off x="1280160" y="4361688"/>
+            <a:ext cx="10287000" cy="1325880"/>
+          </a:xfrm>
+          <a:prstGeom prst="rect">
+            <a:avLst/>
+          </a:prstGeom>
+          <a:noFill/>
+        </p:spPr>
+        <p:txBody>
+          <a:bodyPr wrap="square">
+            <a:spAutoFit/>
+          </a:bodyPr>
+          <a:lstStyle/>
+          <a:p>
+            <a:r>
+              <a:rPr sz="1800" b="1">
+                <a:solidFill>
+                  <a:srgbClr val="FFFFFF"/>
+                </a:solidFill>
+                <a:latin typeface="Calibri"/>
+              </a:rPr>
+              <a:t>Next step: Extend &amp; revisit</a:t>
+            </a:r>
+          </a:p>
+          <a:p>
+            <a:pPr>
+              <a:spcBef>
+                <a:spcPts val="400"/>
+              </a:spcBef>
+            </a:pPr>
+            <a:r>
+              <a:rPr sz="1450">
+                <a:solidFill>
+                  <a:srgbClr val="D7DEE8"/>
+                </a:solidFill>
+                <a:latin typeface="Calibri"/>
+              </a:rPr>
+              <a:t>Extend the model per LoB/channel for sharper staffing allocation, and revisit shrinkage assumptions quarterly as the roster's tenure mix shifts.</a:t>
+            </a:r>
+          </a:p>
+        </p:txBody>
+      </p:sp>
+      <p:sp>
+        <p:nvSpPr>
+          <p:cNvPr id="9" name="TextBox 8"/>
+          <p:cNvSpPr txBox="1"/>
+          <p:nvPr/>
+        </p:nvSpPr>
+        <p:spPr>
+          <a:xfrm>
+            <a:off x="594360" y="6309360"/>
+            <a:ext cx="10058400" cy="365760"/>
+          </a:xfrm>
+          <a:prstGeom prst="rect">
+            <a:avLst/>
+          </a:prstGeom>
+          <a:noFill/>
+        </p:spPr>
+        <p:txBody>
+          <a:bodyPr wrap="square">
+            <a:spAutoFit/>
+          </a:bodyPr>
+          <a:lstStyle/>
+          <a:p>
             <a:pPr algn="l"/>
             <a:r>
-              <a:rPr sz="1200" b="0">
+              <a:rPr sz="1200" b="0" i="0">
                 <a:solidFill>
                   <a:srgbClr val="B8C2D0"/>
                 </a:solidFill>

--- a/usecase2_demand_forecasting/final_output/usecase2_forecast_summary.pptx
+++ b/usecase2_demand_forecasting/final_output/usecase2_forecast_summary.pptx
@@ -3109,7 +3109,7 @@
         </p:nvSpPr>
         <p:spPr>
           <a:xfrm>
-            <a:off x="594360" y="2103120"/>
+            <a:off x="594360" y="2788920"/>
             <a:ext cx="1097280" cy="63500"/>
           </a:xfrm>
           <a:prstGeom prst="rect">
@@ -3153,7 +3153,7 @@
         </p:nvSpPr>
         <p:spPr>
           <a:xfrm>
-            <a:off x="594360" y="2240280"/>
+            <a:off x="594360" y="2926080"/>
             <a:ext cx="10972800" cy="1188720"/>
           </a:xfrm>
           <a:prstGeom prst="rect">
@@ -3176,344 +3176,6 @@
                 <a:latin typeface="Calibri"/>
               </a:rPr>
               <a:t>Demand Forecasting &amp; Staffing</a:t>
-            </a:r>
-          </a:p>
-        </p:txBody>
-      </p:sp>
-      <p:sp>
-        <p:nvSpPr>
-          <p:cNvPr id="4" name="TextBox 3"/>
-          <p:cNvSpPr txBox="1"/>
-          <p:nvPr/>
-        </p:nvSpPr>
-        <p:spPr>
-          <a:xfrm>
-            <a:off x="594360" y="3200400"/>
-            <a:ext cx="10058400" cy="548640"/>
-          </a:xfrm>
-          <a:prstGeom prst="rect">
-            <a:avLst/>
-          </a:prstGeom>
-          <a:noFill/>
-        </p:spPr>
-        <p:txBody>
-          <a:bodyPr wrap="square">
-            <a:spAutoFit/>
-          </a:bodyPr>
-          <a:lstStyle/>
-          <a:p>
-            <a:pPr algn="l"/>
-            <a:r>
-              <a:rPr sz="1800" b="0" i="0">
-                <a:solidFill>
-                  <a:srgbClr val="2EC4B6"/>
-                </a:solidFill>
-                <a:latin typeface="Calibri"/>
-              </a:rPr>
-              <a:t>Contact-volume forecasting, translated into a concrete staffing plan</a:t>
-            </a:r>
-          </a:p>
-        </p:txBody>
-      </p:sp>
-      <p:sp>
-        <p:nvSpPr>
-          <p:cNvPr id="5" name="Rounded Rectangle 4"/>
-          <p:cNvSpPr/>
-          <p:nvPr/>
-        </p:nvSpPr>
-        <p:spPr>
-          <a:xfrm>
-            <a:off x="594360" y="4114800"/>
-            <a:ext cx="2651760" cy="868680"/>
-          </a:xfrm>
-          <a:prstGeom prst="roundRect">
-            <a:avLst/>
-          </a:prstGeom>
-          <a:solidFill>
-            <a:srgbClr val="2B3C5E"/>
-          </a:solidFill>
-          <a:ln w="12700">
-            <a:solidFill>
-              <a:srgbClr val="2EC4B6"/>
-            </a:solidFill>
-          </a:ln>
-          <a:effectLst/>
-        </p:spPr>
-        <p:style>
-          <a:lnRef idx="1">
-            <a:schemeClr val="accent1"/>
-          </a:lnRef>
-          <a:fillRef idx="3">
-            <a:schemeClr val="accent1"/>
-          </a:fillRef>
-          <a:effectRef idx="2">
-            <a:schemeClr val="accent1"/>
-          </a:effectRef>
-          <a:fontRef idx="minor">
-            <a:schemeClr val="lt1"/>
-          </a:fontRef>
-        </p:style>
-        <p:txBody>
-          <a:bodyPr rtlCol="0" anchor="ctr" wrap="square"/>
-          <a:lstStyle/>
-          <a:p>
-            <a:pPr algn="ctr"/>
-            <a:r>
-              <a:rPr sz="1900" b="1">
-                <a:solidFill>
-                  <a:srgbClr val="2EC4B6"/>
-                </a:solidFill>
-                <a:latin typeface="Calibri"/>
-              </a:rPr>
-              <a:t>3.8 yrs</a:t>
-            </a:r>
-          </a:p>
-          <a:p>
-            <a:pPr algn="ctr"/>
-            <a:r>
-              <a:rPr sz="1050">
-                <a:solidFill>
-                  <a:srgbClr val="D7DEE8"/>
-                </a:solidFill>
-                <a:latin typeface="Calibri"/>
-              </a:rPr>
-              <a:t>Daily contact-volume history</a:t>
-            </a:r>
-          </a:p>
-        </p:txBody>
-      </p:sp>
-      <p:sp>
-        <p:nvSpPr>
-          <p:cNvPr id="6" name="Rounded Rectangle 5"/>
-          <p:cNvSpPr/>
-          <p:nvPr/>
-        </p:nvSpPr>
-        <p:spPr>
-          <a:xfrm>
-            <a:off x="3474720" y="4114800"/>
-            <a:ext cx="2651760" cy="868680"/>
-          </a:xfrm>
-          <a:prstGeom prst="roundRect">
-            <a:avLst/>
-          </a:prstGeom>
-          <a:solidFill>
-            <a:srgbClr val="2B3C5E"/>
-          </a:solidFill>
-          <a:ln w="12700">
-            <a:solidFill>
-              <a:srgbClr val="2EC4B6"/>
-            </a:solidFill>
-          </a:ln>
-          <a:effectLst/>
-        </p:spPr>
-        <p:style>
-          <a:lnRef idx="1">
-            <a:schemeClr val="accent1"/>
-          </a:lnRef>
-          <a:fillRef idx="3">
-            <a:schemeClr val="accent1"/>
-          </a:fillRef>
-          <a:effectRef idx="2">
-            <a:schemeClr val="accent1"/>
-          </a:effectRef>
-          <a:fontRef idx="minor">
-            <a:schemeClr val="lt1"/>
-          </a:fontRef>
-        </p:style>
-        <p:txBody>
-          <a:bodyPr rtlCol="0" anchor="ctr" wrap="square"/>
-          <a:lstStyle/>
-          <a:p>
-            <a:pPr algn="ctr"/>
-            <a:r>
-              <a:rPr sz="1900" b="1">
-                <a:solidFill>
-                  <a:srgbClr val="2EC4B6"/>
-                </a:solidFill>
-                <a:latin typeface="Calibri"/>
-              </a:rPr>
-              <a:t>42 days</a:t>
-            </a:r>
-          </a:p>
-          <a:p>
-            <a:pPr algn="ctr"/>
-            <a:r>
-              <a:rPr sz="1050">
-                <a:solidFill>
-                  <a:srgbClr val="D7DEE8"/>
-                </a:solidFill>
-                <a:latin typeface="Calibri"/>
-              </a:rPr>
-              <a:t>Forecast horizon</a:t>
-            </a:r>
-          </a:p>
-        </p:txBody>
-      </p:sp>
-      <p:sp>
-        <p:nvSpPr>
-          <p:cNvPr id="7" name="Rounded Rectangle 6"/>
-          <p:cNvSpPr/>
-          <p:nvPr/>
-        </p:nvSpPr>
-        <p:spPr>
-          <a:xfrm>
-            <a:off x="6355080" y="4114800"/>
-            <a:ext cx="2651760" cy="868680"/>
-          </a:xfrm>
-          <a:prstGeom prst="roundRect">
-            <a:avLst/>
-          </a:prstGeom>
-          <a:solidFill>
-            <a:srgbClr val="2B3C5E"/>
-          </a:solidFill>
-          <a:ln w="12700">
-            <a:solidFill>
-              <a:srgbClr val="2EC4B6"/>
-            </a:solidFill>
-          </a:ln>
-          <a:effectLst/>
-        </p:spPr>
-        <p:style>
-          <a:lnRef idx="1">
-            <a:schemeClr val="accent1"/>
-          </a:lnRef>
-          <a:fillRef idx="3">
-            <a:schemeClr val="accent1"/>
-          </a:fillRef>
-          <a:effectRef idx="2">
-            <a:schemeClr val="accent1"/>
-          </a:effectRef>
-          <a:fontRef idx="minor">
-            <a:schemeClr val="lt1"/>
-          </a:fontRef>
-        </p:style>
-        <p:txBody>
-          <a:bodyPr rtlCol="0" anchor="ctr" wrap="square"/>
-          <a:lstStyle/>
-          <a:p>
-            <a:pPr algn="ctr"/>
-            <a:r>
-              <a:rPr sz="1900" b="1">
-                <a:solidFill>
-                  <a:srgbClr val="2EC4B6"/>
-                </a:solidFill>
-                <a:latin typeface="Calibri"/>
-              </a:rPr>
-              <a:t>2 / 3</a:t>
-            </a:r>
-          </a:p>
-          <a:p>
-            <a:pPr algn="ctr"/>
-            <a:r>
-              <a:rPr sz="1050">
-                <a:solidFill>
-                  <a:srgbClr val="D7DEE8"/>
-                </a:solidFill>
-                <a:latin typeface="Calibri"/>
-              </a:rPr>
-              <a:t>Lines of business / channels</a:t>
-            </a:r>
-          </a:p>
-        </p:txBody>
-      </p:sp>
-      <p:sp>
-        <p:nvSpPr>
-          <p:cNvPr id="8" name="Rounded Rectangle 7"/>
-          <p:cNvSpPr/>
-          <p:nvPr/>
-        </p:nvSpPr>
-        <p:spPr>
-          <a:xfrm>
-            <a:off x="9235440" y="4114800"/>
-            <a:ext cx="2651760" cy="868680"/>
-          </a:xfrm>
-          <a:prstGeom prst="roundRect">
-            <a:avLst/>
-          </a:prstGeom>
-          <a:solidFill>
-            <a:srgbClr val="2B3C5E"/>
-          </a:solidFill>
-          <a:ln w="12700">
-            <a:solidFill>
-              <a:srgbClr val="2EC4B6"/>
-            </a:solidFill>
-          </a:ln>
-          <a:effectLst/>
-        </p:spPr>
-        <p:style>
-          <a:lnRef idx="1">
-            <a:schemeClr val="accent1"/>
-          </a:lnRef>
-          <a:fillRef idx="3">
-            <a:schemeClr val="accent1"/>
-          </a:fillRef>
-          <a:effectRef idx="2">
-            <a:schemeClr val="accent1"/>
-          </a:effectRef>
-          <a:fontRef idx="minor">
-            <a:schemeClr val="lt1"/>
-          </a:fontRef>
-        </p:style>
-        <p:txBody>
-          <a:bodyPr rtlCol="0" anchor="ctr" wrap="square"/>
-          <a:lstStyle/>
-          <a:p>
-            <a:pPr algn="ctr"/>
-            <a:r>
-              <a:rPr sz="1900" b="1">
-                <a:solidFill>
-                  <a:srgbClr val="2EC4B6"/>
-                </a:solidFill>
-                <a:latin typeface="Calibri"/>
-              </a:rPr>
-              <a:t>18.8%</a:t>
-            </a:r>
-          </a:p>
-          <a:p>
-            <a:pPr algn="ctr"/>
-            <a:r>
-              <a:rPr sz="1050">
-                <a:solidFill>
-                  <a:srgbClr val="D7DEE8"/>
-                </a:solidFill>
-                <a:latin typeface="Calibri"/>
-              </a:rPr>
-              <a:t>Holdout forecast MAPE</a:t>
-            </a:r>
-          </a:p>
-        </p:txBody>
-      </p:sp>
-      <p:sp>
-        <p:nvSpPr>
-          <p:cNvPr id="9" name="TextBox 8"/>
-          <p:cNvSpPr txBox="1"/>
-          <p:nvPr/>
-        </p:nvSpPr>
-        <p:spPr>
-          <a:xfrm>
-            <a:off x="594360" y="6446520"/>
-            <a:ext cx="10058400" cy="320040"/>
-          </a:xfrm>
-          <a:prstGeom prst="rect">
-            <a:avLst/>
-          </a:prstGeom>
-          <a:noFill/>
-        </p:spPr>
-        <p:txBody>
-          <a:bodyPr wrap="square">
-            <a:spAutoFit/>
-          </a:bodyPr>
-          <a:lstStyle/>
-          <a:p>
-            <a:pPr algn="l"/>
-            <a:r>
-              <a:rPr sz="1100" b="0" i="0">
-                <a:solidFill>
-                  <a:srgbClr val="8A97AB"/>
-                </a:solidFill>
-                <a:latin typeface="Calibri"/>
-              </a:rPr>
-              <a:t>Data Analytics Consulting</a:t>
             </a:r>
           </a:p>
         </p:txBody>
@@ -5378,51 +5040,16 @@
           </a:p>
         </p:txBody>
       </p:sp>
-      <p:cxnSp>
-        <p:nvCxnSpPr>
-          <p:cNvPr id="5" name="Connector 4"/>
-          <p:cNvCxnSpPr/>
-          <p:nvPr/>
-        </p:nvCxnSpPr>
-        <p:spPr>
-          <a:xfrm>
-            <a:off x="708660.0" y="1851660.0"/>
-            <a:ext cx="10744200.0" cy="0.0"/>
-          </a:xfrm>
-          <a:prstGeom prst="line">
-            <a:avLst/>
-          </a:prstGeom>
-          <a:ln w="25400">
-            <a:solidFill>
-              <a:srgbClr val="DDE2E8"/>
-            </a:solidFill>
-          </a:ln>
-        </p:spPr>
-        <p:style>
-          <a:lnRef idx="2">
-            <a:schemeClr val="accent1"/>
-          </a:lnRef>
-          <a:fillRef idx="0">
-            <a:schemeClr val="accent1"/>
-          </a:fillRef>
-          <a:effectRef idx="1">
-            <a:schemeClr val="accent1"/>
-          </a:effectRef>
-          <a:fontRef idx="minor">
-            <a:schemeClr val="tx1"/>
-          </a:fontRef>
-        </p:style>
-      </p:cxnSp>
-      <p:sp>
-        <p:nvSpPr>
-          <p:cNvPr id="6" name="Oval 5"/>
+      <p:sp>
+        <p:nvSpPr>
+          <p:cNvPr id="5" name="Oval 4"/>
           <p:cNvSpPr/>
           <p:nvPr/>
         </p:nvSpPr>
         <p:spPr>
           <a:xfrm>
-            <a:off x="1330452" y="1600200"/>
-            <a:ext cx="502920" cy="502920"/>
+            <a:off x="594360" y="1417320"/>
+            <a:ext cx="292608" cy="292608"/>
           </a:xfrm>
           <a:prstGeom prst="ellipse">
             <a:avLst/>
@@ -5455,7 +5082,7 @@
           <a:p>
             <a:pPr algn="ctr"/>
             <a:r>
-              <a:rPr sz="1800" b="1">
+              <a:rPr sz="1400" b="1">
                 <a:solidFill>
                   <a:srgbClr val="FFFFFF"/>
                 </a:solidFill>
@@ -5468,14 +5095,14 @@
       </p:sp>
       <p:sp>
         <p:nvSpPr>
-          <p:cNvPr id="7" name="TextBox 6"/>
+          <p:cNvPr id="6" name="TextBox 5"/>
           <p:cNvSpPr txBox="1"/>
           <p:nvPr/>
         </p:nvSpPr>
         <p:spPr>
           <a:xfrm>
-            <a:off x="457200" y="2240280"/>
-            <a:ext cx="2249424" cy="365760"/>
+            <a:off x="978408" y="1399032"/>
+            <a:ext cx="4828032" cy="292608"/>
           </a:xfrm>
           <a:prstGeom prst="rect">
             <a:avLst/>
@@ -5488,7 +5115,7 @@
           </a:bodyPr>
           <a:lstStyle/>
           <a:p>
-            <a:pPr algn="ctr"/>
+            <a:pPr algn="l"/>
             <a:r>
               <a:rPr sz="1450" b="1" i="0">
                 <a:solidFill>
@@ -5496,56 +5123,21 @@
                 </a:solidFill>
                 <a:latin typeface="Calibri"/>
               </a:rPr>
-              <a:t>1. Explore first</a:t>
-            </a:r>
-          </a:p>
-        </p:txBody>
-      </p:sp>
-      <p:sp>
-        <p:nvSpPr>
-          <p:cNvPr id="8" name="TextBox 7"/>
-          <p:cNvSpPr txBox="1"/>
-          <p:nvPr/>
-        </p:nvSpPr>
-        <p:spPr>
-          <a:xfrm>
-            <a:off x="457200" y="2633472"/>
-            <a:ext cx="2249424" cy="1371600"/>
-          </a:xfrm>
-          <a:prstGeom prst="rect">
-            <a:avLst/>
-          </a:prstGeom>
-          <a:noFill/>
-        </p:spPr>
-        <p:txBody>
-          <a:bodyPr wrap="square">
-            <a:spAutoFit/>
-          </a:bodyPr>
-          <a:lstStyle/>
-          <a:p>
-            <a:pPr algn="ctr"/>
-            <a:r>
-              <a:rPr sz="1200" b="0" i="0">
-                <a:solidFill>
-                  <a:srgbClr val="5A6B7D"/>
-                </a:solidFill>
-                <a:latin typeface="Calibri"/>
-              </a:rPr>
-              <a:t>Decompose trend, weekly and yearly seasonality before touching any model.</a:t>
-            </a:r>
-          </a:p>
-        </p:txBody>
-      </p:sp>
-      <p:sp>
-        <p:nvSpPr>
-          <p:cNvPr id="9" name="Oval 8"/>
+              <a:t>Explore first</a:t>
+            </a:r>
+          </a:p>
+        </p:txBody>
+      </p:sp>
+      <p:sp>
+        <p:nvSpPr>
+          <p:cNvPr id="7" name="Oval 6"/>
           <p:cNvSpPr/>
           <p:nvPr/>
         </p:nvSpPr>
         <p:spPr>
           <a:xfrm>
-            <a:off x="3579876" y="1600200"/>
-            <a:ext cx="502920" cy="502920"/>
+            <a:off x="667512" y="1847088"/>
+            <a:ext cx="82296" cy="82296"/>
           </a:xfrm>
           <a:prstGeom prst="ellipse">
             <a:avLst/>
@@ -5577,28 +5169,19 @@
           <a:lstStyle/>
           <a:p>
             <a:pPr algn="ctr"/>
-            <a:r>
-              <a:rPr sz="1800" b="1">
-                <a:solidFill>
-                  <a:srgbClr val="FFFFFF"/>
-                </a:solidFill>
-                <a:latin typeface="Calibri"/>
-              </a:rPr>
-              <a:t>2</a:t>
-            </a:r>
-          </a:p>
-        </p:txBody>
-      </p:sp>
-      <p:sp>
-        <p:nvSpPr>
-          <p:cNvPr id="10" name="TextBox 9"/>
+          </a:p>
+        </p:txBody>
+      </p:sp>
+      <p:sp>
+        <p:nvSpPr>
+          <p:cNvPr id="8" name="TextBox 7"/>
           <p:cNvSpPr txBox="1"/>
           <p:nvPr/>
         </p:nvSpPr>
         <p:spPr>
           <a:xfrm>
-            <a:off x="2706624" y="2240280"/>
-            <a:ext cx="2249424" cy="365760"/>
+            <a:off x="868680" y="1783080"/>
+            <a:ext cx="4937760" cy="292608"/>
           </a:xfrm>
           <a:prstGeom prst="rect">
             <a:avLst/>
@@ -5611,64 +5194,29 @@
           </a:bodyPr>
           <a:lstStyle/>
           <a:p>
-            <a:pPr algn="ctr"/>
-            <a:r>
-              <a:rPr sz="1450" b="1" i="0">
-                <a:solidFill>
-                  <a:srgbClr val="1B2A4A"/>
-                </a:solidFill>
-                <a:latin typeface="Calibri"/>
-              </a:rPr>
-              <a:t>2. Benchmark honestly</a:t>
-            </a:r>
-          </a:p>
-        </p:txBody>
-      </p:sp>
-      <p:sp>
-        <p:nvSpPr>
-          <p:cNvPr id="11" name="TextBox 10"/>
-          <p:cNvSpPr txBox="1"/>
-          <p:nvPr/>
-        </p:nvSpPr>
-        <p:spPr>
-          <a:xfrm>
-            <a:off x="2706624" y="2633472"/>
-            <a:ext cx="2249424" cy="1371600"/>
-          </a:xfrm>
-          <a:prstGeom prst="rect">
-            <a:avLst/>
-          </a:prstGeom>
-          <a:noFill/>
-        </p:spPr>
-        <p:txBody>
-          <a:bodyPr wrap="square">
-            <a:spAutoFit/>
-          </a:bodyPr>
-          <a:lstStyle/>
-          <a:p>
-            <a:pPr algn="ctr"/>
-            <a:r>
-              <a:rPr sz="1200" b="0" i="0">
-                <a:solidFill>
-                  <a:srgbClr val="5A6B7D"/>
-                </a:solidFill>
-                <a:latin typeface="Calibri"/>
-              </a:rPr>
-              <a:t>Every candidate is tested against a naive seasonal baseline on a held-out window - it only ships if it genuinely wins.</a:t>
-            </a:r>
-          </a:p>
-        </p:txBody>
-      </p:sp>
-      <p:sp>
-        <p:nvSpPr>
-          <p:cNvPr id="12" name="Oval 11"/>
+            <a:pPr algn="l"/>
+            <a:r>
+              <a:rPr sz="1150" b="0" i="0">
+                <a:solidFill>
+                  <a:srgbClr val="202633"/>
+                </a:solidFill>
+                <a:latin typeface="Calibri"/>
+              </a:rPr>
+              <a:t>Decomposes trend + weekly/yearly seasonality</a:t>
+            </a:r>
+          </a:p>
+        </p:txBody>
+      </p:sp>
+      <p:sp>
+        <p:nvSpPr>
+          <p:cNvPr id="9" name="Oval 8"/>
           <p:cNvSpPr/>
           <p:nvPr/>
         </p:nvSpPr>
         <p:spPr>
           <a:xfrm>
-            <a:off x="5829300" y="1600200"/>
-            <a:ext cx="502920" cy="502920"/>
+            <a:off x="667512" y="2157984"/>
+            <a:ext cx="82296" cy="82296"/>
           </a:xfrm>
           <a:prstGeom prst="ellipse">
             <a:avLst/>
@@ -5700,28 +5248,19 @@
           <a:lstStyle/>
           <a:p>
             <a:pPr algn="ctr"/>
-            <a:r>
-              <a:rPr sz="1800" b="1">
-                <a:solidFill>
-                  <a:srgbClr val="FFFFFF"/>
-                </a:solidFill>
-                <a:latin typeface="Calibri"/>
-              </a:rPr>
-              <a:t>3</a:t>
-            </a:r>
-          </a:p>
-        </p:txBody>
-      </p:sp>
-      <p:sp>
-        <p:nvSpPr>
-          <p:cNvPr id="13" name="TextBox 12"/>
+          </a:p>
+        </p:txBody>
+      </p:sp>
+      <p:sp>
+        <p:nvSpPr>
+          <p:cNvPr id="10" name="TextBox 9"/>
           <p:cNvSpPr txBox="1"/>
           <p:nvPr/>
         </p:nvSpPr>
         <p:spPr>
           <a:xfrm>
-            <a:off x="4956048" y="2240280"/>
-            <a:ext cx="2249424" cy="365760"/>
+            <a:off x="868680" y="2093976"/>
+            <a:ext cx="4937760" cy="292608"/>
           </a:xfrm>
           <a:prstGeom prst="rect">
             <a:avLst/>
@@ -5734,64 +5273,29 @@
           </a:bodyPr>
           <a:lstStyle/>
           <a:p>
-            <a:pPr algn="ctr"/>
-            <a:r>
-              <a:rPr sz="1450" b="1" i="0">
-                <a:solidFill>
-                  <a:srgbClr val="1B2A4A"/>
-                </a:solidFill>
-                <a:latin typeface="Calibri"/>
-              </a:rPr>
-              <a:t>3. Holt-Winters</a:t>
-            </a:r>
-          </a:p>
-        </p:txBody>
-      </p:sp>
-      <p:sp>
-        <p:nvSpPr>
-          <p:cNvPr id="14" name="TextBox 13"/>
-          <p:cNvSpPr txBox="1"/>
-          <p:nvPr/>
-        </p:nvSpPr>
-        <p:spPr>
-          <a:xfrm>
-            <a:off x="4956048" y="2633472"/>
-            <a:ext cx="2249424" cy="1371600"/>
-          </a:xfrm>
-          <a:prstGeom prst="rect">
-            <a:avLst/>
-          </a:prstGeom>
-          <a:noFill/>
-        </p:spPr>
-        <p:txBody>
-          <a:bodyPr wrap="square">
-            <a:spAutoFit/>
-          </a:bodyPr>
-          <a:lstStyle/>
-          <a:p>
-            <a:pPr algn="ctr"/>
-            <a:r>
-              <a:rPr sz="1200" b="0" i="0">
-                <a:solidFill>
-                  <a:srgbClr val="5A6B7D"/>
-                </a:solidFill>
-                <a:latin typeface="Calibri"/>
-              </a:rPr>
-              <a:t>A lightweight, explainable exponential-smoothing model - not a black box - forecasts volume forward.</a:t>
-            </a:r>
-          </a:p>
-        </p:txBody>
-      </p:sp>
-      <p:sp>
-        <p:nvSpPr>
-          <p:cNvPr id="15" name="Oval 14"/>
+            <a:pPr algn="l"/>
+            <a:r>
+              <a:rPr sz="1150" b="0" i="0">
+                <a:solidFill>
+                  <a:srgbClr val="202633"/>
+                </a:solidFill>
+                <a:latin typeface="Calibri"/>
+              </a:rPr>
+              <a:t>Checks day-of-week patterns before modeling</a:t>
+            </a:r>
+          </a:p>
+        </p:txBody>
+      </p:sp>
+      <p:sp>
+        <p:nvSpPr>
+          <p:cNvPr id="11" name="Oval 10"/>
           <p:cNvSpPr/>
           <p:nvPr/>
         </p:nvSpPr>
         <p:spPr>
           <a:xfrm>
-            <a:off x="8078724" y="1600200"/>
-            <a:ext cx="502920" cy="502920"/>
+            <a:off x="667512" y="2468880"/>
+            <a:ext cx="82296" cy="82296"/>
           </a:xfrm>
           <a:prstGeom prst="ellipse">
             <a:avLst/>
@@ -5823,28 +5327,19 @@
           <a:lstStyle/>
           <a:p>
             <a:pPr algn="ctr"/>
-            <a:r>
-              <a:rPr sz="1800" b="1">
-                <a:solidFill>
-                  <a:srgbClr val="FFFFFF"/>
-                </a:solidFill>
-                <a:latin typeface="Calibri"/>
-              </a:rPr>
-              <a:t>4</a:t>
-            </a:r>
-          </a:p>
-        </p:txBody>
-      </p:sp>
-      <p:sp>
-        <p:nvSpPr>
-          <p:cNvPr id="16" name="TextBox 15"/>
+          </a:p>
+        </p:txBody>
+      </p:sp>
+      <p:sp>
+        <p:nvSpPr>
+          <p:cNvPr id="12" name="TextBox 11"/>
           <p:cNvSpPr txBox="1"/>
           <p:nvPr/>
         </p:nvSpPr>
         <p:spPr>
           <a:xfrm>
-            <a:off x="7205472" y="2240280"/>
-            <a:ext cx="2249424" cy="365760"/>
+            <a:off x="868680" y="2404872"/>
+            <a:ext cx="4937760" cy="292608"/>
           </a:xfrm>
           <a:prstGeom prst="rect">
             <a:avLst/>
@@ -5857,64 +5352,29 @@
           </a:bodyPr>
           <a:lstStyle/>
           <a:p>
-            <a:pPr algn="ctr"/>
-            <a:r>
-              <a:rPr sz="1450" b="1" i="0">
-                <a:solidFill>
-                  <a:srgbClr val="1B2A4A"/>
-                </a:solidFill>
-                <a:latin typeface="Calibri"/>
-              </a:rPr>
-              <a:t>4. Volume -&gt; FTE</a:t>
-            </a:r>
-          </a:p>
-        </p:txBody>
-      </p:sp>
-      <p:sp>
-        <p:nvSpPr>
-          <p:cNvPr id="17" name="TextBox 16"/>
-          <p:cNvSpPr txBox="1"/>
-          <p:nvPr/>
-        </p:nvSpPr>
-        <p:spPr>
-          <a:xfrm>
-            <a:off x="7205472" y="2633472"/>
-            <a:ext cx="2249424" cy="1371600"/>
-          </a:xfrm>
-          <a:prstGeom prst="rect">
-            <a:avLst/>
-          </a:prstGeom>
-          <a:noFill/>
-        </p:spPr>
-        <p:txBody>
-          <a:bodyPr wrap="square">
-            <a:spAutoFit/>
-          </a:bodyPr>
-          <a:lstStyle/>
-          <a:p>
-            <a:pPr algn="ctr"/>
-            <a:r>
-              <a:rPr sz="1200" b="0" i="0">
-                <a:solidFill>
-                  <a:srgbClr val="5A6B7D"/>
-                </a:solidFill>
-                <a:latin typeface="Calibri"/>
-              </a:rPr>
-              <a:t>Convert volume to required FTE using handle time and the roster's REAL shrinkage rate, then compare to available FTE.</a:t>
-            </a:r>
-          </a:p>
-        </p:txBody>
-      </p:sp>
-      <p:sp>
-        <p:nvSpPr>
-          <p:cNvPr id="18" name="Oval 17"/>
+            <a:pPr algn="l"/>
+            <a:r>
+              <a:rPr sz="1150" b="0" i="0">
+                <a:solidFill>
+                  <a:srgbClr val="202633"/>
+                </a:solidFill>
+                <a:latin typeface="Calibri"/>
+              </a:rPr>
+              <a:t>Spots holiday/campaign spikes visually first</a:t>
+            </a:r>
+          </a:p>
+        </p:txBody>
+      </p:sp>
+      <p:sp>
+        <p:nvSpPr>
+          <p:cNvPr id="13" name="Oval 12"/>
           <p:cNvSpPr/>
           <p:nvPr/>
         </p:nvSpPr>
         <p:spPr>
           <a:xfrm>
-            <a:off x="10328148" y="1600200"/>
-            <a:ext cx="502920" cy="502920"/>
+            <a:off x="667512" y="2779776"/>
+            <a:ext cx="82296" cy="82296"/>
           </a:xfrm>
           <a:prstGeom prst="ellipse">
             <a:avLst/>
@@ -5946,28 +5406,19 @@
           <a:lstStyle/>
           <a:p>
             <a:pPr algn="ctr"/>
-            <a:r>
-              <a:rPr sz="1800" b="1">
-                <a:solidFill>
-                  <a:srgbClr val="FFFFFF"/>
-                </a:solidFill>
-                <a:latin typeface="Calibri"/>
-              </a:rPr>
-              <a:t>5</a:t>
-            </a:r>
-          </a:p>
-        </p:txBody>
-      </p:sp>
-      <p:sp>
-        <p:nvSpPr>
-          <p:cNvPr id="19" name="TextBox 18"/>
+          </a:p>
+        </p:txBody>
+      </p:sp>
+      <p:sp>
+        <p:nvSpPr>
+          <p:cNvPr id="14" name="TextBox 13"/>
           <p:cNvSpPr txBox="1"/>
           <p:nvPr/>
         </p:nvSpPr>
         <p:spPr>
           <a:xfrm>
-            <a:off x="9454896" y="2240280"/>
-            <a:ext cx="2249424" cy="365760"/>
+            <a:off x="868680" y="2715768"/>
+            <a:ext cx="4937760" cy="292608"/>
           </a:xfrm>
           <a:prstGeom prst="rect">
             <a:avLst/>
@@ -5980,29 +5431,82 @@
           </a:bodyPr>
           <a:lstStyle/>
           <a:p>
+            <a:pPr algn="l"/>
+            <a:r>
+              <a:rPr sz="1150" b="0" i="0">
+                <a:solidFill>
+                  <a:srgbClr val="202633"/>
+                </a:solidFill>
+                <a:latin typeface="Calibri"/>
+              </a:rPr>
+              <a:t>No model touches the data blind</a:t>
+            </a:r>
+          </a:p>
+        </p:txBody>
+      </p:sp>
+      <p:sp>
+        <p:nvSpPr>
+          <p:cNvPr id="15" name="Oval 14"/>
+          <p:cNvSpPr/>
+          <p:nvPr/>
+        </p:nvSpPr>
+        <p:spPr>
+          <a:xfrm>
+            <a:off x="594360" y="3026664"/>
+            <a:ext cx="292608" cy="292608"/>
+          </a:xfrm>
+          <a:prstGeom prst="ellipse">
+            <a:avLst/>
+          </a:prstGeom>
+          <a:solidFill>
+            <a:srgbClr val="2EC4B6"/>
+          </a:solidFill>
+          <a:ln>
+            <a:noFill/>
+          </a:ln>
+          <a:effectLst/>
+        </p:spPr>
+        <p:style>
+          <a:lnRef idx="1">
+            <a:schemeClr val="accent1"/>
+          </a:lnRef>
+          <a:fillRef idx="3">
+            <a:schemeClr val="accent1"/>
+          </a:fillRef>
+          <a:effectRef idx="2">
+            <a:schemeClr val="accent1"/>
+          </a:effectRef>
+          <a:fontRef idx="minor">
+            <a:schemeClr val="lt1"/>
+          </a:fontRef>
+        </p:style>
+        <p:txBody>
+          <a:bodyPr rtlCol="0" anchor="ctr"/>
+          <a:lstStyle/>
+          <a:p>
             <a:pPr algn="ctr"/>
             <a:r>
-              <a:rPr sz="1450" b="1" i="0">
-                <a:solidFill>
-                  <a:srgbClr val="1B2A4A"/>
-                </a:solidFill>
-                <a:latin typeface="Calibri"/>
-              </a:rPr>
-              <a:t>5. Publish</a:t>
-            </a:r>
-          </a:p>
-        </p:txBody>
-      </p:sp>
-      <p:sp>
-        <p:nvSpPr>
-          <p:cNvPr id="20" name="TextBox 19"/>
+              <a:rPr sz="1400" b="1">
+                <a:solidFill>
+                  <a:srgbClr val="FFFFFF"/>
+                </a:solidFill>
+                <a:latin typeface="Calibri"/>
+              </a:rPr>
+              <a:t>2</a:t>
+            </a:r>
+          </a:p>
+        </p:txBody>
+      </p:sp>
+      <p:sp>
+        <p:nvSpPr>
+          <p:cNvPr id="16" name="TextBox 15"/>
           <p:cNvSpPr txBox="1"/>
           <p:nvPr/>
         </p:nvSpPr>
         <p:spPr>
           <a:xfrm>
-            <a:off x="9454896" y="2633472"/>
-            <a:ext cx="2249424" cy="1371600"/>
+            <a:off x="978408" y="3008376"/>
+            <a:ext cx="4828032" cy="292608"/>
           </a:xfrm>
           <a:prstGeom prst="rect">
             <a:avLst/>
@@ -6015,29 +5519,73 @@
           </a:bodyPr>
           <a:lstStyle/>
           <a:p>
+            <a:pPr algn="l"/>
+            <a:r>
+              <a:rPr sz="1450" b="1" i="0">
+                <a:solidFill>
+                  <a:srgbClr val="1B2A4A"/>
+                </a:solidFill>
+                <a:latin typeface="Calibri"/>
+              </a:rPr>
+              <a:t>Benchmark honestly</a:t>
+            </a:r>
+          </a:p>
+        </p:txBody>
+      </p:sp>
+      <p:sp>
+        <p:nvSpPr>
+          <p:cNvPr id="17" name="Oval 16"/>
+          <p:cNvSpPr/>
+          <p:nvPr/>
+        </p:nvSpPr>
+        <p:spPr>
+          <a:xfrm>
+            <a:off x="667512" y="3456432"/>
+            <a:ext cx="82296" cy="82296"/>
+          </a:xfrm>
+          <a:prstGeom prst="ellipse">
+            <a:avLst/>
+          </a:prstGeom>
+          <a:solidFill>
+            <a:srgbClr val="2EC4B6"/>
+          </a:solidFill>
+          <a:ln>
+            <a:noFill/>
+          </a:ln>
+          <a:effectLst/>
+        </p:spPr>
+        <p:style>
+          <a:lnRef idx="1">
+            <a:schemeClr val="accent1"/>
+          </a:lnRef>
+          <a:fillRef idx="3">
+            <a:schemeClr val="accent1"/>
+          </a:fillRef>
+          <a:effectRef idx="2">
+            <a:schemeClr val="accent1"/>
+          </a:effectRef>
+          <a:fontRef idx="minor">
+            <a:schemeClr val="lt1"/>
+          </a:fontRef>
+        </p:style>
+        <p:txBody>
+          <a:bodyPr rtlCol="0" anchor="ctr"/>
+          <a:lstStyle/>
+          <a:p>
             <a:pPr algn="ctr"/>
-            <a:r>
-              <a:rPr sz="1200" b="0" i="0">
-                <a:solidFill>
-                  <a:srgbClr val="5A6B7D"/>
-                </a:solidFill>
-                <a:latin typeface="Calibri"/>
-              </a:rPr>
-              <a:t>One Excel workbook (forecast, model evidence, rollups, charts) plus a Power BI staffing-gap report.</a:t>
-            </a:r>
-          </a:p>
-        </p:txBody>
-      </p:sp>
-      <p:sp>
-        <p:nvSpPr>
-          <p:cNvPr id="21" name="TextBox 20"/>
+          </a:p>
+        </p:txBody>
+      </p:sp>
+      <p:sp>
+        <p:nvSpPr>
+          <p:cNvPr id="18" name="TextBox 17"/>
           <p:cNvSpPr txBox="1"/>
           <p:nvPr/>
         </p:nvSpPr>
         <p:spPr>
           <a:xfrm>
-            <a:off x="594360" y="6473952"/>
-            <a:ext cx="9144000" cy="320040"/>
+            <a:off x="868680" y="3392424"/>
+            <a:ext cx="4937760" cy="292608"/>
           </a:xfrm>
           <a:prstGeom prst="rect">
             <a:avLst/>
@@ -6052,6 +5600,1490 @@
           <a:p>
             <a:pPr algn="l"/>
             <a:r>
+              <a:rPr sz="1150" b="0" i="0">
+                <a:solidFill>
+                  <a:srgbClr val="202633"/>
+                </a:solidFill>
+                <a:latin typeface="Calibri"/>
+              </a:rPr>
+              <a:t>Naive seasonal baseline: repeat last week</a:t>
+            </a:r>
+          </a:p>
+        </p:txBody>
+      </p:sp>
+      <p:sp>
+        <p:nvSpPr>
+          <p:cNvPr id="19" name="Oval 18"/>
+          <p:cNvSpPr/>
+          <p:nvPr/>
+        </p:nvSpPr>
+        <p:spPr>
+          <a:xfrm>
+            <a:off x="667512" y="3767328"/>
+            <a:ext cx="82296" cy="82296"/>
+          </a:xfrm>
+          <a:prstGeom prst="ellipse">
+            <a:avLst/>
+          </a:prstGeom>
+          <a:solidFill>
+            <a:srgbClr val="2EC4B6"/>
+          </a:solidFill>
+          <a:ln>
+            <a:noFill/>
+          </a:ln>
+          <a:effectLst/>
+        </p:spPr>
+        <p:style>
+          <a:lnRef idx="1">
+            <a:schemeClr val="accent1"/>
+          </a:lnRef>
+          <a:fillRef idx="3">
+            <a:schemeClr val="accent1"/>
+          </a:fillRef>
+          <a:effectRef idx="2">
+            <a:schemeClr val="accent1"/>
+          </a:effectRef>
+          <a:fontRef idx="minor">
+            <a:schemeClr val="lt1"/>
+          </a:fontRef>
+        </p:style>
+        <p:txBody>
+          <a:bodyPr rtlCol="0" anchor="ctr"/>
+          <a:lstStyle/>
+          <a:p>
+            <a:pPr algn="ctr"/>
+          </a:p>
+        </p:txBody>
+      </p:sp>
+      <p:sp>
+        <p:nvSpPr>
+          <p:cNvPr id="20" name="TextBox 19"/>
+          <p:cNvSpPr txBox="1"/>
+          <p:nvPr/>
+        </p:nvSpPr>
+        <p:spPr>
+          <a:xfrm>
+            <a:off x="868680" y="3703320"/>
+            <a:ext cx="4937760" cy="292608"/>
+          </a:xfrm>
+          <a:prstGeom prst="rect">
+            <a:avLst/>
+          </a:prstGeom>
+          <a:noFill/>
+        </p:spPr>
+        <p:txBody>
+          <a:bodyPr wrap="square">
+            <a:spAutoFit/>
+          </a:bodyPr>
+          <a:lstStyle/>
+          <a:p>
+            <a:pPr algn="l"/>
+            <a:r>
+              <a:rPr sz="1150" b="0" i="0">
+                <a:solidFill>
+                  <a:srgbClr val="202633"/>
+                </a:solidFill>
+                <a:latin typeface="Calibri"/>
+              </a:rPr>
+              <a:t>Every candidate tested on a 60-day holdout</a:t>
+            </a:r>
+          </a:p>
+        </p:txBody>
+      </p:sp>
+      <p:sp>
+        <p:nvSpPr>
+          <p:cNvPr id="21" name="Oval 20"/>
+          <p:cNvSpPr/>
+          <p:nvPr/>
+        </p:nvSpPr>
+        <p:spPr>
+          <a:xfrm>
+            <a:off x="667512" y="4078224"/>
+            <a:ext cx="82296" cy="82296"/>
+          </a:xfrm>
+          <a:prstGeom prst="ellipse">
+            <a:avLst/>
+          </a:prstGeom>
+          <a:solidFill>
+            <a:srgbClr val="2EC4B6"/>
+          </a:solidFill>
+          <a:ln>
+            <a:noFill/>
+          </a:ln>
+          <a:effectLst/>
+        </p:spPr>
+        <p:style>
+          <a:lnRef idx="1">
+            <a:schemeClr val="accent1"/>
+          </a:lnRef>
+          <a:fillRef idx="3">
+            <a:schemeClr val="accent1"/>
+          </a:fillRef>
+          <a:effectRef idx="2">
+            <a:schemeClr val="accent1"/>
+          </a:effectRef>
+          <a:fontRef idx="minor">
+            <a:schemeClr val="lt1"/>
+          </a:fontRef>
+        </p:style>
+        <p:txBody>
+          <a:bodyPr rtlCol="0" anchor="ctr"/>
+          <a:lstStyle/>
+          <a:p>
+            <a:pPr algn="ctr"/>
+          </a:p>
+        </p:txBody>
+      </p:sp>
+      <p:sp>
+        <p:nvSpPr>
+          <p:cNvPr id="22" name="TextBox 21"/>
+          <p:cNvSpPr txBox="1"/>
+          <p:nvPr/>
+        </p:nvSpPr>
+        <p:spPr>
+          <a:xfrm>
+            <a:off x="868680" y="4014216"/>
+            <a:ext cx="4937760" cy="292608"/>
+          </a:xfrm>
+          <a:prstGeom prst="rect">
+            <a:avLst/>
+          </a:prstGeom>
+          <a:noFill/>
+        </p:spPr>
+        <p:txBody>
+          <a:bodyPr wrap="square">
+            <a:spAutoFit/>
+          </a:bodyPr>
+          <a:lstStyle/>
+          <a:p>
+            <a:pPr algn="l"/>
+            <a:r>
+              <a:rPr sz="1150" b="0" i="0">
+                <a:solidFill>
+                  <a:srgbClr val="202633"/>
+                </a:solidFill>
+                <a:latin typeface="Calibri"/>
+              </a:rPr>
+              <a:t>A model only ships if it beats the baseline</a:t>
+            </a:r>
+          </a:p>
+        </p:txBody>
+      </p:sp>
+      <p:sp>
+        <p:nvSpPr>
+          <p:cNvPr id="23" name="Oval 22"/>
+          <p:cNvSpPr/>
+          <p:nvPr/>
+        </p:nvSpPr>
+        <p:spPr>
+          <a:xfrm>
+            <a:off x="667512" y="4389120"/>
+            <a:ext cx="82296" cy="82296"/>
+          </a:xfrm>
+          <a:prstGeom prst="ellipse">
+            <a:avLst/>
+          </a:prstGeom>
+          <a:solidFill>
+            <a:srgbClr val="2EC4B6"/>
+          </a:solidFill>
+          <a:ln>
+            <a:noFill/>
+          </a:ln>
+          <a:effectLst/>
+        </p:spPr>
+        <p:style>
+          <a:lnRef idx="1">
+            <a:schemeClr val="accent1"/>
+          </a:lnRef>
+          <a:fillRef idx="3">
+            <a:schemeClr val="accent1"/>
+          </a:fillRef>
+          <a:effectRef idx="2">
+            <a:schemeClr val="accent1"/>
+          </a:effectRef>
+          <a:fontRef idx="minor">
+            <a:schemeClr val="lt1"/>
+          </a:fontRef>
+        </p:style>
+        <p:txBody>
+          <a:bodyPr rtlCol="0" anchor="ctr"/>
+          <a:lstStyle/>
+          <a:p>
+            <a:pPr algn="ctr"/>
+          </a:p>
+        </p:txBody>
+      </p:sp>
+      <p:sp>
+        <p:nvSpPr>
+          <p:cNvPr id="24" name="TextBox 23"/>
+          <p:cNvSpPr txBox="1"/>
+          <p:nvPr/>
+        </p:nvSpPr>
+        <p:spPr>
+          <a:xfrm>
+            <a:off x="868680" y="4325112"/>
+            <a:ext cx="4937760" cy="292608"/>
+          </a:xfrm>
+          <a:prstGeom prst="rect">
+            <a:avLst/>
+          </a:prstGeom>
+          <a:noFill/>
+        </p:spPr>
+        <p:txBody>
+          <a:bodyPr wrap="square">
+            <a:spAutoFit/>
+          </a:bodyPr>
+          <a:lstStyle/>
+          <a:p>
+            <a:pPr algn="l"/>
+            <a:r>
+              <a:rPr sz="1150" b="0" i="0">
+                <a:solidFill>
+                  <a:srgbClr val="202633"/>
+                </a:solidFill>
+                <a:latin typeface="Calibri"/>
+              </a:rPr>
+              <a:t>Script asserts this — never silently skipped</a:t>
+            </a:r>
+          </a:p>
+        </p:txBody>
+      </p:sp>
+      <p:sp>
+        <p:nvSpPr>
+          <p:cNvPr id="25" name="Oval 24"/>
+          <p:cNvSpPr/>
+          <p:nvPr/>
+        </p:nvSpPr>
+        <p:spPr>
+          <a:xfrm>
+            <a:off x="594360" y="4636008"/>
+            <a:ext cx="292608" cy="292608"/>
+          </a:xfrm>
+          <a:prstGeom prst="ellipse">
+            <a:avLst/>
+          </a:prstGeom>
+          <a:solidFill>
+            <a:srgbClr val="2EC4B6"/>
+          </a:solidFill>
+          <a:ln>
+            <a:noFill/>
+          </a:ln>
+          <a:effectLst/>
+        </p:spPr>
+        <p:style>
+          <a:lnRef idx="1">
+            <a:schemeClr val="accent1"/>
+          </a:lnRef>
+          <a:fillRef idx="3">
+            <a:schemeClr val="accent1"/>
+          </a:fillRef>
+          <a:effectRef idx="2">
+            <a:schemeClr val="accent1"/>
+          </a:effectRef>
+          <a:fontRef idx="minor">
+            <a:schemeClr val="lt1"/>
+          </a:fontRef>
+        </p:style>
+        <p:txBody>
+          <a:bodyPr rtlCol="0" anchor="ctr"/>
+          <a:lstStyle/>
+          <a:p>
+            <a:pPr algn="ctr"/>
+            <a:r>
+              <a:rPr sz="1400" b="1">
+                <a:solidFill>
+                  <a:srgbClr val="FFFFFF"/>
+                </a:solidFill>
+                <a:latin typeface="Calibri"/>
+              </a:rPr>
+              <a:t>3</a:t>
+            </a:r>
+          </a:p>
+        </p:txBody>
+      </p:sp>
+      <p:sp>
+        <p:nvSpPr>
+          <p:cNvPr id="26" name="TextBox 25"/>
+          <p:cNvSpPr txBox="1"/>
+          <p:nvPr/>
+        </p:nvSpPr>
+        <p:spPr>
+          <a:xfrm>
+            <a:off x="978408" y="4617720"/>
+            <a:ext cx="4828032" cy="292608"/>
+          </a:xfrm>
+          <a:prstGeom prst="rect">
+            <a:avLst/>
+          </a:prstGeom>
+          <a:noFill/>
+        </p:spPr>
+        <p:txBody>
+          <a:bodyPr wrap="square">
+            <a:spAutoFit/>
+          </a:bodyPr>
+          <a:lstStyle/>
+          <a:p>
+            <a:pPr algn="l"/>
+            <a:r>
+              <a:rPr sz="1450" b="1" i="0">
+                <a:solidFill>
+                  <a:srgbClr val="1B2A4A"/>
+                </a:solidFill>
+                <a:latin typeface="Calibri"/>
+              </a:rPr>
+              <a:t>Holt-Winters</a:t>
+            </a:r>
+          </a:p>
+        </p:txBody>
+      </p:sp>
+      <p:sp>
+        <p:nvSpPr>
+          <p:cNvPr id="27" name="Oval 26"/>
+          <p:cNvSpPr/>
+          <p:nvPr/>
+        </p:nvSpPr>
+        <p:spPr>
+          <a:xfrm>
+            <a:off x="667512" y="5065776"/>
+            <a:ext cx="82296" cy="82296"/>
+          </a:xfrm>
+          <a:prstGeom prst="ellipse">
+            <a:avLst/>
+          </a:prstGeom>
+          <a:solidFill>
+            <a:srgbClr val="2EC4B6"/>
+          </a:solidFill>
+          <a:ln>
+            <a:noFill/>
+          </a:ln>
+          <a:effectLst/>
+        </p:spPr>
+        <p:style>
+          <a:lnRef idx="1">
+            <a:schemeClr val="accent1"/>
+          </a:lnRef>
+          <a:fillRef idx="3">
+            <a:schemeClr val="accent1"/>
+          </a:fillRef>
+          <a:effectRef idx="2">
+            <a:schemeClr val="accent1"/>
+          </a:effectRef>
+          <a:fontRef idx="minor">
+            <a:schemeClr val="lt1"/>
+          </a:fontRef>
+        </p:style>
+        <p:txBody>
+          <a:bodyPr rtlCol="0" anchor="ctr"/>
+          <a:lstStyle/>
+          <a:p>
+            <a:pPr algn="ctr"/>
+          </a:p>
+        </p:txBody>
+      </p:sp>
+      <p:sp>
+        <p:nvSpPr>
+          <p:cNvPr id="28" name="TextBox 27"/>
+          <p:cNvSpPr txBox="1"/>
+          <p:nvPr/>
+        </p:nvSpPr>
+        <p:spPr>
+          <a:xfrm>
+            <a:off x="868680" y="5001768"/>
+            <a:ext cx="4937760" cy="292608"/>
+          </a:xfrm>
+          <a:prstGeom prst="rect">
+            <a:avLst/>
+          </a:prstGeom>
+          <a:noFill/>
+        </p:spPr>
+        <p:txBody>
+          <a:bodyPr wrap="square">
+            <a:spAutoFit/>
+          </a:bodyPr>
+          <a:lstStyle/>
+          <a:p>
+            <a:pPr algn="l"/>
+            <a:r>
+              <a:rPr sz="1150" b="0" i="0">
+                <a:solidFill>
+                  <a:srgbClr val="202633"/>
+                </a:solidFill>
+                <a:latin typeface="Calibri"/>
+              </a:rPr>
+              <a:t>Models trend + weekly seasonality explicitly</a:t>
+            </a:r>
+          </a:p>
+        </p:txBody>
+      </p:sp>
+      <p:sp>
+        <p:nvSpPr>
+          <p:cNvPr id="29" name="Oval 28"/>
+          <p:cNvSpPr/>
+          <p:nvPr/>
+        </p:nvSpPr>
+        <p:spPr>
+          <a:xfrm>
+            <a:off x="667512" y="5376672"/>
+            <a:ext cx="82296" cy="82296"/>
+          </a:xfrm>
+          <a:prstGeom prst="ellipse">
+            <a:avLst/>
+          </a:prstGeom>
+          <a:solidFill>
+            <a:srgbClr val="2EC4B6"/>
+          </a:solidFill>
+          <a:ln>
+            <a:noFill/>
+          </a:ln>
+          <a:effectLst/>
+        </p:spPr>
+        <p:style>
+          <a:lnRef idx="1">
+            <a:schemeClr val="accent1"/>
+          </a:lnRef>
+          <a:fillRef idx="3">
+            <a:schemeClr val="accent1"/>
+          </a:fillRef>
+          <a:effectRef idx="2">
+            <a:schemeClr val="accent1"/>
+          </a:effectRef>
+          <a:fontRef idx="minor">
+            <a:schemeClr val="lt1"/>
+          </a:fontRef>
+        </p:style>
+        <p:txBody>
+          <a:bodyPr rtlCol="0" anchor="ctr"/>
+          <a:lstStyle/>
+          <a:p>
+            <a:pPr algn="ctr"/>
+          </a:p>
+        </p:txBody>
+      </p:sp>
+      <p:sp>
+        <p:nvSpPr>
+          <p:cNvPr id="30" name="TextBox 29"/>
+          <p:cNvSpPr txBox="1"/>
+          <p:nvPr/>
+        </p:nvSpPr>
+        <p:spPr>
+          <a:xfrm>
+            <a:off x="868680" y="5312664"/>
+            <a:ext cx="4937760" cy="292608"/>
+          </a:xfrm>
+          <a:prstGeom prst="rect">
+            <a:avLst/>
+          </a:prstGeom>
+          <a:noFill/>
+        </p:spPr>
+        <p:txBody>
+          <a:bodyPr wrap="square">
+            <a:spAutoFit/>
+          </a:bodyPr>
+          <a:lstStyle/>
+          <a:p>
+            <a:pPr algn="l"/>
+            <a:r>
+              <a:rPr sz="1150" b="0" i="0">
+                <a:solidFill>
+                  <a:srgbClr val="202633"/>
+                </a:solidFill>
+                <a:latin typeface="Calibri"/>
+              </a:rPr>
+              <a:t>Lightweight, explainable — not a black box</a:t>
+            </a:r>
+          </a:p>
+        </p:txBody>
+      </p:sp>
+      <p:sp>
+        <p:nvSpPr>
+          <p:cNvPr id="31" name="Oval 30"/>
+          <p:cNvSpPr/>
+          <p:nvPr/>
+        </p:nvSpPr>
+        <p:spPr>
+          <a:xfrm>
+            <a:off x="667512" y="5687568"/>
+            <a:ext cx="82296" cy="82296"/>
+          </a:xfrm>
+          <a:prstGeom prst="ellipse">
+            <a:avLst/>
+          </a:prstGeom>
+          <a:solidFill>
+            <a:srgbClr val="2EC4B6"/>
+          </a:solidFill>
+          <a:ln>
+            <a:noFill/>
+          </a:ln>
+          <a:effectLst/>
+        </p:spPr>
+        <p:style>
+          <a:lnRef idx="1">
+            <a:schemeClr val="accent1"/>
+          </a:lnRef>
+          <a:fillRef idx="3">
+            <a:schemeClr val="accent1"/>
+          </a:fillRef>
+          <a:effectRef idx="2">
+            <a:schemeClr val="accent1"/>
+          </a:effectRef>
+          <a:fontRef idx="minor">
+            <a:schemeClr val="lt1"/>
+          </a:fontRef>
+        </p:style>
+        <p:txBody>
+          <a:bodyPr rtlCol="0" anchor="ctr"/>
+          <a:lstStyle/>
+          <a:p>
+            <a:pPr algn="ctr"/>
+          </a:p>
+        </p:txBody>
+      </p:sp>
+      <p:sp>
+        <p:nvSpPr>
+          <p:cNvPr id="32" name="TextBox 31"/>
+          <p:cNvSpPr txBox="1"/>
+          <p:nvPr/>
+        </p:nvSpPr>
+        <p:spPr>
+          <a:xfrm>
+            <a:off x="868680" y="5623560"/>
+            <a:ext cx="4937760" cy="292608"/>
+          </a:xfrm>
+          <a:prstGeom prst="rect">
+            <a:avLst/>
+          </a:prstGeom>
+          <a:noFill/>
+        </p:spPr>
+        <p:txBody>
+          <a:bodyPr wrap="square">
+            <a:spAutoFit/>
+          </a:bodyPr>
+          <a:lstStyle/>
+          <a:p>
+            <a:pPr algn="l"/>
+            <a:r>
+              <a:rPr sz="1150" b="0" i="0">
+                <a:solidFill>
+                  <a:srgbClr val="202633"/>
+                </a:solidFill>
+                <a:latin typeface="Calibri"/>
+              </a:rPr>
+              <a:t>Forecasts volume 42 days forward</a:t>
+            </a:r>
+          </a:p>
+        </p:txBody>
+      </p:sp>
+      <p:sp>
+        <p:nvSpPr>
+          <p:cNvPr id="33" name="Oval 32"/>
+          <p:cNvSpPr/>
+          <p:nvPr/>
+        </p:nvSpPr>
+        <p:spPr>
+          <a:xfrm>
+            <a:off x="667512" y="5998464"/>
+            <a:ext cx="82296" cy="82296"/>
+          </a:xfrm>
+          <a:prstGeom prst="ellipse">
+            <a:avLst/>
+          </a:prstGeom>
+          <a:solidFill>
+            <a:srgbClr val="2EC4B6"/>
+          </a:solidFill>
+          <a:ln>
+            <a:noFill/>
+          </a:ln>
+          <a:effectLst/>
+        </p:spPr>
+        <p:style>
+          <a:lnRef idx="1">
+            <a:schemeClr val="accent1"/>
+          </a:lnRef>
+          <a:fillRef idx="3">
+            <a:schemeClr val="accent1"/>
+          </a:fillRef>
+          <a:effectRef idx="2">
+            <a:schemeClr val="accent1"/>
+          </a:effectRef>
+          <a:fontRef idx="minor">
+            <a:schemeClr val="lt1"/>
+          </a:fontRef>
+        </p:style>
+        <p:txBody>
+          <a:bodyPr rtlCol="0" anchor="ctr"/>
+          <a:lstStyle/>
+          <a:p>
+            <a:pPr algn="ctr"/>
+          </a:p>
+        </p:txBody>
+      </p:sp>
+      <p:sp>
+        <p:nvSpPr>
+          <p:cNvPr id="34" name="TextBox 33"/>
+          <p:cNvSpPr txBox="1"/>
+          <p:nvPr/>
+        </p:nvSpPr>
+        <p:spPr>
+          <a:xfrm>
+            <a:off x="868680" y="5934456"/>
+            <a:ext cx="4937760" cy="292608"/>
+          </a:xfrm>
+          <a:prstGeom prst="rect">
+            <a:avLst/>
+          </a:prstGeom>
+          <a:noFill/>
+        </p:spPr>
+        <p:txBody>
+          <a:bodyPr wrap="square">
+            <a:spAutoFit/>
+          </a:bodyPr>
+          <a:lstStyle/>
+          <a:p>
+            <a:pPr algn="l"/>
+            <a:r>
+              <a:rPr sz="1150" b="0" i="0">
+                <a:solidFill>
+                  <a:srgbClr val="202633"/>
+                </a:solidFill>
+                <a:latin typeface="Calibri"/>
+              </a:rPr>
+              <a:t>Beat the baseline: 18.8% vs 20.1% MAPE</a:t>
+            </a:r>
+          </a:p>
+        </p:txBody>
+      </p:sp>
+      <p:sp>
+        <p:nvSpPr>
+          <p:cNvPr id="35" name="Oval 34"/>
+          <p:cNvSpPr/>
+          <p:nvPr/>
+        </p:nvSpPr>
+        <p:spPr>
+          <a:xfrm>
+            <a:off x="6172200" y="2221992"/>
+            <a:ext cx="292608" cy="292608"/>
+          </a:xfrm>
+          <a:prstGeom prst="ellipse">
+            <a:avLst/>
+          </a:prstGeom>
+          <a:solidFill>
+            <a:srgbClr val="2EC4B6"/>
+          </a:solidFill>
+          <a:ln>
+            <a:noFill/>
+          </a:ln>
+          <a:effectLst/>
+        </p:spPr>
+        <p:style>
+          <a:lnRef idx="1">
+            <a:schemeClr val="accent1"/>
+          </a:lnRef>
+          <a:fillRef idx="3">
+            <a:schemeClr val="accent1"/>
+          </a:fillRef>
+          <a:effectRef idx="2">
+            <a:schemeClr val="accent1"/>
+          </a:effectRef>
+          <a:fontRef idx="minor">
+            <a:schemeClr val="lt1"/>
+          </a:fontRef>
+        </p:style>
+        <p:txBody>
+          <a:bodyPr rtlCol="0" anchor="ctr"/>
+          <a:lstStyle/>
+          <a:p>
+            <a:pPr algn="ctr"/>
+            <a:r>
+              <a:rPr sz="1400" b="1">
+                <a:solidFill>
+                  <a:srgbClr val="FFFFFF"/>
+                </a:solidFill>
+                <a:latin typeface="Calibri"/>
+              </a:rPr>
+              <a:t>4</a:t>
+            </a:r>
+          </a:p>
+        </p:txBody>
+      </p:sp>
+      <p:sp>
+        <p:nvSpPr>
+          <p:cNvPr id="36" name="TextBox 35"/>
+          <p:cNvSpPr txBox="1"/>
+          <p:nvPr/>
+        </p:nvSpPr>
+        <p:spPr>
+          <a:xfrm>
+            <a:off x="6556248" y="2203704"/>
+            <a:ext cx="4828032" cy="292608"/>
+          </a:xfrm>
+          <a:prstGeom prst="rect">
+            <a:avLst/>
+          </a:prstGeom>
+          <a:noFill/>
+        </p:spPr>
+        <p:txBody>
+          <a:bodyPr wrap="square">
+            <a:spAutoFit/>
+          </a:bodyPr>
+          <a:lstStyle/>
+          <a:p>
+            <a:pPr algn="l"/>
+            <a:r>
+              <a:rPr sz="1450" b="1" i="0">
+                <a:solidFill>
+                  <a:srgbClr val="1B2A4A"/>
+                </a:solidFill>
+                <a:latin typeface="Calibri"/>
+              </a:rPr>
+              <a:t>Volume -&gt; FTE</a:t>
+            </a:r>
+          </a:p>
+        </p:txBody>
+      </p:sp>
+      <p:sp>
+        <p:nvSpPr>
+          <p:cNvPr id="37" name="Oval 36"/>
+          <p:cNvSpPr/>
+          <p:nvPr/>
+        </p:nvSpPr>
+        <p:spPr>
+          <a:xfrm>
+            <a:off x="6245352" y="2651760"/>
+            <a:ext cx="82296" cy="82296"/>
+          </a:xfrm>
+          <a:prstGeom prst="ellipse">
+            <a:avLst/>
+          </a:prstGeom>
+          <a:solidFill>
+            <a:srgbClr val="2EC4B6"/>
+          </a:solidFill>
+          <a:ln>
+            <a:noFill/>
+          </a:ln>
+          <a:effectLst/>
+        </p:spPr>
+        <p:style>
+          <a:lnRef idx="1">
+            <a:schemeClr val="accent1"/>
+          </a:lnRef>
+          <a:fillRef idx="3">
+            <a:schemeClr val="accent1"/>
+          </a:fillRef>
+          <a:effectRef idx="2">
+            <a:schemeClr val="accent1"/>
+          </a:effectRef>
+          <a:fontRef idx="minor">
+            <a:schemeClr val="lt1"/>
+          </a:fontRef>
+        </p:style>
+        <p:txBody>
+          <a:bodyPr rtlCol="0" anchor="ctr"/>
+          <a:lstStyle/>
+          <a:p>
+            <a:pPr algn="ctr"/>
+          </a:p>
+        </p:txBody>
+      </p:sp>
+      <p:sp>
+        <p:nvSpPr>
+          <p:cNvPr id="38" name="TextBox 37"/>
+          <p:cNvSpPr txBox="1"/>
+          <p:nvPr/>
+        </p:nvSpPr>
+        <p:spPr>
+          <a:xfrm>
+            <a:off x="6446520" y="2587752"/>
+            <a:ext cx="4937760" cy="292608"/>
+          </a:xfrm>
+          <a:prstGeom prst="rect">
+            <a:avLst/>
+          </a:prstGeom>
+          <a:noFill/>
+        </p:spPr>
+        <p:txBody>
+          <a:bodyPr wrap="square">
+            <a:spAutoFit/>
+          </a:bodyPr>
+          <a:lstStyle/>
+          <a:p>
+            <a:pPr algn="l"/>
+            <a:r>
+              <a:rPr sz="1150" b="0" i="0">
+                <a:solidFill>
+                  <a:srgbClr val="202633"/>
+                </a:solidFill>
+                <a:latin typeface="Calibri"/>
+              </a:rPr>
+              <a:t>Converts volume to agent-hours via handle time</a:t>
+            </a:r>
+          </a:p>
+        </p:txBody>
+      </p:sp>
+      <p:sp>
+        <p:nvSpPr>
+          <p:cNvPr id="39" name="Oval 38"/>
+          <p:cNvSpPr/>
+          <p:nvPr/>
+        </p:nvSpPr>
+        <p:spPr>
+          <a:xfrm>
+            <a:off x="6245352" y="2962656"/>
+            <a:ext cx="82296" cy="82296"/>
+          </a:xfrm>
+          <a:prstGeom prst="ellipse">
+            <a:avLst/>
+          </a:prstGeom>
+          <a:solidFill>
+            <a:srgbClr val="2EC4B6"/>
+          </a:solidFill>
+          <a:ln>
+            <a:noFill/>
+          </a:ln>
+          <a:effectLst/>
+        </p:spPr>
+        <p:style>
+          <a:lnRef idx="1">
+            <a:schemeClr val="accent1"/>
+          </a:lnRef>
+          <a:fillRef idx="3">
+            <a:schemeClr val="accent1"/>
+          </a:fillRef>
+          <a:effectRef idx="2">
+            <a:schemeClr val="accent1"/>
+          </a:effectRef>
+          <a:fontRef idx="minor">
+            <a:schemeClr val="lt1"/>
+          </a:fontRef>
+        </p:style>
+        <p:txBody>
+          <a:bodyPr rtlCol="0" anchor="ctr"/>
+          <a:lstStyle/>
+          <a:p>
+            <a:pPr algn="ctr"/>
+          </a:p>
+        </p:txBody>
+      </p:sp>
+      <p:sp>
+        <p:nvSpPr>
+          <p:cNvPr id="40" name="TextBox 39"/>
+          <p:cNvSpPr txBox="1"/>
+          <p:nvPr/>
+        </p:nvSpPr>
+        <p:spPr>
+          <a:xfrm>
+            <a:off x="6446520" y="2898648"/>
+            <a:ext cx="4937760" cy="292608"/>
+          </a:xfrm>
+          <a:prstGeom prst="rect">
+            <a:avLst/>
+          </a:prstGeom>
+          <a:noFill/>
+        </p:spPr>
+        <p:txBody>
+          <a:bodyPr wrap="square">
+            <a:spAutoFit/>
+          </a:bodyPr>
+          <a:lstStyle/>
+          <a:p>
+            <a:pPr algn="l"/>
+            <a:r>
+              <a:rPr sz="1150" b="0" i="0">
+                <a:solidFill>
+                  <a:srgbClr val="202633"/>
+                </a:solidFill>
+                <a:latin typeface="Calibri"/>
+              </a:rPr>
+              <a:t>Uses the roster's REAL shrinkage %, not a guess</a:t>
+            </a:r>
+          </a:p>
+        </p:txBody>
+      </p:sp>
+      <p:sp>
+        <p:nvSpPr>
+          <p:cNvPr id="41" name="Oval 40"/>
+          <p:cNvSpPr/>
+          <p:nvPr/>
+        </p:nvSpPr>
+        <p:spPr>
+          <a:xfrm>
+            <a:off x="6245352" y="3273552"/>
+            <a:ext cx="82296" cy="82296"/>
+          </a:xfrm>
+          <a:prstGeom prst="ellipse">
+            <a:avLst/>
+          </a:prstGeom>
+          <a:solidFill>
+            <a:srgbClr val="2EC4B6"/>
+          </a:solidFill>
+          <a:ln>
+            <a:noFill/>
+          </a:ln>
+          <a:effectLst/>
+        </p:spPr>
+        <p:style>
+          <a:lnRef idx="1">
+            <a:schemeClr val="accent1"/>
+          </a:lnRef>
+          <a:fillRef idx="3">
+            <a:schemeClr val="accent1"/>
+          </a:fillRef>
+          <a:effectRef idx="2">
+            <a:schemeClr val="accent1"/>
+          </a:effectRef>
+          <a:fontRef idx="minor">
+            <a:schemeClr val="lt1"/>
+          </a:fontRef>
+        </p:style>
+        <p:txBody>
+          <a:bodyPr rtlCol="0" anchor="ctr"/>
+          <a:lstStyle/>
+          <a:p>
+            <a:pPr algn="ctr"/>
+          </a:p>
+        </p:txBody>
+      </p:sp>
+      <p:sp>
+        <p:nvSpPr>
+          <p:cNvPr id="42" name="TextBox 41"/>
+          <p:cNvSpPr txBox="1"/>
+          <p:nvPr/>
+        </p:nvSpPr>
+        <p:spPr>
+          <a:xfrm>
+            <a:off x="6446520" y="3209544"/>
+            <a:ext cx="4937760" cy="292608"/>
+          </a:xfrm>
+          <a:prstGeom prst="rect">
+            <a:avLst/>
+          </a:prstGeom>
+          <a:noFill/>
+        </p:spPr>
+        <p:txBody>
+          <a:bodyPr wrap="square">
+            <a:spAutoFit/>
+          </a:bodyPr>
+          <a:lstStyle/>
+          <a:p>
+            <a:pPr algn="l"/>
+            <a:r>
+              <a:rPr sz="1150" b="0" i="0">
+                <a:solidFill>
+                  <a:srgbClr val="202633"/>
+                </a:solidFill>
+                <a:latin typeface="Calibri"/>
+              </a:rPr>
+              <a:t>Compares required FTE to available FTE</a:t>
+            </a:r>
+          </a:p>
+        </p:txBody>
+      </p:sp>
+      <p:sp>
+        <p:nvSpPr>
+          <p:cNvPr id="43" name="Oval 42"/>
+          <p:cNvSpPr/>
+          <p:nvPr/>
+        </p:nvSpPr>
+        <p:spPr>
+          <a:xfrm>
+            <a:off x="6245352" y="3584448"/>
+            <a:ext cx="82296" cy="82296"/>
+          </a:xfrm>
+          <a:prstGeom prst="ellipse">
+            <a:avLst/>
+          </a:prstGeom>
+          <a:solidFill>
+            <a:srgbClr val="2EC4B6"/>
+          </a:solidFill>
+          <a:ln>
+            <a:noFill/>
+          </a:ln>
+          <a:effectLst/>
+        </p:spPr>
+        <p:style>
+          <a:lnRef idx="1">
+            <a:schemeClr val="accent1"/>
+          </a:lnRef>
+          <a:fillRef idx="3">
+            <a:schemeClr val="accent1"/>
+          </a:fillRef>
+          <a:effectRef idx="2">
+            <a:schemeClr val="accent1"/>
+          </a:effectRef>
+          <a:fontRef idx="minor">
+            <a:schemeClr val="lt1"/>
+          </a:fontRef>
+        </p:style>
+        <p:txBody>
+          <a:bodyPr rtlCol="0" anchor="ctr"/>
+          <a:lstStyle/>
+          <a:p>
+            <a:pPr algn="ctr"/>
+          </a:p>
+        </p:txBody>
+      </p:sp>
+      <p:sp>
+        <p:nvSpPr>
+          <p:cNvPr id="44" name="TextBox 43"/>
+          <p:cNvSpPr txBox="1"/>
+          <p:nvPr/>
+        </p:nvSpPr>
+        <p:spPr>
+          <a:xfrm>
+            <a:off x="6446520" y="3520440"/>
+            <a:ext cx="4937760" cy="292608"/>
+          </a:xfrm>
+          <a:prstGeom prst="rect">
+            <a:avLst/>
+          </a:prstGeom>
+          <a:noFill/>
+        </p:spPr>
+        <p:txBody>
+          <a:bodyPr wrap="square">
+            <a:spAutoFit/>
+          </a:bodyPr>
+          <a:lstStyle/>
+          <a:p>
+            <a:pPr algn="l"/>
+            <a:r>
+              <a:rPr sz="1150" b="0" i="0">
+                <a:solidFill>
+                  <a:srgbClr val="202633"/>
+                </a:solidFill>
+                <a:latin typeface="Calibri"/>
+              </a:rPr>
+              <a:t>Flags the exact day staffing runs short</a:t>
+            </a:r>
+          </a:p>
+        </p:txBody>
+      </p:sp>
+      <p:sp>
+        <p:nvSpPr>
+          <p:cNvPr id="45" name="Oval 44"/>
+          <p:cNvSpPr/>
+          <p:nvPr/>
+        </p:nvSpPr>
+        <p:spPr>
+          <a:xfrm>
+            <a:off x="6172200" y="3831336"/>
+            <a:ext cx="292608" cy="292608"/>
+          </a:xfrm>
+          <a:prstGeom prst="ellipse">
+            <a:avLst/>
+          </a:prstGeom>
+          <a:solidFill>
+            <a:srgbClr val="2EC4B6"/>
+          </a:solidFill>
+          <a:ln>
+            <a:noFill/>
+          </a:ln>
+          <a:effectLst/>
+        </p:spPr>
+        <p:style>
+          <a:lnRef idx="1">
+            <a:schemeClr val="accent1"/>
+          </a:lnRef>
+          <a:fillRef idx="3">
+            <a:schemeClr val="accent1"/>
+          </a:fillRef>
+          <a:effectRef idx="2">
+            <a:schemeClr val="accent1"/>
+          </a:effectRef>
+          <a:fontRef idx="minor">
+            <a:schemeClr val="lt1"/>
+          </a:fontRef>
+        </p:style>
+        <p:txBody>
+          <a:bodyPr rtlCol="0" anchor="ctr"/>
+          <a:lstStyle/>
+          <a:p>
+            <a:pPr algn="ctr"/>
+            <a:r>
+              <a:rPr sz="1400" b="1">
+                <a:solidFill>
+                  <a:srgbClr val="FFFFFF"/>
+                </a:solidFill>
+                <a:latin typeface="Calibri"/>
+              </a:rPr>
+              <a:t>5</a:t>
+            </a:r>
+          </a:p>
+        </p:txBody>
+      </p:sp>
+      <p:sp>
+        <p:nvSpPr>
+          <p:cNvPr id="46" name="TextBox 45"/>
+          <p:cNvSpPr txBox="1"/>
+          <p:nvPr/>
+        </p:nvSpPr>
+        <p:spPr>
+          <a:xfrm>
+            <a:off x="6556248" y="3813048"/>
+            <a:ext cx="4828032" cy="292608"/>
+          </a:xfrm>
+          <a:prstGeom prst="rect">
+            <a:avLst/>
+          </a:prstGeom>
+          <a:noFill/>
+        </p:spPr>
+        <p:txBody>
+          <a:bodyPr wrap="square">
+            <a:spAutoFit/>
+          </a:bodyPr>
+          <a:lstStyle/>
+          <a:p>
+            <a:pPr algn="l"/>
+            <a:r>
+              <a:rPr sz="1450" b="1" i="0">
+                <a:solidFill>
+                  <a:srgbClr val="1B2A4A"/>
+                </a:solidFill>
+                <a:latin typeface="Calibri"/>
+              </a:rPr>
+              <a:t>Publish</a:t>
+            </a:r>
+          </a:p>
+        </p:txBody>
+      </p:sp>
+      <p:sp>
+        <p:nvSpPr>
+          <p:cNvPr id="47" name="Oval 46"/>
+          <p:cNvSpPr/>
+          <p:nvPr/>
+        </p:nvSpPr>
+        <p:spPr>
+          <a:xfrm>
+            <a:off x="6245352" y="4261104"/>
+            <a:ext cx="82296" cy="82296"/>
+          </a:xfrm>
+          <a:prstGeom prst="ellipse">
+            <a:avLst/>
+          </a:prstGeom>
+          <a:solidFill>
+            <a:srgbClr val="2EC4B6"/>
+          </a:solidFill>
+          <a:ln>
+            <a:noFill/>
+          </a:ln>
+          <a:effectLst/>
+        </p:spPr>
+        <p:style>
+          <a:lnRef idx="1">
+            <a:schemeClr val="accent1"/>
+          </a:lnRef>
+          <a:fillRef idx="3">
+            <a:schemeClr val="accent1"/>
+          </a:fillRef>
+          <a:effectRef idx="2">
+            <a:schemeClr val="accent1"/>
+          </a:effectRef>
+          <a:fontRef idx="minor">
+            <a:schemeClr val="lt1"/>
+          </a:fontRef>
+        </p:style>
+        <p:txBody>
+          <a:bodyPr rtlCol="0" anchor="ctr"/>
+          <a:lstStyle/>
+          <a:p>
+            <a:pPr algn="ctr"/>
+          </a:p>
+        </p:txBody>
+      </p:sp>
+      <p:sp>
+        <p:nvSpPr>
+          <p:cNvPr id="48" name="TextBox 47"/>
+          <p:cNvSpPr txBox="1"/>
+          <p:nvPr/>
+        </p:nvSpPr>
+        <p:spPr>
+          <a:xfrm>
+            <a:off x="6446520" y="4197096"/>
+            <a:ext cx="4937760" cy="292608"/>
+          </a:xfrm>
+          <a:prstGeom prst="rect">
+            <a:avLst/>
+          </a:prstGeom>
+          <a:noFill/>
+        </p:spPr>
+        <p:txBody>
+          <a:bodyPr wrap="square">
+            <a:spAutoFit/>
+          </a:bodyPr>
+          <a:lstStyle/>
+          <a:p>
+            <a:pPr algn="l"/>
+            <a:r>
+              <a:rPr sz="1150" b="0" i="0">
+                <a:solidFill>
+                  <a:srgbClr val="202633"/>
+                </a:solidFill>
+                <a:latin typeface="Calibri"/>
+              </a:rPr>
+              <a:t>One workbook: forecast + Analysis sheet</a:t>
+            </a:r>
+          </a:p>
+        </p:txBody>
+      </p:sp>
+      <p:sp>
+        <p:nvSpPr>
+          <p:cNvPr id="49" name="Oval 48"/>
+          <p:cNvSpPr/>
+          <p:nvPr/>
+        </p:nvSpPr>
+        <p:spPr>
+          <a:xfrm>
+            <a:off x="6245352" y="4572000"/>
+            <a:ext cx="82296" cy="82296"/>
+          </a:xfrm>
+          <a:prstGeom prst="ellipse">
+            <a:avLst/>
+          </a:prstGeom>
+          <a:solidFill>
+            <a:srgbClr val="2EC4B6"/>
+          </a:solidFill>
+          <a:ln>
+            <a:noFill/>
+          </a:ln>
+          <a:effectLst/>
+        </p:spPr>
+        <p:style>
+          <a:lnRef idx="1">
+            <a:schemeClr val="accent1"/>
+          </a:lnRef>
+          <a:fillRef idx="3">
+            <a:schemeClr val="accent1"/>
+          </a:fillRef>
+          <a:effectRef idx="2">
+            <a:schemeClr val="accent1"/>
+          </a:effectRef>
+          <a:fontRef idx="minor">
+            <a:schemeClr val="lt1"/>
+          </a:fontRef>
+        </p:style>
+        <p:txBody>
+          <a:bodyPr rtlCol="0" anchor="ctr"/>
+          <a:lstStyle/>
+          <a:p>
+            <a:pPr algn="ctr"/>
+          </a:p>
+        </p:txBody>
+      </p:sp>
+      <p:sp>
+        <p:nvSpPr>
+          <p:cNvPr id="50" name="TextBox 49"/>
+          <p:cNvSpPr txBox="1"/>
+          <p:nvPr/>
+        </p:nvSpPr>
+        <p:spPr>
+          <a:xfrm>
+            <a:off x="6446520" y="4507992"/>
+            <a:ext cx="4937760" cy="292608"/>
+          </a:xfrm>
+          <a:prstGeom prst="rect">
+            <a:avLst/>
+          </a:prstGeom>
+          <a:noFill/>
+        </p:spPr>
+        <p:txBody>
+          <a:bodyPr wrap="square">
+            <a:spAutoFit/>
+          </a:bodyPr>
+          <a:lstStyle/>
+          <a:p>
+            <a:pPr algn="l"/>
+            <a:r>
+              <a:rPr sz="1150" b="0" i="0">
+                <a:solidFill>
+                  <a:srgbClr val="202633"/>
+                </a:solidFill>
+                <a:latin typeface="Calibri"/>
+              </a:rPr>
+              <a:t>Every chart pairs volume with staffing gap</a:t>
+            </a:r>
+          </a:p>
+        </p:txBody>
+      </p:sp>
+      <p:sp>
+        <p:nvSpPr>
+          <p:cNvPr id="51" name="Oval 50"/>
+          <p:cNvSpPr/>
+          <p:nvPr/>
+        </p:nvSpPr>
+        <p:spPr>
+          <a:xfrm>
+            <a:off x="6245352" y="4882896"/>
+            <a:ext cx="82296" cy="82296"/>
+          </a:xfrm>
+          <a:prstGeom prst="ellipse">
+            <a:avLst/>
+          </a:prstGeom>
+          <a:solidFill>
+            <a:srgbClr val="2EC4B6"/>
+          </a:solidFill>
+          <a:ln>
+            <a:noFill/>
+          </a:ln>
+          <a:effectLst/>
+        </p:spPr>
+        <p:style>
+          <a:lnRef idx="1">
+            <a:schemeClr val="accent1"/>
+          </a:lnRef>
+          <a:fillRef idx="3">
+            <a:schemeClr val="accent1"/>
+          </a:fillRef>
+          <a:effectRef idx="2">
+            <a:schemeClr val="accent1"/>
+          </a:effectRef>
+          <a:fontRef idx="minor">
+            <a:schemeClr val="lt1"/>
+          </a:fontRef>
+        </p:style>
+        <p:txBody>
+          <a:bodyPr rtlCol="0" anchor="ctr"/>
+          <a:lstStyle/>
+          <a:p>
+            <a:pPr algn="ctr"/>
+          </a:p>
+        </p:txBody>
+      </p:sp>
+      <p:sp>
+        <p:nvSpPr>
+          <p:cNvPr id="52" name="TextBox 51"/>
+          <p:cNvSpPr txBox="1"/>
+          <p:nvPr/>
+        </p:nvSpPr>
+        <p:spPr>
+          <a:xfrm>
+            <a:off x="6446520" y="4818888"/>
+            <a:ext cx="4937760" cy="292608"/>
+          </a:xfrm>
+          <a:prstGeom prst="rect">
+            <a:avLst/>
+          </a:prstGeom>
+          <a:noFill/>
+        </p:spPr>
+        <p:txBody>
+          <a:bodyPr wrap="square">
+            <a:spAutoFit/>
+          </a:bodyPr>
+          <a:lstStyle/>
+          <a:p>
+            <a:pPr algn="l"/>
+            <a:r>
+              <a:rPr sz="1150" b="0" i="0">
+                <a:solidFill>
+                  <a:srgbClr val="202633"/>
+                </a:solidFill>
+                <a:latin typeface="Calibri"/>
+              </a:rPr>
+              <a:t>A 6-slide deck, numbers read live from the data</a:t>
+            </a:r>
+          </a:p>
+        </p:txBody>
+      </p:sp>
+      <p:sp>
+        <p:nvSpPr>
+          <p:cNvPr id="53" name="Oval 52"/>
+          <p:cNvSpPr/>
+          <p:nvPr/>
+        </p:nvSpPr>
+        <p:spPr>
+          <a:xfrm>
+            <a:off x="6245352" y="5193792"/>
+            <a:ext cx="82296" cy="82296"/>
+          </a:xfrm>
+          <a:prstGeom prst="ellipse">
+            <a:avLst/>
+          </a:prstGeom>
+          <a:solidFill>
+            <a:srgbClr val="2EC4B6"/>
+          </a:solidFill>
+          <a:ln>
+            <a:noFill/>
+          </a:ln>
+          <a:effectLst/>
+        </p:spPr>
+        <p:style>
+          <a:lnRef idx="1">
+            <a:schemeClr val="accent1"/>
+          </a:lnRef>
+          <a:fillRef idx="3">
+            <a:schemeClr val="accent1"/>
+          </a:fillRef>
+          <a:effectRef idx="2">
+            <a:schemeClr val="accent1"/>
+          </a:effectRef>
+          <a:fontRef idx="minor">
+            <a:schemeClr val="lt1"/>
+          </a:fontRef>
+        </p:style>
+        <p:txBody>
+          <a:bodyPr rtlCol="0" anchor="ctr"/>
+          <a:lstStyle/>
+          <a:p>
+            <a:pPr algn="ctr"/>
+          </a:p>
+        </p:txBody>
+      </p:sp>
+      <p:sp>
+        <p:nvSpPr>
+          <p:cNvPr id="54" name="TextBox 53"/>
+          <p:cNvSpPr txBox="1"/>
+          <p:nvPr/>
+        </p:nvSpPr>
+        <p:spPr>
+          <a:xfrm>
+            <a:off x="6446520" y="5129784"/>
+            <a:ext cx="4937760" cy="292608"/>
+          </a:xfrm>
+          <a:prstGeom prst="rect">
+            <a:avLst/>
+          </a:prstGeom>
+          <a:noFill/>
+        </p:spPr>
+        <p:txBody>
+          <a:bodyPr wrap="square">
+            <a:spAutoFit/>
+          </a:bodyPr>
+          <a:lstStyle/>
+          <a:p>
+            <a:pPr algn="l"/>
+            <a:r>
+              <a:rPr sz="1150" b="0" i="0">
+                <a:solidFill>
+                  <a:srgbClr val="202633"/>
+                </a:solidFill>
+                <a:latin typeface="Calibri"/>
+              </a:rPr>
+              <a:t>A Power BI staffing-gap report on top</a:t>
+            </a:r>
+          </a:p>
+        </p:txBody>
+      </p:sp>
+      <p:sp>
+        <p:nvSpPr>
+          <p:cNvPr id="55" name="TextBox 54"/>
+          <p:cNvSpPr txBox="1"/>
+          <p:nvPr/>
+        </p:nvSpPr>
+        <p:spPr>
+          <a:xfrm>
+            <a:off x="594360" y="6473952"/>
+            <a:ext cx="9144000" cy="320040"/>
+          </a:xfrm>
+          <a:prstGeom prst="rect">
+            <a:avLst/>
+          </a:prstGeom>
+          <a:noFill/>
+        </p:spPr>
+        <p:txBody>
+          <a:bodyPr wrap="square">
+            <a:spAutoFit/>
+          </a:bodyPr>
+          <a:lstStyle/>
+          <a:p>
+            <a:pPr algn="l"/>
+            <a:r>
               <a:rPr sz="1000" b="0" i="0">
                 <a:solidFill>
                   <a:srgbClr val="5A6B7D"/>
@@ -6065,7 +7097,7 @@
       </p:sp>
       <p:sp>
         <p:nvSpPr>
-          <p:cNvPr id="22" name="TextBox 21"/>
+          <p:cNvPr id="56" name="TextBox 55"/>
           <p:cNvSpPr txBox="1"/>
           <p:nvPr/>
         </p:nvSpPr>
@@ -6384,7 +7416,7 @@
             <a:avLst/>
           </a:prstGeom>
           <a:solidFill>
-            <a:srgbClr val="1B2A4A"/>
+            <a:srgbClr val="E05A47"/>
           </a:solidFill>
           <a:ln>
             <a:noFill/>
@@ -6463,7 +7495,7 @@
                 </a:solidFill>
                 <a:latin typeface="Calibri"/>
               </a:rPr>
-              <a:t>28</a:t>
+              <a:t>36/42</a:t>
             </a:r>
           </a:p>
           <a:p>
@@ -6475,7 +7507,7 @@
                 </a:solidFill>
                 <a:latin typeface="Calibri"/>
               </a:rPr>
-              <a:t>Avg required FTE over the horizon</a:t>
+              <a:t>Days short-staffed over the horizon</a:t>
             </a:r>
           </a:p>
         </p:txBody>
@@ -6574,7 +7606,7 @@
                 </a:solidFill>
                 <a:latin typeface="Calibri"/>
               </a:rPr>
-              <a:t>25</a:t>
+              <a:t>28</a:t>
             </a:r>
           </a:p>
           <a:p>
@@ -6586,7 +7618,7 @@
                 </a:solidFill>
                 <a:latin typeface="Calibri"/>
               </a:rPr>
-              <a:t>Available FTE (current roster)</a:t>
+              <a:t>Avg required FTE over the horizon</a:t>
             </a:r>
           </a:p>
         </p:txBody>
@@ -6606,7 +7638,7 @@
             <a:avLst/>
           </a:prstGeom>
           <a:solidFill>
-            <a:srgbClr val="E05A47"/>
+            <a:srgbClr val="1B2A4A"/>
           </a:solidFill>
           <a:ln>
             <a:noFill/>
@@ -6685,7 +7717,7 @@
                 </a:solidFill>
                 <a:latin typeface="Calibri"/>
               </a:rPr>
-              <a:t>36/42</a:t>
+              <a:t>25</a:t>
             </a:r>
           </a:p>
           <a:p>
@@ -6697,7 +7729,7 @@
                 </a:solidFill>
                 <a:latin typeface="Calibri"/>
               </a:rPr>
-              <a:t>Days short-staffed over the horizon</a:t>
+              <a:t>Available FTE (current roster)</a:t>
             </a:r>
           </a:p>
         </p:txBody>
@@ -6711,7 +7743,7 @@
         <p:spPr>
           <a:xfrm>
             <a:off x="594360" y="3063240"/>
-            <a:ext cx="5486400" cy="320040"/>
+            <a:ext cx="3514344" cy="274320"/>
           </a:xfrm>
           <a:prstGeom prst="rect">
             <a:avLst/>
@@ -6746,7 +7778,7 @@
         <p:spPr>
           <a:xfrm>
             <a:off x="594360" y="3429000"/>
-            <a:ext cx="2682682" cy="411480"/>
+            <a:ext cx="1841150" cy="320040"/>
           </a:xfrm>
           <a:prstGeom prst="rect">
             <a:avLst/>
@@ -6791,8 +7823,8 @@
         </p:nvSpPr>
         <p:spPr>
           <a:xfrm>
-            <a:off x="3277042" y="3429000"/>
-            <a:ext cx="2437957" cy="411480"/>
+            <a:off x="2435510" y="3429000"/>
+            <a:ext cx="1673193" cy="320040"/>
           </a:xfrm>
           <a:prstGeom prst="rect">
             <a:avLst/>
@@ -6837,7 +7869,7 @@
         </p:nvSpPr>
         <p:spPr>
           <a:xfrm>
-            <a:off x="594360" y="3950208"/>
+            <a:off x="594360" y="3895344"/>
             <a:ext cx="128016" cy="128016"/>
           </a:xfrm>
           <a:prstGeom prst="ellipse">
@@ -6881,8 +7913,8 @@
         </p:nvSpPr>
         <p:spPr>
           <a:xfrm>
-            <a:off x="777240" y="3904488"/>
-            <a:ext cx="2377440" cy="274320"/>
+            <a:off x="795528" y="3858768"/>
+            <a:ext cx="3313176" cy="274320"/>
           </a:xfrm>
           <a:prstGeom prst="rect">
             <a:avLst/>
@@ -6897,7 +7929,7 @@
           <a:p>
             <a:pPr algn="l"/>
             <a:r>
-              <a:rPr sz="1300" b="0" i="0">
+              <a:rPr sz="1250" b="0" i="0">
                 <a:solidFill>
                   <a:srgbClr val="5A6B7D"/>
                 </a:solidFill>
@@ -6916,7 +7948,7 @@
         </p:nvSpPr>
         <p:spPr>
           <a:xfrm>
-            <a:off x="3108960" y="3950208"/>
+            <a:off x="594360" y="4206240"/>
             <a:ext cx="128016" cy="128016"/>
           </a:xfrm>
           <a:prstGeom prst="ellipse">
@@ -6960,8 +7992,8 @@
         </p:nvSpPr>
         <p:spPr>
           <a:xfrm>
-            <a:off x="3291840" y="3904488"/>
-            <a:ext cx="2377440" cy="274320"/>
+            <a:off x="795528" y="4169664"/>
+            <a:ext cx="3313176" cy="274320"/>
           </a:xfrm>
           <a:prstGeom prst="rect">
             <a:avLst/>
@@ -6976,7 +8008,7 @@
           <a:p>
             <a:pPr algn="l"/>
             <a:r>
-              <a:rPr sz="1300" b="0" i="0">
+              <a:rPr sz="1250" b="0" i="0">
                 <a:solidFill>
                   <a:srgbClr val="5A6B7D"/>
                 </a:solidFill>
@@ -6989,14 +8021,49 @@
       </p:sp>
       <p:sp>
         <p:nvSpPr>
-          <p:cNvPr id="20" name="Oval 19"/>
+          <p:cNvPr id="20" name="TextBox 19"/>
+          <p:cNvSpPr txBox="1"/>
+          <p:nvPr/>
+        </p:nvSpPr>
+        <p:spPr>
+          <a:xfrm>
+            <a:off x="4337304" y="3063240"/>
+            <a:ext cx="3514344" cy="274320"/>
+          </a:xfrm>
+          <a:prstGeom prst="rect">
+            <a:avLst/>
+          </a:prstGeom>
+          <a:noFill/>
+        </p:spPr>
+        <p:txBody>
+          <a:bodyPr wrap="square">
+            <a:spAutoFit/>
+          </a:bodyPr>
+          <a:lstStyle/>
+          <a:p>
+            <a:pPr algn="l"/>
+            <a:r>
+              <a:rPr sz="1200" b="1" i="0">
+                <a:solidFill>
+                  <a:srgbClr val="1F9A8F"/>
+                </a:solidFill>
+                <a:latin typeface="Calibri"/>
+              </a:rPr>
+              <a:t>TOP 3 SHORT-STAFFED DAYS</a:t>
+            </a:r>
+          </a:p>
+        </p:txBody>
+      </p:sp>
+      <p:sp>
+        <p:nvSpPr>
+          <p:cNvPr id="21" name="Oval 20"/>
           <p:cNvSpPr/>
           <p:nvPr/>
         </p:nvSpPr>
         <p:spPr>
           <a:xfrm>
-            <a:off x="6309360" y="3136392"/>
-            <a:ext cx="128016" cy="128016"/>
+            <a:off x="4337304" y="3447288"/>
+            <a:ext cx="237744" cy="237744"/>
           </a:xfrm>
           <a:prstGeom prst="ellipse">
             <a:avLst/>
@@ -7028,19 +8095,28 @@
           <a:lstStyle/>
           <a:p>
             <a:pPr algn="ctr"/>
-          </a:p>
-        </p:txBody>
-      </p:sp>
-      <p:sp>
-        <p:nvSpPr>
-          <p:cNvPr id="21" name="TextBox 20"/>
+            <a:r>
+              <a:rPr sz="1200" b="1">
+                <a:solidFill>
+                  <a:srgbClr val="FFFFFF"/>
+                </a:solidFill>
+                <a:latin typeface="Calibri"/>
+              </a:rPr>
+              <a:t>1</a:t>
+            </a:r>
+          </a:p>
+        </p:txBody>
+      </p:sp>
+      <p:sp>
+        <p:nvSpPr>
+          <p:cNvPr id="22" name="TextBox 21"/>
           <p:cNvSpPr txBox="1"/>
           <p:nvPr/>
         </p:nvSpPr>
         <p:spPr>
           <a:xfrm>
-            <a:off x="6629400" y="3063240"/>
-            <a:ext cx="4983480" cy="868680"/>
+            <a:off x="4666488" y="3429000"/>
+            <a:ext cx="3185160" cy="329184"/>
           </a:xfrm>
           <a:prstGeom prst="rect">
             <a:avLst/>
@@ -7055,27 +8131,27 @@
           <a:p>
             <a:pPr algn="l"/>
             <a:r>
-              <a:rPr sz="1450" b="0" i="0">
+              <a:rPr sz="1300" b="0" i="0">
                 <a:solidFill>
                   <a:srgbClr val="202633"/>
                 </a:solidFill>
                 <a:latin typeface="Calibri"/>
               </a:rPr>
-              <a:t>Holt-Winters improves forecast accuracy by 1.3 percentage points over the naive baseline - a real, honestly-validated gain.</a:t>
-            </a:r>
-          </a:p>
-        </p:txBody>
-      </p:sp>
-      <p:sp>
-        <p:nvSpPr>
-          <p:cNvPr id="22" name="Oval 21"/>
+              <a:t>18 Nov 2026 — 3.7 FTE short</a:t>
+            </a:r>
+          </a:p>
+        </p:txBody>
+      </p:sp>
+      <p:sp>
+        <p:nvSpPr>
+          <p:cNvPr id="23" name="Oval 22"/>
           <p:cNvSpPr/>
           <p:nvPr/>
         </p:nvSpPr>
         <p:spPr>
           <a:xfrm>
-            <a:off x="6309360" y="4005072"/>
-            <a:ext cx="128016" cy="128016"/>
+            <a:off x="4337304" y="3831336"/>
+            <a:ext cx="237744" cy="237744"/>
           </a:xfrm>
           <a:prstGeom prst="ellipse">
             <a:avLst/>
@@ -7107,19 +8183,28 @@
           <a:lstStyle/>
           <a:p>
             <a:pPr algn="ctr"/>
-          </a:p>
-        </p:txBody>
-      </p:sp>
-      <p:sp>
-        <p:nvSpPr>
-          <p:cNvPr id="23" name="TextBox 22"/>
+            <a:r>
+              <a:rPr sz="1200" b="1">
+                <a:solidFill>
+                  <a:srgbClr val="FFFFFF"/>
+                </a:solidFill>
+                <a:latin typeface="Calibri"/>
+              </a:rPr>
+              <a:t>2</a:t>
+            </a:r>
+          </a:p>
+        </p:txBody>
+      </p:sp>
+      <p:sp>
+        <p:nvSpPr>
+          <p:cNvPr id="24" name="TextBox 23"/>
           <p:cNvSpPr txBox="1"/>
           <p:nvPr/>
         </p:nvSpPr>
         <p:spPr>
           <a:xfrm>
-            <a:off x="6629400" y="3931920"/>
-            <a:ext cx="4983480" cy="868680"/>
+            <a:off x="4666488" y="3813048"/>
+            <a:ext cx="3185160" cy="329184"/>
           </a:xfrm>
           <a:prstGeom prst="rect">
             <a:avLst/>
@@ -7134,27 +8219,27 @@
           <a:p>
             <a:pPr algn="l"/>
             <a:r>
-              <a:rPr sz="1450" b="0" i="0">
+              <a:rPr sz="1300" b="0" i="0">
                 <a:solidFill>
                   <a:srgbClr val="202633"/>
                 </a:solidFill>
                 <a:latin typeface="Calibri"/>
               </a:rPr>
-              <a:t>Short on 36 of the next 42 days, averaging 2.5 FTE short - peaking at 3.7 FTE on 18 Nov 2026.</a:t>
-            </a:r>
-          </a:p>
-        </p:txBody>
-      </p:sp>
-      <p:sp>
-        <p:nvSpPr>
-          <p:cNvPr id="24" name="Oval 23"/>
+              <a:t>25 Nov 2026 — 3.7 FTE short</a:t>
+            </a:r>
+          </a:p>
+        </p:txBody>
+      </p:sp>
+      <p:sp>
+        <p:nvSpPr>
+          <p:cNvPr id="25" name="Oval 24"/>
           <p:cNvSpPr/>
           <p:nvPr/>
         </p:nvSpPr>
         <p:spPr>
           <a:xfrm>
-            <a:off x="594360" y="5148072"/>
-            <a:ext cx="128016" cy="128016"/>
+            <a:off x="4337304" y="4215384"/>
+            <a:ext cx="237744" cy="237744"/>
           </a:xfrm>
           <a:prstGeom prst="ellipse">
             <a:avLst/>
@@ -7186,19 +8271,28 @@
           <a:lstStyle/>
           <a:p>
             <a:pPr algn="ctr"/>
-          </a:p>
-        </p:txBody>
-      </p:sp>
-      <p:sp>
-        <p:nvSpPr>
-          <p:cNvPr id="25" name="TextBox 24"/>
+            <a:r>
+              <a:rPr sz="1200" b="1">
+                <a:solidFill>
+                  <a:srgbClr val="FFFFFF"/>
+                </a:solidFill>
+                <a:latin typeface="Calibri"/>
+              </a:rPr>
+              <a:t>3</a:t>
+            </a:r>
+          </a:p>
+        </p:txBody>
+      </p:sp>
+      <p:sp>
+        <p:nvSpPr>
+          <p:cNvPr id="26" name="TextBox 25"/>
           <p:cNvSpPr txBox="1"/>
           <p:nvPr/>
         </p:nvSpPr>
         <p:spPr>
           <a:xfrm>
-            <a:off x="914400" y="5074920"/>
-            <a:ext cx="10561320" cy="640080"/>
+            <a:off x="4666488" y="4197096"/>
+            <a:ext cx="3185160" cy="329184"/>
           </a:xfrm>
           <a:prstGeom prst="rect">
             <a:avLst/>
@@ -7213,27 +8307,27 @@
           <a:p>
             <a:pPr algn="l"/>
             <a:r>
-              <a:rPr sz="1450" b="0" i="0">
+              <a:rPr sz="1300" b="0" i="0">
                 <a:solidFill>
                   <a:srgbClr val="202633"/>
                 </a:solidFill>
                 <a:latin typeface="Calibri"/>
               </a:rPr>
-              <a:t>This is a modest, fixable gap - not a crisis - but worth flagging now, with weeks of lead time, rather than discovering it the week service levels slip.</a:t>
-            </a:r>
-          </a:p>
-        </p:txBody>
-      </p:sp>
-      <p:sp>
-        <p:nvSpPr>
-          <p:cNvPr id="26" name="TextBox 25"/>
+              <a:t>02 Dec 2026 — 3.7 FTE short</a:t>
+            </a:r>
+          </a:p>
+        </p:txBody>
+      </p:sp>
+      <p:sp>
+        <p:nvSpPr>
+          <p:cNvPr id="27" name="TextBox 26"/>
           <p:cNvSpPr txBox="1"/>
           <p:nvPr/>
         </p:nvSpPr>
         <p:spPr>
           <a:xfrm>
-            <a:off x="594360" y="6473952"/>
-            <a:ext cx="9144000" cy="320040"/>
+            <a:off x="8080248" y="3063240"/>
+            <a:ext cx="3514344" cy="274320"/>
           </a:xfrm>
           <a:prstGeom prst="rect">
             <a:avLst/>
@@ -7248,6 +8342,384 @@
           <a:p>
             <a:pPr algn="l"/>
             <a:r>
+              <a:rPr sz="1200" b="1" i="0">
+                <a:solidFill>
+                  <a:srgbClr val="1F9A8F"/>
+                </a:solidFill>
+                <a:latin typeface="Calibri"/>
+              </a:rPr>
+              <a:t>WEEKLY GAP TREND (NEXT 3 WKS)</a:t>
+            </a:r>
+          </a:p>
+        </p:txBody>
+      </p:sp>
+      <p:sp>
+        <p:nvSpPr>
+          <p:cNvPr id="28" name="Oval 27"/>
+          <p:cNvSpPr/>
+          <p:nvPr/>
+        </p:nvSpPr>
+        <p:spPr>
+          <a:xfrm>
+            <a:off x="8080248" y="3447288"/>
+            <a:ext cx="237744" cy="237744"/>
+          </a:xfrm>
+          <a:prstGeom prst="ellipse">
+            <a:avLst/>
+          </a:prstGeom>
+          <a:solidFill>
+            <a:srgbClr val="2EC4B6"/>
+          </a:solidFill>
+          <a:ln>
+            <a:noFill/>
+          </a:ln>
+          <a:effectLst/>
+        </p:spPr>
+        <p:style>
+          <a:lnRef idx="1">
+            <a:schemeClr val="accent1"/>
+          </a:lnRef>
+          <a:fillRef idx="3">
+            <a:schemeClr val="accent1"/>
+          </a:fillRef>
+          <a:effectRef idx="2">
+            <a:schemeClr val="accent1"/>
+          </a:effectRef>
+          <a:fontRef idx="minor">
+            <a:schemeClr val="lt1"/>
+          </a:fontRef>
+        </p:style>
+        <p:txBody>
+          <a:bodyPr rtlCol="0" anchor="ctr"/>
+          <a:lstStyle/>
+          <a:p>
+            <a:pPr algn="ctr"/>
+            <a:r>
+              <a:rPr sz="1200" b="1">
+                <a:solidFill>
+                  <a:srgbClr val="FFFFFF"/>
+                </a:solidFill>
+                <a:latin typeface="Calibri"/>
+              </a:rPr>
+              <a:t>1</a:t>
+            </a:r>
+          </a:p>
+        </p:txBody>
+      </p:sp>
+      <p:sp>
+        <p:nvSpPr>
+          <p:cNvPr id="29" name="TextBox 28"/>
+          <p:cNvSpPr txBox="1"/>
+          <p:nvPr/>
+        </p:nvSpPr>
+        <p:spPr>
+          <a:xfrm>
+            <a:off x="8409432" y="3429000"/>
+            <a:ext cx="3185160" cy="329184"/>
+          </a:xfrm>
+          <a:prstGeom prst="rect">
+            <a:avLst/>
+          </a:prstGeom>
+          <a:noFill/>
+        </p:spPr>
+        <p:txBody>
+          <a:bodyPr wrap="square">
+            <a:spAutoFit/>
+          </a:bodyPr>
+          <a:lstStyle/>
+          <a:p>
+            <a:pPr algn="l"/>
+            <a:r>
+              <a:rPr sz="1300" b="0" i="0">
+                <a:solidFill>
+                  <a:srgbClr val="202633"/>
+                </a:solidFill>
+                <a:latin typeface="Calibri"/>
+              </a:rPr>
+              <a:t>Week of 26 Oct — 2.6 FTE avg gap</a:t>
+            </a:r>
+          </a:p>
+        </p:txBody>
+      </p:sp>
+      <p:sp>
+        <p:nvSpPr>
+          <p:cNvPr id="30" name="Oval 29"/>
+          <p:cNvSpPr/>
+          <p:nvPr/>
+        </p:nvSpPr>
+        <p:spPr>
+          <a:xfrm>
+            <a:off x="8080248" y="3831336"/>
+            <a:ext cx="237744" cy="237744"/>
+          </a:xfrm>
+          <a:prstGeom prst="ellipse">
+            <a:avLst/>
+          </a:prstGeom>
+          <a:solidFill>
+            <a:srgbClr val="2EC4B6"/>
+          </a:solidFill>
+          <a:ln>
+            <a:noFill/>
+          </a:ln>
+          <a:effectLst/>
+        </p:spPr>
+        <p:style>
+          <a:lnRef idx="1">
+            <a:schemeClr val="accent1"/>
+          </a:lnRef>
+          <a:fillRef idx="3">
+            <a:schemeClr val="accent1"/>
+          </a:fillRef>
+          <a:effectRef idx="2">
+            <a:schemeClr val="accent1"/>
+          </a:effectRef>
+          <a:fontRef idx="minor">
+            <a:schemeClr val="lt1"/>
+          </a:fontRef>
+        </p:style>
+        <p:txBody>
+          <a:bodyPr rtlCol="0" anchor="ctr"/>
+          <a:lstStyle/>
+          <a:p>
+            <a:pPr algn="ctr"/>
+            <a:r>
+              <a:rPr sz="1200" b="1">
+                <a:solidFill>
+                  <a:srgbClr val="FFFFFF"/>
+                </a:solidFill>
+                <a:latin typeface="Calibri"/>
+              </a:rPr>
+              <a:t>2</a:t>
+            </a:r>
+          </a:p>
+        </p:txBody>
+      </p:sp>
+      <p:sp>
+        <p:nvSpPr>
+          <p:cNvPr id="31" name="TextBox 30"/>
+          <p:cNvSpPr txBox="1"/>
+          <p:nvPr/>
+        </p:nvSpPr>
+        <p:spPr>
+          <a:xfrm>
+            <a:off x="8409432" y="3813048"/>
+            <a:ext cx="3185160" cy="329184"/>
+          </a:xfrm>
+          <a:prstGeom prst="rect">
+            <a:avLst/>
+          </a:prstGeom>
+          <a:noFill/>
+        </p:spPr>
+        <p:txBody>
+          <a:bodyPr wrap="square">
+            <a:spAutoFit/>
+          </a:bodyPr>
+          <a:lstStyle/>
+          <a:p>
+            <a:pPr algn="l"/>
+            <a:r>
+              <a:rPr sz="1300" b="0" i="0">
+                <a:solidFill>
+                  <a:srgbClr val="202633"/>
+                </a:solidFill>
+                <a:latin typeface="Calibri"/>
+              </a:rPr>
+              <a:t>Week of 02 Nov — 2.5 FTE avg gap</a:t>
+            </a:r>
+          </a:p>
+        </p:txBody>
+      </p:sp>
+      <p:sp>
+        <p:nvSpPr>
+          <p:cNvPr id="32" name="Oval 31"/>
+          <p:cNvSpPr/>
+          <p:nvPr/>
+        </p:nvSpPr>
+        <p:spPr>
+          <a:xfrm>
+            <a:off x="8080248" y="4215384"/>
+            <a:ext cx="237744" cy="237744"/>
+          </a:xfrm>
+          <a:prstGeom prst="ellipse">
+            <a:avLst/>
+          </a:prstGeom>
+          <a:solidFill>
+            <a:srgbClr val="2EC4B6"/>
+          </a:solidFill>
+          <a:ln>
+            <a:noFill/>
+          </a:ln>
+          <a:effectLst/>
+        </p:spPr>
+        <p:style>
+          <a:lnRef idx="1">
+            <a:schemeClr val="accent1"/>
+          </a:lnRef>
+          <a:fillRef idx="3">
+            <a:schemeClr val="accent1"/>
+          </a:fillRef>
+          <a:effectRef idx="2">
+            <a:schemeClr val="accent1"/>
+          </a:effectRef>
+          <a:fontRef idx="minor">
+            <a:schemeClr val="lt1"/>
+          </a:fontRef>
+        </p:style>
+        <p:txBody>
+          <a:bodyPr rtlCol="0" anchor="ctr"/>
+          <a:lstStyle/>
+          <a:p>
+            <a:pPr algn="ctr"/>
+            <a:r>
+              <a:rPr sz="1200" b="1">
+                <a:solidFill>
+                  <a:srgbClr val="FFFFFF"/>
+                </a:solidFill>
+                <a:latin typeface="Calibri"/>
+              </a:rPr>
+              <a:t>3</a:t>
+            </a:r>
+          </a:p>
+        </p:txBody>
+      </p:sp>
+      <p:sp>
+        <p:nvSpPr>
+          <p:cNvPr id="33" name="TextBox 32"/>
+          <p:cNvSpPr txBox="1"/>
+          <p:nvPr/>
+        </p:nvSpPr>
+        <p:spPr>
+          <a:xfrm>
+            <a:off x="8409432" y="4197096"/>
+            <a:ext cx="3185160" cy="329184"/>
+          </a:xfrm>
+          <a:prstGeom prst="rect">
+            <a:avLst/>
+          </a:prstGeom>
+          <a:noFill/>
+        </p:spPr>
+        <p:txBody>
+          <a:bodyPr wrap="square">
+            <a:spAutoFit/>
+          </a:bodyPr>
+          <a:lstStyle/>
+          <a:p>
+            <a:pPr algn="l"/>
+            <a:r>
+              <a:rPr sz="1300" b="0" i="0">
+                <a:solidFill>
+                  <a:srgbClr val="202633"/>
+                </a:solidFill>
+                <a:latin typeface="Calibri"/>
+              </a:rPr>
+              <a:t>Week of 09 Nov — 2.5 FTE avg gap</a:t>
+            </a:r>
+          </a:p>
+        </p:txBody>
+      </p:sp>
+      <p:sp>
+        <p:nvSpPr>
+          <p:cNvPr id="34" name="Oval 33"/>
+          <p:cNvSpPr/>
+          <p:nvPr/>
+        </p:nvSpPr>
+        <p:spPr>
+          <a:xfrm>
+            <a:off x="594360" y="5330952"/>
+            <a:ext cx="128016" cy="128016"/>
+          </a:xfrm>
+          <a:prstGeom prst="ellipse">
+            <a:avLst/>
+          </a:prstGeom>
+          <a:solidFill>
+            <a:srgbClr val="2EC4B6"/>
+          </a:solidFill>
+          <a:ln>
+            <a:noFill/>
+          </a:ln>
+          <a:effectLst/>
+        </p:spPr>
+        <p:style>
+          <a:lnRef idx="1">
+            <a:schemeClr val="accent1"/>
+          </a:lnRef>
+          <a:fillRef idx="3">
+            <a:schemeClr val="accent1"/>
+          </a:fillRef>
+          <a:effectRef idx="2">
+            <a:schemeClr val="accent1"/>
+          </a:effectRef>
+          <a:fontRef idx="minor">
+            <a:schemeClr val="lt1"/>
+          </a:fontRef>
+        </p:style>
+        <p:txBody>
+          <a:bodyPr rtlCol="0" anchor="ctr"/>
+          <a:lstStyle/>
+          <a:p>
+            <a:pPr algn="ctr"/>
+          </a:p>
+        </p:txBody>
+      </p:sp>
+      <p:sp>
+        <p:nvSpPr>
+          <p:cNvPr id="35" name="TextBox 34"/>
+          <p:cNvSpPr txBox="1"/>
+          <p:nvPr/>
+        </p:nvSpPr>
+        <p:spPr>
+          <a:xfrm>
+            <a:off x="914400" y="5257800"/>
+            <a:ext cx="10561320" cy="548640"/>
+          </a:xfrm>
+          <a:prstGeom prst="rect">
+            <a:avLst/>
+          </a:prstGeom>
+          <a:noFill/>
+        </p:spPr>
+        <p:txBody>
+          <a:bodyPr wrap="square">
+            <a:spAutoFit/>
+          </a:bodyPr>
+          <a:lstStyle/>
+          <a:p>
+            <a:pPr algn="l"/>
+            <a:r>
+              <a:rPr sz="1450" b="0" i="0">
+                <a:solidFill>
+                  <a:srgbClr val="202633"/>
+                </a:solidFill>
+                <a:latin typeface="Calibri"/>
+              </a:rPr>
+              <a:t>This is a modest, fixable gap - not a crisis - but worth flagging now, with weeks of lead time, rather than discovering it the week service levels slip.</a:t>
+            </a:r>
+          </a:p>
+        </p:txBody>
+      </p:sp>
+      <p:sp>
+        <p:nvSpPr>
+          <p:cNvPr id="36" name="TextBox 35"/>
+          <p:cNvSpPr txBox="1"/>
+          <p:nvPr/>
+        </p:nvSpPr>
+        <p:spPr>
+          <a:xfrm>
+            <a:off x="594360" y="6473952"/>
+            <a:ext cx="9144000" cy="320040"/>
+          </a:xfrm>
+          <a:prstGeom prst="rect">
+            <a:avLst/>
+          </a:prstGeom>
+          <a:noFill/>
+        </p:spPr>
+        <p:txBody>
+          <a:bodyPr wrap="square">
+            <a:spAutoFit/>
+          </a:bodyPr>
+          <a:lstStyle/>
+          <a:p>
+            <a:pPr algn="l"/>
+            <a:r>
               <a:rPr sz="1000" b="0" i="0">
                 <a:solidFill>
                   <a:srgbClr val="5A6B7D"/>
@@ -7261,7 +8733,7 @@
       </p:sp>
       <p:sp>
         <p:nvSpPr>
-          <p:cNvPr id="27" name="TextBox 26"/>
+          <p:cNvPr id="37" name="TextBox 36"/>
           <p:cNvSpPr txBox="1"/>
           <p:nvPr/>
         </p:nvSpPr>
@@ -7357,67 +8829,14 @@
       </p:sp>
       <p:sp>
         <p:nvSpPr>
-          <p:cNvPr id="3" name="Oval 2"/>
-          <p:cNvSpPr/>
-          <p:nvPr/>
-        </p:nvSpPr>
-        <p:spPr>
-          <a:xfrm>
-            <a:off x="594360" y="1737360"/>
-            <a:ext cx="457200" cy="457200"/>
-          </a:xfrm>
-          <a:prstGeom prst="ellipse">
-            <a:avLst/>
-          </a:prstGeom>
-          <a:solidFill>
-            <a:srgbClr val="2EC4B6"/>
-          </a:solidFill>
-          <a:ln>
-            <a:noFill/>
-          </a:ln>
-          <a:effectLst/>
-        </p:spPr>
-        <p:style>
-          <a:lnRef idx="1">
-            <a:schemeClr val="accent1"/>
-          </a:lnRef>
-          <a:fillRef idx="3">
-            <a:schemeClr val="accent1"/>
-          </a:fillRef>
-          <a:effectRef idx="2">
-            <a:schemeClr val="accent1"/>
-          </a:effectRef>
-          <a:fontRef idx="minor">
-            <a:schemeClr val="lt1"/>
-          </a:fontRef>
-        </p:style>
-        <p:txBody>
-          <a:bodyPr rtlCol="0" anchor="ctr"/>
-          <a:lstStyle/>
-          <a:p>
-            <a:pPr algn="ctr"/>
-            <a:r>
-              <a:rPr sz="1800" b="1">
-                <a:solidFill>
-                  <a:srgbClr val="1B2A4A"/>
-                </a:solidFill>
-                <a:latin typeface="Calibri"/>
-              </a:rPr>
-              <a:t>1</a:t>
-            </a:r>
-          </a:p>
-        </p:txBody>
-      </p:sp>
-      <p:sp>
-        <p:nvSpPr>
-          <p:cNvPr id="4" name="TextBox 3"/>
+          <p:cNvPr id="3" name="TextBox 2"/>
           <p:cNvSpPr txBox="1"/>
           <p:nvPr/>
         </p:nvSpPr>
         <p:spPr>
           <a:xfrm>
-            <a:off x="1280160" y="1709928"/>
-            <a:ext cx="10287000" cy="1325880"/>
+            <a:off x="594360" y="1691640"/>
+            <a:ext cx="3505200" cy="274320"/>
           </a:xfrm>
           <a:prstGeom prst="rect">
             <a:avLst/>
@@ -7430,97 +8849,29 @@
           </a:bodyPr>
           <a:lstStyle/>
           <a:p>
-            <a:r>
-              <a:rPr sz="1800" b="1">
-                <a:solidFill>
-                  <a:srgbClr val="FFFFFF"/>
-                </a:solidFill>
-                <a:latin typeface="Calibri"/>
-              </a:rPr>
-              <a:t>Fix #1: Close the FTE gap</a:t>
-            </a:r>
-          </a:p>
-          <a:p>
-            <a:pPr>
-              <a:spcBef>
-                <a:spcPts val="400"/>
-              </a:spcBef>
-            </a:pPr>
-            <a:r>
-              <a:rPr sz="1450">
-                <a:solidFill>
-                  <a:srgbClr val="D7DEE8"/>
-                </a:solidFill>
-                <a:latin typeface="Calibri"/>
-              </a:rPr>
-              <a:t>Close a 2.5-FTE average gap with overtime or a couple of flexible-shift agents - the forecast gives 42 days of lead time to plan it, not a same-week scramble.</a:t>
-            </a:r>
-          </a:p>
-        </p:txBody>
-      </p:sp>
-      <p:sp>
-        <p:nvSpPr>
-          <p:cNvPr id="5" name="Oval 4"/>
-          <p:cNvSpPr/>
-          <p:nvPr/>
-        </p:nvSpPr>
-        <p:spPr>
-          <a:xfrm>
-            <a:off x="594360" y="3063240"/>
-            <a:ext cx="457200" cy="457200"/>
-          </a:xfrm>
-          <a:prstGeom prst="ellipse">
-            <a:avLst/>
-          </a:prstGeom>
-          <a:solidFill>
-            <a:srgbClr val="2EC4B6"/>
-          </a:solidFill>
-          <a:ln>
-            <a:noFill/>
-          </a:ln>
-          <a:effectLst/>
-        </p:spPr>
-        <p:style>
-          <a:lnRef idx="1">
-            <a:schemeClr val="accent1"/>
-          </a:lnRef>
-          <a:fillRef idx="3">
-            <a:schemeClr val="accent1"/>
-          </a:fillRef>
-          <a:effectRef idx="2">
-            <a:schemeClr val="accent1"/>
-          </a:effectRef>
-          <a:fontRef idx="minor">
-            <a:schemeClr val="lt1"/>
-          </a:fontRef>
-        </p:style>
-        <p:txBody>
-          <a:bodyPr rtlCol="0" anchor="ctr"/>
-          <a:lstStyle/>
-          <a:p>
-            <a:pPr algn="ctr"/>
-            <a:r>
-              <a:rPr sz="1800" b="1">
-                <a:solidFill>
-                  <a:srgbClr val="1B2A4A"/>
-                </a:solidFill>
-                <a:latin typeface="Calibri"/>
-              </a:rPr>
-              <a:t>2</a:t>
-            </a:r>
-          </a:p>
-        </p:txBody>
-      </p:sp>
-      <p:sp>
-        <p:nvSpPr>
-          <p:cNvPr id="6" name="TextBox 5"/>
+            <a:pPr algn="l"/>
+            <a:r>
+              <a:rPr sz="1200" b="1" i="0">
+                <a:solidFill>
+                  <a:srgbClr val="2EC4B6"/>
+                </a:solidFill>
+                <a:latin typeface="Calibri"/>
+              </a:rPr>
+              <a:t>RECOMMENDATION</a:t>
+            </a:r>
+          </a:p>
+        </p:txBody>
+      </p:sp>
+      <p:sp>
+        <p:nvSpPr>
+          <p:cNvPr id="4" name="TextBox 3"/>
           <p:cNvSpPr txBox="1"/>
           <p:nvPr/>
         </p:nvSpPr>
         <p:spPr>
           <a:xfrm>
-            <a:off x="1280160" y="3035808"/>
-            <a:ext cx="10287000" cy="1325880"/>
+            <a:off x="4328160" y="1691640"/>
+            <a:ext cx="3505200" cy="274320"/>
           </a:xfrm>
           <a:prstGeom prst="rect">
             <a:avLst/>
@@ -7533,97 +8884,29 @@
           </a:bodyPr>
           <a:lstStyle/>
           <a:p>
-            <a:r>
-              <a:rPr sz="1800" b="1">
-                <a:solidFill>
-                  <a:srgbClr val="FFFFFF"/>
-                </a:solidFill>
-                <a:latin typeface="Calibri"/>
-              </a:rPr>
-              <a:t>Fix #2: Watch the peak day</a:t>
-            </a:r>
-          </a:p>
-          <a:p>
-            <a:pPr>
-              <a:spcBef>
-                <a:spcPts val="400"/>
-              </a:spcBef>
-            </a:pPr>
-            <a:r>
-              <a:rPr sz="1450">
-                <a:solidFill>
-                  <a:srgbClr val="D7DEE8"/>
-                </a:solidFill>
-                <a:latin typeface="Calibri"/>
-              </a:rPr>
-              <a:t>Watch 18 Nov 2026 specifically - the single worst-staffed day in the horizon.</a:t>
-            </a:r>
-          </a:p>
-        </p:txBody>
-      </p:sp>
-      <p:sp>
-        <p:nvSpPr>
-          <p:cNvPr id="7" name="Oval 6"/>
-          <p:cNvSpPr/>
-          <p:nvPr/>
-        </p:nvSpPr>
-        <p:spPr>
-          <a:xfrm>
-            <a:off x="594360" y="4389120"/>
-            <a:ext cx="457200" cy="457200"/>
-          </a:xfrm>
-          <a:prstGeom prst="ellipse">
-            <a:avLst/>
-          </a:prstGeom>
-          <a:solidFill>
-            <a:srgbClr val="2EC4B6"/>
-          </a:solidFill>
-          <a:ln>
-            <a:noFill/>
-          </a:ln>
-          <a:effectLst/>
-        </p:spPr>
-        <p:style>
-          <a:lnRef idx="1">
-            <a:schemeClr val="accent1"/>
-          </a:lnRef>
-          <a:fillRef idx="3">
-            <a:schemeClr val="accent1"/>
-          </a:fillRef>
-          <a:effectRef idx="2">
-            <a:schemeClr val="accent1"/>
-          </a:effectRef>
-          <a:fontRef idx="minor">
-            <a:schemeClr val="lt1"/>
-          </a:fontRef>
-        </p:style>
-        <p:txBody>
-          <a:bodyPr rtlCol="0" anchor="ctr"/>
-          <a:lstStyle/>
-          <a:p>
-            <a:pPr algn="ctr"/>
-            <a:r>
-              <a:rPr sz="1800" b="1">
-                <a:solidFill>
-                  <a:srgbClr val="1B2A4A"/>
-                </a:solidFill>
-                <a:latin typeface="Calibri"/>
-              </a:rPr>
-              <a:t>3</a:t>
-            </a:r>
-          </a:p>
-        </p:txBody>
-      </p:sp>
-      <p:sp>
-        <p:nvSpPr>
-          <p:cNvPr id="8" name="TextBox 7"/>
+            <a:pPr algn="l"/>
+            <a:r>
+              <a:rPr sz="1200" b="1" i="0">
+                <a:solidFill>
+                  <a:srgbClr val="2EC4B6"/>
+                </a:solidFill>
+                <a:latin typeface="Calibri"/>
+              </a:rPr>
+              <a:t>WHAT TO DO</a:t>
+            </a:r>
+          </a:p>
+        </p:txBody>
+      </p:sp>
+      <p:sp>
+        <p:nvSpPr>
+          <p:cNvPr id="5" name="TextBox 4"/>
           <p:cNvSpPr txBox="1"/>
           <p:nvPr/>
         </p:nvSpPr>
         <p:spPr>
           <a:xfrm>
-            <a:off x="1280160" y="4361688"/>
-            <a:ext cx="10287000" cy="1325880"/>
+            <a:off x="8061960" y="1691640"/>
+            <a:ext cx="3505200" cy="274320"/>
           </a:xfrm>
           <a:prstGeom prst="rect">
             <a:avLst/>
@@ -7636,30 +8919,120 @@
           </a:bodyPr>
           <a:lstStyle/>
           <a:p>
-            <a:r>
-              <a:rPr sz="1800" b="1">
+            <a:pPr algn="l"/>
+            <a:r>
+              <a:rPr sz="1200" b="1" i="0">
+                <a:solidFill>
+                  <a:srgbClr val="2EC4B6"/>
+                </a:solidFill>
+                <a:latin typeface="Calibri"/>
+              </a:rPr>
+              <a:t>EXPECTED OUTCOME</a:t>
+            </a:r>
+          </a:p>
+        </p:txBody>
+      </p:sp>
+      <p:cxnSp>
+        <p:nvCxnSpPr>
+          <p:cNvPr id="6" name="Connector 5"/>
+          <p:cNvCxnSpPr/>
+          <p:nvPr/>
+        </p:nvCxnSpPr>
+        <p:spPr>
+          <a:xfrm>
+            <a:off x="594360" y="2057400"/>
+            <a:ext cx="10972800" cy="0"/>
+          </a:xfrm>
+          <a:prstGeom prst="line">
+            <a:avLst/>
+          </a:prstGeom>
+          <a:ln w="12700">
+            <a:solidFill>
+              <a:srgbClr val="2B3C5E"/>
+            </a:solidFill>
+          </a:ln>
+        </p:spPr>
+        <p:style>
+          <a:lnRef idx="2">
+            <a:schemeClr val="accent1"/>
+          </a:lnRef>
+          <a:fillRef idx="0">
+            <a:schemeClr val="accent1"/>
+          </a:fillRef>
+          <a:effectRef idx="1">
+            <a:schemeClr val="accent1"/>
+          </a:effectRef>
+          <a:fontRef idx="minor">
+            <a:schemeClr val="tx1"/>
+          </a:fontRef>
+        </p:style>
+      </p:cxnSp>
+      <p:sp>
+        <p:nvSpPr>
+          <p:cNvPr id="7" name="TextBox 6"/>
+          <p:cNvSpPr txBox="1"/>
+          <p:nvPr/>
+        </p:nvSpPr>
+        <p:spPr>
+          <a:xfrm>
+            <a:off x="594360" y="2194560"/>
+            <a:ext cx="3505200" cy="1280160"/>
+          </a:xfrm>
+          <a:prstGeom prst="rect">
+            <a:avLst/>
+          </a:prstGeom>
+          <a:noFill/>
+        </p:spPr>
+        <p:txBody>
+          <a:bodyPr wrap="square">
+            <a:spAutoFit/>
+          </a:bodyPr>
+          <a:lstStyle/>
+          <a:p>
+            <a:pPr algn="l"/>
+            <a:r>
+              <a:rPr sz="1500" b="1" i="0">
+                <a:solidFill>
+                  <a:srgbClr val="2EC4B6"/>
+                </a:solidFill>
+                <a:latin typeface="Calibri"/>
+              </a:rPr>
+              <a:t>Fix #1: Close the FTE gap</a:t>
+            </a:r>
+          </a:p>
+        </p:txBody>
+      </p:sp>
+      <p:sp>
+        <p:nvSpPr>
+          <p:cNvPr id="8" name="TextBox 7"/>
+          <p:cNvSpPr txBox="1"/>
+          <p:nvPr/>
+        </p:nvSpPr>
+        <p:spPr>
+          <a:xfrm>
+            <a:off x="4328160" y="2194560"/>
+            <a:ext cx="3505200" cy="1280160"/>
+          </a:xfrm>
+          <a:prstGeom prst="rect">
+            <a:avLst/>
+          </a:prstGeom>
+          <a:noFill/>
+        </p:spPr>
+        <p:txBody>
+          <a:bodyPr wrap="square">
+            <a:spAutoFit/>
+          </a:bodyPr>
+          <a:lstStyle/>
+          <a:p>
+            <a:pPr algn="l"/>
+            <a:r>
+              <a:rPr sz="1300" b="0" i="0">
                 <a:solidFill>
                   <a:srgbClr val="FFFFFF"/>
                 </a:solidFill>
                 <a:latin typeface="Calibri"/>
               </a:rPr>
-              <a:t>Next step: Extend &amp; revisit</a:t>
-            </a:r>
-          </a:p>
-          <a:p>
-            <a:pPr>
-              <a:spcBef>
-                <a:spcPts val="400"/>
-              </a:spcBef>
-            </a:pPr>
-            <a:r>
-              <a:rPr sz="1450">
-                <a:solidFill>
-                  <a:srgbClr val="D7DEE8"/>
-                </a:solidFill>
-                <a:latin typeface="Calibri"/>
-              </a:rPr>
-              <a:t>Extend the model per LoB/channel for sharper staffing allocation, and revisit shrinkage assumptions quarterly as the roster's tenure mix shifts.</a:t>
+              <a:t>Add overtime or a couple of flexible-shift agents — 42 days of lead time to plan it, not a same-week scramble.</a:t>
             </a:r>
           </a:p>
         </p:txBody>
@@ -7672,7 +9045,252 @@
         </p:nvSpPr>
         <p:spPr>
           <a:xfrm>
-            <a:off x="594360" y="6309360"/>
+            <a:off x="8061960" y="2194560"/>
+            <a:ext cx="3505200" cy="1280160"/>
+          </a:xfrm>
+          <a:prstGeom prst="rect">
+            <a:avLst/>
+          </a:prstGeom>
+          <a:noFill/>
+        </p:spPr>
+        <p:txBody>
+          <a:bodyPr wrap="square">
+            <a:spAutoFit/>
+          </a:bodyPr>
+          <a:lstStyle/>
+          <a:p>
+            <a:pPr algn="l"/>
+            <a:r>
+              <a:rPr sz="1300" b="0" i="0">
+                <a:solidFill>
+                  <a:srgbClr val="D7DEE8"/>
+                </a:solidFill>
+                <a:latin typeface="Calibri"/>
+              </a:rPr>
+              <a:t>Closes the average 2.5-FTE shortfall before it hits service levels.</a:t>
+            </a:r>
+          </a:p>
+        </p:txBody>
+      </p:sp>
+      <p:sp>
+        <p:nvSpPr>
+          <p:cNvPr id="10" name="TextBox 9"/>
+          <p:cNvSpPr txBox="1"/>
+          <p:nvPr/>
+        </p:nvSpPr>
+        <p:spPr>
+          <a:xfrm>
+            <a:off x="594360" y="3474720"/>
+            <a:ext cx="3505200" cy="1280160"/>
+          </a:xfrm>
+          <a:prstGeom prst="rect">
+            <a:avLst/>
+          </a:prstGeom>
+          <a:noFill/>
+        </p:spPr>
+        <p:txBody>
+          <a:bodyPr wrap="square">
+            <a:spAutoFit/>
+          </a:bodyPr>
+          <a:lstStyle/>
+          <a:p>
+            <a:pPr algn="l"/>
+            <a:r>
+              <a:rPr sz="1500" b="1" i="0">
+                <a:solidFill>
+                  <a:srgbClr val="2EC4B6"/>
+                </a:solidFill>
+                <a:latin typeface="Calibri"/>
+              </a:rPr>
+              <a:t>Fix #2: Watch the peak day</a:t>
+            </a:r>
+          </a:p>
+        </p:txBody>
+      </p:sp>
+      <p:sp>
+        <p:nvSpPr>
+          <p:cNvPr id="11" name="TextBox 10"/>
+          <p:cNvSpPr txBox="1"/>
+          <p:nvPr/>
+        </p:nvSpPr>
+        <p:spPr>
+          <a:xfrm>
+            <a:off x="4328160" y="3474720"/>
+            <a:ext cx="3505200" cy="1280160"/>
+          </a:xfrm>
+          <a:prstGeom prst="rect">
+            <a:avLst/>
+          </a:prstGeom>
+          <a:noFill/>
+        </p:spPr>
+        <p:txBody>
+          <a:bodyPr wrap="square">
+            <a:spAutoFit/>
+          </a:bodyPr>
+          <a:lstStyle/>
+          <a:p>
+            <a:pPr algn="l"/>
+            <a:r>
+              <a:rPr sz="1300" b="0" i="0">
+                <a:solidFill>
+                  <a:srgbClr val="FFFFFF"/>
+                </a:solidFill>
+                <a:latin typeface="Calibri"/>
+              </a:rPr>
+              <a:t>Flag 18 Nov 2026 specifically for extra coverage.</a:t>
+            </a:r>
+          </a:p>
+        </p:txBody>
+      </p:sp>
+      <p:sp>
+        <p:nvSpPr>
+          <p:cNvPr id="12" name="TextBox 11"/>
+          <p:cNvSpPr txBox="1"/>
+          <p:nvPr/>
+        </p:nvSpPr>
+        <p:spPr>
+          <a:xfrm>
+            <a:off x="8061960" y="3474720"/>
+            <a:ext cx="3505200" cy="1280160"/>
+          </a:xfrm>
+          <a:prstGeom prst="rect">
+            <a:avLst/>
+          </a:prstGeom>
+          <a:noFill/>
+        </p:spPr>
+        <p:txBody>
+          <a:bodyPr wrap="square">
+            <a:spAutoFit/>
+          </a:bodyPr>
+          <a:lstStyle/>
+          <a:p>
+            <a:pPr algn="l"/>
+            <a:r>
+              <a:rPr sz="1300" b="0" i="0">
+                <a:solidFill>
+                  <a:srgbClr val="D7DEE8"/>
+                </a:solidFill>
+                <a:latin typeface="Calibri"/>
+              </a:rPr>
+              <a:t>Avoids the single worst-staffed day in the horizon, 3.7 FTE short.</a:t>
+            </a:r>
+          </a:p>
+        </p:txBody>
+      </p:sp>
+      <p:sp>
+        <p:nvSpPr>
+          <p:cNvPr id="13" name="TextBox 12"/>
+          <p:cNvSpPr txBox="1"/>
+          <p:nvPr/>
+        </p:nvSpPr>
+        <p:spPr>
+          <a:xfrm>
+            <a:off x="594360" y="4754880"/>
+            <a:ext cx="3505200" cy="1280160"/>
+          </a:xfrm>
+          <a:prstGeom prst="rect">
+            <a:avLst/>
+          </a:prstGeom>
+          <a:noFill/>
+        </p:spPr>
+        <p:txBody>
+          <a:bodyPr wrap="square">
+            <a:spAutoFit/>
+          </a:bodyPr>
+          <a:lstStyle/>
+          <a:p>
+            <a:pPr algn="l"/>
+            <a:r>
+              <a:rPr sz="1500" b="1" i="0">
+                <a:solidFill>
+                  <a:srgbClr val="2EC4B6"/>
+                </a:solidFill>
+                <a:latin typeface="Calibri"/>
+              </a:rPr>
+              <a:t>Next: Extend &amp; revisit</a:t>
+            </a:r>
+          </a:p>
+        </p:txBody>
+      </p:sp>
+      <p:sp>
+        <p:nvSpPr>
+          <p:cNvPr id="14" name="TextBox 13"/>
+          <p:cNvSpPr txBox="1"/>
+          <p:nvPr/>
+        </p:nvSpPr>
+        <p:spPr>
+          <a:xfrm>
+            <a:off x="4328160" y="4754880"/>
+            <a:ext cx="3505200" cy="1280160"/>
+          </a:xfrm>
+          <a:prstGeom prst="rect">
+            <a:avLst/>
+          </a:prstGeom>
+          <a:noFill/>
+        </p:spPr>
+        <p:txBody>
+          <a:bodyPr wrap="square">
+            <a:spAutoFit/>
+          </a:bodyPr>
+          <a:lstStyle/>
+          <a:p>
+            <a:pPr algn="l"/>
+            <a:r>
+              <a:rPr sz="1300" b="0" i="0">
+                <a:solidFill>
+                  <a:srgbClr val="FFFFFF"/>
+                </a:solidFill>
+                <a:latin typeface="Calibri"/>
+              </a:rPr>
+              <a:t>Extend the model per LoB/channel, and revisit shrinkage assumptions quarterly.</a:t>
+            </a:r>
+          </a:p>
+        </p:txBody>
+      </p:sp>
+      <p:sp>
+        <p:nvSpPr>
+          <p:cNvPr id="15" name="TextBox 14"/>
+          <p:cNvSpPr txBox="1"/>
+          <p:nvPr/>
+        </p:nvSpPr>
+        <p:spPr>
+          <a:xfrm>
+            <a:off x="8061960" y="4754880"/>
+            <a:ext cx="3505200" cy="1280160"/>
+          </a:xfrm>
+          <a:prstGeom prst="rect">
+            <a:avLst/>
+          </a:prstGeom>
+          <a:noFill/>
+        </p:spPr>
+        <p:txBody>
+          <a:bodyPr wrap="square">
+            <a:spAutoFit/>
+          </a:bodyPr>
+          <a:lstStyle/>
+          <a:p>
+            <a:pPr algn="l"/>
+            <a:r>
+              <a:rPr sz="1300" b="0" i="0">
+                <a:solidFill>
+                  <a:srgbClr val="D7DEE8"/>
+                </a:solidFill>
+                <a:latin typeface="Calibri"/>
+              </a:rPr>
+              <a:t>Sharper staffing allocation as the roster's tenure mix shifts over time.</a:t>
+            </a:r>
+          </a:p>
+        </p:txBody>
+      </p:sp>
+      <p:sp>
+        <p:nvSpPr>
+          <p:cNvPr id="16" name="TextBox 15"/>
+          <p:cNvSpPr txBox="1"/>
+          <p:nvPr/>
+        </p:nvSpPr>
+        <p:spPr>
+          <a:xfrm>
+            <a:off x="594360" y="6355080"/>
             <a:ext cx="10058400" cy="365760"/>
           </a:xfrm>
           <a:prstGeom prst="rect">

--- a/usecase2_demand_forecasting/final_output/usecase2_forecast_summary.pptx
+++ b/usecase2_demand_forecasting/final_output/usecase2_forecast_summary.pptx
@@ -5048,7 +5048,7 @@
         </p:nvSpPr>
         <p:spPr>
           <a:xfrm>
-            <a:off x="594360" y="1417320"/>
+            <a:off x="594360" y="1371600"/>
             <a:ext cx="292608" cy="292608"/>
           </a:xfrm>
           <a:prstGeom prst="ellipse">
@@ -5101,7 +5101,7 @@
         </p:nvSpPr>
         <p:spPr>
           <a:xfrm>
-            <a:off x="978408" y="1399032"/>
+            <a:off x="978408" y="1353312"/>
             <a:ext cx="4828032" cy="292608"/>
           </a:xfrm>
           <a:prstGeom prst="rect">
@@ -5123,20 +5123,55 @@
                 </a:solidFill>
                 <a:latin typeface="Calibri"/>
               </a:rPr>
-              <a:t>Explore first</a:t>
-            </a:r>
-          </a:p>
-        </p:txBody>
-      </p:sp>
-      <p:sp>
-        <p:nvSpPr>
-          <p:cNvPr id="7" name="Oval 6"/>
+              <a:t>Load &amp; prepare data</a:t>
+            </a:r>
+          </a:p>
+        </p:txBody>
+      </p:sp>
+      <p:sp>
+        <p:nvSpPr>
+          <p:cNvPr id="7" name="TextBox 6"/>
+          <p:cNvSpPr txBox="1"/>
+          <p:nvPr/>
+        </p:nvSpPr>
+        <p:spPr>
+          <a:xfrm>
+            <a:off x="649224" y="1700784"/>
+            <a:ext cx="5157216" cy="182880"/>
+          </a:xfrm>
+          <a:prstGeom prst="rect">
+            <a:avLst/>
+          </a:prstGeom>
+          <a:noFill/>
+        </p:spPr>
+        <p:txBody>
+          <a:bodyPr wrap="square">
+            <a:spAutoFit/>
+          </a:bodyPr>
+          <a:lstStyle/>
+          <a:p>
+            <a:pPr algn="l"/>
+            <a:r>
+              <a:rPr sz="950" b="1" i="0">
+                <a:solidFill>
+                  <a:srgbClr val="1F9A8F"/>
+                </a:solidFill>
+                <a:latin typeface="Calibri"/>
+              </a:rPr>
+              <a:t>APPROACH</a:t>
+            </a:r>
+          </a:p>
+        </p:txBody>
+      </p:sp>
+      <p:sp>
+        <p:nvSpPr>
+          <p:cNvPr id="8" name="Oval 7"/>
           <p:cNvSpPr/>
           <p:nvPr/>
         </p:nvSpPr>
         <p:spPr>
           <a:xfrm>
-            <a:off x="667512" y="1847088"/>
+            <a:off x="667512" y="1956816"/>
             <a:ext cx="82296" cy="82296"/>
           </a:xfrm>
           <a:prstGeom prst="ellipse">
@@ -5174,14 +5209,14 @@
       </p:sp>
       <p:sp>
         <p:nvSpPr>
-          <p:cNvPr id="8" name="TextBox 7"/>
+          <p:cNvPr id="9" name="TextBox 8"/>
           <p:cNvSpPr txBox="1"/>
           <p:nvPr/>
         </p:nvSpPr>
         <p:spPr>
           <a:xfrm>
-            <a:off x="868680" y="1783080"/>
-            <a:ext cx="4937760" cy="292608"/>
+            <a:off x="868680" y="1901952"/>
+            <a:ext cx="4937760" cy="256032"/>
           </a:xfrm>
           <a:prstGeom prst="rect">
             <a:avLst/>
@@ -5202,20 +5237,20 @@
                 </a:solidFill>
                 <a:latin typeface="Calibri"/>
               </a:rPr>
-              <a:t>Decomposes trend + weekly/yearly seasonality</a:t>
-            </a:r>
-          </a:p>
-        </p:txBody>
-      </p:sp>
-      <p:sp>
-        <p:nvSpPr>
-          <p:cNvPr id="9" name="Oval 8"/>
+              <a:t>Load 3.8 yrs volume history + the agent roster</a:t>
+            </a:r>
+          </a:p>
+        </p:txBody>
+      </p:sp>
+      <p:sp>
+        <p:nvSpPr>
+          <p:cNvPr id="10" name="Oval 9"/>
           <p:cNvSpPr/>
           <p:nvPr/>
         </p:nvSpPr>
         <p:spPr>
           <a:xfrm>
-            <a:off x="667512" y="2157984"/>
+            <a:off x="667512" y="2231136"/>
             <a:ext cx="82296" cy="82296"/>
           </a:xfrm>
           <a:prstGeom prst="ellipse">
@@ -5253,14 +5288,14 @@
       </p:sp>
       <p:sp>
         <p:nvSpPr>
-          <p:cNvPr id="10" name="TextBox 9"/>
+          <p:cNvPr id="11" name="TextBox 10"/>
           <p:cNvSpPr txBox="1"/>
           <p:nvPr/>
         </p:nvSpPr>
         <p:spPr>
           <a:xfrm>
-            <a:off x="868680" y="2093976"/>
-            <a:ext cx="4937760" cy="292608"/>
+            <a:off x="868680" y="2176272"/>
+            <a:ext cx="4937760" cy="256032"/>
           </a:xfrm>
           <a:prstGeom prst="rect">
             <a:avLst/>
@@ -5281,21 +5316,135 @@
                 </a:solidFill>
                 <a:latin typeface="Calibri"/>
               </a:rPr>
-              <a:t>Checks day-of-week patterns before modeling</a:t>
-            </a:r>
-          </a:p>
-        </p:txBody>
-      </p:sp>
-      <p:sp>
-        <p:nvSpPr>
-          <p:cNvPr id="11" name="Oval 10"/>
+              <a:t>Derive occupancy from the roster's REAL shrinkage %</a:t>
+            </a:r>
+          </a:p>
+        </p:txBody>
+      </p:sp>
+      <p:sp>
+        <p:nvSpPr>
+          <p:cNvPr id="12" name="TextBox 11"/>
+          <p:cNvSpPr txBox="1"/>
+          <p:nvPr/>
+        </p:nvSpPr>
+        <p:spPr>
+          <a:xfrm>
+            <a:off x="649224" y="2468880"/>
+            <a:ext cx="5157216" cy="182880"/>
+          </a:xfrm>
+          <a:prstGeom prst="rect">
+            <a:avLst/>
+          </a:prstGeom>
+          <a:noFill/>
+        </p:spPr>
+        <p:txBody>
+          <a:bodyPr wrap="square">
+            <a:spAutoFit/>
+          </a:bodyPr>
+          <a:lstStyle/>
+          <a:p>
+            <a:pPr algn="l"/>
+            <a:r>
+              <a:rPr sz="950" b="1" i="0">
+                <a:solidFill>
+                  <a:srgbClr val="1B2A4A"/>
+                </a:solidFill>
+                <a:latin typeface="Calibri"/>
+              </a:rPr>
+              <a:t>OUTPUT</a:t>
+            </a:r>
+          </a:p>
+        </p:txBody>
+      </p:sp>
+      <p:sp>
+        <p:nvSpPr>
+          <p:cNvPr id="13" name="Oval 12"/>
           <p:cNvSpPr/>
           <p:nvPr/>
         </p:nvSpPr>
         <p:spPr>
           <a:xfrm>
-            <a:off x="667512" y="2468880"/>
+            <a:off x="667512" y="2724912"/>
             <a:ext cx="82296" cy="82296"/>
+          </a:xfrm>
+          <a:prstGeom prst="ellipse">
+            <a:avLst/>
+          </a:prstGeom>
+          <a:solidFill>
+            <a:srgbClr val="1B2A4A"/>
+          </a:solidFill>
+          <a:ln>
+            <a:noFill/>
+          </a:ln>
+          <a:effectLst/>
+        </p:spPr>
+        <p:style>
+          <a:lnRef idx="1">
+            <a:schemeClr val="accent1"/>
+          </a:lnRef>
+          <a:fillRef idx="3">
+            <a:schemeClr val="accent1"/>
+          </a:fillRef>
+          <a:effectRef idx="2">
+            <a:schemeClr val="accent1"/>
+          </a:effectRef>
+          <a:fontRef idx="minor">
+            <a:schemeClr val="lt1"/>
+          </a:fontRef>
+        </p:style>
+        <p:txBody>
+          <a:bodyPr rtlCol="0" anchor="ctr"/>
+          <a:lstStyle/>
+          <a:p>
+            <a:pPr algn="ctr"/>
+          </a:p>
+        </p:txBody>
+      </p:sp>
+      <p:sp>
+        <p:nvSpPr>
+          <p:cNvPr id="14" name="TextBox 13"/>
+          <p:cNvSpPr txBox="1"/>
+          <p:nvPr/>
+        </p:nvSpPr>
+        <p:spPr>
+          <a:xfrm>
+            <a:off x="868680" y="2670048"/>
+            <a:ext cx="4937760" cy="256032"/>
+          </a:xfrm>
+          <a:prstGeom prst="rect">
+            <a:avLst/>
+          </a:prstGeom>
+          <a:noFill/>
+        </p:spPr>
+        <p:txBody>
+          <a:bodyPr wrap="square">
+            <a:spAutoFit/>
+          </a:bodyPr>
+          <a:lstStyle/>
+          <a:p>
+            <a:pPr algn="l"/>
+            <a:r>
+              <a:rPr sz="1150" b="1" i="0">
+                <a:solidFill>
+                  <a:srgbClr val="202633"/>
+                </a:solidFill>
+                <a:latin typeface="Calibri"/>
+              </a:rPr>
+              <a:t>A ready-to-model daily volume series + occupancy figure</a:t>
+            </a:r>
+          </a:p>
+        </p:txBody>
+      </p:sp>
+      <p:sp>
+        <p:nvSpPr>
+          <p:cNvPr id="15" name="Oval 14"/>
+          <p:cNvSpPr/>
+          <p:nvPr/>
+        </p:nvSpPr>
+        <p:spPr>
+          <a:xfrm>
+            <a:off x="594360" y="2962656"/>
+            <a:ext cx="292608" cy="292608"/>
           </a:xfrm>
           <a:prstGeom prst="ellipse">
             <a:avLst/>
@@ -5327,19 +5476,28 @@
           <a:lstStyle/>
           <a:p>
             <a:pPr algn="ctr"/>
-          </a:p>
-        </p:txBody>
-      </p:sp>
-      <p:sp>
-        <p:nvSpPr>
-          <p:cNvPr id="12" name="TextBox 11"/>
+            <a:r>
+              <a:rPr sz="1400" b="1">
+                <a:solidFill>
+                  <a:srgbClr val="FFFFFF"/>
+                </a:solidFill>
+                <a:latin typeface="Calibri"/>
+              </a:rPr>
+              <a:t>2</a:t>
+            </a:r>
+          </a:p>
+        </p:txBody>
+      </p:sp>
+      <p:sp>
+        <p:nvSpPr>
+          <p:cNvPr id="16" name="TextBox 15"/>
           <p:cNvSpPr txBox="1"/>
           <p:nvPr/>
         </p:nvSpPr>
         <p:spPr>
           <a:xfrm>
-            <a:off x="868680" y="2404872"/>
-            <a:ext cx="4937760" cy="292608"/>
+            <a:off x="978408" y="2944368"/>
+            <a:ext cx="4828032" cy="292608"/>
           </a:xfrm>
           <a:prstGeom prst="rect">
             <a:avLst/>
@@ -5354,26 +5512,61 @@
           <a:p>
             <a:pPr algn="l"/>
             <a:r>
-              <a:rPr sz="1150" b="0" i="0">
-                <a:solidFill>
-                  <a:srgbClr val="202633"/>
-                </a:solidFill>
-                <a:latin typeface="Calibri"/>
-              </a:rPr>
-              <a:t>Spots holiday/campaign spikes visually first</a:t>
-            </a:r>
-          </a:p>
-        </p:txBody>
-      </p:sp>
-      <p:sp>
-        <p:nvSpPr>
-          <p:cNvPr id="13" name="Oval 12"/>
+              <a:rPr sz="1450" b="1" i="0">
+                <a:solidFill>
+                  <a:srgbClr val="1B2A4A"/>
+                </a:solidFill>
+                <a:latin typeface="Calibri"/>
+              </a:rPr>
+              <a:t>Explore first</a:t>
+            </a:r>
+          </a:p>
+        </p:txBody>
+      </p:sp>
+      <p:sp>
+        <p:nvSpPr>
+          <p:cNvPr id="17" name="TextBox 16"/>
+          <p:cNvSpPr txBox="1"/>
+          <p:nvPr/>
+        </p:nvSpPr>
+        <p:spPr>
+          <a:xfrm>
+            <a:off x="649224" y="3291840"/>
+            <a:ext cx="5157216" cy="182880"/>
+          </a:xfrm>
+          <a:prstGeom prst="rect">
+            <a:avLst/>
+          </a:prstGeom>
+          <a:noFill/>
+        </p:spPr>
+        <p:txBody>
+          <a:bodyPr wrap="square">
+            <a:spAutoFit/>
+          </a:bodyPr>
+          <a:lstStyle/>
+          <a:p>
+            <a:pPr algn="l"/>
+            <a:r>
+              <a:rPr sz="950" b="1" i="0">
+                <a:solidFill>
+                  <a:srgbClr val="1F9A8F"/>
+                </a:solidFill>
+                <a:latin typeface="Calibri"/>
+              </a:rPr>
+              <a:t>APPROACH</a:t>
+            </a:r>
+          </a:p>
+        </p:txBody>
+      </p:sp>
+      <p:sp>
+        <p:nvSpPr>
+          <p:cNvPr id="18" name="Oval 17"/>
           <p:cNvSpPr/>
           <p:nvPr/>
         </p:nvSpPr>
         <p:spPr>
           <a:xfrm>
-            <a:off x="667512" y="2779776"/>
+            <a:off x="667512" y="3547872"/>
             <a:ext cx="82296" cy="82296"/>
           </a:xfrm>
           <a:prstGeom prst="ellipse">
@@ -5411,14 +5604,14 @@
       </p:sp>
       <p:sp>
         <p:nvSpPr>
-          <p:cNvPr id="14" name="TextBox 13"/>
+          <p:cNvPr id="19" name="TextBox 18"/>
           <p:cNvSpPr txBox="1"/>
           <p:nvPr/>
         </p:nvSpPr>
         <p:spPr>
           <a:xfrm>
-            <a:off x="868680" y="2715768"/>
-            <a:ext cx="4937760" cy="292608"/>
+            <a:off x="868680" y="3493008"/>
+            <a:ext cx="4937760" cy="256032"/>
           </a:xfrm>
           <a:prstGeom prst="rect">
             <a:avLst/>
@@ -5439,21 +5632,21 @@
                 </a:solidFill>
                 <a:latin typeface="Calibri"/>
               </a:rPr>
-              <a:t>No model touches the data blind</a:t>
-            </a:r>
-          </a:p>
-        </p:txBody>
-      </p:sp>
-      <p:sp>
-        <p:nvSpPr>
-          <p:cNvPr id="15" name="Oval 14"/>
+              <a:t>Decompose trend + weekly/yearly seasonality</a:t>
+            </a:r>
+          </a:p>
+        </p:txBody>
+      </p:sp>
+      <p:sp>
+        <p:nvSpPr>
+          <p:cNvPr id="20" name="Oval 19"/>
           <p:cNvSpPr/>
           <p:nvPr/>
         </p:nvSpPr>
         <p:spPr>
           <a:xfrm>
-            <a:off x="594360" y="3026664"/>
-            <a:ext cx="292608" cy="292608"/>
+            <a:off x="667512" y="3822192"/>
+            <a:ext cx="82296" cy="82296"/>
           </a:xfrm>
           <a:prstGeom prst="ellipse">
             <a:avLst/>
@@ -5485,28 +5678,19 @@
           <a:lstStyle/>
           <a:p>
             <a:pPr algn="ctr"/>
-            <a:r>
-              <a:rPr sz="1400" b="1">
-                <a:solidFill>
-                  <a:srgbClr val="FFFFFF"/>
-                </a:solidFill>
-                <a:latin typeface="Calibri"/>
-              </a:rPr>
-              <a:t>2</a:t>
-            </a:r>
-          </a:p>
-        </p:txBody>
-      </p:sp>
-      <p:sp>
-        <p:nvSpPr>
-          <p:cNvPr id="16" name="TextBox 15"/>
+          </a:p>
+        </p:txBody>
+      </p:sp>
+      <p:sp>
+        <p:nvSpPr>
+          <p:cNvPr id="21" name="TextBox 20"/>
           <p:cNvSpPr txBox="1"/>
           <p:nvPr/>
         </p:nvSpPr>
         <p:spPr>
           <a:xfrm>
-            <a:off x="978408" y="3008376"/>
-            <a:ext cx="4828032" cy="292608"/>
+            <a:off x="868680" y="3767328"/>
+            <a:ext cx="4937760" cy="256032"/>
           </a:xfrm>
           <a:prstGeom prst="rect">
             <a:avLst/>
@@ -5521,27 +5705,141 @@
           <a:p>
             <a:pPr algn="l"/>
             <a:r>
-              <a:rPr sz="1450" b="1" i="0">
+              <a:rPr sz="1150" b="0" i="0">
+                <a:solidFill>
+                  <a:srgbClr val="202633"/>
+                </a:solidFill>
+                <a:latin typeface="Calibri"/>
+              </a:rPr>
+              <a:t>Check day-of-week patterns before modeling</a:t>
+            </a:r>
+          </a:p>
+        </p:txBody>
+      </p:sp>
+      <p:sp>
+        <p:nvSpPr>
+          <p:cNvPr id="22" name="TextBox 21"/>
+          <p:cNvSpPr txBox="1"/>
+          <p:nvPr/>
+        </p:nvSpPr>
+        <p:spPr>
+          <a:xfrm>
+            <a:off x="649224" y="4059936"/>
+            <a:ext cx="5157216" cy="182880"/>
+          </a:xfrm>
+          <a:prstGeom prst="rect">
+            <a:avLst/>
+          </a:prstGeom>
+          <a:noFill/>
+        </p:spPr>
+        <p:txBody>
+          <a:bodyPr wrap="square">
+            <a:spAutoFit/>
+          </a:bodyPr>
+          <a:lstStyle/>
+          <a:p>
+            <a:pPr algn="l"/>
+            <a:r>
+              <a:rPr sz="950" b="1" i="0">
                 <a:solidFill>
                   <a:srgbClr val="1B2A4A"/>
                 </a:solidFill>
                 <a:latin typeface="Calibri"/>
               </a:rPr>
-              <a:t>Benchmark honestly</a:t>
-            </a:r>
-          </a:p>
-        </p:txBody>
-      </p:sp>
-      <p:sp>
-        <p:nvSpPr>
-          <p:cNvPr id="17" name="Oval 16"/>
+              <a:t>OUTPUT</a:t>
+            </a:r>
+          </a:p>
+        </p:txBody>
+      </p:sp>
+      <p:sp>
+        <p:nvSpPr>
+          <p:cNvPr id="23" name="Oval 22"/>
           <p:cNvSpPr/>
           <p:nvPr/>
         </p:nvSpPr>
         <p:spPr>
           <a:xfrm>
-            <a:off x="667512" y="3456432"/>
+            <a:off x="667512" y="4315968"/>
             <a:ext cx="82296" cy="82296"/>
+          </a:xfrm>
+          <a:prstGeom prst="ellipse">
+            <a:avLst/>
+          </a:prstGeom>
+          <a:solidFill>
+            <a:srgbClr val="1B2A4A"/>
+          </a:solidFill>
+          <a:ln>
+            <a:noFill/>
+          </a:ln>
+          <a:effectLst/>
+        </p:spPr>
+        <p:style>
+          <a:lnRef idx="1">
+            <a:schemeClr val="accent1"/>
+          </a:lnRef>
+          <a:fillRef idx="3">
+            <a:schemeClr val="accent1"/>
+          </a:fillRef>
+          <a:effectRef idx="2">
+            <a:schemeClr val="accent1"/>
+          </a:effectRef>
+          <a:fontRef idx="minor">
+            <a:schemeClr val="lt1"/>
+          </a:fontRef>
+        </p:style>
+        <p:txBody>
+          <a:bodyPr rtlCol="0" anchor="ctr"/>
+          <a:lstStyle/>
+          <a:p>
+            <a:pPr algn="ctr"/>
+          </a:p>
+        </p:txBody>
+      </p:sp>
+      <p:sp>
+        <p:nvSpPr>
+          <p:cNvPr id="24" name="TextBox 23"/>
+          <p:cNvSpPr txBox="1"/>
+          <p:nvPr/>
+        </p:nvSpPr>
+        <p:spPr>
+          <a:xfrm>
+            <a:off x="868680" y="4261104"/>
+            <a:ext cx="4937760" cy="256032"/>
+          </a:xfrm>
+          <a:prstGeom prst="rect">
+            <a:avLst/>
+          </a:prstGeom>
+          <a:noFill/>
+        </p:spPr>
+        <p:txBody>
+          <a:bodyPr wrap="square">
+            <a:spAutoFit/>
+          </a:bodyPr>
+          <a:lstStyle/>
+          <a:p>
+            <a:pPr algn="l"/>
+            <a:r>
+              <a:rPr sz="1150" b="1" i="0">
+                <a:solidFill>
+                  <a:srgbClr val="202633"/>
+                </a:solidFill>
+                <a:latin typeface="Calibri"/>
+              </a:rPr>
+              <a:t>Confirms the series' real shape before trusting a model</a:t>
+            </a:r>
+          </a:p>
+        </p:txBody>
+      </p:sp>
+      <p:sp>
+        <p:nvSpPr>
+          <p:cNvPr id="25" name="Oval 24"/>
+          <p:cNvSpPr/>
+          <p:nvPr/>
+        </p:nvSpPr>
+        <p:spPr>
+          <a:xfrm>
+            <a:off x="594360" y="4553712"/>
+            <a:ext cx="292608" cy="292608"/>
           </a:xfrm>
           <a:prstGeom prst="ellipse">
             <a:avLst/>
@@ -5573,19 +5871,28 @@
           <a:lstStyle/>
           <a:p>
             <a:pPr algn="ctr"/>
-          </a:p>
-        </p:txBody>
-      </p:sp>
-      <p:sp>
-        <p:nvSpPr>
-          <p:cNvPr id="18" name="TextBox 17"/>
+            <a:r>
+              <a:rPr sz="1400" b="1">
+                <a:solidFill>
+                  <a:srgbClr val="FFFFFF"/>
+                </a:solidFill>
+                <a:latin typeface="Calibri"/>
+              </a:rPr>
+              <a:t>3</a:t>
+            </a:r>
+          </a:p>
+        </p:txBody>
+      </p:sp>
+      <p:sp>
+        <p:nvSpPr>
+          <p:cNvPr id="26" name="TextBox 25"/>
           <p:cNvSpPr txBox="1"/>
           <p:nvPr/>
         </p:nvSpPr>
         <p:spPr>
           <a:xfrm>
-            <a:off x="868680" y="3392424"/>
-            <a:ext cx="4937760" cy="292608"/>
+            <a:off x="978408" y="4535424"/>
+            <a:ext cx="4828032" cy="292608"/>
           </a:xfrm>
           <a:prstGeom prst="rect">
             <a:avLst/>
@@ -5600,26 +5907,61 @@
           <a:p>
             <a:pPr algn="l"/>
             <a:r>
-              <a:rPr sz="1150" b="0" i="0">
-                <a:solidFill>
-                  <a:srgbClr val="202633"/>
-                </a:solidFill>
-                <a:latin typeface="Calibri"/>
-              </a:rPr>
-              <a:t>Naive seasonal baseline: repeat last week</a:t>
-            </a:r>
-          </a:p>
-        </p:txBody>
-      </p:sp>
-      <p:sp>
-        <p:nvSpPr>
-          <p:cNvPr id="19" name="Oval 18"/>
+              <a:rPr sz="1450" b="1" i="0">
+                <a:solidFill>
+                  <a:srgbClr val="1B2A4A"/>
+                </a:solidFill>
+                <a:latin typeface="Calibri"/>
+              </a:rPr>
+              <a:t>Benchmark honestly</a:t>
+            </a:r>
+          </a:p>
+        </p:txBody>
+      </p:sp>
+      <p:sp>
+        <p:nvSpPr>
+          <p:cNvPr id="27" name="TextBox 26"/>
+          <p:cNvSpPr txBox="1"/>
+          <p:nvPr/>
+        </p:nvSpPr>
+        <p:spPr>
+          <a:xfrm>
+            <a:off x="649224" y="4882896"/>
+            <a:ext cx="5157216" cy="182880"/>
+          </a:xfrm>
+          <a:prstGeom prst="rect">
+            <a:avLst/>
+          </a:prstGeom>
+          <a:noFill/>
+        </p:spPr>
+        <p:txBody>
+          <a:bodyPr wrap="square">
+            <a:spAutoFit/>
+          </a:bodyPr>
+          <a:lstStyle/>
+          <a:p>
+            <a:pPr algn="l"/>
+            <a:r>
+              <a:rPr sz="950" b="1" i="0">
+                <a:solidFill>
+                  <a:srgbClr val="1F9A8F"/>
+                </a:solidFill>
+                <a:latin typeface="Calibri"/>
+              </a:rPr>
+              <a:t>APPROACH</a:t>
+            </a:r>
+          </a:p>
+        </p:txBody>
+      </p:sp>
+      <p:sp>
+        <p:nvSpPr>
+          <p:cNvPr id="28" name="Oval 27"/>
           <p:cNvSpPr/>
           <p:nvPr/>
         </p:nvSpPr>
         <p:spPr>
           <a:xfrm>
-            <a:off x="667512" y="3767328"/>
+            <a:off x="667512" y="5138928"/>
             <a:ext cx="82296" cy="82296"/>
           </a:xfrm>
           <a:prstGeom prst="ellipse">
@@ -5657,14 +5999,14 @@
       </p:sp>
       <p:sp>
         <p:nvSpPr>
-          <p:cNvPr id="20" name="TextBox 19"/>
+          <p:cNvPr id="29" name="TextBox 28"/>
           <p:cNvSpPr txBox="1"/>
           <p:nvPr/>
         </p:nvSpPr>
         <p:spPr>
           <a:xfrm>
-            <a:off x="868680" y="3703320"/>
-            <a:ext cx="4937760" cy="292608"/>
+            <a:off x="868680" y="5084064"/>
+            <a:ext cx="4937760" cy="256032"/>
           </a:xfrm>
           <a:prstGeom prst="rect">
             <a:avLst/>
@@ -5685,20 +6027,20 @@
                 </a:solidFill>
                 <a:latin typeface="Calibri"/>
               </a:rPr>
-              <a:t>Every candidate tested on a 60-day holdout</a:t>
-            </a:r>
-          </a:p>
-        </p:txBody>
-      </p:sp>
-      <p:sp>
-        <p:nvSpPr>
-          <p:cNvPr id="21" name="Oval 20"/>
+              <a:t>Naive seasonal baseline: repeat last week</a:t>
+            </a:r>
+          </a:p>
+        </p:txBody>
+      </p:sp>
+      <p:sp>
+        <p:nvSpPr>
+          <p:cNvPr id="30" name="Oval 29"/>
           <p:cNvSpPr/>
           <p:nvPr/>
         </p:nvSpPr>
         <p:spPr>
           <a:xfrm>
-            <a:off x="667512" y="4078224"/>
+            <a:off x="667512" y="5413248"/>
             <a:ext cx="82296" cy="82296"/>
           </a:xfrm>
           <a:prstGeom prst="ellipse">
@@ -5736,14 +6078,14 @@
       </p:sp>
       <p:sp>
         <p:nvSpPr>
-          <p:cNvPr id="22" name="TextBox 21"/>
+          <p:cNvPr id="31" name="TextBox 30"/>
           <p:cNvSpPr txBox="1"/>
           <p:nvPr/>
         </p:nvSpPr>
         <p:spPr>
           <a:xfrm>
-            <a:off x="868680" y="4014216"/>
-            <a:ext cx="4937760" cy="292608"/>
+            <a:off x="868680" y="5358384"/>
+            <a:ext cx="4937760" cy="256032"/>
           </a:xfrm>
           <a:prstGeom prst="rect">
             <a:avLst/>
@@ -5764,21 +6106,135 @@
                 </a:solidFill>
                 <a:latin typeface="Calibri"/>
               </a:rPr>
-              <a:t>A model only ships if it beats the baseline</a:t>
-            </a:r>
-          </a:p>
-        </p:txBody>
-      </p:sp>
-      <p:sp>
-        <p:nvSpPr>
-          <p:cNvPr id="23" name="Oval 22"/>
+              <a:t>Test every candidate on a 60-day holdout</a:t>
+            </a:r>
+          </a:p>
+        </p:txBody>
+      </p:sp>
+      <p:sp>
+        <p:nvSpPr>
+          <p:cNvPr id="32" name="TextBox 31"/>
+          <p:cNvSpPr txBox="1"/>
+          <p:nvPr/>
+        </p:nvSpPr>
+        <p:spPr>
+          <a:xfrm>
+            <a:off x="649224" y="5650992"/>
+            <a:ext cx="5157216" cy="182880"/>
+          </a:xfrm>
+          <a:prstGeom prst="rect">
+            <a:avLst/>
+          </a:prstGeom>
+          <a:noFill/>
+        </p:spPr>
+        <p:txBody>
+          <a:bodyPr wrap="square">
+            <a:spAutoFit/>
+          </a:bodyPr>
+          <a:lstStyle/>
+          <a:p>
+            <a:pPr algn="l"/>
+            <a:r>
+              <a:rPr sz="950" b="1" i="0">
+                <a:solidFill>
+                  <a:srgbClr val="1B2A4A"/>
+                </a:solidFill>
+                <a:latin typeface="Calibri"/>
+              </a:rPr>
+              <a:t>OUTPUT</a:t>
+            </a:r>
+          </a:p>
+        </p:txBody>
+      </p:sp>
+      <p:sp>
+        <p:nvSpPr>
+          <p:cNvPr id="33" name="Oval 32"/>
           <p:cNvSpPr/>
           <p:nvPr/>
         </p:nvSpPr>
         <p:spPr>
           <a:xfrm>
-            <a:off x="667512" y="4389120"/>
+            <a:off x="667512" y="5907024"/>
             <a:ext cx="82296" cy="82296"/>
+          </a:xfrm>
+          <a:prstGeom prst="ellipse">
+            <a:avLst/>
+          </a:prstGeom>
+          <a:solidFill>
+            <a:srgbClr val="1B2A4A"/>
+          </a:solidFill>
+          <a:ln>
+            <a:noFill/>
+          </a:ln>
+          <a:effectLst/>
+        </p:spPr>
+        <p:style>
+          <a:lnRef idx="1">
+            <a:schemeClr val="accent1"/>
+          </a:lnRef>
+          <a:fillRef idx="3">
+            <a:schemeClr val="accent1"/>
+          </a:fillRef>
+          <a:effectRef idx="2">
+            <a:schemeClr val="accent1"/>
+          </a:effectRef>
+          <a:fontRef idx="minor">
+            <a:schemeClr val="lt1"/>
+          </a:fontRef>
+        </p:style>
+        <p:txBody>
+          <a:bodyPr rtlCol="0" anchor="ctr"/>
+          <a:lstStyle/>
+          <a:p>
+            <a:pPr algn="ctr"/>
+          </a:p>
+        </p:txBody>
+      </p:sp>
+      <p:sp>
+        <p:nvSpPr>
+          <p:cNvPr id="34" name="TextBox 33"/>
+          <p:cNvSpPr txBox="1"/>
+          <p:nvPr/>
+        </p:nvSpPr>
+        <p:spPr>
+          <a:xfrm>
+            <a:off x="868680" y="5852160"/>
+            <a:ext cx="4937760" cy="256032"/>
+          </a:xfrm>
+          <a:prstGeom prst="rect">
+            <a:avLst/>
+          </a:prstGeom>
+          <a:noFill/>
+        </p:spPr>
+        <p:txBody>
+          <a:bodyPr wrap="square">
+            <a:spAutoFit/>
+          </a:bodyPr>
+          <a:lstStyle/>
+          <a:p>
+            <a:pPr algn="l"/>
+            <a:r>
+              <a:rPr sz="1150" b="1" i="0">
+                <a:solidFill>
+                  <a:srgbClr val="202633"/>
+                </a:solidFill>
+                <a:latin typeface="Calibri"/>
+              </a:rPr>
+              <a:t>A bar every model must beat before it ships</a:t>
+            </a:r>
+          </a:p>
+        </p:txBody>
+      </p:sp>
+      <p:sp>
+        <p:nvSpPr>
+          <p:cNvPr id="35" name="Oval 34"/>
+          <p:cNvSpPr/>
+          <p:nvPr/>
+        </p:nvSpPr>
+        <p:spPr>
+          <a:xfrm>
+            <a:off x="6172200" y="1371600"/>
+            <a:ext cx="292608" cy="292608"/>
           </a:xfrm>
           <a:prstGeom prst="ellipse">
             <a:avLst/>
@@ -5810,19 +6266,28 @@
           <a:lstStyle/>
           <a:p>
             <a:pPr algn="ctr"/>
-          </a:p>
-        </p:txBody>
-      </p:sp>
-      <p:sp>
-        <p:nvSpPr>
-          <p:cNvPr id="24" name="TextBox 23"/>
+            <a:r>
+              <a:rPr sz="1400" b="1">
+                <a:solidFill>
+                  <a:srgbClr val="FFFFFF"/>
+                </a:solidFill>
+                <a:latin typeface="Calibri"/>
+              </a:rPr>
+              <a:t>4</a:t>
+            </a:r>
+          </a:p>
+        </p:txBody>
+      </p:sp>
+      <p:sp>
+        <p:nvSpPr>
+          <p:cNvPr id="36" name="TextBox 35"/>
           <p:cNvSpPr txBox="1"/>
           <p:nvPr/>
         </p:nvSpPr>
         <p:spPr>
           <a:xfrm>
-            <a:off x="868680" y="4325112"/>
-            <a:ext cx="4937760" cy="292608"/>
+            <a:off x="6556248" y="1353312"/>
+            <a:ext cx="4828032" cy="292608"/>
           </a:xfrm>
           <a:prstGeom prst="rect">
             <a:avLst/>
@@ -5837,27 +6302,62 @@
           <a:p>
             <a:pPr algn="l"/>
             <a:r>
-              <a:rPr sz="1150" b="0" i="0">
-                <a:solidFill>
-                  <a:srgbClr val="202633"/>
-                </a:solidFill>
-                <a:latin typeface="Calibri"/>
-              </a:rPr>
-              <a:t>Script asserts this — never silently skipped</a:t>
-            </a:r>
-          </a:p>
-        </p:txBody>
-      </p:sp>
-      <p:sp>
-        <p:nvSpPr>
-          <p:cNvPr id="25" name="Oval 24"/>
+              <a:rPr sz="1450" b="1" i="0">
+                <a:solidFill>
+                  <a:srgbClr val="1B2A4A"/>
+                </a:solidFill>
+                <a:latin typeface="Calibri"/>
+              </a:rPr>
+              <a:t>Holt-Winters</a:t>
+            </a:r>
+          </a:p>
+        </p:txBody>
+      </p:sp>
+      <p:sp>
+        <p:nvSpPr>
+          <p:cNvPr id="37" name="TextBox 36"/>
+          <p:cNvSpPr txBox="1"/>
+          <p:nvPr/>
+        </p:nvSpPr>
+        <p:spPr>
+          <a:xfrm>
+            <a:off x="6227064" y="1700784"/>
+            <a:ext cx="5157216" cy="182880"/>
+          </a:xfrm>
+          <a:prstGeom prst="rect">
+            <a:avLst/>
+          </a:prstGeom>
+          <a:noFill/>
+        </p:spPr>
+        <p:txBody>
+          <a:bodyPr wrap="square">
+            <a:spAutoFit/>
+          </a:bodyPr>
+          <a:lstStyle/>
+          <a:p>
+            <a:pPr algn="l"/>
+            <a:r>
+              <a:rPr sz="950" b="1" i="0">
+                <a:solidFill>
+                  <a:srgbClr val="1F9A8F"/>
+                </a:solidFill>
+                <a:latin typeface="Calibri"/>
+              </a:rPr>
+              <a:t>APPROACH</a:t>
+            </a:r>
+          </a:p>
+        </p:txBody>
+      </p:sp>
+      <p:sp>
+        <p:nvSpPr>
+          <p:cNvPr id="38" name="Oval 37"/>
           <p:cNvSpPr/>
           <p:nvPr/>
         </p:nvSpPr>
         <p:spPr>
           <a:xfrm>
-            <a:off x="594360" y="4636008"/>
-            <a:ext cx="292608" cy="292608"/>
+            <a:off x="6245352" y="1956816"/>
+            <a:ext cx="82296" cy="82296"/>
           </a:xfrm>
           <a:prstGeom prst="ellipse">
             <a:avLst/>
@@ -5889,28 +6389,19 @@
           <a:lstStyle/>
           <a:p>
             <a:pPr algn="ctr"/>
-            <a:r>
-              <a:rPr sz="1400" b="1">
-                <a:solidFill>
-                  <a:srgbClr val="FFFFFF"/>
-                </a:solidFill>
-                <a:latin typeface="Calibri"/>
-              </a:rPr>
-              <a:t>3</a:t>
-            </a:r>
-          </a:p>
-        </p:txBody>
-      </p:sp>
-      <p:sp>
-        <p:nvSpPr>
-          <p:cNvPr id="26" name="TextBox 25"/>
+          </a:p>
+        </p:txBody>
+      </p:sp>
+      <p:sp>
+        <p:nvSpPr>
+          <p:cNvPr id="39" name="TextBox 38"/>
           <p:cNvSpPr txBox="1"/>
           <p:nvPr/>
         </p:nvSpPr>
         <p:spPr>
           <a:xfrm>
-            <a:off x="978408" y="4617720"/>
-            <a:ext cx="4828032" cy="292608"/>
+            <a:off x="6446520" y="1901952"/>
+            <a:ext cx="4937760" cy="256032"/>
           </a:xfrm>
           <a:prstGeom prst="rect">
             <a:avLst/>
@@ -5925,26 +6416,26 @@
           <a:p>
             <a:pPr algn="l"/>
             <a:r>
-              <a:rPr sz="1450" b="1" i="0">
-                <a:solidFill>
-                  <a:srgbClr val="1B2A4A"/>
-                </a:solidFill>
-                <a:latin typeface="Calibri"/>
-              </a:rPr>
-              <a:t>Holt-Winters</a:t>
-            </a:r>
-          </a:p>
-        </p:txBody>
-      </p:sp>
-      <p:sp>
-        <p:nvSpPr>
-          <p:cNvPr id="27" name="Oval 26"/>
+              <a:rPr sz="1150" b="0" i="0">
+                <a:solidFill>
+                  <a:srgbClr val="202633"/>
+                </a:solidFill>
+                <a:latin typeface="Calibri"/>
+              </a:rPr>
+              <a:t>Model trend + weekly seasonality explicitly</a:t>
+            </a:r>
+          </a:p>
+        </p:txBody>
+      </p:sp>
+      <p:sp>
+        <p:nvSpPr>
+          <p:cNvPr id="40" name="Oval 39"/>
           <p:cNvSpPr/>
           <p:nvPr/>
         </p:nvSpPr>
         <p:spPr>
           <a:xfrm>
-            <a:off x="667512" y="5065776"/>
+            <a:off x="6245352" y="2231136"/>
             <a:ext cx="82296" cy="82296"/>
           </a:xfrm>
           <a:prstGeom prst="ellipse">
@@ -5982,14 +6473,14 @@
       </p:sp>
       <p:sp>
         <p:nvSpPr>
-          <p:cNvPr id="28" name="TextBox 27"/>
+          <p:cNvPr id="41" name="TextBox 40"/>
           <p:cNvSpPr txBox="1"/>
           <p:nvPr/>
         </p:nvSpPr>
         <p:spPr>
           <a:xfrm>
-            <a:off x="868680" y="5001768"/>
-            <a:ext cx="4937760" cy="292608"/>
+            <a:off x="6446520" y="2176272"/>
+            <a:ext cx="4937760" cy="256032"/>
           </a:xfrm>
           <a:prstGeom prst="rect">
             <a:avLst/>
@@ -6010,21 +6501,135 @@
                 </a:solidFill>
                 <a:latin typeface="Calibri"/>
               </a:rPr>
-              <a:t>Models trend + weekly seasonality explicitly</a:t>
-            </a:r>
-          </a:p>
-        </p:txBody>
-      </p:sp>
-      <p:sp>
-        <p:nvSpPr>
-          <p:cNvPr id="29" name="Oval 28"/>
+              <a:t>Forecast volume 42 days forward</a:t>
+            </a:r>
+          </a:p>
+        </p:txBody>
+      </p:sp>
+      <p:sp>
+        <p:nvSpPr>
+          <p:cNvPr id="42" name="TextBox 41"/>
+          <p:cNvSpPr txBox="1"/>
+          <p:nvPr/>
+        </p:nvSpPr>
+        <p:spPr>
+          <a:xfrm>
+            <a:off x="6227064" y="2468880"/>
+            <a:ext cx="5157216" cy="182880"/>
+          </a:xfrm>
+          <a:prstGeom prst="rect">
+            <a:avLst/>
+          </a:prstGeom>
+          <a:noFill/>
+        </p:spPr>
+        <p:txBody>
+          <a:bodyPr wrap="square">
+            <a:spAutoFit/>
+          </a:bodyPr>
+          <a:lstStyle/>
+          <a:p>
+            <a:pPr algn="l"/>
+            <a:r>
+              <a:rPr sz="950" b="1" i="0">
+                <a:solidFill>
+                  <a:srgbClr val="1B2A4A"/>
+                </a:solidFill>
+                <a:latin typeface="Calibri"/>
+              </a:rPr>
+              <a:t>OUTPUT</a:t>
+            </a:r>
+          </a:p>
+        </p:txBody>
+      </p:sp>
+      <p:sp>
+        <p:nvSpPr>
+          <p:cNvPr id="43" name="Oval 42"/>
           <p:cNvSpPr/>
           <p:nvPr/>
         </p:nvSpPr>
         <p:spPr>
           <a:xfrm>
-            <a:off x="667512" y="5376672"/>
+            <a:off x="6245352" y="2724912"/>
             <a:ext cx="82296" cy="82296"/>
+          </a:xfrm>
+          <a:prstGeom prst="ellipse">
+            <a:avLst/>
+          </a:prstGeom>
+          <a:solidFill>
+            <a:srgbClr val="1B2A4A"/>
+          </a:solidFill>
+          <a:ln>
+            <a:noFill/>
+          </a:ln>
+          <a:effectLst/>
+        </p:spPr>
+        <p:style>
+          <a:lnRef idx="1">
+            <a:schemeClr val="accent1"/>
+          </a:lnRef>
+          <a:fillRef idx="3">
+            <a:schemeClr val="accent1"/>
+          </a:fillRef>
+          <a:effectRef idx="2">
+            <a:schemeClr val="accent1"/>
+          </a:effectRef>
+          <a:fontRef idx="minor">
+            <a:schemeClr val="lt1"/>
+          </a:fontRef>
+        </p:style>
+        <p:txBody>
+          <a:bodyPr rtlCol="0" anchor="ctr"/>
+          <a:lstStyle/>
+          <a:p>
+            <a:pPr algn="ctr"/>
+          </a:p>
+        </p:txBody>
+      </p:sp>
+      <p:sp>
+        <p:nvSpPr>
+          <p:cNvPr id="44" name="TextBox 43"/>
+          <p:cNvSpPr txBox="1"/>
+          <p:nvPr/>
+        </p:nvSpPr>
+        <p:spPr>
+          <a:xfrm>
+            <a:off x="6446520" y="2670048"/>
+            <a:ext cx="4937760" cy="256032"/>
+          </a:xfrm>
+          <a:prstGeom prst="rect">
+            <a:avLst/>
+          </a:prstGeom>
+          <a:noFill/>
+        </p:spPr>
+        <p:txBody>
+          <a:bodyPr wrap="square">
+            <a:spAutoFit/>
+          </a:bodyPr>
+          <a:lstStyle/>
+          <a:p>
+            <a:pPr algn="l"/>
+            <a:r>
+              <a:rPr sz="1150" b="1" i="0">
+                <a:solidFill>
+                  <a:srgbClr val="202633"/>
+                </a:solidFill>
+                <a:latin typeface="Calibri"/>
+              </a:rPr>
+              <a:t>18.8% MAPE — beats the 20.1% baseline</a:t>
+            </a:r>
+          </a:p>
+        </p:txBody>
+      </p:sp>
+      <p:sp>
+        <p:nvSpPr>
+          <p:cNvPr id="45" name="Oval 44"/>
+          <p:cNvSpPr/>
+          <p:nvPr/>
+        </p:nvSpPr>
+        <p:spPr>
+          <a:xfrm>
+            <a:off x="6172200" y="2962656"/>
+            <a:ext cx="292608" cy="292608"/>
           </a:xfrm>
           <a:prstGeom prst="ellipse">
             <a:avLst/>
@@ -6056,19 +6661,28 @@
           <a:lstStyle/>
           <a:p>
             <a:pPr algn="ctr"/>
-          </a:p>
-        </p:txBody>
-      </p:sp>
-      <p:sp>
-        <p:nvSpPr>
-          <p:cNvPr id="30" name="TextBox 29"/>
+            <a:r>
+              <a:rPr sz="1400" b="1">
+                <a:solidFill>
+                  <a:srgbClr val="FFFFFF"/>
+                </a:solidFill>
+                <a:latin typeface="Calibri"/>
+              </a:rPr>
+              <a:t>5</a:t>
+            </a:r>
+          </a:p>
+        </p:txBody>
+      </p:sp>
+      <p:sp>
+        <p:nvSpPr>
+          <p:cNvPr id="46" name="TextBox 45"/>
           <p:cNvSpPr txBox="1"/>
           <p:nvPr/>
         </p:nvSpPr>
         <p:spPr>
           <a:xfrm>
-            <a:off x="868680" y="5312664"/>
-            <a:ext cx="4937760" cy="292608"/>
+            <a:off x="6556248" y="2944368"/>
+            <a:ext cx="4828032" cy="292608"/>
           </a:xfrm>
           <a:prstGeom prst="rect">
             <a:avLst/>
@@ -6083,26 +6697,61 @@
           <a:p>
             <a:pPr algn="l"/>
             <a:r>
-              <a:rPr sz="1150" b="0" i="0">
-                <a:solidFill>
-                  <a:srgbClr val="202633"/>
-                </a:solidFill>
-                <a:latin typeface="Calibri"/>
-              </a:rPr>
-              <a:t>Lightweight, explainable — not a black box</a:t>
-            </a:r>
-          </a:p>
-        </p:txBody>
-      </p:sp>
-      <p:sp>
-        <p:nvSpPr>
-          <p:cNvPr id="31" name="Oval 30"/>
+              <a:rPr sz="1450" b="1" i="0">
+                <a:solidFill>
+                  <a:srgbClr val="1B2A4A"/>
+                </a:solidFill>
+                <a:latin typeface="Calibri"/>
+              </a:rPr>
+              <a:t>Volume -&gt; FTE</a:t>
+            </a:r>
+          </a:p>
+        </p:txBody>
+      </p:sp>
+      <p:sp>
+        <p:nvSpPr>
+          <p:cNvPr id="47" name="TextBox 46"/>
+          <p:cNvSpPr txBox="1"/>
+          <p:nvPr/>
+        </p:nvSpPr>
+        <p:spPr>
+          <a:xfrm>
+            <a:off x="6227064" y="3291840"/>
+            <a:ext cx="5157216" cy="182880"/>
+          </a:xfrm>
+          <a:prstGeom prst="rect">
+            <a:avLst/>
+          </a:prstGeom>
+          <a:noFill/>
+        </p:spPr>
+        <p:txBody>
+          <a:bodyPr wrap="square">
+            <a:spAutoFit/>
+          </a:bodyPr>
+          <a:lstStyle/>
+          <a:p>
+            <a:pPr algn="l"/>
+            <a:r>
+              <a:rPr sz="950" b="1" i="0">
+                <a:solidFill>
+                  <a:srgbClr val="1F9A8F"/>
+                </a:solidFill>
+                <a:latin typeface="Calibri"/>
+              </a:rPr>
+              <a:t>APPROACH</a:t>
+            </a:r>
+          </a:p>
+        </p:txBody>
+      </p:sp>
+      <p:sp>
+        <p:nvSpPr>
+          <p:cNvPr id="48" name="Oval 47"/>
           <p:cNvSpPr/>
           <p:nvPr/>
         </p:nvSpPr>
         <p:spPr>
           <a:xfrm>
-            <a:off x="667512" y="5687568"/>
+            <a:off x="6245352" y="3547872"/>
             <a:ext cx="82296" cy="82296"/>
           </a:xfrm>
           <a:prstGeom prst="ellipse">
@@ -6140,14 +6789,14 @@
       </p:sp>
       <p:sp>
         <p:nvSpPr>
-          <p:cNvPr id="32" name="TextBox 31"/>
+          <p:cNvPr id="49" name="TextBox 48"/>
           <p:cNvSpPr txBox="1"/>
           <p:nvPr/>
         </p:nvSpPr>
         <p:spPr>
           <a:xfrm>
-            <a:off x="868680" y="5623560"/>
-            <a:ext cx="4937760" cy="292608"/>
+            <a:off x="6446520" y="3493008"/>
+            <a:ext cx="4937760" cy="256032"/>
           </a:xfrm>
           <a:prstGeom prst="rect">
             <a:avLst/>
@@ -6168,20 +6817,20 @@
                 </a:solidFill>
                 <a:latin typeface="Calibri"/>
               </a:rPr>
-              <a:t>Forecasts volume 42 days forward</a:t>
-            </a:r>
-          </a:p>
-        </p:txBody>
-      </p:sp>
-      <p:sp>
-        <p:nvSpPr>
-          <p:cNvPr id="33" name="Oval 32"/>
+              <a:t>Convert volume to agent-hours via handle time</a:t>
+            </a:r>
+          </a:p>
+        </p:txBody>
+      </p:sp>
+      <p:sp>
+        <p:nvSpPr>
+          <p:cNvPr id="50" name="Oval 49"/>
           <p:cNvSpPr/>
           <p:nvPr/>
         </p:nvSpPr>
         <p:spPr>
           <a:xfrm>
-            <a:off x="667512" y="5998464"/>
+            <a:off x="6245352" y="3822192"/>
             <a:ext cx="82296" cy="82296"/>
           </a:xfrm>
           <a:prstGeom prst="ellipse">
@@ -6219,14 +6868,14 @@
       </p:sp>
       <p:sp>
         <p:nvSpPr>
-          <p:cNvPr id="34" name="TextBox 33"/>
+          <p:cNvPr id="51" name="TextBox 50"/>
           <p:cNvSpPr txBox="1"/>
           <p:nvPr/>
         </p:nvSpPr>
         <p:spPr>
           <a:xfrm>
-            <a:off x="868680" y="5934456"/>
-            <a:ext cx="4937760" cy="292608"/>
+            <a:off x="6446520" y="3767328"/>
+            <a:ext cx="4937760" cy="256032"/>
           </a:xfrm>
           <a:prstGeom prst="rect">
             <a:avLst/>
@@ -6247,20 +6896,134 @@
                 </a:solidFill>
                 <a:latin typeface="Calibri"/>
               </a:rPr>
-              <a:t>Beat the baseline: 18.8% vs 20.1% MAPE</a:t>
-            </a:r>
-          </a:p>
-        </p:txBody>
-      </p:sp>
-      <p:sp>
-        <p:nvSpPr>
-          <p:cNvPr id="35" name="Oval 34"/>
+              <a:t>Compare required FTE to available FTE</a:t>
+            </a:r>
+          </a:p>
+        </p:txBody>
+      </p:sp>
+      <p:sp>
+        <p:nvSpPr>
+          <p:cNvPr id="52" name="TextBox 51"/>
+          <p:cNvSpPr txBox="1"/>
+          <p:nvPr/>
+        </p:nvSpPr>
+        <p:spPr>
+          <a:xfrm>
+            <a:off x="6227064" y="4059936"/>
+            <a:ext cx="5157216" cy="182880"/>
+          </a:xfrm>
+          <a:prstGeom prst="rect">
+            <a:avLst/>
+          </a:prstGeom>
+          <a:noFill/>
+        </p:spPr>
+        <p:txBody>
+          <a:bodyPr wrap="square">
+            <a:spAutoFit/>
+          </a:bodyPr>
+          <a:lstStyle/>
+          <a:p>
+            <a:pPr algn="l"/>
+            <a:r>
+              <a:rPr sz="950" b="1" i="0">
+                <a:solidFill>
+                  <a:srgbClr val="1B2A4A"/>
+                </a:solidFill>
+                <a:latin typeface="Calibri"/>
+              </a:rPr>
+              <a:t>OUTPUT</a:t>
+            </a:r>
+          </a:p>
+        </p:txBody>
+      </p:sp>
+      <p:sp>
+        <p:nvSpPr>
+          <p:cNvPr id="53" name="Oval 52"/>
           <p:cNvSpPr/>
           <p:nvPr/>
         </p:nvSpPr>
         <p:spPr>
           <a:xfrm>
-            <a:off x="6172200" y="2221992"/>
+            <a:off x="6245352" y="4315968"/>
+            <a:ext cx="82296" cy="82296"/>
+          </a:xfrm>
+          <a:prstGeom prst="ellipse">
+            <a:avLst/>
+          </a:prstGeom>
+          <a:solidFill>
+            <a:srgbClr val="1B2A4A"/>
+          </a:solidFill>
+          <a:ln>
+            <a:noFill/>
+          </a:ln>
+          <a:effectLst/>
+        </p:spPr>
+        <p:style>
+          <a:lnRef idx="1">
+            <a:schemeClr val="accent1"/>
+          </a:lnRef>
+          <a:fillRef idx="3">
+            <a:schemeClr val="accent1"/>
+          </a:fillRef>
+          <a:effectRef idx="2">
+            <a:schemeClr val="accent1"/>
+          </a:effectRef>
+          <a:fontRef idx="minor">
+            <a:schemeClr val="lt1"/>
+          </a:fontRef>
+        </p:style>
+        <p:txBody>
+          <a:bodyPr rtlCol="0" anchor="ctr"/>
+          <a:lstStyle/>
+          <a:p>
+            <a:pPr algn="ctr"/>
+          </a:p>
+        </p:txBody>
+      </p:sp>
+      <p:sp>
+        <p:nvSpPr>
+          <p:cNvPr id="54" name="TextBox 53"/>
+          <p:cNvSpPr txBox="1"/>
+          <p:nvPr/>
+        </p:nvSpPr>
+        <p:spPr>
+          <a:xfrm>
+            <a:off x="6446520" y="4261104"/>
+            <a:ext cx="4937760" cy="256032"/>
+          </a:xfrm>
+          <a:prstGeom prst="rect">
+            <a:avLst/>
+          </a:prstGeom>
+          <a:noFill/>
+        </p:spPr>
+        <p:txBody>
+          <a:bodyPr wrap="square">
+            <a:spAutoFit/>
+          </a:bodyPr>
+          <a:lstStyle/>
+          <a:p>
+            <a:pPr algn="l"/>
+            <a:r>
+              <a:rPr sz="1150" b="1" i="0">
+                <a:solidFill>
+                  <a:srgbClr val="202633"/>
+                </a:solidFill>
+                <a:latin typeface="Calibri"/>
+              </a:rPr>
+              <a:t>The exact day(s) staffing runs short, and by how much</a:t>
+            </a:r>
+          </a:p>
+        </p:txBody>
+      </p:sp>
+      <p:sp>
+        <p:nvSpPr>
+          <p:cNvPr id="55" name="Oval 54"/>
+          <p:cNvSpPr/>
+          <p:nvPr/>
+        </p:nvSpPr>
+        <p:spPr>
+          <a:xfrm>
+            <a:off x="6172200" y="4553712"/>
             <a:ext cx="292608" cy="292608"/>
           </a:xfrm>
           <a:prstGeom prst="ellipse">
@@ -6300,20 +7063,20 @@
                 </a:solidFill>
                 <a:latin typeface="Calibri"/>
               </a:rPr>
-              <a:t>4</a:t>
-            </a:r>
-          </a:p>
-        </p:txBody>
-      </p:sp>
-      <p:sp>
-        <p:nvSpPr>
-          <p:cNvPr id="36" name="TextBox 35"/>
+              <a:t>6</a:t>
+            </a:r>
+          </a:p>
+        </p:txBody>
+      </p:sp>
+      <p:sp>
+        <p:nvSpPr>
+          <p:cNvPr id="56" name="TextBox 55"/>
           <p:cNvSpPr txBox="1"/>
           <p:nvPr/>
         </p:nvSpPr>
         <p:spPr>
           <a:xfrm>
-            <a:off x="6556248" y="2203704"/>
+            <a:off x="6556248" y="4535424"/>
             <a:ext cx="4828032" cy="292608"/>
           </a:xfrm>
           <a:prstGeom prst="rect">
@@ -6335,20 +7098,55 @@
                 </a:solidFill>
                 <a:latin typeface="Calibri"/>
               </a:rPr>
-              <a:t>Volume -&gt; FTE</a:t>
-            </a:r>
-          </a:p>
-        </p:txBody>
-      </p:sp>
-      <p:sp>
-        <p:nvSpPr>
-          <p:cNvPr id="37" name="Oval 36"/>
+              <a:t>Publish</a:t>
+            </a:r>
+          </a:p>
+        </p:txBody>
+      </p:sp>
+      <p:sp>
+        <p:nvSpPr>
+          <p:cNvPr id="57" name="TextBox 56"/>
+          <p:cNvSpPr txBox="1"/>
+          <p:nvPr/>
+        </p:nvSpPr>
+        <p:spPr>
+          <a:xfrm>
+            <a:off x="6227064" y="4882896"/>
+            <a:ext cx="5157216" cy="182880"/>
+          </a:xfrm>
+          <a:prstGeom prst="rect">
+            <a:avLst/>
+          </a:prstGeom>
+          <a:noFill/>
+        </p:spPr>
+        <p:txBody>
+          <a:bodyPr wrap="square">
+            <a:spAutoFit/>
+          </a:bodyPr>
+          <a:lstStyle/>
+          <a:p>
+            <a:pPr algn="l"/>
+            <a:r>
+              <a:rPr sz="950" b="1" i="0">
+                <a:solidFill>
+                  <a:srgbClr val="1F9A8F"/>
+                </a:solidFill>
+                <a:latin typeface="Calibri"/>
+              </a:rPr>
+              <a:t>APPROACH</a:t>
+            </a:r>
+          </a:p>
+        </p:txBody>
+      </p:sp>
+      <p:sp>
+        <p:nvSpPr>
+          <p:cNvPr id="58" name="Oval 57"/>
           <p:cNvSpPr/>
           <p:nvPr/>
         </p:nvSpPr>
         <p:spPr>
           <a:xfrm>
-            <a:off x="6245352" y="2651760"/>
+            <a:off x="6245352" y="5138928"/>
             <a:ext cx="82296" cy="82296"/>
           </a:xfrm>
           <a:prstGeom prst="ellipse">
@@ -6386,14 +7184,14 @@
       </p:sp>
       <p:sp>
         <p:nvSpPr>
-          <p:cNvPr id="38" name="TextBox 37"/>
+          <p:cNvPr id="59" name="TextBox 58"/>
           <p:cNvSpPr txBox="1"/>
           <p:nvPr/>
         </p:nvSpPr>
         <p:spPr>
           <a:xfrm>
-            <a:off x="6446520" y="2587752"/>
-            <a:ext cx="4937760" cy="292608"/>
+            <a:off x="6446520" y="5084064"/>
+            <a:ext cx="4937760" cy="256032"/>
           </a:xfrm>
           <a:prstGeom prst="rect">
             <a:avLst/>
@@ -6414,20 +7212,20 @@
                 </a:solidFill>
                 <a:latin typeface="Calibri"/>
               </a:rPr>
-              <a:t>Converts volume to agent-hours via handle time</a:t>
-            </a:r>
-          </a:p>
-        </p:txBody>
-      </p:sp>
-      <p:sp>
-        <p:nvSpPr>
-          <p:cNvPr id="39" name="Oval 38"/>
+              <a:t>Write one workbook: forecast + Analysis sheet</a:t>
+            </a:r>
+          </a:p>
+        </p:txBody>
+      </p:sp>
+      <p:sp>
+        <p:nvSpPr>
+          <p:cNvPr id="60" name="Oval 59"/>
           <p:cNvSpPr/>
           <p:nvPr/>
         </p:nvSpPr>
         <p:spPr>
           <a:xfrm>
-            <a:off x="6245352" y="2962656"/>
+            <a:off x="6245352" y="5413248"/>
             <a:ext cx="82296" cy="82296"/>
           </a:xfrm>
           <a:prstGeom prst="ellipse">
@@ -6465,14 +7263,14 @@
       </p:sp>
       <p:sp>
         <p:nvSpPr>
-          <p:cNvPr id="40" name="TextBox 39"/>
+          <p:cNvPr id="61" name="TextBox 60"/>
           <p:cNvSpPr txBox="1"/>
           <p:nvPr/>
         </p:nvSpPr>
         <p:spPr>
           <a:xfrm>
-            <a:off x="6446520" y="2898648"/>
-            <a:ext cx="4937760" cy="292608"/>
+            <a:off x="6446520" y="5358384"/>
+            <a:ext cx="4937760" cy="256032"/>
           </a:xfrm>
           <a:prstGeom prst="rect">
             <a:avLst/>
@@ -6493,27 +7291,62 @@
                 </a:solidFill>
                 <a:latin typeface="Calibri"/>
               </a:rPr>
-              <a:t>Uses the roster's REAL shrinkage %, not a guess</a:t>
-            </a:r>
-          </a:p>
-        </p:txBody>
-      </p:sp>
-      <p:sp>
-        <p:nvSpPr>
-          <p:cNvPr id="41" name="Oval 40"/>
+              <a:t>Build the PPT deck + Power BI report on top</a:t>
+            </a:r>
+          </a:p>
+        </p:txBody>
+      </p:sp>
+      <p:sp>
+        <p:nvSpPr>
+          <p:cNvPr id="62" name="TextBox 61"/>
+          <p:cNvSpPr txBox="1"/>
+          <p:nvPr/>
+        </p:nvSpPr>
+        <p:spPr>
+          <a:xfrm>
+            <a:off x="6227064" y="5650992"/>
+            <a:ext cx="5157216" cy="182880"/>
+          </a:xfrm>
+          <a:prstGeom prst="rect">
+            <a:avLst/>
+          </a:prstGeom>
+          <a:noFill/>
+        </p:spPr>
+        <p:txBody>
+          <a:bodyPr wrap="square">
+            <a:spAutoFit/>
+          </a:bodyPr>
+          <a:lstStyle/>
+          <a:p>
+            <a:pPr algn="l"/>
+            <a:r>
+              <a:rPr sz="950" b="1" i="0">
+                <a:solidFill>
+                  <a:srgbClr val="1B2A4A"/>
+                </a:solidFill>
+                <a:latin typeface="Calibri"/>
+              </a:rPr>
+              <a:t>OUTPUT</a:t>
+            </a:r>
+          </a:p>
+        </p:txBody>
+      </p:sp>
+      <p:sp>
+        <p:nvSpPr>
+          <p:cNvPr id="63" name="Oval 62"/>
           <p:cNvSpPr/>
           <p:nvPr/>
         </p:nvSpPr>
         <p:spPr>
           <a:xfrm>
-            <a:off x="6245352" y="3273552"/>
+            <a:off x="6245352" y="5907024"/>
             <a:ext cx="82296" cy="82296"/>
           </a:xfrm>
           <a:prstGeom prst="ellipse">
             <a:avLst/>
           </a:prstGeom>
           <a:solidFill>
-            <a:srgbClr val="2EC4B6"/>
+            <a:srgbClr val="1B2A4A"/>
           </a:solidFill>
           <a:ln>
             <a:noFill/>
@@ -6544,14 +7377,14 @@
       </p:sp>
       <p:sp>
         <p:nvSpPr>
-          <p:cNvPr id="42" name="TextBox 41"/>
+          <p:cNvPr id="64" name="TextBox 63"/>
           <p:cNvSpPr txBox="1"/>
           <p:nvPr/>
         </p:nvSpPr>
         <p:spPr>
           <a:xfrm>
-            <a:off x="6446520" y="3209544"/>
-            <a:ext cx="4937760" cy="292608"/>
+            <a:off x="6446520" y="5852160"/>
+            <a:ext cx="4937760" cy="256032"/>
           </a:xfrm>
           <a:prstGeom prst="rect">
             <a:avLst/>
@@ -6566,71 +7399,27 @@
           <a:p>
             <a:pPr algn="l"/>
             <a:r>
-              <a:rPr sz="1150" b="0" i="0">
+              <a:rPr sz="1150" b="1" i="0">
                 <a:solidFill>
                   <a:srgbClr val="202633"/>
                 </a:solidFill>
                 <a:latin typeface="Calibri"/>
               </a:rPr>
-              <a:t>Compares required FTE to available FTE</a:t>
-            </a:r>
-          </a:p>
-        </p:txBody>
-      </p:sp>
-      <p:sp>
-        <p:nvSpPr>
-          <p:cNvPr id="43" name="Oval 42"/>
-          <p:cNvSpPr/>
-          <p:nvPr/>
-        </p:nvSpPr>
-        <p:spPr>
-          <a:xfrm>
-            <a:off x="6245352" y="3584448"/>
-            <a:ext cx="82296" cy="82296"/>
-          </a:xfrm>
-          <a:prstGeom prst="ellipse">
-            <a:avLst/>
-          </a:prstGeom>
-          <a:solidFill>
-            <a:srgbClr val="2EC4B6"/>
-          </a:solidFill>
-          <a:ln>
-            <a:noFill/>
-          </a:ln>
-          <a:effectLst/>
-        </p:spPr>
-        <p:style>
-          <a:lnRef idx="1">
-            <a:schemeClr val="accent1"/>
-          </a:lnRef>
-          <a:fillRef idx="3">
-            <a:schemeClr val="accent1"/>
-          </a:fillRef>
-          <a:effectRef idx="2">
-            <a:schemeClr val="accent1"/>
-          </a:effectRef>
-          <a:fontRef idx="minor">
-            <a:schemeClr val="lt1"/>
-          </a:fontRef>
-        </p:style>
-        <p:txBody>
-          <a:bodyPr rtlCol="0" anchor="ctr"/>
-          <a:lstStyle/>
-          <a:p>
-            <a:pPr algn="ctr"/>
-          </a:p>
-        </p:txBody>
-      </p:sp>
-      <p:sp>
-        <p:nvSpPr>
-          <p:cNvPr id="44" name="TextBox 43"/>
+              <a:t>A client-ready package, numbers always in sync</a:t>
+            </a:r>
+          </a:p>
+        </p:txBody>
+      </p:sp>
+      <p:sp>
+        <p:nvSpPr>
+          <p:cNvPr id="65" name="TextBox 64"/>
           <p:cNvSpPr txBox="1"/>
           <p:nvPr/>
         </p:nvSpPr>
         <p:spPr>
           <a:xfrm>
-            <a:off x="6446520" y="3520440"/>
-            <a:ext cx="4937760" cy="292608"/>
+            <a:off x="594360" y="6473952"/>
+            <a:ext cx="9144000" cy="320040"/>
           </a:xfrm>
           <a:prstGeom prst="rect">
             <a:avLst/>
@@ -6645,445 +7434,6 @@
           <a:p>
             <a:pPr algn="l"/>
             <a:r>
-              <a:rPr sz="1150" b="0" i="0">
-                <a:solidFill>
-                  <a:srgbClr val="202633"/>
-                </a:solidFill>
-                <a:latin typeface="Calibri"/>
-              </a:rPr>
-              <a:t>Flags the exact day staffing runs short</a:t>
-            </a:r>
-          </a:p>
-        </p:txBody>
-      </p:sp>
-      <p:sp>
-        <p:nvSpPr>
-          <p:cNvPr id="45" name="Oval 44"/>
-          <p:cNvSpPr/>
-          <p:nvPr/>
-        </p:nvSpPr>
-        <p:spPr>
-          <a:xfrm>
-            <a:off x="6172200" y="3831336"/>
-            <a:ext cx="292608" cy="292608"/>
-          </a:xfrm>
-          <a:prstGeom prst="ellipse">
-            <a:avLst/>
-          </a:prstGeom>
-          <a:solidFill>
-            <a:srgbClr val="2EC4B6"/>
-          </a:solidFill>
-          <a:ln>
-            <a:noFill/>
-          </a:ln>
-          <a:effectLst/>
-        </p:spPr>
-        <p:style>
-          <a:lnRef idx="1">
-            <a:schemeClr val="accent1"/>
-          </a:lnRef>
-          <a:fillRef idx="3">
-            <a:schemeClr val="accent1"/>
-          </a:fillRef>
-          <a:effectRef idx="2">
-            <a:schemeClr val="accent1"/>
-          </a:effectRef>
-          <a:fontRef idx="minor">
-            <a:schemeClr val="lt1"/>
-          </a:fontRef>
-        </p:style>
-        <p:txBody>
-          <a:bodyPr rtlCol="0" anchor="ctr"/>
-          <a:lstStyle/>
-          <a:p>
-            <a:pPr algn="ctr"/>
-            <a:r>
-              <a:rPr sz="1400" b="1">
-                <a:solidFill>
-                  <a:srgbClr val="FFFFFF"/>
-                </a:solidFill>
-                <a:latin typeface="Calibri"/>
-              </a:rPr>
-              <a:t>5</a:t>
-            </a:r>
-          </a:p>
-        </p:txBody>
-      </p:sp>
-      <p:sp>
-        <p:nvSpPr>
-          <p:cNvPr id="46" name="TextBox 45"/>
-          <p:cNvSpPr txBox="1"/>
-          <p:nvPr/>
-        </p:nvSpPr>
-        <p:spPr>
-          <a:xfrm>
-            <a:off x="6556248" y="3813048"/>
-            <a:ext cx="4828032" cy="292608"/>
-          </a:xfrm>
-          <a:prstGeom prst="rect">
-            <a:avLst/>
-          </a:prstGeom>
-          <a:noFill/>
-        </p:spPr>
-        <p:txBody>
-          <a:bodyPr wrap="square">
-            <a:spAutoFit/>
-          </a:bodyPr>
-          <a:lstStyle/>
-          <a:p>
-            <a:pPr algn="l"/>
-            <a:r>
-              <a:rPr sz="1450" b="1" i="0">
-                <a:solidFill>
-                  <a:srgbClr val="1B2A4A"/>
-                </a:solidFill>
-                <a:latin typeface="Calibri"/>
-              </a:rPr>
-              <a:t>Publish</a:t>
-            </a:r>
-          </a:p>
-        </p:txBody>
-      </p:sp>
-      <p:sp>
-        <p:nvSpPr>
-          <p:cNvPr id="47" name="Oval 46"/>
-          <p:cNvSpPr/>
-          <p:nvPr/>
-        </p:nvSpPr>
-        <p:spPr>
-          <a:xfrm>
-            <a:off x="6245352" y="4261104"/>
-            <a:ext cx="82296" cy="82296"/>
-          </a:xfrm>
-          <a:prstGeom prst="ellipse">
-            <a:avLst/>
-          </a:prstGeom>
-          <a:solidFill>
-            <a:srgbClr val="2EC4B6"/>
-          </a:solidFill>
-          <a:ln>
-            <a:noFill/>
-          </a:ln>
-          <a:effectLst/>
-        </p:spPr>
-        <p:style>
-          <a:lnRef idx="1">
-            <a:schemeClr val="accent1"/>
-          </a:lnRef>
-          <a:fillRef idx="3">
-            <a:schemeClr val="accent1"/>
-          </a:fillRef>
-          <a:effectRef idx="2">
-            <a:schemeClr val="accent1"/>
-          </a:effectRef>
-          <a:fontRef idx="minor">
-            <a:schemeClr val="lt1"/>
-          </a:fontRef>
-        </p:style>
-        <p:txBody>
-          <a:bodyPr rtlCol="0" anchor="ctr"/>
-          <a:lstStyle/>
-          <a:p>
-            <a:pPr algn="ctr"/>
-          </a:p>
-        </p:txBody>
-      </p:sp>
-      <p:sp>
-        <p:nvSpPr>
-          <p:cNvPr id="48" name="TextBox 47"/>
-          <p:cNvSpPr txBox="1"/>
-          <p:nvPr/>
-        </p:nvSpPr>
-        <p:spPr>
-          <a:xfrm>
-            <a:off x="6446520" y="4197096"/>
-            <a:ext cx="4937760" cy="292608"/>
-          </a:xfrm>
-          <a:prstGeom prst="rect">
-            <a:avLst/>
-          </a:prstGeom>
-          <a:noFill/>
-        </p:spPr>
-        <p:txBody>
-          <a:bodyPr wrap="square">
-            <a:spAutoFit/>
-          </a:bodyPr>
-          <a:lstStyle/>
-          <a:p>
-            <a:pPr algn="l"/>
-            <a:r>
-              <a:rPr sz="1150" b="0" i="0">
-                <a:solidFill>
-                  <a:srgbClr val="202633"/>
-                </a:solidFill>
-                <a:latin typeface="Calibri"/>
-              </a:rPr>
-              <a:t>One workbook: forecast + Analysis sheet</a:t>
-            </a:r>
-          </a:p>
-        </p:txBody>
-      </p:sp>
-      <p:sp>
-        <p:nvSpPr>
-          <p:cNvPr id="49" name="Oval 48"/>
-          <p:cNvSpPr/>
-          <p:nvPr/>
-        </p:nvSpPr>
-        <p:spPr>
-          <a:xfrm>
-            <a:off x="6245352" y="4572000"/>
-            <a:ext cx="82296" cy="82296"/>
-          </a:xfrm>
-          <a:prstGeom prst="ellipse">
-            <a:avLst/>
-          </a:prstGeom>
-          <a:solidFill>
-            <a:srgbClr val="2EC4B6"/>
-          </a:solidFill>
-          <a:ln>
-            <a:noFill/>
-          </a:ln>
-          <a:effectLst/>
-        </p:spPr>
-        <p:style>
-          <a:lnRef idx="1">
-            <a:schemeClr val="accent1"/>
-          </a:lnRef>
-          <a:fillRef idx="3">
-            <a:schemeClr val="accent1"/>
-          </a:fillRef>
-          <a:effectRef idx="2">
-            <a:schemeClr val="accent1"/>
-          </a:effectRef>
-          <a:fontRef idx="minor">
-            <a:schemeClr val="lt1"/>
-          </a:fontRef>
-        </p:style>
-        <p:txBody>
-          <a:bodyPr rtlCol="0" anchor="ctr"/>
-          <a:lstStyle/>
-          <a:p>
-            <a:pPr algn="ctr"/>
-          </a:p>
-        </p:txBody>
-      </p:sp>
-      <p:sp>
-        <p:nvSpPr>
-          <p:cNvPr id="50" name="TextBox 49"/>
-          <p:cNvSpPr txBox="1"/>
-          <p:nvPr/>
-        </p:nvSpPr>
-        <p:spPr>
-          <a:xfrm>
-            <a:off x="6446520" y="4507992"/>
-            <a:ext cx="4937760" cy="292608"/>
-          </a:xfrm>
-          <a:prstGeom prst="rect">
-            <a:avLst/>
-          </a:prstGeom>
-          <a:noFill/>
-        </p:spPr>
-        <p:txBody>
-          <a:bodyPr wrap="square">
-            <a:spAutoFit/>
-          </a:bodyPr>
-          <a:lstStyle/>
-          <a:p>
-            <a:pPr algn="l"/>
-            <a:r>
-              <a:rPr sz="1150" b="0" i="0">
-                <a:solidFill>
-                  <a:srgbClr val="202633"/>
-                </a:solidFill>
-                <a:latin typeface="Calibri"/>
-              </a:rPr>
-              <a:t>Every chart pairs volume with staffing gap</a:t>
-            </a:r>
-          </a:p>
-        </p:txBody>
-      </p:sp>
-      <p:sp>
-        <p:nvSpPr>
-          <p:cNvPr id="51" name="Oval 50"/>
-          <p:cNvSpPr/>
-          <p:nvPr/>
-        </p:nvSpPr>
-        <p:spPr>
-          <a:xfrm>
-            <a:off x="6245352" y="4882896"/>
-            <a:ext cx="82296" cy="82296"/>
-          </a:xfrm>
-          <a:prstGeom prst="ellipse">
-            <a:avLst/>
-          </a:prstGeom>
-          <a:solidFill>
-            <a:srgbClr val="2EC4B6"/>
-          </a:solidFill>
-          <a:ln>
-            <a:noFill/>
-          </a:ln>
-          <a:effectLst/>
-        </p:spPr>
-        <p:style>
-          <a:lnRef idx="1">
-            <a:schemeClr val="accent1"/>
-          </a:lnRef>
-          <a:fillRef idx="3">
-            <a:schemeClr val="accent1"/>
-          </a:fillRef>
-          <a:effectRef idx="2">
-            <a:schemeClr val="accent1"/>
-          </a:effectRef>
-          <a:fontRef idx="minor">
-            <a:schemeClr val="lt1"/>
-          </a:fontRef>
-        </p:style>
-        <p:txBody>
-          <a:bodyPr rtlCol="0" anchor="ctr"/>
-          <a:lstStyle/>
-          <a:p>
-            <a:pPr algn="ctr"/>
-          </a:p>
-        </p:txBody>
-      </p:sp>
-      <p:sp>
-        <p:nvSpPr>
-          <p:cNvPr id="52" name="TextBox 51"/>
-          <p:cNvSpPr txBox="1"/>
-          <p:nvPr/>
-        </p:nvSpPr>
-        <p:spPr>
-          <a:xfrm>
-            <a:off x="6446520" y="4818888"/>
-            <a:ext cx="4937760" cy="292608"/>
-          </a:xfrm>
-          <a:prstGeom prst="rect">
-            <a:avLst/>
-          </a:prstGeom>
-          <a:noFill/>
-        </p:spPr>
-        <p:txBody>
-          <a:bodyPr wrap="square">
-            <a:spAutoFit/>
-          </a:bodyPr>
-          <a:lstStyle/>
-          <a:p>
-            <a:pPr algn="l"/>
-            <a:r>
-              <a:rPr sz="1150" b="0" i="0">
-                <a:solidFill>
-                  <a:srgbClr val="202633"/>
-                </a:solidFill>
-                <a:latin typeface="Calibri"/>
-              </a:rPr>
-              <a:t>A 6-slide deck, numbers read live from the data</a:t>
-            </a:r>
-          </a:p>
-        </p:txBody>
-      </p:sp>
-      <p:sp>
-        <p:nvSpPr>
-          <p:cNvPr id="53" name="Oval 52"/>
-          <p:cNvSpPr/>
-          <p:nvPr/>
-        </p:nvSpPr>
-        <p:spPr>
-          <a:xfrm>
-            <a:off x="6245352" y="5193792"/>
-            <a:ext cx="82296" cy="82296"/>
-          </a:xfrm>
-          <a:prstGeom prst="ellipse">
-            <a:avLst/>
-          </a:prstGeom>
-          <a:solidFill>
-            <a:srgbClr val="2EC4B6"/>
-          </a:solidFill>
-          <a:ln>
-            <a:noFill/>
-          </a:ln>
-          <a:effectLst/>
-        </p:spPr>
-        <p:style>
-          <a:lnRef idx="1">
-            <a:schemeClr val="accent1"/>
-          </a:lnRef>
-          <a:fillRef idx="3">
-            <a:schemeClr val="accent1"/>
-          </a:fillRef>
-          <a:effectRef idx="2">
-            <a:schemeClr val="accent1"/>
-          </a:effectRef>
-          <a:fontRef idx="minor">
-            <a:schemeClr val="lt1"/>
-          </a:fontRef>
-        </p:style>
-        <p:txBody>
-          <a:bodyPr rtlCol="0" anchor="ctr"/>
-          <a:lstStyle/>
-          <a:p>
-            <a:pPr algn="ctr"/>
-          </a:p>
-        </p:txBody>
-      </p:sp>
-      <p:sp>
-        <p:nvSpPr>
-          <p:cNvPr id="54" name="TextBox 53"/>
-          <p:cNvSpPr txBox="1"/>
-          <p:nvPr/>
-        </p:nvSpPr>
-        <p:spPr>
-          <a:xfrm>
-            <a:off x="6446520" y="5129784"/>
-            <a:ext cx="4937760" cy="292608"/>
-          </a:xfrm>
-          <a:prstGeom prst="rect">
-            <a:avLst/>
-          </a:prstGeom>
-          <a:noFill/>
-        </p:spPr>
-        <p:txBody>
-          <a:bodyPr wrap="square">
-            <a:spAutoFit/>
-          </a:bodyPr>
-          <a:lstStyle/>
-          <a:p>
-            <a:pPr algn="l"/>
-            <a:r>
-              <a:rPr sz="1150" b="0" i="0">
-                <a:solidFill>
-                  <a:srgbClr val="202633"/>
-                </a:solidFill>
-                <a:latin typeface="Calibri"/>
-              </a:rPr>
-              <a:t>A Power BI staffing-gap report on top</a:t>
-            </a:r>
-          </a:p>
-        </p:txBody>
-      </p:sp>
-      <p:sp>
-        <p:nvSpPr>
-          <p:cNvPr id="55" name="TextBox 54"/>
-          <p:cNvSpPr txBox="1"/>
-          <p:nvPr/>
-        </p:nvSpPr>
-        <p:spPr>
-          <a:xfrm>
-            <a:off x="594360" y="6473952"/>
-            <a:ext cx="9144000" cy="320040"/>
-          </a:xfrm>
-          <a:prstGeom prst="rect">
-            <a:avLst/>
-          </a:prstGeom>
-          <a:noFill/>
-        </p:spPr>
-        <p:txBody>
-          <a:bodyPr wrap="square">
-            <a:spAutoFit/>
-          </a:bodyPr>
-          <a:lstStyle/>
-          <a:p>
-            <a:pPr algn="l"/>
-            <a:r>
               <a:rPr sz="1000" b="0" i="0">
                 <a:solidFill>
                   <a:srgbClr val="5A6B7D"/>
@@ -7097,7 +7447,7 @@
       </p:sp>
       <p:sp>
         <p:nvSpPr>
-          <p:cNvPr id="56" name="TextBox 55"/>
+          <p:cNvPr id="66" name="TextBox 65"/>
           <p:cNvSpPr txBox="1"/>
           <p:nvPr/>
         </p:nvSpPr>
@@ -8049,7 +8399,7 @@
                 </a:solidFill>
                 <a:latin typeface="Calibri"/>
               </a:rPr>
-              <a:t>TOP 3 SHORT-STAFFED DAYS</a:t>
+              <a:t>TOP 5 SHORT-STAFFED DAYS</a:t>
             </a:r>
           </a:p>
         </p:txBody>
@@ -8062,8 +8412,8 @@
         </p:nvSpPr>
         <p:spPr>
           <a:xfrm>
-            <a:off x="4337304" y="3447288"/>
-            <a:ext cx="237744" cy="237744"/>
+            <a:off x="4337304" y="3438144"/>
+            <a:ext cx="201168" cy="201168"/>
           </a:xfrm>
           <a:prstGeom prst="ellipse">
             <a:avLst/>
@@ -8096,7 +8446,7 @@
           <a:p>
             <a:pPr algn="ctr"/>
             <a:r>
-              <a:rPr sz="1200" b="1">
+              <a:rPr sz="1050" b="1">
                 <a:solidFill>
                   <a:srgbClr val="FFFFFF"/>
                 </a:solidFill>
@@ -8115,8 +8465,8 @@
         </p:nvSpPr>
         <p:spPr>
           <a:xfrm>
-            <a:off x="4666488" y="3429000"/>
-            <a:ext cx="3185160" cy="329184"/>
+            <a:off x="4629912" y="3410712"/>
+            <a:ext cx="3221736" cy="292608"/>
           </a:xfrm>
           <a:prstGeom prst="rect">
             <a:avLst/>
@@ -8131,7 +8481,7 @@
           <a:p>
             <a:pPr algn="l"/>
             <a:r>
-              <a:rPr sz="1300" b="0" i="0">
+              <a:rPr sz="1200" b="0" i="0">
                 <a:solidFill>
                   <a:srgbClr val="202633"/>
                 </a:solidFill>
@@ -8150,8 +8500,8 @@
         </p:nvSpPr>
         <p:spPr>
           <a:xfrm>
-            <a:off x="4337304" y="3831336"/>
-            <a:ext cx="237744" cy="237744"/>
+            <a:off x="4337304" y="3767328"/>
+            <a:ext cx="201168" cy="201168"/>
           </a:xfrm>
           <a:prstGeom prst="ellipse">
             <a:avLst/>
@@ -8184,7 +8534,7 @@
           <a:p>
             <a:pPr algn="ctr"/>
             <a:r>
-              <a:rPr sz="1200" b="1">
+              <a:rPr sz="1050" b="1">
                 <a:solidFill>
                   <a:srgbClr val="FFFFFF"/>
                 </a:solidFill>
@@ -8203,8 +8553,8 @@
         </p:nvSpPr>
         <p:spPr>
           <a:xfrm>
-            <a:off x="4666488" y="3813048"/>
-            <a:ext cx="3185160" cy="329184"/>
+            <a:off x="4629912" y="3739896"/>
+            <a:ext cx="3221736" cy="292608"/>
           </a:xfrm>
           <a:prstGeom prst="rect">
             <a:avLst/>
@@ -8219,7 +8569,7 @@
           <a:p>
             <a:pPr algn="l"/>
             <a:r>
-              <a:rPr sz="1300" b="0" i="0">
+              <a:rPr sz="1200" b="0" i="0">
                 <a:solidFill>
                   <a:srgbClr val="202633"/>
                 </a:solidFill>
@@ -8238,8 +8588,8 @@
         </p:nvSpPr>
         <p:spPr>
           <a:xfrm>
-            <a:off x="4337304" y="4215384"/>
-            <a:ext cx="237744" cy="237744"/>
+            <a:off x="4337304" y="4096512"/>
+            <a:ext cx="201168" cy="201168"/>
           </a:xfrm>
           <a:prstGeom prst="ellipse">
             <a:avLst/>
@@ -8272,7 +8622,7 @@
           <a:p>
             <a:pPr algn="ctr"/>
             <a:r>
-              <a:rPr sz="1200" b="1">
+              <a:rPr sz="1050" b="1">
                 <a:solidFill>
                   <a:srgbClr val="FFFFFF"/>
                 </a:solidFill>
@@ -8291,8 +8641,8 @@
         </p:nvSpPr>
         <p:spPr>
           <a:xfrm>
-            <a:off x="4666488" y="4197096"/>
-            <a:ext cx="3185160" cy="329184"/>
+            <a:off x="4629912" y="4069080"/>
+            <a:ext cx="3221736" cy="292608"/>
           </a:xfrm>
           <a:prstGeom prst="rect">
             <a:avLst/>
@@ -8307,7 +8657,7 @@
           <a:p>
             <a:pPr algn="l"/>
             <a:r>
-              <a:rPr sz="1300" b="0" i="0">
+              <a:rPr sz="1200" b="0" i="0">
                 <a:solidFill>
                   <a:srgbClr val="202633"/>
                 </a:solidFill>
@@ -8320,49 +8670,14 @@
       </p:sp>
       <p:sp>
         <p:nvSpPr>
-          <p:cNvPr id="27" name="TextBox 26"/>
-          <p:cNvSpPr txBox="1"/>
-          <p:nvPr/>
-        </p:nvSpPr>
-        <p:spPr>
-          <a:xfrm>
-            <a:off x="8080248" y="3063240"/>
-            <a:ext cx="3514344" cy="274320"/>
-          </a:xfrm>
-          <a:prstGeom prst="rect">
-            <a:avLst/>
-          </a:prstGeom>
-          <a:noFill/>
-        </p:spPr>
-        <p:txBody>
-          <a:bodyPr wrap="square">
-            <a:spAutoFit/>
-          </a:bodyPr>
-          <a:lstStyle/>
-          <a:p>
-            <a:pPr algn="l"/>
-            <a:r>
-              <a:rPr sz="1200" b="1" i="0">
-                <a:solidFill>
-                  <a:srgbClr val="1F9A8F"/>
-                </a:solidFill>
-                <a:latin typeface="Calibri"/>
-              </a:rPr>
-              <a:t>WEEKLY GAP TREND (NEXT 3 WKS)</a:t>
-            </a:r>
-          </a:p>
-        </p:txBody>
-      </p:sp>
-      <p:sp>
-        <p:nvSpPr>
-          <p:cNvPr id="28" name="Oval 27"/>
+          <p:cNvPr id="27" name="Oval 26"/>
           <p:cNvSpPr/>
           <p:nvPr/>
         </p:nvSpPr>
         <p:spPr>
           <a:xfrm>
-            <a:off x="8080248" y="3447288"/>
-            <a:ext cx="237744" cy="237744"/>
+            <a:off x="4337304" y="4425696"/>
+            <a:ext cx="201168" cy="201168"/>
           </a:xfrm>
           <a:prstGeom prst="ellipse">
             <a:avLst/>
@@ -8395,27 +8710,27 @@
           <a:p>
             <a:pPr algn="ctr"/>
             <a:r>
-              <a:rPr sz="1200" b="1">
+              <a:rPr sz="1050" b="1">
                 <a:solidFill>
                   <a:srgbClr val="FFFFFF"/>
                 </a:solidFill>
                 <a:latin typeface="Calibri"/>
               </a:rPr>
-              <a:t>1</a:t>
-            </a:r>
-          </a:p>
-        </p:txBody>
-      </p:sp>
-      <p:sp>
-        <p:nvSpPr>
-          <p:cNvPr id="29" name="TextBox 28"/>
+              <a:t>4</a:t>
+            </a:r>
+          </a:p>
+        </p:txBody>
+      </p:sp>
+      <p:sp>
+        <p:nvSpPr>
+          <p:cNvPr id="28" name="TextBox 27"/>
           <p:cNvSpPr txBox="1"/>
           <p:nvPr/>
         </p:nvSpPr>
         <p:spPr>
           <a:xfrm>
-            <a:off x="8409432" y="3429000"/>
-            <a:ext cx="3185160" cy="329184"/>
+            <a:off x="4629912" y="4398264"/>
+            <a:ext cx="3221736" cy="292608"/>
           </a:xfrm>
           <a:prstGeom prst="rect">
             <a:avLst/>
@@ -8430,27 +8745,27 @@
           <a:p>
             <a:pPr algn="l"/>
             <a:r>
-              <a:rPr sz="1300" b="0" i="0">
+              <a:rPr sz="1200" b="0" i="0">
                 <a:solidFill>
                   <a:srgbClr val="202633"/>
                 </a:solidFill>
                 <a:latin typeface="Calibri"/>
               </a:rPr>
-              <a:t>Week of 26 Oct — 2.6 FTE avg gap</a:t>
-            </a:r>
-          </a:p>
-        </p:txBody>
-      </p:sp>
-      <p:sp>
-        <p:nvSpPr>
-          <p:cNvPr id="30" name="Oval 29"/>
+              <a:t>28 Oct 2026 — 3.6 FTE short</a:t>
+            </a:r>
+          </a:p>
+        </p:txBody>
+      </p:sp>
+      <p:sp>
+        <p:nvSpPr>
+          <p:cNvPr id="29" name="Oval 28"/>
           <p:cNvSpPr/>
           <p:nvPr/>
         </p:nvSpPr>
         <p:spPr>
           <a:xfrm>
-            <a:off x="8080248" y="3831336"/>
-            <a:ext cx="237744" cy="237744"/>
+            <a:off x="4337304" y="4754880"/>
+            <a:ext cx="201168" cy="201168"/>
           </a:xfrm>
           <a:prstGeom prst="ellipse">
             <a:avLst/>
@@ -8483,27 +8798,27 @@
           <a:p>
             <a:pPr algn="ctr"/>
             <a:r>
-              <a:rPr sz="1200" b="1">
+              <a:rPr sz="1050" b="1">
                 <a:solidFill>
                   <a:srgbClr val="FFFFFF"/>
                 </a:solidFill>
                 <a:latin typeface="Calibri"/>
               </a:rPr>
-              <a:t>2</a:t>
-            </a:r>
-          </a:p>
-        </p:txBody>
-      </p:sp>
-      <p:sp>
-        <p:nvSpPr>
-          <p:cNvPr id="31" name="TextBox 30"/>
+              <a:t>5</a:t>
+            </a:r>
+          </a:p>
+        </p:txBody>
+      </p:sp>
+      <p:sp>
+        <p:nvSpPr>
+          <p:cNvPr id="30" name="TextBox 29"/>
           <p:cNvSpPr txBox="1"/>
           <p:nvPr/>
         </p:nvSpPr>
         <p:spPr>
           <a:xfrm>
-            <a:off x="8409432" y="3813048"/>
-            <a:ext cx="3185160" cy="329184"/>
+            <a:off x="4629912" y="4727448"/>
+            <a:ext cx="3221736" cy="292608"/>
           </a:xfrm>
           <a:prstGeom prst="rect">
             <a:avLst/>
@@ -8518,13 +8833,48 @@
           <a:p>
             <a:pPr algn="l"/>
             <a:r>
-              <a:rPr sz="1300" b="0" i="0">
+              <a:rPr sz="1200" b="0" i="0">
                 <a:solidFill>
                   <a:srgbClr val="202633"/>
                 </a:solidFill>
                 <a:latin typeface="Calibri"/>
               </a:rPr>
-              <a:t>Week of 02 Nov — 2.5 FTE avg gap</a:t>
+              <a:t>04 Nov 2026 — 3.6 FTE short</a:t>
+            </a:r>
+          </a:p>
+        </p:txBody>
+      </p:sp>
+      <p:sp>
+        <p:nvSpPr>
+          <p:cNvPr id="31" name="TextBox 30"/>
+          <p:cNvSpPr txBox="1"/>
+          <p:nvPr/>
+        </p:nvSpPr>
+        <p:spPr>
+          <a:xfrm>
+            <a:off x="8080248" y="3063240"/>
+            <a:ext cx="3514344" cy="274320"/>
+          </a:xfrm>
+          <a:prstGeom prst="rect">
+            <a:avLst/>
+          </a:prstGeom>
+          <a:noFill/>
+        </p:spPr>
+        <p:txBody>
+          <a:bodyPr wrap="square">
+            <a:spAutoFit/>
+          </a:bodyPr>
+          <a:lstStyle/>
+          <a:p>
+            <a:pPr algn="l"/>
+            <a:r>
+              <a:rPr sz="1200" b="1" i="0">
+                <a:solidFill>
+                  <a:srgbClr val="1F9A8F"/>
+                </a:solidFill>
+                <a:latin typeface="Calibri"/>
+              </a:rPr>
+              <a:t>WEEKLY GAP TREND (NEXT 5 WKS)</a:t>
             </a:r>
           </a:p>
         </p:txBody>
@@ -8537,8 +8887,8 @@
         </p:nvSpPr>
         <p:spPr>
           <a:xfrm>
-            <a:off x="8080248" y="4215384"/>
-            <a:ext cx="237744" cy="237744"/>
+            <a:off x="8080248" y="3438144"/>
+            <a:ext cx="201168" cy="201168"/>
           </a:xfrm>
           <a:prstGeom prst="ellipse">
             <a:avLst/>
@@ -8571,13 +8921,13 @@
           <a:p>
             <a:pPr algn="ctr"/>
             <a:r>
-              <a:rPr sz="1200" b="1">
+              <a:rPr sz="1050" b="1">
                 <a:solidFill>
                   <a:srgbClr val="FFFFFF"/>
                 </a:solidFill>
                 <a:latin typeface="Calibri"/>
               </a:rPr>
-              <a:t>3</a:t>
+              <a:t>1</a:t>
             </a:r>
           </a:p>
         </p:txBody>
@@ -8590,8 +8940,8 @@
         </p:nvSpPr>
         <p:spPr>
           <a:xfrm>
-            <a:off x="8409432" y="4197096"/>
-            <a:ext cx="3185160" cy="329184"/>
+            <a:off x="8372856" y="3410712"/>
+            <a:ext cx="3221736" cy="292608"/>
           </a:xfrm>
           <a:prstGeom prst="rect">
             <a:avLst/>
@@ -8606,13 +8956,13 @@
           <a:p>
             <a:pPr algn="l"/>
             <a:r>
-              <a:rPr sz="1300" b="0" i="0">
+              <a:rPr sz="1200" b="0" i="0">
                 <a:solidFill>
                   <a:srgbClr val="202633"/>
                 </a:solidFill>
                 <a:latin typeface="Calibri"/>
               </a:rPr>
-              <a:t>Week of 09 Nov — 2.5 FTE avg gap</a:t>
+              <a:t>Week of 26 Oct — 2.6 FTE avg gap</a:t>
             </a:r>
           </a:p>
         </p:txBody>
@@ -8625,8 +8975,8 @@
         </p:nvSpPr>
         <p:spPr>
           <a:xfrm>
-            <a:off x="594360" y="5330952"/>
-            <a:ext cx="128016" cy="128016"/>
+            <a:off x="8080248" y="3767328"/>
+            <a:ext cx="201168" cy="201168"/>
           </a:xfrm>
           <a:prstGeom prst="ellipse">
             <a:avLst/>
@@ -8658,6 +9008,15 @@
           <a:lstStyle/>
           <a:p>
             <a:pPr algn="ctr"/>
+            <a:r>
+              <a:rPr sz="1050" b="1">
+                <a:solidFill>
+                  <a:srgbClr val="FFFFFF"/>
+                </a:solidFill>
+                <a:latin typeface="Calibri"/>
+              </a:rPr>
+              <a:t>2</a:t>
+            </a:r>
           </a:p>
         </p:txBody>
       </p:sp>
@@ -8669,8 +9028,8 @@
         </p:nvSpPr>
         <p:spPr>
           <a:xfrm>
-            <a:off x="914400" y="5257800"/>
-            <a:ext cx="10561320" cy="548640"/>
+            <a:off x="8372856" y="3739896"/>
+            <a:ext cx="3221736" cy="292608"/>
           </a:xfrm>
           <a:prstGeom prst="rect">
             <a:avLst/>
@@ -8685,27 +9044,80 @@
           <a:p>
             <a:pPr algn="l"/>
             <a:r>
-              <a:rPr sz="1450" b="0" i="0">
+              <a:rPr sz="1200" b="0" i="0">
                 <a:solidFill>
                   <a:srgbClr val="202633"/>
                 </a:solidFill>
                 <a:latin typeface="Calibri"/>
               </a:rPr>
-              <a:t>This is a modest, fixable gap - not a crisis - but worth flagging now, with weeks of lead time, rather than discovering it the week service levels slip.</a:t>
-            </a:r>
-          </a:p>
-        </p:txBody>
-      </p:sp>
-      <p:sp>
-        <p:nvSpPr>
-          <p:cNvPr id="36" name="TextBox 35"/>
+              <a:t>Week of 02 Nov — 2.5 FTE avg gap</a:t>
+            </a:r>
+          </a:p>
+        </p:txBody>
+      </p:sp>
+      <p:sp>
+        <p:nvSpPr>
+          <p:cNvPr id="36" name="Oval 35"/>
+          <p:cNvSpPr/>
+          <p:nvPr/>
+        </p:nvSpPr>
+        <p:spPr>
+          <a:xfrm>
+            <a:off x="8080248" y="4096512"/>
+            <a:ext cx="201168" cy="201168"/>
+          </a:xfrm>
+          <a:prstGeom prst="ellipse">
+            <a:avLst/>
+          </a:prstGeom>
+          <a:solidFill>
+            <a:srgbClr val="2EC4B6"/>
+          </a:solidFill>
+          <a:ln>
+            <a:noFill/>
+          </a:ln>
+          <a:effectLst/>
+        </p:spPr>
+        <p:style>
+          <a:lnRef idx="1">
+            <a:schemeClr val="accent1"/>
+          </a:lnRef>
+          <a:fillRef idx="3">
+            <a:schemeClr val="accent1"/>
+          </a:fillRef>
+          <a:effectRef idx="2">
+            <a:schemeClr val="accent1"/>
+          </a:effectRef>
+          <a:fontRef idx="minor">
+            <a:schemeClr val="lt1"/>
+          </a:fontRef>
+        </p:style>
+        <p:txBody>
+          <a:bodyPr rtlCol="0" anchor="ctr"/>
+          <a:lstStyle/>
+          <a:p>
+            <a:pPr algn="ctr"/>
+            <a:r>
+              <a:rPr sz="1050" b="1">
+                <a:solidFill>
+                  <a:srgbClr val="FFFFFF"/>
+                </a:solidFill>
+                <a:latin typeface="Calibri"/>
+              </a:rPr>
+              <a:t>3</a:t>
+            </a:r>
+          </a:p>
+        </p:txBody>
+      </p:sp>
+      <p:sp>
+        <p:nvSpPr>
+          <p:cNvPr id="37" name="TextBox 36"/>
           <p:cNvSpPr txBox="1"/>
           <p:nvPr/>
         </p:nvSpPr>
         <p:spPr>
           <a:xfrm>
-            <a:off x="594360" y="6473952"/>
-            <a:ext cx="9144000" cy="320040"/>
+            <a:off x="8372856" y="4069080"/>
+            <a:ext cx="3221736" cy="292608"/>
           </a:xfrm>
           <a:prstGeom prst="rect">
             <a:avLst/>
@@ -8720,6 +9132,296 @@
           <a:p>
             <a:pPr algn="l"/>
             <a:r>
+              <a:rPr sz="1200" b="0" i="0">
+                <a:solidFill>
+                  <a:srgbClr val="202633"/>
+                </a:solidFill>
+                <a:latin typeface="Calibri"/>
+              </a:rPr>
+              <a:t>Week of 09 Nov — 2.5 FTE avg gap</a:t>
+            </a:r>
+          </a:p>
+        </p:txBody>
+      </p:sp>
+      <p:sp>
+        <p:nvSpPr>
+          <p:cNvPr id="38" name="Oval 37"/>
+          <p:cNvSpPr/>
+          <p:nvPr/>
+        </p:nvSpPr>
+        <p:spPr>
+          <a:xfrm>
+            <a:off x="8080248" y="4425696"/>
+            <a:ext cx="201168" cy="201168"/>
+          </a:xfrm>
+          <a:prstGeom prst="ellipse">
+            <a:avLst/>
+          </a:prstGeom>
+          <a:solidFill>
+            <a:srgbClr val="2EC4B6"/>
+          </a:solidFill>
+          <a:ln>
+            <a:noFill/>
+          </a:ln>
+          <a:effectLst/>
+        </p:spPr>
+        <p:style>
+          <a:lnRef idx="1">
+            <a:schemeClr val="accent1"/>
+          </a:lnRef>
+          <a:fillRef idx="3">
+            <a:schemeClr val="accent1"/>
+          </a:fillRef>
+          <a:effectRef idx="2">
+            <a:schemeClr val="accent1"/>
+          </a:effectRef>
+          <a:fontRef idx="minor">
+            <a:schemeClr val="lt1"/>
+          </a:fontRef>
+        </p:style>
+        <p:txBody>
+          <a:bodyPr rtlCol="0" anchor="ctr"/>
+          <a:lstStyle/>
+          <a:p>
+            <a:pPr algn="ctr"/>
+            <a:r>
+              <a:rPr sz="1050" b="1">
+                <a:solidFill>
+                  <a:srgbClr val="FFFFFF"/>
+                </a:solidFill>
+                <a:latin typeface="Calibri"/>
+              </a:rPr>
+              <a:t>4</a:t>
+            </a:r>
+          </a:p>
+        </p:txBody>
+      </p:sp>
+      <p:sp>
+        <p:nvSpPr>
+          <p:cNvPr id="39" name="TextBox 38"/>
+          <p:cNvSpPr txBox="1"/>
+          <p:nvPr/>
+        </p:nvSpPr>
+        <p:spPr>
+          <a:xfrm>
+            <a:off x="8372856" y="4398264"/>
+            <a:ext cx="3221736" cy="292608"/>
+          </a:xfrm>
+          <a:prstGeom prst="rect">
+            <a:avLst/>
+          </a:prstGeom>
+          <a:noFill/>
+        </p:spPr>
+        <p:txBody>
+          <a:bodyPr wrap="square">
+            <a:spAutoFit/>
+          </a:bodyPr>
+          <a:lstStyle/>
+          <a:p>
+            <a:pPr algn="l"/>
+            <a:r>
+              <a:rPr sz="1200" b="0" i="0">
+                <a:solidFill>
+                  <a:srgbClr val="202633"/>
+                </a:solidFill>
+                <a:latin typeface="Calibri"/>
+              </a:rPr>
+              <a:t>Week of 16 Nov — 2.5 FTE avg gap</a:t>
+            </a:r>
+          </a:p>
+        </p:txBody>
+      </p:sp>
+      <p:sp>
+        <p:nvSpPr>
+          <p:cNvPr id="40" name="Oval 39"/>
+          <p:cNvSpPr/>
+          <p:nvPr/>
+        </p:nvSpPr>
+        <p:spPr>
+          <a:xfrm>
+            <a:off x="8080248" y="4754880"/>
+            <a:ext cx="201168" cy="201168"/>
+          </a:xfrm>
+          <a:prstGeom prst="ellipse">
+            <a:avLst/>
+          </a:prstGeom>
+          <a:solidFill>
+            <a:srgbClr val="2EC4B6"/>
+          </a:solidFill>
+          <a:ln>
+            <a:noFill/>
+          </a:ln>
+          <a:effectLst/>
+        </p:spPr>
+        <p:style>
+          <a:lnRef idx="1">
+            <a:schemeClr val="accent1"/>
+          </a:lnRef>
+          <a:fillRef idx="3">
+            <a:schemeClr val="accent1"/>
+          </a:fillRef>
+          <a:effectRef idx="2">
+            <a:schemeClr val="accent1"/>
+          </a:effectRef>
+          <a:fontRef idx="minor">
+            <a:schemeClr val="lt1"/>
+          </a:fontRef>
+        </p:style>
+        <p:txBody>
+          <a:bodyPr rtlCol="0" anchor="ctr"/>
+          <a:lstStyle/>
+          <a:p>
+            <a:pPr algn="ctr"/>
+            <a:r>
+              <a:rPr sz="1050" b="1">
+                <a:solidFill>
+                  <a:srgbClr val="FFFFFF"/>
+                </a:solidFill>
+                <a:latin typeface="Calibri"/>
+              </a:rPr>
+              <a:t>5</a:t>
+            </a:r>
+          </a:p>
+        </p:txBody>
+      </p:sp>
+      <p:sp>
+        <p:nvSpPr>
+          <p:cNvPr id="41" name="TextBox 40"/>
+          <p:cNvSpPr txBox="1"/>
+          <p:nvPr/>
+        </p:nvSpPr>
+        <p:spPr>
+          <a:xfrm>
+            <a:off x="8372856" y="4727448"/>
+            <a:ext cx="3221736" cy="292608"/>
+          </a:xfrm>
+          <a:prstGeom prst="rect">
+            <a:avLst/>
+          </a:prstGeom>
+          <a:noFill/>
+        </p:spPr>
+        <p:txBody>
+          <a:bodyPr wrap="square">
+            <a:spAutoFit/>
+          </a:bodyPr>
+          <a:lstStyle/>
+          <a:p>
+            <a:pPr algn="l"/>
+            <a:r>
+              <a:rPr sz="1200" b="0" i="0">
+                <a:solidFill>
+                  <a:srgbClr val="202633"/>
+                </a:solidFill>
+                <a:latin typeface="Calibri"/>
+              </a:rPr>
+              <a:t>Week of 23 Nov — 2.5 FTE avg gap</a:t>
+            </a:r>
+          </a:p>
+        </p:txBody>
+      </p:sp>
+      <p:sp>
+        <p:nvSpPr>
+          <p:cNvPr id="42" name="Oval 41"/>
+          <p:cNvSpPr/>
+          <p:nvPr/>
+        </p:nvSpPr>
+        <p:spPr>
+          <a:xfrm>
+            <a:off x="594360" y="5513832"/>
+            <a:ext cx="128016" cy="128016"/>
+          </a:xfrm>
+          <a:prstGeom prst="ellipse">
+            <a:avLst/>
+          </a:prstGeom>
+          <a:solidFill>
+            <a:srgbClr val="2EC4B6"/>
+          </a:solidFill>
+          <a:ln>
+            <a:noFill/>
+          </a:ln>
+          <a:effectLst/>
+        </p:spPr>
+        <p:style>
+          <a:lnRef idx="1">
+            <a:schemeClr val="accent1"/>
+          </a:lnRef>
+          <a:fillRef idx="3">
+            <a:schemeClr val="accent1"/>
+          </a:fillRef>
+          <a:effectRef idx="2">
+            <a:schemeClr val="accent1"/>
+          </a:effectRef>
+          <a:fontRef idx="minor">
+            <a:schemeClr val="lt1"/>
+          </a:fontRef>
+        </p:style>
+        <p:txBody>
+          <a:bodyPr rtlCol="0" anchor="ctr"/>
+          <a:lstStyle/>
+          <a:p>
+            <a:pPr algn="ctr"/>
+          </a:p>
+        </p:txBody>
+      </p:sp>
+      <p:sp>
+        <p:nvSpPr>
+          <p:cNvPr id="43" name="TextBox 42"/>
+          <p:cNvSpPr txBox="1"/>
+          <p:nvPr/>
+        </p:nvSpPr>
+        <p:spPr>
+          <a:xfrm>
+            <a:off x="914400" y="5440680"/>
+            <a:ext cx="10561320" cy="548640"/>
+          </a:xfrm>
+          <a:prstGeom prst="rect">
+            <a:avLst/>
+          </a:prstGeom>
+          <a:noFill/>
+        </p:spPr>
+        <p:txBody>
+          <a:bodyPr wrap="square">
+            <a:spAutoFit/>
+          </a:bodyPr>
+          <a:lstStyle/>
+          <a:p>
+            <a:pPr algn="l"/>
+            <a:r>
+              <a:rPr sz="1450" b="0" i="0">
+                <a:solidFill>
+                  <a:srgbClr val="202633"/>
+                </a:solidFill>
+                <a:latin typeface="Calibri"/>
+              </a:rPr>
+              <a:t>This is a modest, fixable gap - not a crisis - but worth flagging now, with weeks of lead time, rather than discovering it the week service levels slip.</a:t>
+            </a:r>
+          </a:p>
+        </p:txBody>
+      </p:sp>
+      <p:sp>
+        <p:nvSpPr>
+          <p:cNvPr id="44" name="TextBox 43"/>
+          <p:cNvSpPr txBox="1"/>
+          <p:nvPr/>
+        </p:nvSpPr>
+        <p:spPr>
+          <a:xfrm>
+            <a:off x="594360" y="6473952"/>
+            <a:ext cx="9144000" cy="320040"/>
+          </a:xfrm>
+          <a:prstGeom prst="rect">
+            <a:avLst/>
+          </a:prstGeom>
+          <a:noFill/>
+        </p:spPr>
+        <p:txBody>
+          <a:bodyPr wrap="square">
+            <a:spAutoFit/>
+          </a:bodyPr>
+          <a:lstStyle/>
+          <a:p>
+            <a:pPr algn="l"/>
+            <a:r>
               <a:rPr sz="1000" b="0" i="0">
                 <a:solidFill>
                   <a:srgbClr val="5A6B7D"/>
@@ -8733,7 +9435,7 @@
       </p:sp>
       <p:sp>
         <p:nvSpPr>
-          <p:cNvPr id="37" name="TextBox 36"/>
+          <p:cNvPr id="45" name="TextBox 44"/>
           <p:cNvSpPr txBox="1"/>
           <p:nvPr/>
         </p:nvSpPr>
@@ -8836,7 +9538,7 @@
         <p:spPr>
           <a:xfrm>
             <a:off x="594360" y="1691640"/>
-            <a:ext cx="3505200" cy="274320"/>
+            <a:ext cx="2536911" cy="274320"/>
           </a:xfrm>
           <a:prstGeom prst="rect">
             <a:avLst/>
@@ -8870,8 +9572,8 @@
         </p:nvSpPr>
         <p:spPr>
           <a:xfrm>
-            <a:off x="4328160" y="1691640"/>
-            <a:ext cx="3505200" cy="274320"/>
+            <a:off x="3332439" y="1691640"/>
+            <a:ext cx="4651004" cy="274320"/>
           </a:xfrm>
           <a:prstGeom prst="rect">
             <a:avLst/>
@@ -8905,8 +9607,8 @@
         </p:nvSpPr>
         <p:spPr>
           <a:xfrm>
-            <a:off x="8061960" y="1691640"/>
-            <a:ext cx="3505200" cy="274320"/>
+            <a:off x="8184611" y="1691640"/>
+            <a:ext cx="3382549" cy="274320"/>
           </a:xfrm>
           <a:prstGeom prst="rect">
             <a:avLst/>
@@ -8976,7 +9678,7 @@
         <p:spPr>
           <a:xfrm>
             <a:off x="594360" y="2194560"/>
-            <a:ext cx="3505200" cy="1280160"/>
+            <a:ext cx="2536911" cy="1280160"/>
           </a:xfrm>
           <a:prstGeom prst="rect">
             <a:avLst/>
@@ -8991,13 +9693,13 @@
           <a:p>
             <a:pPr algn="l"/>
             <a:r>
-              <a:rPr sz="1500" b="1" i="0">
+              <a:rPr sz="1450" b="1" i="0">
                 <a:solidFill>
                   <a:srgbClr val="2EC4B6"/>
                 </a:solidFill>
                 <a:latin typeface="Calibri"/>
               </a:rPr>
-              <a:t>Fix #1: Close the FTE gap</a:t>
+              <a:t>Fix #1: Close the FTE gap (86% of days)</a:t>
             </a:r>
           </a:p>
         </p:txBody>
@@ -9010,8 +9712,8 @@
         </p:nvSpPr>
         <p:spPr>
           <a:xfrm>
-            <a:off x="4328160" y="2194560"/>
-            <a:ext cx="3505200" cy="1280160"/>
+            <a:off x="3332439" y="2194560"/>
+            <a:ext cx="4651004" cy="1280160"/>
           </a:xfrm>
           <a:prstGeom prst="rect">
             <a:avLst/>
@@ -9026,13 +9728,13 @@
           <a:p>
             <a:pPr algn="l"/>
             <a:r>
-              <a:rPr sz="1300" b="0" i="0">
+              <a:rPr sz="1250" b="0" i="0">
                 <a:solidFill>
                   <a:srgbClr val="FFFFFF"/>
                 </a:solidFill>
                 <a:latin typeface="Calibri"/>
               </a:rPr>
-              <a:t>Add overtime or a couple of flexible-shift agents — 42 days of lead time to plan it, not a same-week scramble.</a:t>
+              <a:t>Short-staffed on 86% of the next 42 days, averaging 2.5 FTE (9% of required headcount) — add overtime or flexible-shift agents, prioritizing Broadband coverage since it alone drives 36% of total volume.</a:t>
             </a:r>
           </a:p>
         </p:txBody>
@@ -9045,8 +9747,8 @@
         </p:nvSpPr>
         <p:spPr>
           <a:xfrm>
-            <a:off x="8061960" y="2194560"/>
-            <a:ext cx="3505200" cy="1280160"/>
+            <a:off x="8184611" y="2194560"/>
+            <a:ext cx="3382549" cy="1280160"/>
           </a:xfrm>
           <a:prstGeom prst="rect">
             <a:avLst/>
@@ -9061,13 +9763,13 @@
           <a:p>
             <a:pPr algn="l"/>
             <a:r>
-              <a:rPr sz="1300" b="0" i="0">
+              <a:rPr sz="1250" b="0" i="0">
                 <a:solidFill>
                   <a:srgbClr val="D7DEE8"/>
                 </a:solidFill>
                 <a:latin typeface="Calibri"/>
               </a:rPr>
-              <a:t>Closes the average 2.5-FTE shortfall before it hits service levels.</a:t>
+              <a:t>Closes the gap with 42 days of lead time, protecting the LoB carrying most of the service-level risk.</a:t>
             </a:r>
           </a:p>
         </p:txBody>
@@ -9081,7 +9783,7 @@
         <p:spPr>
           <a:xfrm>
             <a:off x="594360" y="3474720"/>
-            <a:ext cx="3505200" cy="1280160"/>
+            <a:ext cx="2536911" cy="1280160"/>
           </a:xfrm>
           <a:prstGeom prst="rect">
             <a:avLst/>
@@ -9096,7 +9798,7 @@
           <a:p>
             <a:pPr algn="l"/>
             <a:r>
-              <a:rPr sz="1500" b="1" i="0">
+              <a:rPr sz="1450" b="1" i="0">
                 <a:solidFill>
                   <a:srgbClr val="2EC4B6"/>
                 </a:solidFill>
@@ -9115,8 +9817,8 @@
         </p:nvSpPr>
         <p:spPr>
           <a:xfrm>
-            <a:off x="4328160" y="3474720"/>
-            <a:ext cx="3505200" cy="1280160"/>
+            <a:off x="3332439" y="3474720"/>
+            <a:ext cx="4651004" cy="1280160"/>
           </a:xfrm>
           <a:prstGeom prst="rect">
             <a:avLst/>
@@ -9131,13 +9833,13 @@
           <a:p>
             <a:pPr algn="l"/>
             <a:r>
-              <a:rPr sz="1300" b="0" i="0">
+              <a:rPr sz="1250" b="0" i="0">
                 <a:solidFill>
                   <a:srgbClr val="FFFFFF"/>
                 </a:solidFill>
                 <a:latin typeface="Calibri"/>
               </a:rPr>
-              <a:t>Flag 18 Nov 2026 specifically for extra coverage.</a:t>
+              <a:t>18 Nov 2026 is the single worst day, 3.7 FTE short — forecast volume peaks that day with no spare buffer.</a:t>
             </a:r>
           </a:p>
         </p:txBody>
@@ -9150,8 +9852,8 @@
         </p:nvSpPr>
         <p:spPr>
           <a:xfrm>
-            <a:off x="8061960" y="3474720"/>
-            <a:ext cx="3505200" cy="1280160"/>
+            <a:off x="8184611" y="3474720"/>
+            <a:ext cx="3382549" cy="1280160"/>
           </a:xfrm>
           <a:prstGeom prst="rect">
             <a:avLst/>
@@ -9166,13 +9868,13 @@
           <a:p>
             <a:pPr algn="l"/>
             <a:r>
-              <a:rPr sz="1300" b="0" i="0">
+              <a:rPr sz="1250" b="0" i="0">
                 <a:solidFill>
                   <a:srgbClr val="D7DEE8"/>
                 </a:solidFill>
                 <a:latin typeface="Calibri"/>
               </a:rPr>
-              <a:t>Avoids the single worst-staffed day in the horizon, 3.7 FTE short.</a:t>
+              <a:t>Proactive scheduling avoids the highest service-level-risk day in the horizon.</a:t>
             </a:r>
           </a:p>
         </p:txBody>
@@ -9186,7 +9888,7 @@
         <p:spPr>
           <a:xfrm>
             <a:off x="594360" y="4754880"/>
-            <a:ext cx="3505200" cy="1280160"/>
+            <a:ext cx="2536911" cy="1280160"/>
           </a:xfrm>
           <a:prstGeom prst="rect">
             <a:avLst/>
@@ -9201,7 +9903,7 @@
           <a:p>
             <a:pPr algn="l"/>
             <a:r>
-              <a:rPr sz="1500" b="1" i="0">
+              <a:rPr sz="1450" b="1" i="0">
                 <a:solidFill>
                   <a:srgbClr val="2EC4B6"/>
                 </a:solidFill>
@@ -9220,8 +9922,8 @@
         </p:nvSpPr>
         <p:spPr>
           <a:xfrm>
-            <a:off x="4328160" y="4754880"/>
-            <a:ext cx="3505200" cy="1280160"/>
+            <a:off x="3332439" y="4754880"/>
+            <a:ext cx="4651004" cy="1280160"/>
           </a:xfrm>
           <a:prstGeom prst="rect">
             <a:avLst/>
@@ -9236,13 +9938,13 @@
           <a:p>
             <a:pPr algn="l"/>
             <a:r>
-              <a:rPr sz="1300" b="0" i="0">
+              <a:rPr sz="1250" b="0" i="0">
                 <a:solidFill>
                   <a:srgbClr val="FFFFFF"/>
                 </a:solidFill>
                 <a:latin typeface="Calibri"/>
               </a:rPr>
-              <a:t>Extend the model per LoB/channel, and revisit shrinkage assumptions quarterly.</a:t>
+              <a:t>Extend the model per LoB/channel for sharper allocation, and revisit shrinkage assumptions quarterly as the roster's tenure mix shifts.</a:t>
             </a:r>
           </a:p>
         </p:txBody>
@@ -9255,8 +9957,8 @@
         </p:nvSpPr>
         <p:spPr>
           <a:xfrm>
-            <a:off x="8061960" y="4754880"/>
-            <a:ext cx="3505200" cy="1280160"/>
+            <a:off x="8184611" y="4754880"/>
+            <a:ext cx="3382549" cy="1280160"/>
           </a:xfrm>
           <a:prstGeom prst="rect">
             <a:avLst/>
@@ -9271,13 +9973,13 @@
           <a:p>
             <a:pPr algn="l"/>
             <a:r>
-              <a:rPr sz="1300" b="0" i="0">
+              <a:rPr sz="1250" b="0" i="0">
                 <a:solidFill>
                   <a:srgbClr val="D7DEE8"/>
                 </a:solidFill>
                 <a:latin typeface="Calibri"/>
               </a:rPr>
-              <a:t>Sharper staffing allocation as the roster's tenure mix shifts over time.</a:t>
+              <a:t>Keeps the staffing plan accurate instead of going stale between reviews.</a:t>
             </a:r>
           </a:p>
         </p:txBody>

--- a/usecase2_demand_forecasting/final_output/usecase2_forecast_summary.pptx
+++ b/usecase2_demand_forecasting/final_output/usecase2_forecast_summary.pptx
@@ -5042,14 +5042,259 @@
       </p:sp>
       <p:sp>
         <p:nvSpPr>
-          <p:cNvPr id="5" name="Oval 4"/>
+          <p:cNvPr id="5" name="TextBox 4"/>
+          <p:cNvSpPr txBox="1"/>
+          <p:nvPr/>
+        </p:nvSpPr>
+        <p:spPr>
+          <a:xfrm>
+            <a:off x="3291840" y="1463040"/>
+            <a:ext cx="4846320" cy="274320"/>
+          </a:xfrm>
+          <a:prstGeom prst="rect">
+            <a:avLst/>
+          </a:prstGeom>
+          <a:noFill/>
+        </p:spPr>
+        <p:txBody>
+          <a:bodyPr wrap="square">
+            <a:spAutoFit/>
+          </a:bodyPr>
+          <a:lstStyle/>
+          <a:p>
+            <a:pPr algn="l"/>
+            <a:r>
+              <a:rPr sz="1050" b="1" i="0">
+                <a:solidFill>
+                  <a:srgbClr val="1F9A8F"/>
+                </a:solidFill>
+                <a:latin typeface="Calibri"/>
+              </a:rPr>
+              <a:t>APPROACH</a:t>
+            </a:r>
+          </a:p>
+        </p:txBody>
+      </p:sp>
+      <p:sp>
+        <p:nvSpPr>
+          <p:cNvPr id="6" name="TextBox 5"/>
+          <p:cNvSpPr txBox="1"/>
+          <p:nvPr/>
+        </p:nvSpPr>
+        <p:spPr>
+          <a:xfrm>
+            <a:off x="8366760" y="1463040"/>
+            <a:ext cx="3227832" cy="274320"/>
+          </a:xfrm>
+          <a:prstGeom prst="rect">
+            <a:avLst/>
+          </a:prstGeom>
+          <a:noFill/>
+        </p:spPr>
+        <p:txBody>
+          <a:bodyPr wrap="square">
+            <a:spAutoFit/>
+          </a:bodyPr>
+          <a:lstStyle/>
+          <a:p>
+            <a:pPr algn="l"/>
+            <a:r>
+              <a:rPr sz="1050" b="1" i="0">
+                <a:solidFill>
+                  <a:srgbClr val="1F9A8F"/>
+                </a:solidFill>
+                <a:latin typeface="Calibri"/>
+              </a:rPr>
+              <a:t>OUTPUT</a:t>
+            </a:r>
+          </a:p>
+        </p:txBody>
+      </p:sp>
+      <p:cxnSp>
+        <p:nvCxnSpPr>
+          <p:cNvPr id="7" name="Connector 6"/>
+          <p:cNvCxnSpPr/>
+          <p:nvPr/>
+        </p:nvCxnSpPr>
+        <p:spPr>
+          <a:xfrm>
+            <a:off x="768096" y="1929384"/>
+            <a:ext cx="64008" cy="768096"/>
+          </a:xfrm>
+          <a:prstGeom prst="line">
+            <a:avLst/>
+          </a:prstGeom>
+          <a:ln w="22225">
+            <a:solidFill>
+              <a:srgbClr val="DDE2E8"/>
+            </a:solidFill>
+          </a:ln>
+        </p:spPr>
+        <p:style>
+          <a:lnRef idx="2">
+            <a:schemeClr val="accent1"/>
+          </a:lnRef>
+          <a:fillRef idx="0">
+            <a:schemeClr val="accent1"/>
+          </a:fillRef>
+          <a:effectRef idx="1">
+            <a:schemeClr val="accent1"/>
+          </a:effectRef>
+          <a:fontRef idx="minor">
+            <a:schemeClr val="tx1"/>
+          </a:fontRef>
+        </p:style>
+      </p:cxnSp>
+      <p:cxnSp>
+        <p:nvCxnSpPr>
+          <p:cNvPr id="8" name="Connector 7"/>
+          <p:cNvCxnSpPr/>
+          <p:nvPr/>
+        </p:nvCxnSpPr>
+        <p:spPr>
+          <a:xfrm>
+            <a:off x="832104" y="2697480"/>
+            <a:ext cx="64008" cy="768096"/>
+          </a:xfrm>
+          <a:prstGeom prst="line">
+            <a:avLst/>
+          </a:prstGeom>
+          <a:ln w="22225">
+            <a:solidFill>
+              <a:srgbClr val="DDE2E8"/>
+            </a:solidFill>
+          </a:ln>
+        </p:spPr>
+        <p:style>
+          <a:lnRef idx="2">
+            <a:schemeClr val="accent1"/>
+          </a:lnRef>
+          <a:fillRef idx="0">
+            <a:schemeClr val="accent1"/>
+          </a:fillRef>
+          <a:effectRef idx="1">
+            <a:schemeClr val="accent1"/>
+          </a:effectRef>
+          <a:fontRef idx="minor">
+            <a:schemeClr val="tx1"/>
+          </a:fontRef>
+        </p:style>
+      </p:cxnSp>
+      <p:cxnSp>
+        <p:nvCxnSpPr>
+          <p:cNvPr id="9" name="Connector 8"/>
+          <p:cNvCxnSpPr/>
+          <p:nvPr/>
+        </p:nvCxnSpPr>
+        <p:spPr>
+          <a:xfrm>
+            <a:off x="896112" y="3465576"/>
+            <a:ext cx="64008" cy="768096"/>
+          </a:xfrm>
+          <a:prstGeom prst="line">
+            <a:avLst/>
+          </a:prstGeom>
+          <a:ln w="22225">
+            <a:solidFill>
+              <a:srgbClr val="DDE2E8"/>
+            </a:solidFill>
+          </a:ln>
+        </p:spPr>
+        <p:style>
+          <a:lnRef idx="2">
+            <a:schemeClr val="accent1"/>
+          </a:lnRef>
+          <a:fillRef idx="0">
+            <a:schemeClr val="accent1"/>
+          </a:fillRef>
+          <a:effectRef idx="1">
+            <a:schemeClr val="accent1"/>
+          </a:effectRef>
+          <a:fontRef idx="minor">
+            <a:schemeClr val="tx1"/>
+          </a:fontRef>
+        </p:style>
+      </p:cxnSp>
+      <p:cxnSp>
+        <p:nvCxnSpPr>
+          <p:cNvPr id="10" name="Connector 9"/>
+          <p:cNvCxnSpPr/>
+          <p:nvPr/>
+        </p:nvCxnSpPr>
+        <p:spPr>
+          <a:xfrm>
+            <a:off x="960120" y="4233672"/>
+            <a:ext cx="64008" cy="768096"/>
+          </a:xfrm>
+          <a:prstGeom prst="line">
+            <a:avLst/>
+          </a:prstGeom>
+          <a:ln w="22225">
+            <a:solidFill>
+              <a:srgbClr val="DDE2E8"/>
+            </a:solidFill>
+          </a:ln>
+        </p:spPr>
+        <p:style>
+          <a:lnRef idx="2">
+            <a:schemeClr val="accent1"/>
+          </a:lnRef>
+          <a:fillRef idx="0">
+            <a:schemeClr val="accent1"/>
+          </a:fillRef>
+          <a:effectRef idx="1">
+            <a:schemeClr val="accent1"/>
+          </a:effectRef>
+          <a:fontRef idx="minor">
+            <a:schemeClr val="tx1"/>
+          </a:fontRef>
+        </p:style>
+      </p:cxnSp>
+      <p:cxnSp>
+        <p:nvCxnSpPr>
+          <p:cNvPr id="11" name="Connector 10"/>
+          <p:cNvCxnSpPr/>
+          <p:nvPr/>
+        </p:nvCxnSpPr>
+        <p:spPr>
+          <a:xfrm>
+            <a:off x="1024128" y="5001768"/>
+            <a:ext cx="64008" cy="768096"/>
+          </a:xfrm>
+          <a:prstGeom prst="line">
+            <a:avLst/>
+          </a:prstGeom>
+          <a:ln w="22225">
+            <a:solidFill>
+              <a:srgbClr val="DDE2E8"/>
+            </a:solidFill>
+          </a:ln>
+        </p:spPr>
+        <p:style>
+          <a:lnRef idx="2">
+            <a:schemeClr val="accent1"/>
+          </a:lnRef>
+          <a:fillRef idx="0">
+            <a:schemeClr val="accent1"/>
+          </a:fillRef>
+          <a:effectRef idx="1">
+            <a:schemeClr val="accent1"/>
+          </a:effectRef>
+          <a:fontRef idx="minor">
+            <a:schemeClr val="tx1"/>
+          </a:fontRef>
+        </p:style>
+      </p:cxnSp>
+      <p:sp>
+        <p:nvSpPr>
+          <p:cNvPr id="12" name="Oval 11"/>
           <p:cNvSpPr/>
           <p:nvPr/>
         </p:nvSpPr>
         <p:spPr>
           <a:xfrm>
-            <a:off x="594360" y="1371600"/>
-            <a:ext cx="292608" cy="292608"/>
+            <a:off x="594360" y="1755648"/>
+            <a:ext cx="347472" cy="347472"/>
           </a:xfrm>
           <a:prstGeom prst="ellipse">
             <a:avLst/>
@@ -5082,7 +5327,7 @@
           <a:p>
             <a:pPr algn="ctr"/>
             <a:r>
-              <a:rPr sz="1400" b="1">
+              <a:rPr sz="1500" b="1">
                 <a:solidFill>
                   <a:srgbClr val="FFFFFF"/>
                 </a:solidFill>
@@ -5095,14 +5340,14 @@
       </p:sp>
       <p:sp>
         <p:nvSpPr>
-          <p:cNvPr id="6" name="TextBox 5"/>
+          <p:cNvPr id="13" name="TextBox 12"/>
           <p:cNvSpPr txBox="1"/>
           <p:nvPr/>
         </p:nvSpPr>
         <p:spPr>
           <a:xfrm>
-            <a:off x="978408" y="1353312"/>
-            <a:ext cx="4828032" cy="292608"/>
+            <a:off x="1051560" y="1764792"/>
+            <a:ext cx="2011680" cy="502920"/>
           </a:xfrm>
           <a:prstGeom prst="rect">
             <a:avLst/>
@@ -5130,14 +5375,14 @@
       </p:sp>
       <p:sp>
         <p:nvSpPr>
-          <p:cNvPr id="7" name="TextBox 6"/>
+          <p:cNvPr id="14" name="TextBox 13"/>
           <p:cNvSpPr txBox="1"/>
           <p:nvPr/>
         </p:nvSpPr>
         <p:spPr>
           <a:xfrm>
-            <a:off x="649224" y="1700784"/>
-            <a:ext cx="5157216" cy="182880"/>
+            <a:off x="3291840" y="1755648"/>
+            <a:ext cx="4846320" cy="768096"/>
           </a:xfrm>
           <a:prstGeom prst="rect">
             <a:avLst/>
@@ -5152,27 +5397,82 @@
           <a:p>
             <a:pPr algn="l"/>
             <a:r>
-              <a:rPr sz="950" b="1" i="0">
-                <a:solidFill>
-                  <a:srgbClr val="1F9A8F"/>
-                </a:solidFill>
-                <a:latin typeface="Calibri"/>
-              </a:rPr>
-              <a:t>APPROACH</a:t>
-            </a:r>
-          </a:p>
-        </p:txBody>
-      </p:sp>
-      <p:sp>
-        <p:nvSpPr>
-          <p:cNvPr id="8" name="Oval 7"/>
+              <a:rPr sz="1250" b="0" i="0">
+                <a:solidFill>
+                  <a:srgbClr val="202633"/>
+                </a:solidFill>
+                <a:latin typeface="Calibri"/>
+              </a:rPr>
+              <a:t>Loads 3.8 years of volume history plus the agent roster, then derives occupancy from the roster's REAL shrinkage %, not a flat assumption.</a:t>
+            </a:r>
+          </a:p>
+        </p:txBody>
+      </p:sp>
+      <p:sp>
+        <p:nvSpPr>
+          <p:cNvPr id="15" name="Rounded Rectangle 14"/>
           <p:cNvSpPr/>
           <p:nvPr/>
         </p:nvSpPr>
         <p:spPr>
           <a:xfrm>
-            <a:off x="667512" y="1956816"/>
-            <a:ext cx="82296" cy="82296"/>
+            <a:off x="8366760" y="1755648"/>
+            <a:ext cx="3227832" cy="676656"/>
+          </a:xfrm>
+          <a:prstGeom prst="roundRect">
+            <a:avLst/>
+          </a:prstGeom>
+          <a:solidFill>
+            <a:srgbClr val="F5F7FA"/>
+          </a:solidFill>
+          <a:ln>
+            <a:solidFill>
+              <a:srgbClr val="DDE2E8"/>
+            </a:solidFill>
+          </a:ln>
+          <a:effectLst/>
+        </p:spPr>
+        <p:style>
+          <a:lnRef idx="1">
+            <a:schemeClr val="accent1"/>
+          </a:lnRef>
+          <a:fillRef idx="3">
+            <a:schemeClr val="accent1"/>
+          </a:fillRef>
+          <a:effectRef idx="2">
+            <a:schemeClr val="accent1"/>
+          </a:effectRef>
+          <a:fontRef idx="minor">
+            <a:schemeClr val="lt1"/>
+          </a:fontRef>
+        </p:style>
+        <p:txBody>
+          <a:bodyPr rtlCol="0" anchor="ctr" wrap="square"/>
+          <a:lstStyle/>
+          <a:p>
+            <a:pPr algn="l"/>
+            <a:r>
+              <a:rPr sz="1200" b="1">
+                <a:solidFill>
+                  <a:srgbClr val="1B2A4A"/>
+                </a:solidFill>
+                <a:latin typeface="Calibri"/>
+              </a:rPr>
+              <a:t>A ready-to-model daily volume series + occupancy figure</a:t>
+            </a:r>
+          </a:p>
+        </p:txBody>
+      </p:sp>
+      <p:sp>
+        <p:nvSpPr>
+          <p:cNvPr id="16" name="Oval 15"/>
+          <p:cNvSpPr/>
+          <p:nvPr/>
+        </p:nvSpPr>
+        <p:spPr>
+          <a:xfrm>
+            <a:off x="658368" y="2523744"/>
+            <a:ext cx="347472" cy="347472"/>
           </a:xfrm>
           <a:prstGeom prst="ellipse">
             <a:avLst/>
@@ -5204,19 +5504,28 @@
           <a:lstStyle/>
           <a:p>
             <a:pPr algn="ctr"/>
-          </a:p>
-        </p:txBody>
-      </p:sp>
-      <p:sp>
-        <p:nvSpPr>
-          <p:cNvPr id="9" name="TextBox 8"/>
+            <a:r>
+              <a:rPr sz="1500" b="1">
+                <a:solidFill>
+                  <a:srgbClr val="FFFFFF"/>
+                </a:solidFill>
+                <a:latin typeface="Calibri"/>
+              </a:rPr>
+              <a:t>2</a:t>
+            </a:r>
+          </a:p>
+        </p:txBody>
+      </p:sp>
+      <p:sp>
+        <p:nvSpPr>
+          <p:cNvPr id="17" name="TextBox 16"/>
           <p:cNvSpPr txBox="1"/>
           <p:nvPr/>
         </p:nvSpPr>
         <p:spPr>
           <a:xfrm>
-            <a:off x="868680" y="1901952"/>
-            <a:ext cx="4937760" cy="256032"/>
+            <a:off x="1115568" y="2532888"/>
+            <a:ext cx="1947672" cy="502920"/>
           </a:xfrm>
           <a:prstGeom prst="rect">
             <a:avLst/>
@@ -5231,27 +5540,117 @@
           <a:p>
             <a:pPr algn="l"/>
             <a:r>
-              <a:rPr sz="1150" b="0" i="0">
+              <a:rPr sz="1450" b="1" i="0">
+                <a:solidFill>
+                  <a:srgbClr val="1B2A4A"/>
+                </a:solidFill>
+                <a:latin typeface="Calibri"/>
+              </a:rPr>
+              <a:t>Explore first</a:t>
+            </a:r>
+          </a:p>
+        </p:txBody>
+      </p:sp>
+      <p:sp>
+        <p:nvSpPr>
+          <p:cNvPr id="18" name="TextBox 17"/>
+          <p:cNvSpPr txBox="1"/>
+          <p:nvPr/>
+        </p:nvSpPr>
+        <p:spPr>
+          <a:xfrm>
+            <a:off x="3291840" y="2523744"/>
+            <a:ext cx="4846320" cy="768096"/>
+          </a:xfrm>
+          <a:prstGeom prst="rect">
+            <a:avLst/>
+          </a:prstGeom>
+          <a:noFill/>
+        </p:spPr>
+        <p:txBody>
+          <a:bodyPr wrap="square">
+            <a:spAutoFit/>
+          </a:bodyPr>
+          <a:lstStyle/>
+          <a:p>
+            <a:pPr algn="l"/>
+            <a:r>
+              <a:rPr sz="1250" b="0" i="0">
                 <a:solidFill>
                   <a:srgbClr val="202633"/>
                 </a:solidFill>
                 <a:latin typeface="Calibri"/>
               </a:rPr>
-              <a:t>Load 3.8 yrs volume history + the agent roster</a:t>
-            </a:r>
-          </a:p>
-        </p:txBody>
-      </p:sp>
-      <p:sp>
-        <p:nvSpPr>
-          <p:cNvPr id="10" name="Oval 9"/>
+              <a:t>Decomposes trend and weekly/yearly seasonality, and checks day-of-week patterns before touching any model.</a:t>
+            </a:r>
+          </a:p>
+        </p:txBody>
+      </p:sp>
+      <p:sp>
+        <p:nvSpPr>
+          <p:cNvPr id="19" name="Rounded Rectangle 18"/>
           <p:cNvSpPr/>
           <p:nvPr/>
         </p:nvSpPr>
         <p:spPr>
           <a:xfrm>
-            <a:off x="667512" y="2231136"/>
-            <a:ext cx="82296" cy="82296"/>
+            <a:off x="8366760" y="2523744"/>
+            <a:ext cx="3227832" cy="676656"/>
+          </a:xfrm>
+          <a:prstGeom prst="roundRect">
+            <a:avLst/>
+          </a:prstGeom>
+          <a:solidFill>
+            <a:srgbClr val="F5F7FA"/>
+          </a:solidFill>
+          <a:ln>
+            <a:solidFill>
+              <a:srgbClr val="DDE2E8"/>
+            </a:solidFill>
+          </a:ln>
+          <a:effectLst/>
+        </p:spPr>
+        <p:style>
+          <a:lnRef idx="1">
+            <a:schemeClr val="accent1"/>
+          </a:lnRef>
+          <a:fillRef idx="3">
+            <a:schemeClr val="accent1"/>
+          </a:fillRef>
+          <a:effectRef idx="2">
+            <a:schemeClr val="accent1"/>
+          </a:effectRef>
+          <a:fontRef idx="minor">
+            <a:schemeClr val="lt1"/>
+          </a:fontRef>
+        </p:style>
+        <p:txBody>
+          <a:bodyPr rtlCol="0" anchor="ctr" wrap="square"/>
+          <a:lstStyle/>
+          <a:p>
+            <a:pPr algn="l"/>
+            <a:r>
+              <a:rPr sz="1200" b="1">
+                <a:solidFill>
+                  <a:srgbClr val="1B2A4A"/>
+                </a:solidFill>
+                <a:latin typeface="Calibri"/>
+              </a:rPr>
+              <a:t>Confirms the series' real shape before trusting a model</a:t>
+            </a:r>
+          </a:p>
+        </p:txBody>
+      </p:sp>
+      <p:sp>
+        <p:nvSpPr>
+          <p:cNvPr id="20" name="Oval 19"/>
+          <p:cNvSpPr/>
+          <p:nvPr/>
+        </p:nvSpPr>
+        <p:spPr>
+          <a:xfrm>
+            <a:off x="722376" y="3291840"/>
+            <a:ext cx="347472" cy="347472"/>
           </a:xfrm>
           <a:prstGeom prst="ellipse">
             <a:avLst/>
@@ -5283,19 +5682,28 @@
           <a:lstStyle/>
           <a:p>
             <a:pPr algn="ctr"/>
-          </a:p>
-        </p:txBody>
-      </p:sp>
-      <p:sp>
-        <p:nvSpPr>
-          <p:cNvPr id="11" name="TextBox 10"/>
+            <a:r>
+              <a:rPr sz="1500" b="1">
+                <a:solidFill>
+                  <a:srgbClr val="FFFFFF"/>
+                </a:solidFill>
+                <a:latin typeface="Calibri"/>
+              </a:rPr>
+              <a:t>3</a:t>
+            </a:r>
+          </a:p>
+        </p:txBody>
+      </p:sp>
+      <p:sp>
+        <p:nvSpPr>
+          <p:cNvPr id="21" name="TextBox 20"/>
           <p:cNvSpPr txBox="1"/>
           <p:nvPr/>
         </p:nvSpPr>
         <p:spPr>
           <a:xfrm>
-            <a:off x="868680" y="2176272"/>
-            <a:ext cx="4937760" cy="256032"/>
+            <a:off x="1179576" y="3300984"/>
+            <a:ext cx="1883664" cy="502920"/>
           </a:xfrm>
           <a:prstGeom prst="rect">
             <a:avLst/>
@@ -5310,27 +5718,27 @@
           <a:p>
             <a:pPr algn="l"/>
             <a:r>
-              <a:rPr sz="1150" b="0" i="0">
-                <a:solidFill>
-                  <a:srgbClr val="202633"/>
-                </a:solidFill>
-                <a:latin typeface="Calibri"/>
-              </a:rPr>
-              <a:t>Derive occupancy from the roster's REAL shrinkage %</a:t>
-            </a:r>
-          </a:p>
-        </p:txBody>
-      </p:sp>
-      <p:sp>
-        <p:nvSpPr>
-          <p:cNvPr id="12" name="TextBox 11"/>
+              <a:rPr sz="1450" b="1" i="0">
+                <a:solidFill>
+                  <a:srgbClr val="1B2A4A"/>
+                </a:solidFill>
+                <a:latin typeface="Calibri"/>
+              </a:rPr>
+              <a:t>Benchmark honestly</a:t>
+            </a:r>
+          </a:p>
+        </p:txBody>
+      </p:sp>
+      <p:sp>
+        <p:nvSpPr>
+          <p:cNvPr id="22" name="TextBox 21"/>
           <p:cNvSpPr txBox="1"/>
           <p:nvPr/>
         </p:nvSpPr>
         <p:spPr>
           <a:xfrm>
-            <a:off x="649224" y="2468880"/>
-            <a:ext cx="5157216" cy="182880"/>
+            <a:off x="3291840" y="3291840"/>
+            <a:ext cx="4846320" cy="768096"/>
           </a:xfrm>
           <a:prstGeom prst="rect">
             <a:avLst/>
@@ -5345,36 +5753,38 @@
           <a:p>
             <a:pPr algn="l"/>
             <a:r>
-              <a:rPr sz="950" b="1" i="0">
-                <a:solidFill>
-                  <a:srgbClr val="1B2A4A"/>
-                </a:solidFill>
-                <a:latin typeface="Calibri"/>
-              </a:rPr>
-              <a:t>OUTPUT</a:t>
-            </a:r>
-          </a:p>
-        </p:txBody>
-      </p:sp>
-      <p:sp>
-        <p:nvSpPr>
-          <p:cNvPr id="13" name="Oval 12"/>
+              <a:rPr sz="1250" b="0" i="0">
+                <a:solidFill>
+                  <a:srgbClr val="202633"/>
+                </a:solidFill>
+                <a:latin typeface="Calibri"/>
+              </a:rPr>
+              <a:t>Benchmarks against a naive seasonal baseline (repeat last week), tested on a 60-day holdout.</a:t>
+            </a:r>
+          </a:p>
+        </p:txBody>
+      </p:sp>
+      <p:sp>
+        <p:nvSpPr>
+          <p:cNvPr id="23" name="Rounded Rectangle 22"/>
           <p:cNvSpPr/>
           <p:nvPr/>
         </p:nvSpPr>
         <p:spPr>
           <a:xfrm>
-            <a:off x="667512" y="2724912"/>
-            <a:ext cx="82296" cy="82296"/>
-          </a:xfrm>
-          <a:prstGeom prst="ellipse">
+            <a:off x="8366760" y="3291840"/>
+            <a:ext cx="3227832" cy="676656"/>
+          </a:xfrm>
+          <a:prstGeom prst="roundRect">
             <a:avLst/>
           </a:prstGeom>
           <a:solidFill>
-            <a:srgbClr val="1B2A4A"/>
+            <a:srgbClr val="F5F7FA"/>
           </a:solidFill>
           <a:ln>
-            <a:noFill/>
+            <a:solidFill>
+              <a:srgbClr val="DDE2E8"/>
+            </a:solidFill>
           </a:ln>
           <a:effectLst/>
         </p:spPr>
@@ -5393,58 +5803,32 @@
           </a:fontRef>
         </p:style>
         <p:txBody>
-          <a:bodyPr rtlCol="0" anchor="ctr"/>
-          <a:lstStyle/>
-          <a:p>
-            <a:pPr algn="ctr"/>
-          </a:p>
-        </p:txBody>
-      </p:sp>
-      <p:sp>
-        <p:nvSpPr>
-          <p:cNvPr id="14" name="TextBox 13"/>
-          <p:cNvSpPr txBox="1"/>
-          <p:nvPr/>
-        </p:nvSpPr>
-        <p:spPr>
-          <a:xfrm>
-            <a:off x="868680" y="2670048"/>
-            <a:ext cx="4937760" cy="256032"/>
-          </a:xfrm>
-          <a:prstGeom prst="rect">
-            <a:avLst/>
-          </a:prstGeom>
-          <a:noFill/>
-        </p:spPr>
-        <p:txBody>
-          <a:bodyPr wrap="square">
-            <a:spAutoFit/>
-          </a:bodyPr>
+          <a:bodyPr rtlCol="0" anchor="ctr" wrap="square"/>
           <a:lstStyle/>
           <a:p>
             <a:pPr algn="l"/>
             <a:r>
-              <a:rPr sz="1150" b="1" i="0">
-                <a:solidFill>
-                  <a:srgbClr val="202633"/>
-                </a:solidFill>
-                <a:latin typeface="Calibri"/>
-              </a:rPr>
-              <a:t>A ready-to-model daily volume series + occupancy figure</a:t>
-            </a:r>
-          </a:p>
-        </p:txBody>
-      </p:sp>
-      <p:sp>
-        <p:nvSpPr>
-          <p:cNvPr id="15" name="Oval 14"/>
+              <a:rPr sz="1200" b="1">
+                <a:solidFill>
+                  <a:srgbClr val="1B2A4A"/>
+                </a:solidFill>
+                <a:latin typeface="Calibri"/>
+              </a:rPr>
+              <a:t>A bar every candidate model must beat before it ships</a:t>
+            </a:r>
+          </a:p>
+        </p:txBody>
+      </p:sp>
+      <p:sp>
+        <p:nvSpPr>
+          <p:cNvPr id="24" name="Oval 23"/>
           <p:cNvSpPr/>
           <p:nvPr/>
         </p:nvSpPr>
         <p:spPr>
           <a:xfrm>
-            <a:off x="594360" y="2962656"/>
-            <a:ext cx="292608" cy="292608"/>
+            <a:off x="786384" y="4059936"/>
+            <a:ext cx="347472" cy="347472"/>
           </a:xfrm>
           <a:prstGeom prst="ellipse">
             <a:avLst/>
@@ -5477,27 +5861,27 @@
           <a:p>
             <a:pPr algn="ctr"/>
             <a:r>
-              <a:rPr sz="1400" b="1">
+              <a:rPr sz="1500" b="1">
                 <a:solidFill>
                   <a:srgbClr val="FFFFFF"/>
                 </a:solidFill>
                 <a:latin typeface="Calibri"/>
               </a:rPr>
-              <a:t>2</a:t>
-            </a:r>
-          </a:p>
-        </p:txBody>
-      </p:sp>
-      <p:sp>
-        <p:nvSpPr>
-          <p:cNvPr id="16" name="TextBox 15"/>
+              <a:t>4</a:t>
+            </a:r>
+          </a:p>
+        </p:txBody>
+      </p:sp>
+      <p:sp>
+        <p:nvSpPr>
+          <p:cNvPr id="25" name="TextBox 24"/>
           <p:cNvSpPr txBox="1"/>
           <p:nvPr/>
         </p:nvSpPr>
         <p:spPr>
           <a:xfrm>
-            <a:off x="978408" y="2944368"/>
-            <a:ext cx="4828032" cy="292608"/>
+            <a:off x="1243584" y="4069080"/>
+            <a:ext cx="1819656" cy="502920"/>
           </a:xfrm>
           <a:prstGeom prst="rect">
             <a:avLst/>
@@ -5518,21 +5902,21 @@
                 </a:solidFill>
                 <a:latin typeface="Calibri"/>
               </a:rPr>
-              <a:t>Explore first</a:t>
-            </a:r>
-          </a:p>
-        </p:txBody>
-      </p:sp>
-      <p:sp>
-        <p:nvSpPr>
-          <p:cNvPr id="17" name="TextBox 16"/>
+              <a:t>Holt-Winters</a:t>
+            </a:r>
+          </a:p>
+        </p:txBody>
+      </p:sp>
+      <p:sp>
+        <p:nvSpPr>
+          <p:cNvPr id="26" name="TextBox 25"/>
           <p:cNvSpPr txBox="1"/>
           <p:nvPr/>
         </p:nvSpPr>
         <p:spPr>
           <a:xfrm>
-            <a:off x="649224" y="3291840"/>
-            <a:ext cx="5157216" cy="182880"/>
+            <a:off x="3291840" y="4059936"/>
+            <a:ext cx="4846320" cy="768096"/>
           </a:xfrm>
           <a:prstGeom prst="rect">
             <a:avLst/>
@@ -5547,27 +5931,82 @@
           <a:p>
             <a:pPr algn="l"/>
             <a:r>
-              <a:rPr sz="950" b="1" i="0">
-                <a:solidFill>
-                  <a:srgbClr val="1F9A8F"/>
-                </a:solidFill>
-                <a:latin typeface="Calibri"/>
-              </a:rPr>
-              <a:t>APPROACH</a:t>
-            </a:r>
-          </a:p>
-        </p:txBody>
-      </p:sp>
-      <p:sp>
-        <p:nvSpPr>
-          <p:cNvPr id="18" name="Oval 17"/>
+              <a:rPr sz="1250" b="0" i="0">
+                <a:solidFill>
+                  <a:srgbClr val="202633"/>
+                </a:solidFill>
+                <a:latin typeface="Calibri"/>
+              </a:rPr>
+              <a:t>Models trend and weekly seasonality explicitly, then forecasts volume 42 days forward.</a:t>
+            </a:r>
+          </a:p>
+        </p:txBody>
+      </p:sp>
+      <p:sp>
+        <p:nvSpPr>
+          <p:cNvPr id="27" name="Rounded Rectangle 26"/>
           <p:cNvSpPr/>
           <p:nvPr/>
         </p:nvSpPr>
         <p:spPr>
           <a:xfrm>
-            <a:off x="667512" y="3547872"/>
-            <a:ext cx="82296" cy="82296"/>
+            <a:off x="8366760" y="4059936"/>
+            <a:ext cx="3227832" cy="676656"/>
+          </a:xfrm>
+          <a:prstGeom prst="roundRect">
+            <a:avLst/>
+          </a:prstGeom>
+          <a:solidFill>
+            <a:srgbClr val="F5F7FA"/>
+          </a:solidFill>
+          <a:ln>
+            <a:solidFill>
+              <a:srgbClr val="DDE2E8"/>
+            </a:solidFill>
+          </a:ln>
+          <a:effectLst/>
+        </p:spPr>
+        <p:style>
+          <a:lnRef idx="1">
+            <a:schemeClr val="accent1"/>
+          </a:lnRef>
+          <a:fillRef idx="3">
+            <a:schemeClr val="accent1"/>
+          </a:fillRef>
+          <a:effectRef idx="2">
+            <a:schemeClr val="accent1"/>
+          </a:effectRef>
+          <a:fontRef idx="minor">
+            <a:schemeClr val="lt1"/>
+          </a:fontRef>
+        </p:style>
+        <p:txBody>
+          <a:bodyPr rtlCol="0" anchor="ctr" wrap="square"/>
+          <a:lstStyle/>
+          <a:p>
+            <a:pPr algn="l"/>
+            <a:r>
+              <a:rPr sz="1200" b="1">
+                <a:solidFill>
+                  <a:srgbClr val="1B2A4A"/>
+                </a:solidFill>
+                <a:latin typeface="Calibri"/>
+              </a:rPr>
+              <a:t>18.8% MAPE — beats the 20.1% baseline</a:t>
+            </a:r>
+          </a:p>
+        </p:txBody>
+      </p:sp>
+      <p:sp>
+        <p:nvSpPr>
+          <p:cNvPr id="28" name="Oval 27"/>
+          <p:cNvSpPr/>
+          <p:nvPr/>
+        </p:nvSpPr>
+        <p:spPr>
+          <a:xfrm>
+            <a:off x="850392" y="4828032"/>
+            <a:ext cx="347472" cy="347472"/>
           </a:xfrm>
           <a:prstGeom prst="ellipse">
             <a:avLst/>
@@ -5599,19 +6038,28 @@
           <a:lstStyle/>
           <a:p>
             <a:pPr algn="ctr"/>
-          </a:p>
-        </p:txBody>
-      </p:sp>
-      <p:sp>
-        <p:nvSpPr>
-          <p:cNvPr id="19" name="TextBox 18"/>
+            <a:r>
+              <a:rPr sz="1500" b="1">
+                <a:solidFill>
+                  <a:srgbClr val="FFFFFF"/>
+                </a:solidFill>
+                <a:latin typeface="Calibri"/>
+              </a:rPr>
+              <a:t>5</a:t>
+            </a:r>
+          </a:p>
+        </p:txBody>
+      </p:sp>
+      <p:sp>
+        <p:nvSpPr>
+          <p:cNvPr id="29" name="TextBox 28"/>
           <p:cNvSpPr txBox="1"/>
           <p:nvPr/>
         </p:nvSpPr>
         <p:spPr>
           <a:xfrm>
-            <a:off x="868680" y="3493008"/>
-            <a:ext cx="4937760" cy="256032"/>
+            <a:off x="1307592" y="4837176"/>
+            <a:ext cx="1755648" cy="502920"/>
           </a:xfrm>
           <a:prstGeom prst="rect">
             <a:avLst/>
@@ -5626,27 +6074,117 @@
           <a:p>
             <a:pPr algn="l"/>
             <a:r>
-              <a:rPr sz="1150" b="0" i="0">
+              <a:rPr sz="1450" b="1" i="0">
+                <a:solidFill>
+                  <a:srgbClr val="1B2A4A"/>
+                </a:solidFill>
+                <a:latin typeface="Calibri"/>
+              </a:rPr>
+              <a:t>Volume -&gt; FTE</a:t>
+            </a:r>
+          </a:p>
+        </p:txBody>
+      </p:sp>
+      <p:sp>
+        <p:nvSpPr>
+          <p:cNvPr id="30" name="TextBox 29"/>
+          <p:cNvSpPr txBox="1"/>
+          <p:nvPr/>
+        </p:nvSpPr>
+        <p:spPr>
+          <a:xfrm>
+            <a:off x="3291840" y="4828032"/>
+            <a:ext cx="4846320" cy="768096"/>
+          </a:xfrm>
+          <a:prstGeom prst="rect">
+            <a:avLst/>
+          </a:prstGeom>
+          <a:noFill/>
+        </p:spPr>
+        <p:txBody>
+          <a:bodyPr wrap="square">
+            <a:spAutoFit/>
+          </a:bodyPr>
+          <a:lstStyle/>
+          <a:p>
+            <a:pPr algn="l"/>
+            <a:r>
+              <a:rPr sz="1250" b="0" i="0">
                 <a:solidFill>
                   <a:srgbClr val="202633"/>
                 </a:solidFill>
                 <a:latin typeface="Calibri"/>
               </a:rPr>
-              <a:t>Decompose trend + weekly/yearly seasonality</a:t>
-            </a:r>
-          </a:p>
-        </p:txBody>
-      </p:sp>
-      <p:sp>
-        <p:nvSpPr>
-          <p:cNvPr id="20" name="Oval 19"/>
+              <a:t>Converts volume to agent-hours via handle time, then compares required FTE to available FTE.</a:t>
+            </a:r>
+          </a:p>
+        </p:txBody>
+      </p:sp>
+      <p:sp>
+        <p:nvSpPr>
+          <p:cNvPr id="31" name="Rounded Rectangle 30"/>
           <p:cNvSpPr/>
           <p:nvPr/>
         </p:nvSpPr>
         <p:spPr>
           <a:xfrm>
-            <a:off x="667512" y="3822192"/>
-            <a:ext cx="82296" cy="82296"/>
+            <a:off x="8366760" y="4828032"/>
+            <a:ext cx="3227832" cy="676656"/>
+          </a:xfrm>
+          <a:prstGeom prst="roundRect">
+            <a:avLst/>
+          </a:prstGeom>
+          <a:solidFill>
+            <a:srgbClr val="F5F7FA"/>
+          </a:solidFill>
+          <a:ln>
+            <a:solidFill>
+              <a:srgbClr val="DDE2E8"/>
+            </a:solidFill>
+          </a:ln>
+          <a:effectLst/>
+        </p:spPr>
+        <p:style>
+          <a:lnRef idx="1">
+            <a:schemeClr val="accent1"/>
+          </a:lnRef>
+          <a:fillRef idx="3">
+            <a:schemeClr val="accent1"/>
+          </a:fillRef>
+          <a:effectRef idx="2">
+            <a:schemeClr val="accent1"/>
+          </a:effectRef>
+          <a:fontRef idx="minor">
+            <a:schemeClr val="lt1"/>
+          </a:fontRef>
+        </p:style>
+        <p:txBody>
+          <a:bodyPr rtlCol="0" anchor="ctr" wrap="square"/>
+          <a:lstStyle/>
+          <a:p>
+            <a:pPr algn="l"/>
+            <a:r>
+              <a:rPr sz="1200" b="1">
+                <a:solidFill>
+                  <a:srgbClr val="1B2A4A"/>
+                </a:solidFill>
+                <a:latin typeface="Calibri"/>
+              </a:rPr>
+              <a:t>The exact day(s) staffing runs short, and by how much</a:t>
+            </a:r>
+          </a:p>
+        </p:txBody>
+      </p:sp>
+      <p:sp>
+        <p:nvSpPr>
+          <p:cNvPr id="32" name="Oval 31"/>
+          <p:cNvSpPr/>
+          <p:nvPr/>
+        </p:nvSpPr>
+        <p:spPr>
+          <a:xfrm>
+            <a:off x="914400" y="5596128"/>
+            <a:ext cx="347472" cy="347472"/>
           </a:xfrm>
           <a:prstGeom prst="ellipse">
             <a:avLst/>
@@ -5678,19 +6216,28 @@
           <a:lstStyle/>
           <a:p>
             <a:pPr algn="ctr"/>
-          </a:p>
-        </p:txBody>
-      </p:sp>
-      <p:sp>
-        <p:nvSpPr>
-          <p:cNvPr id="21" name="TextBox 20"/>
+            <a:r>
+              <a:rPr sz="1500" b="1">
+                <a:solidFill>
+                  <a:srgbClr val="FFFFFF"/>
+                </a:solidFill>
+                <a:latin typeface="Calibri"/>
+              </a:rPr>
+              <a:t>6</a:t>
+            </a:r>
+          </a:p>
+        </p:txBody>
+      </p:sp>
+      <p:sp>
+        <p:nvSpPr>
+          <p:cNvPr id="33" name="TextBox 32"/>
           <p:cNvSpPr txBox="1"/>
           <p:nvPr/>
         </p:nvSpPr>
         <p:spPr>
           <a:xfrm>
-            <a:off x="868680" y="3767328"/>
-            <a:ext cx="4937760" cy="256032"/>
+            <a:off x="1371600" y="5605272"/>
+            <a:ext cx="1691640" cy="502920"/>
           </a:xfrm>
           <a:prstGeom prst="rect">
             <a:avLst/>
@@ -5705,27 +6252,27 @@
           <a:p>
             <a:pPr algn="l"/>
             <a:r>
-              <a:rPr sz="1150" b="0" i="0">
-                <a:solidFill>
-                  <a:srgbClr val="202633"/>
-                </a:solidFill>
-                <a:latin typeface="Calibri"/>
-              </a:rPr>
-              <a:t>Check day-of-week patterns before modeling</a:t>
-            </a:r>
-          </a:p>
-        </p:txBody>
-      </p:sp>
-      <p:sp>
-        <p:nvSpPr>
-          <p:cNvPr id="22" name="TextBox 21"/>
+              <a:rPr sz="1450" b="1" i="0">
+                <a:solidFill>
+                  <a:srgbClr val="1B2A4A"/>
+                </a:solidFill>
+                <a:latin typeface="Calibri"/>
+              </a:rPr>
+              <a:t>Publish</a:t>
+            </a:r>
+          </a:p>
+        </p:txBody>
+      </p:sp>
+      <p:sp>
+        <p:nvSpPr>
+          <p:cNvPr id="34" name="TextBox 33"/>
           <p:cNvSpPr txBox="1"/>
           <p:nvPr/>
         </p:nvSpPr>
         <p:spPr>
           <a:xfrm>
-            <a:off x="649224" y="4059936"/>
-            <a:ext cx="5157216" cy="182880"/>
+            <a:off x="3291840" y="5596128"/>
+            <a:ext cx="4846320" cy="768096"/>
           </a:xfrm>
           <a:prstGeom prst="rect">
             <a:avLst/>
@@ -5740,36 +6287,38 @@
           <a:p>
             <a:pPr algn="l"/>
             <a:r>
-              <a:rPr sz="950" b="1" i="0">
-                <a:solidFill>
-                  <a:srgbClr val="1B2A4A"/>
-                </a:solidFill>
-                <a:latin typeface="Calibri"/>
-              </a:rPr>
-              <a:t>OUTPUT</a:t>
-            </a:r>
-          </a:p>
-        </p:txBody>
-      </p:sp>
-      <p:sp>
-        <p:nvSpPr>
-          <p:cNvPr id="23" name="Oval 22"/>
+              <a:rPr sz="1250" b="0" i="0">
+                <a:solidFill>
+                  <a:srgbClr val="202633"/>
+                </a:solidFill>
+                <a:latin typeface="Calibri"/>
+              </a:rPr>
+              <a:t>One workbook is written (forecast + Analysis sheet), then the PPT deck and Power BI report are built on top.</a:t>
+            </a:r>
+          </a:p>
+        </p:txBody>
+      </p:sp>
+      <p:sp>
+        <p:nvSpPr>
+          <p:cNvPr id="35" name="Rounded Rectangle 34"/>
           <p:cNvSpPr/>
           <p:nvPr/>
         </p:nvSpPr>
         <p:spPr>
           <a:xfrm>
-            <a:off x="667512" y="4315968"/>
-            <a:ext cx="82296" cy="82296"/>
-          </a:xfrm>
-          <a:prstGeom prst="ellipse">
+            <a:off x="8366760" y="5596128"/>
+            <a:ext cx="3227832" cy="676656"/>
+          </a:xfrm>
+          <a:prstGeom prst="roundRect">
             <a:avLst/>
           </a:prstGeom>
           <a:solidFill>
-            <a:srgbClr val="1B2A4A"/>
+            <a:srgbClr val="F5F7FA"/>
           </a:solidFill>
           <a:ln>
-            <a:noFill/>
+            <a:solidFill>
+              <a:srgbClr val="DDE2E8"/>
+            </a:solidFill>
           </a:ln>
           <a:effectLst/>
         </p:spPr>
@@ -5788,23 +6337,32 @@
           </a:fontRef>
         </p:style>
         <p:txBody>
-          <a:bodyPr rtlCol="0" anchor="ctr"/>
-          <a:lstStyle/>
-          <a:p>
-            <a:pPr algn="ctr"/>
-          </a:p>
-        </p:txBody>
-      </p:sp>
-      <p:sp>
-        <p:nvSpPr>
-          <p:cNvPr id="24" name="TextBox 23"/>
+          <a:bodyPr rtlCol="0" anchor="ctr" wrap="square"/>
+          <a:lstStyle/>
+          <a:p>
+            <a:pPr algn="l"/>
+            <a:r>
+              <a:rPr sz="1200" b="1">
+                <a:solidFill>
+                  <a:srgbClr val="1B2A4A"/>
+                </a:solidFill>
+                <a:latin typeface="Calibri"/>
+              </a:rPr>
+              <a:t>A client-ready package, numbers always in sync</a:t>
+            </a:r>
+          </a:p>
+        </p:txBody>
+      </p:sp>
+      <p:sp>
+        <p:nvSpPr>
+          <p:cNvPr id="36" name="TextBox 35"/>
           <p:cNvSpPr txBox="1"/>
           <p:nvPr/>
         </p:nvSpPr>
         <p:spPr>
           <a:xfrm>
-            <a:off x="868680" y="4261104"/>
-            <a:ext cx="4937760" cy="256032"/>
+            <a:off x="594360" y="6473952"/>
+            <a:ext cx="9144000" cy="320040"/>
           </a:xfrm>
           <a:prstGeom prst="rect">
             <a:avLst/>
@@ -5819,496 +6377,13 @@
           <a:p>
             <a:pPr algn="l"/>
             <a:r>
-              <a:rPr sz="1150" b="1" i="0">
-                <a:solidFill>
-                  <a:srgbClr val="202633"/>
-                </a:solidFill>
-                <a:latin typeface="Calibri"/>
-              </a:rPr>
-              <a:t>Confirms the series' real shape before trusting a model</a:t>
-            </a:r>
-          </a:p>
-        </p:txBody>
-      </p:sp>
-      <p:sp>
-        <p:nvSpPr>
-          <p:cNvPr id="25" name="Oval 24"/>
-          <p:cNvSpPr/>
-          <p:nvPr/>
-        </p:nvSpPr>
-        <p:spPr>
-          <a:xfrm>
-            <a:off x="594360" y="4553712"/>
-            <a:ext cx="292608" cy="292608"/>
-          </a:xfrm>
-          <a:prstGeom prst="ellipse">
-            <a:avLst/>
-          </a:prstGeom>
-          <a:solidFill>
-            <a:srgbClr val="2EC4B6"/>
-          </a:solidFill>
-          <a:ln>
-            <a:noFill/>
-          </a:ln>
-          <a:effectLst/>
-        </p:spPr>
-        <p:style>
-          <a:lnRef idx="1">
-            <a:schemeClr val="accent1"/>
-          </a:lnRef>
-          <a:fillRef idx="3">
-            <a:schemeClr val="accent1"/>
-          </a:fillRef>
-          <a:effectRef idx="2">
-            <a:schemeClr val="accent1"/>
-          </a:effectRef>
-          <a:fontRef idx="minor">
-            <a:schemeClr val="lt1"/>
-          </a:fontRef>
-        </p:style>
-        <p:txBody>
-          <a:bodyPr rtlCol="0" anchor="ctr"/>
-          <a:lstStyle/>
-          <a:p>
-            <a:pPr algn="ctr"/>
-            <a:r>
-              <a:rPr sz="1400" b="1">
-                <a:solidFill>
-                  <a:srgbClr val="FFFFFF"/>
-                </a:solidFill>
-                <a:latin typeface="Calibri"/>
-              </a:rPr>
-              <a:t>3</a:t>
-            </a:r>
-          </a:p>
-        </p:txBody>
-      </p:sp>
-      <p:sp>
-        <p:nvSpPr>
-          <p:cNvPr id="26" name="TextBox 25"/>
-          <p:cNvSpPr txBox="1"/>
-          <p:nvPr/>
-        </p:nvSpPr>
-        <p:spPr>
-          <a:xfrm>
-            <a:off x="978408" y="4535424"/>
-            <a:ext cx="4828032" cy="292608"/>
-          </a:xfrm>
-          <a:prstGeom prst="rect">
-            <a:avLst/>
-          </a:prstGeom>
-          <a:noFill/>
-        </p:spPr>
-        <p:txBody>
-          <a:bodyPr wrap="square">
-            <a:spAutoFit/>
-          </a:bodyPr>
-          <a:lstStyle/>
-          <a:p>
-            <a:pPr algn="l"/>
-            <a:r>
-              <a:rPr sz="1450" b="1" i="0">
-                <a:solidFill>
-                  <a:srgbClr val="1B2A4A"/>
-                </a:solidFill>
-                <a:latin typeface="Calibri"/>
-              </a:rPr>
-              <a:t>Benchmark honestly</a:t>
-            </a:r>
-          </a:p>
-        </p:txBody>
-      </p:sp>
-      <p:sp>
-        <p:nvSpPr>
-          <p:cNvPr id="27" name="TextBox 26"/>
-          <p:cNvSpPr txBox="1"/>
-          <p:nvPr/>
-        </p:nvSpPr>
-        <p:spPr>
-          <a:xfrm>
-            <a:off x="649224" y="4882896"/>
-            <a:ext cx="5157216" cy="182880"/>
-          </a:xfrm>
-          <a:prstGeom prst="rect">
-            <a:avLst/>
-          </a:prstGeom>
-          <a:noFill/>
-        </p:spPr>
-        <p:txBody>
-          <a:bodyPr wrap="square">
-            <a:spAutoFit/>
-          </a:bodyPr>
-          <a:lstStyle/>
-          <a:p>
-            <a:pPr algn="l"/>
-            <a:r>
-              <a:rPr sz="950" b="1" i="0">
-                <a:solidFill>
-                  <a:srgbClr val="1F9A8F"/>
-                </a:solidFill>
-                <a:latin typeface="Calibri"/>
-              </a:rPr>
-              <a:t>APPROACH</a:t>
-            </a:r>
-          </a:p>
-        </p:txBody>
-      </p:sp>
-      <p:sp>
-        <p:nvSpPr>
-          <p:cNvPr id="28" name="Oval 27"/>
-          <p:cNvSpPr/>
-          <p:nvPr/>
-        </p:nvSpPr>
-        <p:spPr>
-          <a:xfrm>
-            <a:off x="667512" y="5138928"/>
-            <a:ext cx="82296" cy="82296"/>
-          </a:xfrm>
-          <a:prstGeom prst="ellipse">
-            <a:avLst/>
-          </a:prstGeom>
-          <a:solidFill>
-            <a:srgbClr val="2EC4B6"/>
-          </a:solidFill>
-          <a:ln>
-            <a:noFill/>
-          </a:ln>
-          <a:effectLst/>
-        </p:spPr>
-        <p:style>
-          <a:lnRef idx="1">
-            <a:schemeClr val="accent1"/>
-          </a:lnRef>
-          <a:fillRef idx="3">
-            <a:schemeClr val="accent1"/>
-          </a:fillRef>
-          <a:effectRef idx="2">
-            <a:schemeClr val="accent1"/>
-          </a:effectRef>
-          <a:fontRef idx="minor">
-            <a:schemeClr val="lt1"/>
-          </a:fontRef>
-        </p:style>
-        <p:txBody>
-          <a:bodyPr rtlCol="0" anchor="ctr"/>
-          <a:lstStyle/>
-          <a:p>
-            <a:pPr algn="ctr"/>
-          </a:p>
-        </p:txBody>
-      </p:sp>
-      <p:sp>
-        <p:nvSpPr>
-          <p:cNvPr id="29" name="TextBox 28"/>
-          <p:cNvSpPr txBox="1"/>
-          <p:nvPr/>
-        </p:nvSpPr>
-        <p:spPr>
-          <a:xfrm>
-            <a:off x="868680" y="5084064"/>
-            <a:ext cx="4937760" cy="256032"/>
-          </a:xfrm>
-          <a:prstGeom prst="rect">
-            <a:avLst/>
-          </a:prstGeom>
-          <a:noFill/>
-        </p:spPr>
-        <p:txBody>
-          <a:bodyPr wrap="square">
-            <a:spAutoFit/>
-          </a:bodyPr>
-          <a:lstStyle/>
-          <a:p>
-            <a:pPr algn="l"/>
-            <a:r>
-              <a:rPr sz="1150" b="0" i="0">
-                <a:solidFill>
-                  <a:srgbClr val="202633"/>
-                </a:solidFill>
-                <a:latin typeface="Calibri"/>
-              </a:rPr>
-              <a:t>Naive seasonal baseline: repeat last week</a:t>
-            </a:r>
-          </a:p>
-        </p:txBody>
-      </p:sp>
-      <p:sp>
-        <p:nvSpPr>
-          <p:cNvPr id="30" name="Oval 29"/>
-          <p:cNvSpPr/>
-          <p:nvPr/>
-        </p:nvSpPr>
-        <p:spPr>
-          <a:xfrm>
-            <a:off x="667512" y="5413248"/>
-            <a:ext cx="82296" cy="82296"/>
-          </a:xfrm>
-          <a:prstGeom prst="ellipse">
-            <a:avLst/>
-          </a:prstGeom>
-          <a:solidFill>
-            <a:srgbClr val="2EC4B6"/>
-          </a:solidFill>
-          <a:ln>
-            <a:noFill/>
-          </a:ln>
-          <a:effectLst/>
-        </p:spPr>
-        <p:style>
-          <a:lnRef idx="1">
-            <a:schemeClr val="accent1"/>
-          </a:lnRef>
-          <a:fillRef idx="3">
-            <a:schemeClr val="accent1"/>
-          </a:fillRef>
-          <a:effectRef idx="2">
-            <a:schemeClr val="accent1"/>
-          </a:effectRef>
-          <a:fontRef idx="minor">
-            <a:schemeClr val="lt1"/>
-          </a:fontRef>
-        </p:style>
-        <p:txBody>
-          <a:bodyPr rtlCol="0" anchor="ctr"/>
-          <a:lstStyle/>
-          <a:p>
-            <a:pPr algn="ctr"/>
-          </a:p>
-        </p:txBody>
-      </p:sp>
-      <p:sp>
-        <p:nvSpPr>
-          <p:cNvPr id="31" name="TextBox 30"/>
-          <p:cNvSpPr txBox="1"/>
-          <p:nvPr/>
-        </p:nvSpPr>
-        <p:spPr>
-          <a:xfrm>
-            <a:off x="868680" y="5358384"/>
-            <a:ext cx="4937760" cy="256032"/>
-          </a:xfrm>
-          <a:prstGeom prst="rect">
-            <a:avLst/>
-          </a:prstGeom>
-          <a:noFill/>
-        </p:spPr>
-        <p:txBody>
-          <a:bodyPr wrap="square">
-            <a:spAutoFit/>
-          </a:bodyPr>
-          <a:lstStyle/>
-          <a:p>
-            <a:pPr algn="l"/>
-            <a:r>
-              <a:rPr sz="1150" b="0" i="0">
-                <a:solidFill>
-                  <a:srgbClr val="202633"/>
-                </a:solidFill>
-                <a:latin typeface="Calibri"/>
-              </a:rPr>
-              <a:t>Test every candidate on a 60-day holdout</a:t>
-            </a:r>
-          </a:p>
-        </p:txBody>
-      </p:sp>
-      <p:sp>
-        <p:nvSpPr>
-          <p:cNvPr id="32" name="TextBox 31"/>
-          <p:cNvSpPr txBox="1"/>
-          <p:nvPr/>
-        </p:nvSpPr>
-        <p:spPr>
-          <a:xfrm>
-            <a:off x="649224" y="5650992"/>
-            <a:ext cx="5157216" cy="182880"/>
-          </a:xfrm>
-          <a:prstGeom prst="rect">
-            <a:avLst/>
-          </a:prstGeom>
-          <a:noFill/>
-        </p:spPr>
-        <p:txBody>
-          <a:bodyPr wrap="square">
-            <a:spAutoFit/>
-          </a:bodyPr>
-          <a:lstStyle/>
-          <a:p>
-            <a:pPr algn="l"/>
-            <a:r>
-              <a:rPr sz="950" b="1" i="0">
-                <a:solidFill>
-                  <a:srgbClr val="1B2A4A"/>
-                </a:solidFill>
-                <a:latin typeface="Calibri"/>
-              </a:rPr>
-              <a:t>OUTPUT</a:t>
-            </a:r>
-          </a:p>
-        </p:txBody>
-      </p:sp>
-      <p:sp>
-        <p:nvSpPr>
-          <p:cNvPr id="33" name="Oval 32"/>
-          <p:cNvSpPr/>
-          <p:nvPr/>
-        </p:nvSpPr>
-        <p:spPr>
-          <a:xfrm>
-            <a:off x="667512" y="5907024"/>
-            <a:ext cx="82296" cy="82296"/>
-          </a:xfrm>
-          <a:prstGeom prst="ellipse">
-            <a:avLst/>
-          </a:prstGeom>
-          <a:solidFill>
-            <a:srgbClr val="1B2A4A"/>
-          </a:solidFill>
-          <a:ln>
-            <a:noFill/>
-          </a:ln>
-          <a:effectLst/>
-        </p:spPr>
-        <p:style>
-          <a:lnRef idx="1">
-            <a:schemeClr val="accent1"/>
-          </a:lnRef>
-          <a:fillRef idx="3">
-            <a:schemeClr val="accent1"/>
-          </a:fillRef>
-          <a:effectRef idx="2">
-            <a:schemeClr val="accent1"/>
-          </a:effectRef>
-          <a:fontRef idx="minor">
-            <a:schemeClr val="lt1"/>
-          </a:fontRef>
-        </p:style>
-        <p:txBody>
-          <a:bodyPr rtlCol="0" anchor="ctr"/>
-          <a:lstStyle/>
-          <a:p>
-            <a:pPr algn="ctr"/>
-          </a:p>
-        </p:txBody>
-      </p:sp>
-      <p:sp>
-        <p:nvSpPr>
-          <p:cNvPr id="34" name="TextBox 33"/>
-          <p:cNvSpPr txBox="1"/>
-          <p:nvPr/>
-        </p:nvSpPr>
-        <p:spPr>
-          <a:xfrm>
-            <a:off x="868680" y="5852160"/>
-            <a:ext cx="4937760" cy="256032"/>
-          </a:xfrm>
-          <a:prstGeom prst="rect">
-            <a:avLst/>
-          </a:prstGeom>
-          <a:noFill/>
-        </p:spPr>
-        <p:txBody>
-          <a:bodyPr wrap="square">
-            <a:spAutoFit/>
-          </a:bodyPr>
-          <a:lstStyle/>
-          <a:p>
-            <a:pPr algn="l"/>
-            <a:r>
-              <a:rPr sz="1150" b="1" i="0">
-                <a:solidFill>
-                  <a:srgbClr val="202633"/>
-                </a:solidFill>
-                <a:latin typeface="Calibri"/>
-              </a:rPr>
-              <a:t>A bar every model must beat before it ships</a:t>
-            </a:r>
-          </a:p>
-        </p:txBody>
-      </p:sp>
-      <p:sp>
-        <p:nvSpPr>
-          <p:cNvPr id="35" name="Oval 34"/>
-          <p:cNvSpPr/>
-          <p:nvPr/>
-        </p:nvSpPr>
-        <p:spPr>
-          <a:xfrm>
-            <a:off x="6172200" y="1371600"/>
-            <a:ext cx="292608" cy="292608"/>
-          </a:xfrm>
-          <a:prstGeom prst="ellipse">
-            <a:avLst/>
-          </a:prstGeom>
-          <a:solidFill>
-            <a:srgbClr val="2EC4B6"/>
-          </a:solidFill>
-          <a:ln>
-            <a:noFill/>
-          </a:ln>
-          <a:effectLst/>
-        </p:spPr>
-        <p:style>
-          <a:lnRef idx="1">
-            <a:schemeClr val="accent1"/>
-          </a:lnRef>
-          <a:fillRef idx="3">
-            <a:schemeClr val="accent1"/>
-          </a:fillRef>
-          <a:effectRef idx="2">
-            <a:schemeClr val="accent1"/>
-          </a:effectRef>
-          <a:fontRef idx="minor">
-            <a:schemeClr val="lt1"/>
-          </a:fontRef>
-        </p:style>
-        <p:txBody>
-          <a:bodyPr rtlCol="0" anchor="ctr"/>
-          <a:lstStyle/>
-          <a:p>
-            <a:pPr algn="ctr"/>
-            <a:r>
-              <a:rPr sz="1400" b="1">
-                <a:solidFill>
-                  <a:srgbClr val="FFFFFF"/>
-                </a:solidFill>
-                <a:latin typeface="Calibri"/>
-              </a:rPr>
-              <a:t>4</a:t>
-            </a:r>
-          </a:p>
-        </p:txBody>
-      </p:sp>
-      <p:sp>
-        <p:nvSpPr>
-          <p:cNvPr id="36" name="TextBox 35"/>
-          <p:cNvSpPr txBox="1"/>
-          <p:nvPr/>
-        </p:nvSpPr>
-        <p:spPr>
-          <a:xfrm>
-            <a:off x="6556248" y="1353312"/>
-            <a:ext cx="4828032" cy="292608"/>
-          </a:xfrm>
-          <a:prstGeom prst="rect">
-            <a:avLst/>
-          </a:prstGeom>
-          <a:noFill/>
-        </p:spPr>
-        <p:txBody>
-          <a:bodyPr wrap="square">
-            <a:spAutoFit/>
-          </a:bodyPr>
-          <a:lstStyle/>
-          <a:p>
-            <a:pPr algn="l"/>
-            <a:r>
-              <a:rPr sz="1450" b="1" i="0">
-                <a:solidFill>
-                  <a:srgbClr val="1B2A4A"/>
-                </a:solidFill>
-                <a:latin typeface="Calibri"/>
-              </a:rPr>
-              <a:t>Holt-Winters</a:t>
+              <a:rPr sz="1000" b="0" i="0">
+                <a:solidFill>
+                  <a:srgbClr val="5A6B7D"/>
+                </a:solidFill>
+                <a:latin typeface="Calibri"/>
+              </a:rPr>
+              <a:t>Demand Forecasting &amp; Staffing</a:t>
             </a:r>
           </a:p>
         </p:txBody>
@@ -6316,1138 +6391,6 @@
       <p:sp>
         <p:nvSpPr>
           <p:cNvPr id="37" name="TextBox 36"/>
-          <p:cNvSpPr txBox="1"/>
-          <p:nvPr/>
-        </p:nvSpPr>
-        <p:spPr>
-          <a:xfrm>
-            <a:off x="6227064" y="1700784"/>
-            <a:ext cx="5157216" cy="182880"/>
-          </a:xfrm>
-          <a:prstGeom prst="rect">
-            <a:avLst/>
-          </a:prstGeom>
-          <a:noFill/>
-        </p:spPr>
-        <p:txBody>
-          <a:bodyPr wrap="square">
-            <a:spAutoFit/>
-          </a:bodyPr>
-          <a:lstStyle/>
-          <a:p>
-            <a:pPr algn="l"/>
-            <a:r>
-              <a:rPr sz="950" b="1" i="0">
-                <a:solidFill>
-                  <a:srgbClr val="1F9A8F"/>
-                </a:solidFill>
-                <a:latin typeface="Calibri"/>
-              </a:rPr>
-              <a:t>APPROACH</a:t>
-            </a:r>
-          </a:p>
-        </p:txBody>
-      </p:sp>
-      <p:sp>
-        <p:nvSpPr>
-          <p:cNvPr id="38" name="Oval 37"/>
-          <p:cNvSpPr/>
-          <p:nvPr/>
-        </p:nvSpPr>
-        <p:spPr>
-          <a:xfrm>
-            <a:off x="6245352" y="1956816"/>
-            <a:ext cx="82296" cy="82296"/>
-          </a:xfrm>
-          <a:prstGeom prst="ellipse">
-            <a:avLst/>
-          </a:prstGeom>
-          <a:solidFill>
-            <a:srgbClr val="2EC4B6"/>
-          </a:solidFill>
-          <a:ln>
-            <a:noFill/>
-          </a:ln>
-          <a:effectLst/>
-        </p:spPr>
-        <p:style>
-          <a:lnRef idx="1">
-            <a:schemeClr val="accent1"/>
-          </a:lnRef>
-          <a:fillRef idx="3">
-            <a:schemeClr val="accent1"/>
-          </a:fillRef>
-          <a:effectRef idx="2">
-            <a:schemeClr val="accent1"/>
-          </a:effectRef>
-          <a:fontRef idx="minor">
-            <a:schemeClr val="lt1"/>
-          </a:fontRef>
-        </p:style>
-        <p:txBody>
-          <a:bodyPr rtlCol="0" anchor="ctr"/>
-          <a:lstStyle/>
-          <a:p>
-            <a:pPr algn="ctr"/>
-          </a:p>
-        </p:txBody>
-      </p:sp>
-      <p:sp>
-        <p:nvSpPr>
-          <p:cNvPr id="39" name="TextBox 38"/>
-          <p:cNvSpPr txBox="1"/>
-          <p:nvPr/>
-        </p:nvSpPr>
-        <p:spPr>
-          <a:xfrm>
-            <a:off x="6446520" y="1901952"/>
-            <a:ext cx="4937760" cy="256032"/>
-          </a:xfrm>
-          <a:prstGeom prst="rect">
-            <a:avLst/>
-          </a:prstGeom>
-          <a:noFill/>
-        </p:spPr>
-        <p:txBody>
-          <a:bodyPr wrap="square">
-            <a:spAutoFit/>
-          </a:bodyPr>
-          <a:lstStyle/>
-          <a:p>
-            <a:pPr algn="l"/>
-            <a:r>
-              <a:rPr sz="1150" b="0" i="0">
-                <a:solidFill>
-                  <a:srgbClr val="202633"/>
-                </a:solidFill>
-                <a:latin typeface="Calibri"/>
-              </a:rPr>
-              <a:t>Model trend + weekly seasonality explicitly</a:t>
-            </a:r>
-          </a:p>
-        </p:txBody>
-      </p:sp>
-      <p:sp>
-        <p:nvSpPr>
-          <p:cNvPr id="40" name="Oval 39"/>
-          <p:cNvSpPr/>
-          <p:nvPr/>
-        </p:nvSpPr>
-        <p:spPr>
-          <a:xfrm>
-            <a:off x="6245352" y="2231136"/>
-            <a:ext cx="82296" cy="82296"/>
-          </a:xfrm>
-          <a:prstGeom prst="ellipse">
-            <a:avLst/>
-          </a:prstGeom>
-          <a:solidFill>
-            <a:srgbClr val="2EC4B6"/>
-          </a:solidFill>
-          <a:ln>
-            <a:noFill/>
-          </a:ln>
-          <a:effectLst/>
-        </p:spPr>
-        <p:style>
-          <a:lnRef idx="1">
-            <a:schemeClr val="accent1"/>
-          </a:lnRef>
-          <a:fillRef idx="3">
-            <a:schemeClr val="accent1"/>
-          </a:fillRef>
-          <a:effectRef idx="2">
-            <a:schemeClr val="accent1"/>
-          </a:effectRef>
-          <a:fontRef idx="minor">
-            <a:schemeClr val="lt1"/>
-          </a:fontRef>
-        </p:style>
-        <p:txBody>
-          <a:bodyPr rtlCol="0" anchor="ctr"/>
-          <a:lstStyle/>
-          <a:p>
-            <a:pPr algn="ctr"/>
-          </a:p>
-        </p:txBody>
-      </p:sp>
-      <p:sp>
-        <p:nvSpPr>
-          <p:cNvPr id="41" name="TextBox 40"/>
-          <p:cNvSpPr txBox="1"/>
-          <p:nvPr/>
-        </p:nvSpPr>
-        <p:spPr>
-          <a:xfrm>
-            <a:off x="6446520" y="2176272"/>
-            <a:ext cx="4937760" cy="256032"/>
-          </a:xfrm>
-          <a:prstGeom prst="rect">
-            <a:avLst/>
-          </a:prstGeom>
-          <a:noFill/>
-        </p:spPr>
-        <p:txBody>
-          <a:bodyPr wrap="square">
-            <a:spAutoFit/>
-          </a:bodyPr>
-          <a:lstStyle/>
-          <a:p>
-            <a:pPr algn="l"/>
-            <a:r>
-              <a:rPr sz="1150" b="0" i="0">
-                <a:solidFill>
-                  <a:srgbClr val="202633"/>
-                </a:solidFill>
-                <a:latin typeface="Calibri"/>
-              </a:rPr>
-              <a:t>Forecast volume 42 days forward</a:t>
-            </a:r>
-          </a:p>
-        </p:txBody>
-      </p:sp>
-      <p:sp>
-        <p:nvSpPr>
-          <p:cNvPr id="42" name="TextBox 41"/>
-          <p:cNvSpPr txBox="1"/>
-          <p:nvPr/>
-        </p:nvSpPr>
-        <p:spPr>
-          <a:xfrm>
-            <a:off x="6227064" y="2468880"/>
-            <a:ext cx="5157216" cy="182880"/>
-          </a:xfrm>
-          <a:prstGeom prst="rect">
-            <a:avLst/>
-          </a:prstGeom>
-          <a:noFill/>
-        </p:spPr>
-        <p:txBody>
-          <a:bodyPr wrap="square">
-            <a:spAutoFit/>
-          </a:bodyPr>
-          <a:lstStyle/>
-          <a:p>
-            <a:pPr algn="l"/>
-            <a:r>
-              <a:rPr sz="950" b="1" i="0">
-                <a:solidFill>
-                  <a:srgbClr val="1B2A4A"/>
-                </a:solidFill>
-                <a:latin typeface="Calibri"/>
-              </a:rPr>
-              <a:t>OUTPUT</a:t>
-            </a:r>
-          </a:p>
-        </p:txBody>
-      </p:sp>
-      <p:sp>
-        <p:nvSpPr>
-          <p:cNvPr id="43" name="Oval 42"/>
-          <p:cNvSpPr/>
-          <p:nvPr/>
-        </p:nvSpPr>
-        <p:spPr>
-          <a:xfrm>
-            <a:off x="6245352" y="2724912"/>
-            <a:ext cx="82296" cy="82296"/>
-          </a:xfrm>
-          <a:prstGeom prst="ellipse">
-            <a:avLst/>
-          </a:prstGeom>
-          <a:solidFill>
-            <a:srgbClr val="1B2A4A"/>
-          </a:solidFill>
-          <a:ln>
-            <a:noFill/>
-          </a:ln>
-          <a:effectLst/>
-        </p:spPr>
-        <p:style>
-          <a:lnRef idx="1">
-            <a:schemeClr val="accent1"/>
-          </a:lnRef>
-          <a:fillRef idx="3">
-            <a:schemeClr val="accent1"/>
-          </a:fillRef>
-          <a:effectRef idx="2">
-            <a:schemeClr val="accent1"/>
-          </a:effectRef>
-          <a:fontRef idx="minor">
-            <a:schemeClr val="lt1"/>
-          </a:fontRef>
-        </p:style>
-        <p:txBody>
-          <a:bodyPr rtlCol="0" anchor="ctr"/>
-          <a:lstStyle/>
-          <a:p>
-            <a:pPr algn="ctr"/>
-          </a:p>
-        </p:txBody>
-      </p:sp>
-      <p:sp>
-        <p:nvSpPr>
-          <p:cNvPr id="44" name="TextBox 43"/>
-          <p:cNvSpPr txBox="1"/>
-          <p:nvPr/>
-        </p:nvSpPr>
-        <p:spPr>
-          <a:xfrm>
-            <a:off x="6446520" y="2670048"/>
-            <a:ext cx="4937760" cy="256032"/>
-          </a:xfrm>
-          <a:prstGeom prst="rect">
-            <a:avLst/>
-          </a:prstGeom>
-          <a:noFill/>
-        </p:spPr>
-        <p:txBody>
-          <a:bodyPr wrap="square">
-            <a:spAutoFit/>
-          </a:bodyPr>
-          <a:lstStyle/>
-          <a:p>
-            <a:pPr algn="l"/>
-            <a:r>
-              <a:rPr sz="1150" b="1" i="0">
-                <a:solidFill>
-                  <a:srgbClr val="202633"/>
-                </a:solidFill>
-                <a:latin typeface="Calibri"/>
-              </a:rPr>
-              <a:t>18.8% MAPE — beats the 20.1% baseline</a:t>
-            </a:r>
-          </a:p>
-        </p:txBody>
-      </p:sp>
-      <p:sp>
-        <p:nvSpPr>
-          <p:cNvPr id="45" name="Oval 44"/>
-          <p:cNvSpPr/>
-          <p:nvPr/>
-        </p:nvSpPr>
-        <p:spPr>
-          <a:xfrm>
-            <a:off x="6172200" y="2962656"/>
-            <a:ext cx="292608" cy="292608"/>
-          </a:xfrm>
-          <a:prstGeom prst="ellipse">
-            <a:avLst/>
-          </a:prstGeom>
-          <a:solidFill>
-            <a:srgbClr val="2EC4B6"/>
-          </a:solidFill>
-          <a:ln>
-            <a:noFill/>
-          </a:ln>
-          <a:effectLst/>
-        </p:spPr>
-        <p:style>
-          <a:lnRef idx="1">
-            <a:schemeClr val="accent1"/>
-          </a:lnRef>
-          <a:fillRef idx="3">
-            <a:schemeClr val="accent1"/>
-          </a:fillRef>
-          <a:effectRef idx="2">
-            <a:schemeClr val="accent1"/>
-          </a:effectRef>
-          <a:fontRef idx="minor">
-            <a:schemeClr val="lt1"/>
-          </a:fontRef>
-        </p:style>
-        <p:txBody>
-          <a:bodyPr rtlCol="0" anchor="ctr"/>
-          <a:lstStyle/>
-          <a:p>
-            <a:pPr algn="ctr"/>
-            <a:r>
-              <a:rPr sz="1400" b="1">
-                <a:solidFill>
-                  <a:srgbClr val="FFFFFF"/>
-                </a:solidFill>
-                <a:latin typeface="Calibri"/>
-              </a:rPr>
-              <a:t>5</a:t>
-            </a:r>
-          </a:p>
-        </p:txBody>
-      </p:sp>
-      <p:sp>
-        <p:nvSpPr>
-          <p:cNvPr id="46" name="TextBox 45"/>
-          <p:cNvSpPr txBox="1"/>
-          <p:nvPr/>
-        </p:nvSpPr>
-        <p:spPr>
-          <a:xfrm>
-            <a:off x="6556248" y="2944368"/>
-            <a:ext cx="4828032" cy="292608"/>
-          </a:xfrm>
-          <a:prstGeom prst="rect">
-            <a:avLst/>
-          </a:prstGeom>
-          <a:noFill/>
-        </p:spPr>
-        <p:txBody>
-          <a:bodyPr wrap="square">
-            <a:spAutoFit/>
-          </a:bodyPr>
-          <a:lstStyle/>
-          <a:p>
-            <a:pPr algn="l"/>
-            <a:r>
-              <a:rPr sz="1450" b="1" i="0">
-                <a:solidFill>
-                  <a:srgbClr val="1B2A4A"/>
-                </a:solidFill>
-                <a:latin typeface="Calibri"/>
-              </a:rPr>
-              <a:t>Volume -&gt; FTE</a:t>
-            </a:r>
-          </a:p>
-        </p:txBody>
-      </p:sp>
-      <p:sp>
-        <p:nvSpPr>
-          <p:cNvPr id="47" name="TextBox 46"/>
-          <p:cNvSpPr txBox="1"/>
-          <p:nvPr/>
-        </p:nvSpPr>
-        <p:spPr>
-          <a:xfrm>
-            <a:off x="6227064" y="3291840"/>
-            <a:ext cx="5157216" cy="182880"/>
-          </a:xfrm>
-          <a:prstGeom prst="rect">
-            <a:avLst/>
-          </a:prstGeom>
-          <a:noFill/>
-        </p:spPr>
-        <p:txBody>
-          <a:bodyPr wrap="square">
-            <a:spAutoFit/>
-          </a:bodyPr>
-          <a:lstStyle/>
-          <a:p>
-            <a:pPr algn="l"/>
-            <a:r>
-              <a:rPr sz="950" b="1" i="0">
-                <a:solidFill>
-                  <a:srgbClr val="1F9A8F"/>
-                </a:solidFill>
-                <a:latin typeface="Calibri"/>
-              </a:rPr>
-              <a:t>APPROACH</a:t>
-            </a:r>
-          </a:p>
-        </p:txBody>
-      </p:sp>
-      <p:sp>
-        <p:nvSpPr>
-          <p:cNvPr id="48" name="Oval 47"/>
-          <p:cNvSpPr/>
-          <p:nvPr/>
-        </p:nvSpPr>
-        <p:spPr>
-          <a:xfrm>
-            <a:off x="6245352" y="3547872"/>
-            <a:ext cx="82296" cy="82296"/>
-          </a:xfrm>
-          <a:prstGeom prst="ellipse">
-            <a:avLst/>
-          </a:prstGeom>
-          <a:solidFill>
-            <a:srgbClr val="2EC4B6"/>
-          </a:solidFill>
-          <a:ln>
-            <a:noFill/>
-          </a:ln>
-          <a:effectLst/>
-        </p:spPr>
-        <p:style>
-          <a:lnRef idx="1">
-            <a:schemeClr val="accent1"/>
-          </a:lnRef>
-          <a:fillRef idx="3">
-            <a:schemeClr val="accent1"/>
-          </a:fillRef>
-          <a:effectRef idx="2">
-            <a:schemeClr val="accent1"/>
-          </a:effectRef>
-          <a:fontRef idx="minor">
-            <a:schemeClr val="lt1"/>
-          </a:fontRef>
-        </p:style>
-        <p:txBody>
-          <a:bodyPr rtlCol="0" anchor="ctr"/>
-          <a:lstStyle/>
-          <a:p>
-            <a:pPr algn="ctr"/>
-          </a:p>
-        </p:txBody>
-      </p:sp>
-      <p:sp>
-        <p:nvSpPr>
-          <p:cNvPr id="49" name="TextBox 48"/>
-          <p:cNvSpPr txBox="1"/>
-          <p:nvPr/>
-        </p:nvSpPr>
-        <p:spPr>
-          <a:xfrm>
-            <a:off x="6446520" y="3493008"/>
-            <a:ext cx="4937760" cy="256032"/>
-          </a:xfrm>
-          <a:prstGeom prst="rect">
-            <a:avLst/>
-          </a:prstGeom>
-          <a:noFill/>
-        </p:spPr>
-        <p:txBody>
-          <a:bodyPr wrap="square">
-            <a:spAutoFit/>
-          </a:bodyPr>
-          <a:lstStyle/>
-          <a:p>
-            <a:pPr algn="l"/>
-            <a:r>
-              <a:rPr sz="1150" b="0" i="0">
-                <a:solidFill>
-                  <a:srgbClr val="202633"/>
-                </a:solidFill>
-                <a:latin typeface="Calibri"/>
-              </a:rPr>
-              <a:t>Convert volume to agent-hours via handle time</a:t>
-            </a:r>
-          </a:p>
-        </p:txBody>
-      </p:sp>
-      <p:sp>
-        <p:nvSpPr>
-          <p:cNvPr id="50" name="Oval 49"/>
-          <p:cNvSpPr/>
-          <p:nvPr/>
-        </p:nvSpPr>
-        <p:spPr>
-          <a:xfrm>
-            <a:off x="6245352" y="3822192"/>
-            <a:ext cx="82296" cy="82296"/>
-          </a:xfrm>
-          <a:prstGeom prst="ellipse">
-            <a:avLst/>
-          </a:prstGeom>
-          <a:solidFill>
-            <a:srgbClr val="2EC4B6"/>
-          </a:solidFill>
-          <a:ln>
-            <a:noFill/>
-          </a:ln>
-          <a:effectLst/>
-        </p:spPr>
-        <p:style>
-          <a:lnRef idx="1">
-            <a:schemeClr val="accent1"/>
-          </a:lnRef>
-          <a:fillRef idx="3">
-            <a:schemeClr val="accent1"/>
-          </a:fillRef>
-          <a:effectRef idx="2">
-            <a:schemeClr val="accent1"/>
-          </a:effectRef>
-          <a:fontRef idx="minor">
-            <a:schemeClr val="lt1"/>
-          </a:fontRef>
-        </p:style>
-        <p:txBody>
-          <a:bodyPr rtlCol="0" anchor="ctr"/>
-          <a:lstStyle/>
-          <a:p>
-            <a:pPr algn="ctr"/>
-          </a:p>
-        </p:txBody>
-      </p:sp>
-      <p:sp>
-        <p:nvSpPr>
-          <p:cNvPr id="51" name="TextBox 50"/>
-          <p:cNvSpPr txBox="1"/>
-          <p:nvPr/>
-        </p:nvSpPr>
-        <p:spPr>
-          <a:xfrm>
-            <a:off x="6446520" y="3767328"/>
-            <a:ext cx="4937760" cy="256032"/>
-          </a:xfrm>
-          <a:prstGeom prst="rect">
-            <a:avLst/>
-          </a:prstGeom>
-          <a:noFill/>
-        </p:spPr>
-        <p:txBody>
-          <a:bodyPr wrap="square">
-            <a:spAutoFit/>
-          </a:bodyPr>
-          <a:lstStyle/>
-          <a:p>
-            <a:pPr algn="l"/>
-            <a:r>
-              <a:rPr sz="1150" b="0" i="0">
-                <a:solidFill>
-                  <a:srgbClr val="202633"/>
-                </a:solidFill>
-                <a:latin typeface="Calibri"/>
-              </a:rPr>
-              <a:t>Compare required FTE to available FTE</a:t>
-            </a:r>
-          </a:p>
-        </p:txBody>
-      </p:sp>
-      <p:sp>
-        <p:nvSpPr>
-          <p:cNvPr id="52" name="TextBox 51"/>
-          <p:cNvSpPr txBox="1"/>
-          <p:nvPr/>
-        </p:nvSpPr>
-        <p:spPr>
-          <a:xfrm>
-            <a:off x="6227064" y="4059936"/>
-            <a:ext cx="5157216" cy="182880"/>
-          </a:xfrm>
-          <a:prstGeom prst="rect">
-            <a:avLst/>
-          </a:prstGeom>
-          <a:noFill/>
-        </p:spPr>
-        <p:txBody>
-          <a:bodyPr wrap="square">
-            <a:spAutoFit/>
-          </a:bodyPr>
-          <a:lstStyle/>
-          <a:p>
-            <a:pPr algn="l"/>
-            <a:r>
-              <a:rPr sz="950" b="1" i="0">
-                <a:solidFill>
-                  <a:srgbClr val="1B2A4A"/>
-                </a:solidFill>
-                <a:latin typeface="Calibri"/>
-              </a:rPr>
-              <a:t>OUTPUT</a:t>
-            </a:r>
-          </a:p>
-        </p:txBody>
-      </p:sp>
-      <p:sp>
-        <p:nvSpPr>
-          <p:cNvPr id="53" name="Oval 52"/>
-          <p:cNvSpPr/>
-          <p:nvPr/>
-        </p:nvSpPr>
-        <p:spPr>
-          <a:xfrm>
-            <a:off x="6245352" y="4315968"/>
-            <a:ext cx="82296" cy="82296"/>
-          </a:xfrm>
-          <a:prstGeom prst="ellipse">
-            <a:avLst/>
-          </a:prstGeom>
-          <a:solidFill>
-            <a:srgbClr val="1B2A4A"/>
-          </a:solidFill>
-          <a:ln>
-            <a:noFill/>
-          </a:ln>
-          <a:effectLst/>
-        </p:spPr>
-        <p:style>
-          <a:lnRef idx="1">
-            <a:schemeClr val="accent1"/>
-          </a:lnRef>
-          <a:fillRef idx="3">
-            <a:schemeClr val="accent1"/>
-          </a:fillRef>
-          <a:effectRef idx="2">
-            <a:schemeClr val="accent1"/>
-          </a:effectRef>
-          <a:fontRef idx="minor">
-            <a:schemeClr val="lt1"/>
-          </a:fontRef>
-        </p:style>
-        <p:txBody>
-          <a:bodyPr rtlCol="0" anchor="ctr"/>
-          <a:lstStyle/>
-          <a:p>
-            <a:pPr algn="ctr"/>
-          </a:p>
-        </p:txBody>
-      </p:sp>
-      <p:sp>
-        <p:nvSpPr>
-          <p:cNvPr id="54" name="TextBox 53"/>
-          <p:cNvSpPr txBox="1"/>
-          <p:nvPr/>
-        </p:nvSpPr>
-        <p:spPr>
-          <a:xfrm>
-            <a:off x="6446520" y="4261104"/>
-            <a:ext cx="4937760" cy="256032"/>
-          </a:xfrm>
-          <a:prstGeom prst="rect">
-            <a:avLst/>
-          </a:prstGeom>
-          <a:noFill/>
-        </p:spPr>
-        <p:txBody>
-          <a:bodyPr wrap="square">
-            <a:spAutoFit/>
-          </a:bodyPr>
-          <a:lstStyle/>
-          <a:p>
-            <a:pPr algn="l"/>
-            <a:r>
-              <a:rPr sz="1150" b="1" i="0">
-                <a:solidFill>
-                  <a:srgbClr val="202633"/>
-                </a:solidFill>
-                <a:latin typeface="Calibri"/>
-              </a:rPr>
-              <a:t>The exact day(s) staffing runs short, and by how much</a:t>
-            </a:r>
-          </a:p>
-        </p:txBody>
-      </p:sp>
-      <p:sp>
-        <p:nvSpPr>
-          <p:cNvPr id="55" name="Oval 54"/>
-          <p:cNvSpPr/>
-          <p:nvPr/>
-        </p:nvSpPr>
-        <p:spPr>
-          <a:xfrm>
-            <a:off x="6172200" y="4553712"/>
-            <a:ext cx="292608" cy="292608"/>
-          </a:xfrm>
-          <a:prstGeom prst="ellipse">
-            <a:avLst/>
-          </a:prstGeom>
-          <a:solidFill>
-            <a:srgbClr val="2EC4B6"/>
-          </a:solidFill>
-          <a:ln>
-            <a:noFill/>
-          </a:ln>
-          <a:effectLst/>
-        </p:spPr>
-        <p:style>
-          <a:lnRef idx="1">
-            <a:schemeClr val="accent1"/>
-          </a:lnRef>
-          <a:fillRef idx="3">
-            <a:schemeClr val="accent1"/>
-          </a:fillRef>
-          <a:effectRef idx="2">
-            <a:schemeClr val="accent1"/>
-          </a:effectRef>
-          <a:fontRef idx="minor">
-            <a:schemeClr val="lt1"/>
-          </a:fontRef>
-        </p:style>
-        <p:txBody>
-          <a:bodyPr rtlCol="0" anchor="ctr"/>
-          <a:lstStyle/>
-          <a:p>
-            <a:pPr algn="ctr"/>
-            <a:r>
-              <a:rPr sz="1400" b="1">
-                <a:solidFill>
-                  <a:srgbClr val="FFFFFF"/>
-                </a:solidFill>
-                <a:latin typeface="Calibri"/>
-              </a:rPr>
-              <a:t>6</a:t>
-            </a:r>
-          </a:p>
-        </p:txBody>
-      </p:sp>
-      <p:sp>
-        <p:nvSpPr>
-          <p:cNvPr id="56" name="TextBox 55"/>
-          <p:cNvSpPr txBox="1"/>
-          <p:nvPr/>
-        </p:nvSpPr>
-        <p:spPr>
-          <a:xfrm>
-            <a:off x="6556248" y="4535424"/>
-            <a:ext cx="4828032" cy="292608"/>
-          </a:xfrm>
-          <a:prstGeom prst="rect">
-            <a:avLst/>
-          </a:prstGeom>
-          <a:noFill/>
-        </p:spPr>
-        <p:txBody>
-          <a:bodyPr wrap="square">
-            <a:spAutoFit/>
-          </a:bodyPr>
-          <a:lstStyle/>
-          <a:p>
-            <a:pPr algn="l"/>
-            <a:r>
-              <a:rPr sz="1450" b="1" i="0">
-                <a:solidFill>
-                  <a:srgbClr val="1B2A4A"/>
-                </a:solidFill>
-                <a:latin typeface="Calibri"/>
-              </a:rPr>
-              <a:t>Publish</a:t>
-            </a:r>
-          </a:p>
-        </p:txBody>
-      </p:sp>
-      <p:sp>
-        <p:nvSpPr>
-          <p:cNvPr id="57" name="TextBox 56"/>
-          <p:cNvSpPr txBox="1"/>
-          <p:nvPr/>
-        </p:nvSpPr>
-        <p:spPr>
-          <a:xfrm>
-            <a:off x="6227064" y="4882896"/>
-            <a:ext cx="5157216" cy="182880"/>
-          </a:xfrm>
-          <a:prstGeom prst="rect">
-            <a:avLst/>
-          </a:prstGeom>
-          <a:noFill/>
-        </p:spPr>
-        <p:txBody>
-          <a:bodyPr wrap="square">
-            <a:spAutoFit/>
-          </a:bodyPr>
-          <a:lstStyle/>
-          <a:p>
-            <a:pPr algn="l"/>
-            <a:r>
-              <a:rPr sz="950" b="1" i="0">
-                <a:solidFill>
-                  <a:srgbClr val="1F9A8F"/>
-                </a:solidFill>
-                <a:latin typeface="Calibri"/>
-              </a:rPr>
-              <a:t>APPROACH</a:t>
-            </a:r>
-          </a:p>
-        </p:txBody>
-      </p:sp>
-      <p:sp>
-        <p:nvSpPr>
-          <p:cNvPr id="58" name="Oval 57"/>
-          <p:cNvSpPr/>
-          <p:nvPr/>
-        </p:nvSpPr>
-        <p:spPr>
-          <a:xfrm>
-            <a:off x="6245352" y="5138928"/>
-            <a:ext cx="82296" cy="82296"/>
-          </a:xfrm>
-          <a:prstGeom prst="ellipse">
-            <a:avLst/>
-          </a:prstGeom>
-          <a:solidFill>
-            <a:srgbClr val="2EC4B6"/>
-          </a:solidFill>
-          <a:ln>
-            <a:noFill/>
-          </a:ln>
-          <a:effectLst/>
-        </p:spPr>
-        <p:style>
-          <a:lnRef idx="1">
-            <a:schemeClr val="accent1"/>
-          </a:lnRef>
-          <a:fillRef idx="3">
-            <a:schemeClr val="accent1"/>
-          </a:fillRef>
-          <a:effectRef idx="2">
-            <a:schemeClr val="accent1"/>
-          </a:effectRef>
-          <a:fontRef idx="minor">
-            <a:schemeClr val="lt1"/>
-          </a:fontRef>
-        </p:style>
-        <p:txBody>
-          <a:bodyPr rtlCol="0" anchor="ctr"/>
-          <a:lstStyle/>
-          <a:p>
-            <a:pPr algn="ctr"/>
-          </a:p>
-        </p:txBody>
-      </p:sp>
-      <p:sp>
-        <p:nvSpPr>
-          <p:cNvPr id="59" name="TextBox 58"/>
-          <p:cNvSpPr txBox="1"/>
-          <p:nvPr/>
-        </p:nvSpPr>
-        <p:spPr>
-          <a:xfrm>
-            <a:off x="6446520" y="5084064"/>
-            <a:ext cx="4937760" cy="256032"/>
-          </a:xfrm>
-          <a:prstGeom prst="rect">
-            <a:avLst/>
-          </a:prstGeom>
-          <a:noFill/>
-        </p:spPr>
-        <p:txBody>
-          <a:bodyPr wrap="square">
-            <a:spAutoFit/>
-          </a:bodyPr>
-          <a:lstStyle/>
-          <a:p>
-            <a:pPr algn="l"/>
-            <a:r>
-              <a:rPr sz="1150" b="0" i="0">
-                <a:solidFill>
-                  <a:srgbClr val="202633"/>
-                </a:solidFill>
-                <a:latin typeface="Calibri"/>
-              </a:rPr>
-              <a:t>Write one workbook: forecast + Analysis sheet</a:t>
-            </a:r>
-          </a:p>
-        </p:txBody>
-      </p:sp>
-      <p:sp>
-        <p:nvSpPr>
-          <p:cNvPr id="60" name="Oval 59"/>
-          <p:cNvSpPr/>
-          <p:nvPr/>
-        </p:nvSpPr>
-        <p:spPr>
-          <a:xfrm>
-            <a:off x="6245352" y="5413248"/>
-            <a:ext cx="82296" cy="82296"/>
-          </a:xfrm>
-          <a:prstGeom prst="ellipse">
-            <a:avLst/>
-          </a:prstGeom>
-          <a:solidFill>
-            <a:srgbClr val="2EC4B6"/>
-          </a:solidFill>
-          <a:ln>
-            <a:noFill/>
-          </a:ln>
-          <a:effectLst/>
-        </p:spPr>
-        <p:style>
-          <a:lnRef idx="1">
-            <a:schemeClr val="accent1"/>
-          </a:lnRef>
-          <a:fillRef idx="3">
-            <a:schemeClr val="accent1"/>
-          </a:fillRef>
-          <a:effectRef idx="2">
-            <a:schemeClr val="accent1"/>
-          </a:effectRef>
-          <a:fontRef idx="minor">
-            <a:schemeClr val="lt1"/>
-          </a:fontRef>
-        </p:style>
-        <p:txBody>
-          <a:bodyPr rtlCol="0" anchor="ctr"/>
-          <a:lstStyle/>
-          <a:p>
-            <a:pPr algn="ctr"/>
-          </a:p>
-        </p:txBody>
-      </p:sp>
-      <p:sp>
-        <p:nvSpPr>
-          <p:cNvPr id="61" name="TextBox 60"/>
-          <p:cNvSpPr txBox="1"/>
-          <p:nvPr/>
-        </p:nvSpPr>
-        <p:spPr>
-          <a:xfrm>
-            <a:off x="6446520" y="5358384"/>
-            <a:ext cx="4937760" cy="256032"/>
-          </a:xfrm>
-          <a:prstGeom prst="rect">
-            <a:avLst/>
-          </a:prstGeom>
-          <a:noFill/>
-        </p:spPr>
-        <p:txBody>
-          <a:bodyPr wrap="square">
-            <a:spAutoFit/>
-          </a:bodyPr>
-          <a:lstStyle/>
-          <a:p>
-            <a:pPr algn="l"/>
-            <a:r>
-              <a:rPr sz="1150" b="0" i="0">
-                <a:solidFill>
-                  <a:srgbClr val="202633"/>
-                </a:solidFill>
-                <a:latin typeface="Calibri"/>
-              </a:rPr>
-              <a:t>Build the PPT deck + Power BI report on top</a:t>
-            </a:r>
-          </a:p>
-        </p:txBody>
-      </p:sp>
-      <p:sp>
-        <p:nvSpPr>
-          <p:cNvPr id="62" name="TextBox 61"/>
-          <p:cNvSpPr txBox="1"/>
-          <p:nvPr/>
-        </p:nvSpPr>
-        <p:spPr>
-          <a:xfrm>
-            <a:off x="6227064" y="5650992"/>
-            <a:ext cx="5157216" cy="182880"/>
-          </a:xfrm>
-          <a:prstGeom prst="rect">
-            <a:avLst/>
-          </a:prstGeom>
-          <a:noFill/>
-        </p:spPr>
-        <p:txBody>
-          <a:bodyPr wrap="square">
-            <a:spAutoFit/>
-          </a:bodyPr>
-          <a:lstStyle/>
-          <a:p>
-            <a:pPr algn="l"/>
-            <a:r>
-              <a:rPr sz="950" b="1" i="0">
-                <a:solidFill>
-                  <a:srgbClr val="1B2A4A"/>
-                </a:solidFill>
-                <a:latin typeface="Calibri"/>
-              </a:rPr>
-              <a:t>OUTPUT</a:t>
-            </a:r>
-          </a:p>
-        </p:txBody>
-      </p:sp>
-      <p:sp>
-        <p:nvSpPr>
-          <p:cNvPr id="63" name="Oval 62"/>
-          <p:cNvSpPr/>
-          <p:nvPr/>
-        </p:nvSpPr>
-        <p:spPr>
-          <a:xfrm>
-            <a:off x="6245352" y="5907024"/>
-            <a:ext cx="82296" cy="82296"/>
-          </a:xfrm>
-          <a:prstGeom prst="ellipse">
-            <a:avLst/>
-          </a:prstGeom>
-          <a:solidFill>
-            <a:srgbClr val="1B2A4A"/>
-          </a:solidFill>
-          <a:ln>
-            <a:noFill/>
-          </a:ln>
-          <a:effectLst/>
-        </p:spPr>
-        <p:style>
-          <a:lnRef idx="1">
-            <a:schemeClr val="accent1"/>
-          </a:lnRef>
-          <a:fillRef idx="3">
-            <a:schemeClr val="accent1"/>
-          </a:fillRef>
-          <a:effectRef idx="2">
-            <a:schemeClr val="accent1"/>
-          </a:effectRef>
-          <a:fontRef idx="minor">
-            <a:schemeClr val="lt1"/>
-          </a:fontRef>
-        </p:style>
-        <p:txBody>
-          <a:bodyPr rtlCol="0" anchor="ctr"/>
-          <a:lstStyle/>
-          <a:p>
-            <a:pPr algn="ctr"/>
-          </a:p>
-        </p:txBody>
-      </p:sp>
-      <p:sp>
-        <p:nvSpPr>
-          <p:cNvPr id="64" name="TextBox 63"/>
-          <p:cNvSpPr txBox="1"/>
-          <p:nvPr/>
-        </p:nvSpPr>
-        <p:spPr>
-          <a:xfrm>
-            <a:off x="6446520" y="5852160"/>
-            <a:ext cx="4937760" cy="256032"/>
-          </a:xfrm>
-          <a:prstGeom prst="rect">
-            <a:avLst/>
-          </a:prstGeom>
-          <a:noFill/>
-        </p:spPr>
-        <p:txBody>
-          <a:bodyPr wrap="square">
-            <a:spAutoFit/>
-          </a:bodyPr>
-          <a:lstStyle/>
-          <a:p>
-            <a:pPr algn="l"/>
-            <a:r>
-              <a:rPr sz="1150" b="1" i="0">
-                <a:solidFill>
-                  <a:srgbClr val="202633"/>
-                </a:solidFill>
-                <a:latin typeface="Calibri"/>
-              </a:rPr>
-              <a:t>A client-ready package, numbers always in sync</a:t>
-            </a:r>
-          </a:p>
-        </p:txBody>
-      </p:sp>
-      <p:sp>
-        <p:nvSpPr>
-          <p:cNvPr id="65" name="TextBox 64"/>
-          <p:cNvSpPr txBox="1"/>
-          <p:nvPr/>
-        </p:nvSpPr>
-        <p:spPr>
-          <a:xfrm>
-            <a:off x="594360" y="6473952"/>
-            <a:ext cx="9144000" cy="320040"/>
-          </a:xfrm>
-          <a:prstGeom prst="rect">
-            <a:avLst/>
-          </a:prstGeom>
-          <a:noFill/>
-        </p:spPr>
-        <p:txBody>
-          <a:bodyPr wrap="square">
-            <a:spAutoFit/>
-          </a:bodyPr>
-          <a:lstStyle/>
-          <a:p>
-            <a:pPr algn="l"/>
-            <a:r>
-              <a:rPr sz="1000" b="0" i="0">
-                <a:solidFill>
-                  <a:srgbClr val="5A6B7D"/>
-                </a:solidFill>
-                <a:latin typeface="Calibri"/>
-              </a:rPr>
-              <a:t>Demand Forecasting &amp; Staffing</a:t>
-            </a:r>
-          </a:p>
-        </p:txBody>
-      </p:sp>
-      <p:sp>
-        <p:nvSpPr>
-          <p:cNvPr id="66" name="TextBox 65"/>
           <p:cNvSpPr txBox="1"/>
           <p:nvPr/>
         </p:nvSpPr>

--- a/usecase2_demand_forecasting/final_output/usecase2_forecast_summary.pptx
+++ b/usecase2_demand_forecasting/final_output/usecase2_forecast_summary.pptx
@@ -5119,7 +5119,7 @@
         <p:spPr>
           <a:xfrm>
             <a:off x="768096" y="1929384"/>
-            <a:ext cx="64008" cy="768096"/>
+            <a:ext cx="0" cy="768096"/>
           </a:xfrm>
           <a:prstGeom prst="line">
             <a:avLst/>
@@ -5153,8 +5153,8 @@
         </p:nvCxnSpPr>
         <p:spPr>
           <a:xfrm>
-            <a:off x="832104" y="2697480"/>
-            <a:ext cx="64008" cy="768096"/>
+            <a:off x="768096" y="2697480"/>
+            <a:ext cx="0" cy="768096"/>
           </a:xfrm>
           <a:prstGeom prst="line">
             <a:avLst/>
@@ -5188,8 +5188,8 @@
         </p:nvCxnSpPr>
         <p:spPr>
           <a:xfrm>
-            <a:off x="896112" y="3465576"/>
-            <a:ext cx="64008" cy="768096"/>
+            <a:off x="768096" y="3465576"/>
+            <a:ext cx="0" cy="768096"/>
           </a:xfrm>
           <a:prstGeom prst="line">
             <a:avLst/>
@@ -5223,8 +5223,8 @@
         </p:nvCxnSpPr>
         <p:spPr>
           <a:xfrm>
-            <a:off x="960120" y="4233672"/>
-            <a:ext cx="64008" cy="768096"/>
+            <a:off x="768096" y="4233672"/>
+            <a:ext cx="0" cy="768096"/>
           </a:xfrm>
           <a:prstGeom prst="line">
             <a:avLst/>
@@ -5258,8 +5258,8 @@
         </p:nvCxnSpPr>
         <p:spPr>
           <a:xfrm>
-            <a:off x="1024128" y="5001768"/>
-            <a:ext cx="64008" cy="768096"/>
+            <a:off x="768096" y="5001768"/>
+            <a:ext cx="0" cy="768096"/>
           </a:xfrm>
           <a:prstGeom prst="line">
             <a:avLst/>
@@ -5397,13 +5397,13 @@
           <a:p>
             <a:pPr algn="l"/>
             <a:r>
-              <a:rPr sz="1250" b="0" i="0">
+              <a:rPr sz="1050" b="0" i="0">
                 <a:solidFill>
                   <a:srgbClr val="202633"/>
                 </a:solidFill>
                 <a:latin typeface="Calibri"/>
               </a:rPr>
-              <a:t>Loads 3.8 years of volume history plus the agent roster, then derives occupancy from the roster's REAL shrinkage %, not a flat assumption.</a:t>
+              <a:t>pandas loads 3.8 years of volume history + the roster; occupancy = 1 minus the roster's average shrinkage % (time lost to breaks/training), not a textbook 85% assumption.</a:t>
             </a:r>
           </a:p>
         </p:txBody>
@@ -5458,7 +5458,7 @@
                 </a:solidFill>
                 <a:latin typeface="Calibri"/>
               </a:rPr>
-              <a:t>A ready-to-model daily volume series + occupancy figure</a:t>
+              <a:t>A ready-to-model daily volume series + a real occupancy figure</a:t>
             </a:r>
           </a:p>
         </p:txBody>
@@ -5471,7 +5471,7 @@
         </p:nvSpPr>
         <p:spPr>
           <a:xfrm>
-            <a:off x="658368" y="2523744"/>
+            <a:off x="594360" y="2523744"/>
             <a:ext cx="347472" cy="347472"/>
           </a:xfrm>
           <a:prstGeom prst="ellipse">
@@ -5524,8 +5524,8 @@
         </p:nvSpPr>
         <p:spPr>
           <a:xfrm>
-            <a:off x="1115568" y="2532888"/>
-            <a:ext cx="1947672" cy="502920"/>
+            <a:off x="1051560" y="2532888"/>
+            <a:ext cx="2011680" cy="502920"/>
           </a:xfrm>
           <a:prstGeom prst="rect">
             <a:avLst/>
@@ -5575,13 +5575,13 @@
           <a:p>
             <a:pPr algn="l"/>
             <a:r>
-              <a:rPr sz="1250" b="0" i="0">
+              <a:rPr sz="1050" b="0" i="0">
                 <a:solidFill>
                   <a:srgbClr val="202633"/>
                 </a:solidFill>
                 <a:latin typeface="Calibri"/>
               </a:rPr>
-              <a:t>Decomposes trend and weekly/yearly seasonality, and checks day-of-week patterns before touching any model.</a:t>
+              <a:t>statsmodels' seasonal_decompose splits the series into trend, weekly seasonality, and residual noise, so the real weekly rhythm (e.g. the Sunday dip) is confirmed visually before any model is trusted.</a:t>
             </a:r>
           </a:p>
         </p:txBody>
@@ -5649,7 +5649,7 @@
         </p:nvSpPr>
         <p:spPr>
           <a:xfrm>
-            <a:off x="722376" y="3291840"/>
+            <a:off x="594360" y="3291840"/>
             <a:ext cx="347472" cy="347472"/>
           </a:xfrm>
           <a:prstGeom prst="ellipse">
@@ -5702,8 +5702,8 @@
         </p:nvSpPr>
         <p:spPr>
           <a:xfrm>
-            <a:off x="1179576" y="3300984"/>
-            <a:ext cx="1883664" cy="502920"/>
+            <a:off x="1051560" y="3300984"/>
+            <a:ext cx="2011680" cy="502920"/>
           </a:xfrm>
           <a:prstGeom prst="rect">
             <a:avLst/>
@@ -5753,13 +5753,13 @@
           <a:p>
             <a:pPr algn="l"/>
             <a:r>
-              <a:rPr sz="1250" b="0" i="0">
+              <a:rPr sz="1050" b="0" i="0">
                 <a:solidFill>
                   <a:srgbClr val="202633"/>
                 </a:solidFill>
                 <a:latin typeface="Calibri"/>
               </a:rPr>
-              <a:t>Benchmarks against a naive seasonal baseline (repeat last week), tested on a 60-day holdout.</a:t>
+              <a:t>The naive baseline just repeats each weekday's volume from one week back; its holdout MAPE (mean absolute % error, scikit-learn) becomes the bar every real model must beat.</a:t>
             </a:r>
           </a:p>
         </p:txBody>
@@ -5827,7 +5827,7 @@
         </p:nvSpPr>
         <p:spPr>
           <a:xfrm>
-            <a:off x="786384" y="4059936"/>
+            <a:off x="594360" y="4059936"/>
             <a:ext cx="347472" cy="347472"/>
           </a:xfrm>
           <a:prstGeom prst="ellipse">
@@ -5880,8 +5880,8 @@
         </p:nvSpPr>
         <p:spPr>
           <a:xfrm>
-            <a:off x="1243584" y="4069080"/>
-            <a:ext cx="1819656" cy="502920"/>
+            <a:off x="1051560" y="4069080"/>
+            <a:ext cx="2011680" cy="502920"/>
           </a:xfrm>
           <a:prstGeom prst="rect">
             <a:avLst/>
@@ -5931,13 +5931,13 @@
           <a:p>
             <a:pPr algn="l"/>
             <a:r>
-              <a:rPr sz="1250" b="0" i="0">
+              <a:rPr sz="1050" b="0" i="0">
                 <a:solidFill>
                   <a:srgbClr val="202633"/>
                 </a:solidFill>
                 <a:latin typeface="Calibri"/>
               </a:rPr>
-              <a:t>Models trend and weekly seasonality explicitly, then forecasts volume 42 days forward.</a:t>
+              <a:t>statsmodels' ExponentialSmoothing fits separate trend and weekly-seasonal components, then extrapolates both forward 42 days - a transparent formula, not a black box.</a:t>
             </a:r>
           </a:p>
         </p:txBody>
@@ -6005,7 +6005,7 @@
         </p:nvSpPr>
         <p:spPr>
           <a:xfrm>
-            <a:off x="850392" y="4828032"/>
+            <a:off x="594360" y="4828032"/>
             <a:ext cx="347472" cy="347472"/>
           </a:xfrm>
           <a:prstGeom prst="ellipse">
@@ -6058,8 +6058,8 @@
         </p:nvSpPr>
         <p:spPr>
           <a:xfrm>
-            <a:off x="1307592" y="4837176"/>
-            <a:ext cx="1755648" cy="502920"/>
+            <a:off x="1051560" y="4837176"/>
+            <a:ext cx="2011680" cy="502920"/>
           </a:xfrm>
           <a:prstGeom prst="rect">
             <a:avLst/>
@@ -6109,13 +6109,13 @@
           <a:p>
             <a:pPr algn="l"/>
             <a:r>
-              <a:rPr sz="1250" b="0" i="0">
+              <a:rPr sz="1050" b="0" i="0">
                 <a:solidFill>
                   <a:srgbClr val="202633"/>
                 </a:solidFill>
                 <a:latin typeface="Calibri"/>
               </a:rPr>
-              <a:t>Converts volume to agent-hours via handle time, then compares required FTE to available FTE.</a:t>
+              <a:t>required_hours = volume x handle_time / 3600; required_FTE = hours / (shift_hours x occupancy) - then compared day-by-day against the roster's available hours.</a:t>
             </a:r>
           </a:p>
         </p:txBody>
@@ -6183,7 +6183,7 @@
         </p:nvSpPr>
         <p:spPr>
           <a:xfrm>
-            <a:off x="914400" y="5596128"/>
+            <a:off x="594360" y="5596128"/>
             <a:ext cx="347472" cy="347472"/>
           </a:xfrm>
           <a:prstGeom prst="ellipse">
@@ -6236,8 +6236,8 @@
         </p:nvSpPr>
         <p:spPr>
           <a:xfrm>
-            <a:off x="1371600" y="5605272"/>
-            <a:ext cx="1691640" cy="502920"/>
+            <a:off x="1051560" y="5605272"/>
+            <a:ext cx="2011680" cy="502920"/>
           </a:xfrm>
           <a:prstGeom prst="rect">
             <a:avLst/>
@@ -6287,13 +6287,13 @@
           <a:p>
             <a:pPr algn="l"/>
             <a:r>
-              <a:rPr sz="1250" b="0" i="0">
+              <a:rPr sz="1050" b="0" i="0">
                 <a:solidFill>
                   <a:srgbClr val="202633"/>
                 </a:solidFill>
                 <a:latin typeface="Calibri"/>
               </a:rPr>
-              <a:t>One workbook is written (forecast + Analysis sheet), then the PPT deck and Power BI report are built on top.</a:t>
+              <a:t>openpyxl writes one workbook (forecast + an Analysis sheet with native Excel charts); python-pptx then re-reads that SAME file to build this deck.</a:t>
             </a:r>
           </a:p>
         </p:txBody>
@@ -8852,7 +8852,7 @@
                 </a:solidFill>
                 <a:latin typeface="Calibri"/>
               </a:rPr>
-              <a:t>Next: Extend &amp; revisit</a:t>
+              <a:t>Fix #3: Rebalance the weekly schedule</a:t>
             </a:r>
           </a:p>
         </p:txBody>
@@ -8887,7 +8887,7 @@
                 </a:solidFill>
                 <a:latin typeface="Calibri"/>
               </a:rPr>
-              <a:t>Extend the model per LoB/channel for sharper allocation, and revisit shrinkage assumptions quarterly as the roster's tenure mix shifts.</a:t>
+              <a:t>The roster runs a surplus on Sunday (-1.2 FTE over) but is short every other day, worst on Wednesday (3.7 FTE avg) — shift some of that Sunday coverage into the weekday shifts that need it.</a:t>
             </a:r>
           </a:p>
         </p:txBody>
@@ -8922,7 +8922,7 @@
                 </a:solidFill>
                 <a:latin typeface="Calibri"/>
               </a:rPr>
-              <a:t>Keeps the staffing plan accurate instead of going stale between reviews.</a:t>
+              <a:t>Closes the weekday shortfall using capacity already on the roster, not new hires.</a:t>
             </a:r>
           </a:p>
         </p:txBody>

--- a/usecase2_demand_forecasting/final_output/usecase2_forecast_summary.pptx
+++ b/usecase2_demand_forecasting/final_output/usecase2_forecast_summary.pptx
@@ -4017,7 +4017,7 @@
                 </a:solidFill>
                 <a:latin typeface="Calibri"/>
               </a:rPr>
-              <a:t>3.8 yrs</a:t>
+              <a:t>3.0 yrs</a:t>
             </a:r>
           </a:p>
           <a:p>
@@ -4239,7 +4239,7 @@
                 </a:solidFill>
                 <a:latin typeface="Calibri"/>
               </a:rPr>
-              <a:t>2</a:t>
+              <a:t>4</a:t>
             </a:r>
           </a:p>
           <a:p>
@@ -4569,7 +4569,7 @@
         <p:spPr>
           <a:xfrm>
             <a:off x="594360" y="4800600"/>
-            <a:ext cx="3862882" cy="411480"/>
+            <a:ext cx="1099017" cy="411480"/>
           </a:xfrm>
           <a:prstGeom prst="rect">
             <a:avLst/>
@@ -4614,8 +4614,8 @@
         </p:nvSpPr>
         <p:spPr>
           <a:xfrm>
-            <a:off x="4457242" y="4800600"/>
-            <a:ext cx="7018477" cy="411480"/>
+            <a:off x="1693377" y="4800600"/>
+            <a:ext cx="2219797" cy="411480"/>
           </a:xfrm>
           <a:prstGeom prst="rect">
             <a:avLst/>
@@ -4654,7 +4654,99 @@
       </p:sp>
       <p:sp>
         <p:nvSpPr>
-          <p:cNvPr id="20" name="Oval 19"/>
+          <p:cNvPr id="20" name="Rectangle 19"/>
+          <p:cNvSpPr/>
+          <p:nvPr/>
+        </p:nvSpPr>
+        <p:spPr>
+          <a:xfrm>
+            <a:off x="3913174" y="4800600"/>
+            <a:ext cx="4787798" cy="411480"/>
+          </a:xfrm>
+          <a:prstGeom prst="rect">
+            <a:avLst/>
+          </a:prstGeom>
+          <a:solidFill>
+            <a:srgbClr val="E8A83C"/>
+          </a:solidFill>
+          <a:ln w="19050">
+            <a:solidFill>
+              <a:srgbClr val="FFFFFF"/>
+            </a:solidFill>
+          </a:ln>
+          <a:effectLst/>
+        </p:spPr>
+        <p:style>
+          <a:lnRef idx="1">
+            <a:schemeClr val="accent1"/>
+          </a:lnRef>
+          <a:fillRef idx="3">
+            <a:schemeClr val="accent1"/>
+          </a:fillRef>
+          <a:effectRef idx="2">
+            <a:schemeClr val="accent1"/>
+          </a:effectRef>
+          <a:fontRef idx="minor">
+            <a:schemeClr val="lt1"/>
+          </a:fontRef>
+        </p:style>
+        <p:txBody>
+          <a:bodyPr rtlCol="0" anchor="ctr"/>
+          <a:lstStyle/>
+          <a:p>
+            <a:pPr algn="ctr"/>
+          </a:p>
+        </p:txBody>
+      </p:sp>
+      <p:sp>
+        <p:nvSpPr>
+          <p:cNvPr id="21" name="Rectangle 20"/>
+          <p:cNvSpPr/>
+          <p:nvPr/>
+        </p:nvSpPr>
+        <p:spPr>
+          <a:xfrm>
+            <a:off x="8700972" y="4800600"/>
+            <a:ext cx="2774746" cy="411480"/>
+          </a:xfrm>
+          <a:prstGeom prst="rect">
+            <a:avLst/>
+          </a:prstGeom>
+          <a:solidFill>
+            <a:srgbClr val="E05A47"/>
+          </a:solidFill>
+          <a:ln w="19050">
+            <a:solidFill>
+              <a:srgbClr val="FFFFFF"/>
+            </a:solidFill>
+          </a:ln>
+          <a:effectLst/>
+        </p:spPr>
+        <p:style>
+          <a:lnRef idx="1">
+            <a:schemeClr val="accent1"/>
+          </a:lnRef>
+          <a:fillRef idx="3">
+            <a:schemeClr val="accent1"/>
+          </a:fillRef>
+          <a:effectRef idx="2">
+            <a:schemeClr val="accent1"/>
+          </a:effectRef>
+          <a:fontRef idx="minor">
+            <a:schemeClr val="lt1"/>
+          </a:fontRef>
+        </p:style>
+        <p:txBody>
+          <a:bodyPr rtlCol="0" anchor="ctr"/>
+          <a:lstStyle/>
+          <a:p>
+            <a:pPr algn="ctr"/>
+          </a:p>
+        </p:txBody>
+      </p:sp>
+      <p:sp>
+        <p:nvSpPr>
+          <p:cNvPr id="22" name="Oval 21"/>
           <p:cNvSpPr/>
           <p:nvPr/>
         </p:nvSpPr>
@@ -4698,7 +4790,7 @@
       </p:sp>
       <p:sp>
         <p:nvSpPr>
-          <p:cNvPr id="21" name="TextBox 20"/>
+          <p:cNvPr id="23" name="TextBox 22"/>
           <p:cNvSpPr txBox="1"/>
           <p:nvPr/>
         </p:nvSpPr>
@@ -4726,14 +4818,14 @@
                 </a:solidFill>
                 <a:latin typeface="Calibri"/>
               </a:rPr>
-              <a:t>Broadband: 36%</a:t>
-            </a:r>
-          </a:p>
-        </p:txBody>
-      </p:sp>
-      <p:sp>
-        <p:nvSpPr>
-          <p:cNvPr id="22" name="Oval 21"/>
+              <a:t>Billing &amp; Payments: 10%</a:t>
+            </a:r>
+          </a:p>
+        </p:txBody>
+      </p:sp>
+      <p:sp>
+        <p:nvSpPr>
+          <p:cNvPr id="24" name="Oval 23"/>
           <p:cNvSpPr/>
           <p:nvPr/>
         </p:nvSpPr>
@@ -4777,7 +4869,7 @@
       </p:sp>
       <p:sp>
         <p:nvSpPr>
-          <p:cNvPr id="23" name="TextBox 22"/>
+          <p:cNvPr id="25" name="TextBox 24"/>
           <p:cNvSpPr txBox="1"/>
           <p:nvPr/>
         </p:nvSpPr>
@@ -4805,21 +4897,65 @@
                 </a:solidFill>
                 <a:latin typeface="Calibri"/>
               </a:rPr>
-              <a:t>Postpaid Mobile: 64%</a:t>
-            </a:r>
-          </a:p>
-        </p:txBody>
-      </p:sp>
-      <p:sp>
-        <p:nvSpPr>
-          <p:cNvPr id="24" name="TextBox 23"/>
+              <a:t>Broadband: 20%</a:t>
+            </a:r>
+          </a:p>
+        </p:txBody>
+      </p:sp>
+      <p:sp>
+        <p:nvSpPr>
+          <p:cNvPr id="26" name="Oval 25"/>
+          <p:cNvSpPr/>
+          <p:nvPr/>
+        </p:nvSpPr>
+        <p:spPr>
+          <a:xfrm>
+            <a:off x="5623560" y="5321808"/>
+            <a:ext cx="128016" cy="128016"/>
+          </a:xfrm>
+          <a:prstGeom prst="ellipse">
+            <a:avLst/>
+          </a:prstGeom>
+          <a:solidFill>
+            <a:srgbClr val="E8A83C"/>
+          </a:solidFill>
+          <a:ln>
+            <a:noFill/>
+          </a:ln>
+          <a:effectLst/>
+        </p:spPr>
+        <p:style>
+          <a:lnRef idx="1">
+            <a:schemeClr val="accent1"/>
+          </a:lnRef>
+          <a:fillRef idx="3">
+            <a:schemeClr val="accent1"/>
+          </a:fillRef>
+          <a:effectRef idx="2">
+            <a:schemeClr val="accent1"/>
+          </a:effectRef>
+          <a:fontRef idx="minor">
+            <a:schemeClr val="lt1"/>
+          </a:fontRef>
+        </p:style>
+        <p:txBody>
+          <a:bodyPr rtlCol="0" anchor="ctr"/>
+          <a:lstStyle/>
+          <a:p>
+            <a:pPr algn="ctr"/>
+          </a:p>
+        </p:txBody>
+      </p:sp>
+      <p:sp>
+        <p:nvSpPr>
+          <p:cNvPr id="27" name="TextBox 26"/>
           <p:cNvSpPr txBox="1"/>
           <p:nvPr/>
         </p:nvSpPr>
         <p:spPr>
           <a:xfrm>
-            <a:off x="594360" y="6473952"/>
-            <a:ext cx="9144000" cy="320040"/>
+            <a:off x="5806440" y="5276088"/>
+            <a:ext cx="2377440" cy="274320"/>
           </a:xfrm>
           <a:prstGeom prst="rect">
             <a:avLst/>
@@ -4834,6 +4970,120 @@
           <a:p>
             <a:pPr algn="l"/>
             <a:r>
+              <a:rPr sz="1300" b="0" i="0">
+                <a:solidFill>
+                  <a:srgbClr val="5A6B7D"/>
+                </a:solidFill>
+                <a:latin typeface="Calibri"/>
+              </a:rPr>
+              <a:t>Postpaid Mobile: 44%</a:t>
+            </a:r>
+          </a:p>
+        </p:txBody>
+      </p:sp>
+      <p:sp>
+        <p:nvSpPr>
+          <p:cNvPr id="28" name="Oval 27"/>
+          <p:cNvSpPr/>
+          <p:nvPr/>
+        </p:nvSpPr>
+        <p:spPr>
+          <a:xfrm>
+            <a:off x="8138160" y="5321808"/>
+            <a:ext cx="128016" cy="128016"/>
+          </a:xfrm>
+          <a:prstGeom prst="ellipse">
+            <a:avLst/>
+          </a:prstGeom>
+          <a:solidFill>
+            <a:srgbClr val="E05A47"/>
+          </a:solidFill>
+          <a:ln>
+            <a:noFill/>
+          </a:ln>
+          <a:effectLst/>
+        </p:spPr>
+        <p:style>
+          <a:lnRef idx="1">
+            <a:schemeClr val="accent1"/>
+          </a:lnRef>
+          <a:fillRef idx="3">
+            <a:schemeClr val="accent1"/>
+          </a:fillRef>
+          <a:effectRef idx="2">
+            <a:schemeClr val="accent1"/>
+          </a:effectRef>
+          <a:fontRef idx="minor">
+            <a:schemeClr val="lt1"/>
+          </a:fontRef>
+        </p:style>
+        <p:txBody>
+          <a:bodyPr rtlCol="0" anchor="ctr"/>
+          <a:lstStyle/>
+          <a:p>
+            <a:pPr algn="ctr"/>
+          </a:p>
+        </p:txBody>
+      </p:sp>
+      <p:sp>
+        <p:nvSpPr>
+          <p:cNvPr id="29" name="TextBox 28"/>
+          <p:cNvSpPr txBox="1"/>
+          <p:nvPr/>
+        </p:nvSpPr>
+        <p:spPr>
+          <a:xfrm>
+            <a:off x="8321040" y="5276088"/>
+            <a:ext cx="2377440" cy="274320"/>
+          </a:xfrm>
+          <a:prstGeom prst="rect">
+            <a:avLst/>
+          </a:prstGeom>
+          <a:noFill/>
+        </p:spPr>
+        <p:txBody>
+          <a:bodyPr wrap="square">
+            <a:spAutoFit/>
+          </a:bodyPr>
+          <a:lstStyle/>
+          <a:p>
+            <a:pPr algn="l"/>
+            <a:r>
+              <a:rPr sz="1300" b="0" i="0">
+                <a:solidFill>
+                  <a:srgbClr val="5A6B7D"/>
+                </a:solidFill>
+                <a:latin typeface="Calibri"/>
+              </a:rPr>
+              <a:t>Prepaid Mobile: 26%</a:t>
+            </a:r>
+          </a:p>
+        </p:txBody>
+      </p:sp>
+      <p:sp>
+        <p:nvSpPr>
+          <p:cNvPr id="30" name="TextBox 29"/>
+          <p:cNvSpPr txBox="1"/>
+          <p:nvPr/>
+        </p:nvSpPr>
+        <p:spPr>
+          <a:xfrm>
+            <a:off x="594360" y="6473952"/>
+            <a:ext cx="9144000" cy="320040"/>
+          </a:xfrm>
+          <a:prstGeom prst="rect">
+            <a:avLst/>
+          </a:prstGeom>
+          <a:noFill/>
+        </p:spPr>
+        <p:txBody>
+          <a:bodyPr wrap="square">
+            <a:spAutoFit/>
+          </a:bodyPr>
+          <a:lstStyle/>
+          <a:p>
+            <a:pPr algn="l"/>
+            <a:r>
               <a:rPr sz="1000" b="0" i="0">
                 <a:solidFill>
                   <a:srgbClr val="5A6B7D"/>
@@ -4847,7 +5097,7 @@
       </p:sp>
       <p:sp>
         <p:nvSpPr>
-          <p:cNvPr id="25" name="TextBox 24"/>
+          <p:cNvPr id="31" name="TextBox 30"/>
           <p:cNvSpPr txBox="1"/>
           <p:nvPr/>
         </p:nvSpPr>
@@ -5992,7 +6242,7 @@
                 </a:solidFill>
                 <a:latin typeface="Calibri"/>
               </a:rPr>
-              <a:t>18.8% MAPE — beats the 20.1% baseline</a:t>
+              <a:t>15.1% MAPE — beats the 17.2% baseline</a:t>
             </a:r>
           </a:p>
         </p:txBody>
@@ -6677,7 +6927,7 @@
                 </a:solidFill>
                 <a:latin typeface="Calibri"/>
               </a:rPr>
-              <a:t>18.8%</a:t>
+              <a:t>15.1%</a:t>
             </a:r>
           </a:p>
           <a:p>
@@ -6689,7 +6939,7 @@
                 </a:solidFill>
                 <a:latin typeface="Calibri"/>
               </a:rPr>
-              <a:t>Holdout MAPE (vs 20.1% baseline)</a:t>
+              <a:t>Holdout MAPE (vs 17.2% baseline)</a:t>
             </a:r>
           </a:p>
         </p:txBody>
@@ -6899,7 +7149,7 @@
                 </a:solidFill>
                 <a:latin typeface="Calibri"/>
               </a:rPr>
-              <a:t>28</a:t>
+              <a:t>25</a:t>
             </a:r>
           </a:p>
           <a:p>
@@ -7010,7 +7260,7 @@
                 </a:solidFill>
                 <a:latin typeface="Calibri"/>
               </a:rPr>
-              <a:t>25</a:t>
+              <a:t>24</a:t>
             </a:r>
           </a:p>
           <a:p>
@@ -7071,7 +7321,7 @@
         <p:spPr>
           <a:xfrm>
             <a:off x="594360" y="3429000"/>
-            <a:ext cx="1841150" cy="320040"/>
+            <a:ext cx="1791823" cy="320040"/>
           </a:xfrm>
           <a:prstGeom prst="rect">
             <a:avLst/>
@@ -7116,8 +7366,8 @@
         </p:nvSpPr>
         <p:spPr>
           <a:xfrm>
-            <a:off x="2435510" y="3429000"/>
-            <a:ext cx="1673193" cy="320040"/>
+            <a:off x="2386183" y="3429000"/>
+            <a:ext cx="1722520" cy="320040"/>
           </a:xfrm>
           <a:prstGeom prst="rect">
             <a:avLst/>
@@ -7228,7 +7478,7 @@
                 </a:solidFill>
                 <a:latin typeface="Calibri"/>
               </a:rPr>
-              <a:t>Required: 52%</a:t>
+              <a:t>Required: 51%</a:t>
             </a:r>
           </a:p>
         </p:txBody>
@@ -7307,7 +7557,7 @@
                 </a:solidFill>
                 <a:latin typeface="Calibri"/>
               </a:rPr>
-              <a:t>Available: 48%</a:t>
+              <a:t>Available: 49%</a:t>
             </a:r>
           </a:p>
         </p:txBody>
@@ -7430,7 +7680,7 @@
                 </a:solidFill>
                 <a:latin typeface="Calibri"/>
               </a:rPr>
-              <a:t>18 Nov 2026 — 3.7 FTE short</a:t>
+              <a:t>29 Oct 2026 — 2.3 FTE short</a:t>
             </a:r>
           </a:p>
         </p:txBody>
@@ -7518,7 +7768,7 @@
                 </a:solidFill>
                 <a:latin typeface="Calibri"/>
               </a:rPr>
-              <a:t>25 Nov 2026 — 3.7 FTE short</a:t>
+              <a:t>05 Nov 2026 — 2.3 FTE short</a:t>
             </a:r>
           </a:p>
         </p:txBody>
@@ -7606,7 +7856,7 @@
                 </a:solidFill>
                 <a:latin typeface="Calibri"/>
               </a:rPr>
-              <a:t>02 Dec 2026 — 3.7 FTE short</a:t>
+              <a:t>12 Nov 2026 — 2.3 FTE short</a:t>
             </a:r>
           </a:p>
         </p:txBody>
@@ -7694,7 +7944,7 @@
                 </a:solidFill>
                 <a:latin typeface="Calibri"/>
               </a:rPr>
-              <a:t>28 Oct 2026 — 3.6 FTE short</a:t>
+              <a:t>19 Nov 2026 — 2.3 FTE short</a:t>
             </a:r>
           </a:p>
         </p:txBody>
@@ -7782,7 +8032,7 @@
                 </a:solidFill>
                 <a:latin typeface="Calibri"/>
               </a:rPr>
-              <a:t>04 Nov 2026 — 3.6 FTE short</a:t>
+              <a:t>26 Nov 2026 — 2.3 FTE short</a:t>
             </a:r>
           </a:p>
         </p:txBody>
@@ -7905,7 +8155,7 @@
                 </a:solidFill>
                 <a:latin typeface="Calibri"/>
               </a:rPr>
-              <a:t>Week of 26 Oct — 2.6 FTE avg gap</a:t>
+              <a:t>Week of 26 Oct — 0.9 FTE avg gap</a:t>
             </a:r>
           </a:p>
         </p:txBody>
@@ -7993,7 +8243,7 @@
                 </a:solidFill>
                 <a:latin typeface="Calibri"/>
               </a:rPr>
-              <a:t>Week of 02 Nov — 2.5 FTE avg gap</a:t>
+              <a:t>Week of 02 Nov — 1.0 FTE avg gap</a:t>
             </a:r>
           </a:p>
         </p:txBody>
@@ -8081,7 +8331,7 @@
                 </a:solidFill>
                 <a:latin typeface="Calibri"/>
               </a:rPr>
-              <a:t>Week of 09 Nov — 2.5 FTE avg gap</a:t>
+              <a:t>Week of 09 Nov — 1.0 FTE avg gap</a:t>
             </a:r>
           </a:p>
         </p:txBody>
@@ -8169,7 +8419,7 @@
                 </a:solidFill>
                 <a:latin typeface="Calibri"/>
               </a:rPr>
-              <a:t>Week of 16 Nov — 2.5 FTE avg gap</a:t>
+              <a:t>Week of 16 Nov — 1.0 FTE avg gap</a:t>
             </a:r>
           </a:p>
         </p:txBody>
@@ -8257,7 +8507,7 @@
                 </a:solidFill>
                 <a:latin typeface="Calibri"/>
               </a:rPr>
-              <a:t>Week of 23 Nov — 2.5 FTE avg gap</a:t>
+              <a:t>Week of 23 Nov — 1.0 FTE avg gap</a:t>
             </a:r>
           </a:p>
         </p:txBody>
@@ -8677,7 +8927,7 @@
                 </a:solidFill>
                 <a:latin typeface="Calibri"/>
               </a:rPr>
-              <a:t>Short-staffed on 86% of the next 42 days, averaging 2.5 FTE (9% of required headcount) — add overtime or flexible-shift agents, prioritizing Broadband coverage since it alone drives 36% of total volume.</a:t>
+              <a:t>Short-staffed on 86% of the next 42 days, averaging 1.0 FTE (4% of required headcount) — add overtime or flexible-shift agents, prioritizing Billing &amp; Payments coverage since it alone drives 10% of total volume.</a:t>
             </a:r>
           </a:p>
         </p:txBody>
@@ -8782,7 +9032,7 @@
                 </a:solidFill>
                 <a:latin typeface="Calibri"/>
               </a:rPr>
-              <a:t>18 Nov 2026 is the single worst day, 3.7 FTE short — forecast volume peaks that day with no spare buffer.</a:t>
+              <a:t>29 Oct 2026 is the single worst day, 2.3 FTE short — forecast volume peaks that day with no spare buffer.</a:t>
             </a:r>
           </a:p>
         </p:txBody>
@@ -8887,7 +9137,7 @@
                 </a:solidFill>
                 <a:latin typeface="Calibri"/>
               </a:rPr>
-              <a:t>The roster runs a surplus on Sunday (-1.2 FTE over) but is short every other day, worst on Wednesday (3.7 FTE avg) — shift some of that Sunday coverage into the weekday shifts that need it.</a:t>
+              <a:t>The roster runs a surplus on Sunday (-2.8 FTE over) but is short every other day, worst on Thursday (2.3 FTE avg) — shift some of that Sunday coverage into the weekday shifts that need it.</a:t>
             </a:r>
           </a:p>
         </p:txBody>

--- a/usecase2_demand_forecasting/final_output/usecase2_forecast_summary.pptx
+++ b/usecase2_demand_forecasting/final_output/usecase2_forecast_summary.pptx
@@ -7038,7 +7038,7 @@
                 </a:solidFill>
                 <a:latin typeface="Calibri"/>
               </a:rPr>
-              <a:t>36/42</a:t>
+              <a:t>34/42</a:t>
             </a:r>
           </a:p>
           <a:p>
@@ -7260,7 +7260,7 @@
                 </a:solidFill>
                 <a:latin typeface="Calibri"/>
               </a:rPr>
-              <a:t>24</a:t>
+              <a:t>25</a:t>
             </a:r>
           </a:p>
           <a:p>
@@ -7321,7 +7321,7 @@
         <p:spPr>
           <a:xfrm>
             <a:off x="594360" y="3429000"/>
-            <a:ext cx="1791823" cy="320040"/>
+            <a:ext cx="1786123" cy="320040"/>
           </a:xfrm>
           <a:prstGeom prst="rect">
             <a:avLst/>
@@ -7366,8 +7366,8 @@
         </p:nvSpPr>
         <p:spPr>
           <a:xfrm>
-            <a:off x="2386183" y="3429000"/>
-            <a:ext cx="1722520" cy="320040"/>
+            <a:off x="2380483" y="3429000"/>
+            <a:ext cx="1728220" cy="320040"/>
           </a:xfrm>
           <a:prstGeom prst="rect">
             <a:avLst/>
@@ -7680,7 +7680,7 @@
                 </a:solidFill>
                 <a:latin typeface="Calibri"/>
               </a:rPr>
-              <a:t>29 Oct 2026 — 2.3 FTE short</a:t>
+              <a:t>02 Dec 2026 — 3.3 FTE short</a:t>
             </a:r>
           </a:p>
         </p:txBody>
@@ -7768,7 +7768,7 @@
                 </a:solidFill>
                 <a:latin typeface="Calibri"/>
               </a:rPr>
-              <a:t>05 Nov 2026 — 2.3 FTE short</a:t>
+              <a:t>12 Nov 2026 — 3.2 FTE short</a:t>
             </a:r>
           </a:p>
         </p:txBody>
@@ -7856,7 +7856,7 @@
                 </a:solidFill>
                 <a:latin typeface="Calibri"/>
               </a:rPr>
-              <a:t>12 Nov 2026 — 2.3 FTE short</a:t>
+              <a:t>31 Oct 2026 — 3.0 FTE short</a:t>
             </a:r>
           </a:p>
         </p:txBody>
@@ -7944,7 +7944,7 @@
                 </a:solidFill>
                 <a:latin typeface="Calibri"/>
               </a:rPr>
-              <a:t>19 Nov 2026 — 2.3 FTE short</a:t>
+              <a:t>04 Nov 2026 — 2.8 FTE short</a:t>
             </a:r>
           </a:p>
         </p:txBody>
@@ -8032,7 +8032,7 @@
                 </a:solidFill>
                 <a:latin typeface="Calibri"/>
               </a:rPr>
-              <a:t>26 Nov 2026 — 2.3 FTE short</a:t>
+              <a:t>21 Nov 2026 — 2.7 FTE short</a:t>
             </a:r>
           </a:p>
         </p:txBody>
@@ -8243,7 +8243,7 @@
                 </a:solidFill>
                 <a:latin typeface="Calibri"/>
               </a:rPr>
-              <a:t>Week of 02 Nov — 1.0 FTE avg gap</a:t>
+              <a:t>Week of 02 Nov — 0.8 FTE avg gap</a:t>
             </a:r>
           </a:p>
         </p:txBody>
@@ -8419,7 +8419,7 @@
                 </a:solidFill>
                 <a:latin typeface="Calibri"/>
               </a:rPr>
-              <a:t>Week of 16 Nov — 1.0 FTE avg gap</a:t>
+              <a:t>Week of 16 Nov — 1.1 FTE avg gap</a:t>
             </a:r>
           </a:p>
         </p:txBody>
@@ -8507,7 +8507,7 @@
                 </a:solidFill>
                 <a:latin typeface="Calibri"/>
               </a:rPr>
-              <a:t>Week of 23 Nov — 1.0 FTE avg gap</a:t>
+              <a:t>Week of 23 Nov — 0.7 FTE avg gap</a:t>
             </a:r>
           </a:p>
         </p:txBody>
@@ -8892,7 +8892,7 @@
                 </a:solidFill>
                 <a:latin typeface="Calibri"/>
               </a:rPr>
-              <a:t>Fix #1: Close the FTE gap (86% of days)</a:t>
+              <a:t>Fix #1: Close the FTE gap (81% of days)</a:t>
             </a:r>
           </a:p>
         </p:txBody>
@@ -8927,7 +8927,7 @@
                 </a:solidFill>
                 <a:latin typeface="Calibri"/>
               </a:rPr>
-              <a:t>Short-staffed on 86% of the next 42 days, averaging 1.0 FTE (4% of required headcount) — add overtime or flexible-shift agents, prioritizing Billing &amp; Payments coverage since it alone drives 10% of total volume.</a:t>
+              <a:t>Short-staffed on 81% of the next 42 days, averaging 0.8 FTE (3% of required headcount) — add overtime or flexible-shift agents, prioritizing Billing &amp; Payments coverage since it alone drives 10% of total volume.</a:t>
             </a:r>
           </a:p>
         </p:txBody>
@@ -9032,7 +9032,7 @@
                 </a:solidFill>
                 <a:latin typeface="Calibri"/>
               </a:rPr>
-              <a:t>29 Oct 2026 is the single worst day, 2.3 FTE short — forecast volume peaks that day with no spare buffer.</a:t>
+              <a:t>02 Dec 2026 is the single worst day, 3.3 FTE short — forecast volume peaks that day with no spare buffer.</a:t>
             </a:r>
           </a:p>
         </p:txBody>
@@ -9137,7 +9137,7 @@
                 </a:solidFill>
                 <a:latin typeface="Calibri"/>
               </a:rPr>
-              <a:t>The roster runs a surplus on Sunday (-2.8 FTE over) but is short every other day, worst on Thursday (2.3 FTE avg) — shift some of that Sunday coverage into the weekday shifts that need it.</a:t>
+              <a:t>The roster runs a surplus on Sunday (-2.8 FTE over) but is short every other day, worst on Thursday (2.0 FTE avg) — shift some of that Sunday coverage into the weekday shifts that need it.</a:t>
             </a:r>
           </a:p>
         </p:txBody>
